--- a/presentations/m2-session-4-optimization-and-deployment.pptx
+++ b/presentations/m2-session-4-optimization-and-deployment.pptx
@@ -3491,7 +3491,7 @@
                 </a:solidFill>
                 <a:latin typeface="Arial"/>
               </a:rPr>
-              <a:t>SANITY CHECK ON TWO PASSENGERS</a:t>
+              <a:t>FROM NOTEBOOK TO PRODUCTION</a:t>
             </a:r>
           </a:p>
         </p:txBody>
@@ -3531,7 +3531,7 @@
                 </a:solidFill>
                 <a:latin typeface="Arial"/>
               </a:rPr>
-              <a:t>The loaded pipeline answers a real question - a survival gap of 100% vs 3%</a:t>
+              <a:t>Production is a loop, not a finish line - the model runs where real users can reach it</a:t>
             </a:r>
           </a:p>
         </p:txBody>
@@ -3618,7 +3618,7 @@
                 </a:solidFill>
                 <a:latin typeface="Arial"/>
               </a:rPr>
-              <a:t>Loaded from disk, no retraining: raw passenger details in, verdict out.</a:t>
+              <a:t>Save the WHOLE pipeline: titanic_model_v1.joblib, 2,599 KB - raw data in, prediction out; re-coding the prep by hand invites silently wrong predictions</a:t>
             </a:r>
           </a:p>
           <a:p>
@@ -3638,7 +3638,7 @@
                 </a:solidFill>
                 <a:latin typeface="Arial"/>
               </a:rPr>
-              <a:t>An invented first-class woman, 30 (Fare 80, Cherbourg) - a passenger like Florence: survives, 100%.</a:t>
+              <a:t>Load in a fresh process: no retraining, no notebook required</a:t>
             </a:r>
           </a:p>
           <a:p>
@@ -3658,7 +3658,7 @@
                 </a:solidFill>
                 <a:latin typeface="Arial"/>
               </a:rPr>
-              <a:t>An invented third-class man, 28 (Fare 7.9, Southampton) - a passenger like Owen: does not survive, 3%.</a:t>
+              <a:t>Version the file name (v1) so you always know what is running - and can roll back</a:t>
             </a:r>
           </a:p>
           <a:p>
@@ -3678,7 +3678,7 @@
                 </a:solidFill>
                 <a:latin typeface="Arial"/>
               </a:rPr>
-              <a:t>A probability is confidence, not a guarantee about one individual.</a:t>
+              <a:t>Ng's rollout ladder for steps 4-5: SHADOW mode (model runs beside the human, predictions logged but unused), then CANARY (~5% of real traffic, watch, ramp), then full swap with a rollback path - deployment is a dial, not a switch</a:t>
             </a:r>
           </a:p>
           <a:p>
@@ -3698,14 +3698,14 @@
                 </a:solidFill>
                 <a:latin typeface="Arial"/>
               </a:rPr>
-              <a:t>The gap reflects the Titanic's reality: class and sex decided lifeboat seats.</a:t>
+              <a:t>Monitoring closes the loop: drift detected means retrain and reship</a:t>
             </a:r>
           </a:p>
         </p:txBody>
       </p:sp>
       <p:pic>
         <p:nvPicPr>
-          <p:cNvPr id="8" name="Picture 7" descr="two_passengers.png"/>
+          <p:cNvPr id="8" name="Picture 7" descr="s4_production_loop.png"/>
           <p:cNvPicPr>
             <a:picLocks noChangeAspect="1"/>
           </p:cNvPicPr>
@@ -3720,7 +3720,7 @@
         <p:spPr>
           <a:xfrm>
             <a:off x="5120640" y="1874519"/>
-            <a:ext cx="6492240" cy="2938007"/>
+            <a:ext cx="6492240" cy="3931990"/>
           </a:xfrm>
           <a:prstGeom prst="rect">
             <a:avLst/>
@@ -3762,7 +3762,7 @@
                 </a:solidFill>
                 <a:latin typeface="Arial"/>
               </a:rPr>
-              <a:t>Two invented sanity-check passengers, scored by the saved pipeline. Module 2, notebook 3.</a:t>
+              <a:t>The production loop: save, load, wrap, host, monitor, retrain. Module 2, notebook 3. Ng, Machine Learning Engineering for Production C1.</a:t>
             </a:r>
           </a:p>
         </p:txBody>
@@ -3988,7 +3988,7 @@
                 </a:solidFill>
                 <a:latin typeface="Arial"/>
               </a:rPr>
-              <a:t>FROM MODEL TO APP</a:t>
+              <a:t>SANITY CHECK ON TWO PASSENGERS</a:t>
             </a:r>
           </a:p>
         </p:txBody>
@@ -4028,7 +4028,7 @@
                 </a:solidFill>
                 <a:latin typeface="Arial"/>
               </a:rPr>
-              <a:t>A few lines of Gradio turn the pipeline into a web app anyone can use</a:t>
+              <a:t>The loaded pipeline answers a real question - a survival gap of 100% vs 3%</a:t>
             </a:r>
           </a:p>
         </p:txBody>
@@ -4079,58 +4079,14 @@
       </p:sp>
       <p:sp>
         <p:nvSpPr>
-          <p:cNvPr id="7" name="Rectangle 6"/>
-          <p:cNvSpPr/>
+          <p:cNvPr id="7" name="TextBox 6"/>
+          <p:cNvSpPr txBox="1"/>
           <p:nvPr/>
         </p:nvSpPr>
         <p:spPr>
           <a:xfrm>
             <a:off x="548640" y="1874519"/>
-            <a:ext cx="5394960" cy="4297680"/>
-          </a:xfrm>
-          <a:prstGeom prst="rect">
-            <a:avLst/>
-          </a:prstGeom>
-          <a:solidFill>
-            <a:srgbClr val="EEF3FD"/>
-          </a:solidFill>
-          <a:ln>
-            <a:noFill/>
-          </a:ln>
-          <a:effectLst/>
-        </p:spPr>
-        <p:style>
-          <a:lnRef idx="1">
-            <a:schemeClr val="accent1"/>
-          </a:lnRef>
-          <a:fillRef idx="3">
-            <a:schemeClr val="accent1"/>
-          </a:fillRef>
-          <a:effectRef idx="2">
-            <a:schemeClr val="accent1"/>
-          </a:effectRef>
-          <a:fontRef idx="minor">
-            <a:schemeClr val="lt1"/>
-          </a:fontRef>
-        </p:style>
-        <p:txBody>
-          <a:bodyPr rtlCol="0" anchor="ctr"/>
-          <a:lstStyle/>
-          <a:p>
-            <a:pPr algn="ctr"/>
-          </a:p>
-        </p:txBody>
-      </p:sp>
-      <p:sp>
-        <p:nvSpPr>
-          <p:cNvPr id="8" name="TextBox 7"/>
-          <p:cNvSpPr txBox="1"/>
-          <p:nvPr/>
-        </p:nvSpPr>
-        <p:spPr>
-          <a:xfrm>
-            <a:off x="777240" y="2039111"/>
-            <a:ext cx="4937760" cy="365760"/>
+            <a:ext cx="4297680" cy="4206240"/>
           </a:xfrm>
           <a:prstGeom prst="rect">
             <a:avLst/>
@@ -4143,49 +4099,9 @@
           </a:bodyPr>
           <a:lstStyle/>
           <a:p>
-            <a:pPr algn="l">
-              <a:spcAft>
-                <a:spcPts val="600"/>
-              </a:spcAft>
-              <a:buNone/>
-            </a:pPr>
-            <a:r>
-              <a:rPr sz="1500" b="1">
-                <a:solidFill>
-                  <a:srgbClr val="0A2540"/>
-                </a:solidFill>
-                <a:latin typeface="Arial"/>
-              </a:rPr>
-              <a:t>Gradio: a function becomes a web form</a:t>
-            </a:r>
-          </a:p>
-        </p:txBody>
-      </p:sp>
-      <p:sp>
-        <p:nvSpPr>
-          <p:cNvPr id="9" name="TextBox 8"/>
-          <p:cNvSpPr txBox="1"/>
-          <p:nvPr/>
-        </p:nvSpPr>
-        <p:spPr>
-          <a:xfrm>
-            <a:off x="777240" y="2441447"/>
-            <a:ext cx="4937760" cy="3566160"/>
-          </a:xfrm>
-          <a:prstGeom prst="rect">
-            <a:avLst/>
-          </a:prstGeom>
-          <a:noFill/>
-        </p:spPr>
-        <p:txBody>
-          <a:bodyPr wrap="square">
-            <a:spAutoFit/>
-          </a:bodyPr>
-          <a:lstStyle/>
-          <a:p>
             <a:pPr algn="l" indent="-228600" marL="228600">
               <a:spcAft>
-                <a:spcPts val="600"/>
+                <a:spcPts val="800"/>
               </a:spcAft>
               <a:buClr>
                 <a:srgbClr val="1E5EF3"/>
@@ -4193,19 +4109,19 @@
               <a:buChar char="—"/>
             </a:pPr>
             <a:r>
-              <a:rPr sz="1300" b="0">
+              <a:rPr sz="1450" b="0">
                 <a:solidFill>
                   <a:srgbClr val="202B38"/>
                 </a:solidFill>
                 <a:latin typeface="Arial"/>
               </a:rPr>
-              <a:t>Write a normal Python function: inputs in, answer out.</a:t>
+              <a:t>Loaded from disk, no retraining: raw passenger details in, verdict out.</a:t>
             </a:r>
           </a:p>
           <a:p>
             <a:pPr algn="l" indent="-228600" marL="228600">
               <a:spcAft>
-                <a:spcPts val="600"/>
+                <a:spcPts val="800"/>
               </a:spcAft>
               <a:buClr>
                 <a:srgbClr val="1E5EF3"/>
@@ -4213,19 +4129,19 @@
               <a:buChar char="—"/>
             </a:pPr>
             <a:r>
-              <a:rPr sz="1300" b="0">
+              <a:rPr sz="1450" b="0">
                 <a:solidFill>
                   <a:srgbClr val="202B38"/>
                 </a:solidFill>
                 <a:latin typeface="Arial"/>
               </a:rPr>
-              <a:t>Gradio renders it as sliders, dropdowns and a text box.</a:t>
+              <a:t>An invented first-class woman, 30 (Fare 80, Cherbourg) - a passenger like Florence: survives, 100%.</a:t>
             </a:r>
           </a:p>
           <a:p>
             <a:pPr algn="l" indent="-228600" marL="228600">
               <a:spcAft>
-                <a:spcPts val="600"/>
+                <a:spcPts val="800"/>
               </a:spcAft>
               <a:buClr>
                 <a:srgbClr val="1E5EF3"/>
@@ -4233,19 +4149,19 @@
               <a:buChar char="—"/>
             </a:pPr>
             <a:r>
-              <a:rPr sz="1300" b="0">
+              <a:rPr sz="1450" b="0">
                 <a:solidFill>
                   <a:srgbClr val="202B38"/>
                 </a:solidFill>
                 <a:latin typeface="Arial"/>
               </a:rPr>
-              <a:t>Title is derived by rule (boys under 13 Master, men Mr).</a:t>
+              <a:t>An invented third-class man, 28 (Fare 7.9, Southampton) - a passenger like Owen: does not survive, 3%.</a:t>
             </a:r>
           </a:p>
           <a:p>
             <a:pPr algn="l" indent="-228600" marL="228600">
               <a:spcAft>
-                <a:spcPts val="600"/>
+                <a:spcPts val="800"/>
               </a:spcAft>
               <a:buClr>
                 <a:srgbClr val="1E5EF3"/>
@@ -4253,126 +4169,19 @@
               <a:buChar char="—"/>
             </a:pPr>
             <a:r>
-              <a:rPr sz="1300" b="0">
+              <a:rPr sz="1450" b="0">
                 <a:solidFill>
                   <a:srgbClr val="202B38"/>
                 </a:solidFill>
                 <a:latin typeface="Arial"/>
               </a:rPr>
-              <a:t>On Colab, launch() gives a shareable temporary link.</a:t>
-            </a:r>
-          </a:p>
-        </p:txBody>
-      </p:sp>
-      <p:sp>
-        <p:nvSpPr>
-          <p:cNvPr id="10" name="Rectangle 9"/>
-          <p:cNvSpPr/>
-          <p:nvPr/>
-        </p:nvSpPr>
-        <p:spPr>
-          <a:xfrm>
-            <a:off x="6245352" y="1874519"/>
-            <a:ext cx="5394960" cy="4297680"/>
-          </a:xfrm>
-          <a:prstGeom prst="rect">
-            <a:avLst/>
-          </a:prstGeom>
-          <a:solidFill>
-            <a:srgbClr val="EEF3FD"/>
-          </a:solidFill>
-          <a:ln>
-            <a:noFill/>
-          </a:ln>
-          <a:effectLst/>
-        </p:spPr>
-        <p:style>
-          <a:lnRef idx="1">
-            <a:schemeClr val="accent1"/>
-          </a:lnRef>
-          <a:fillRef idx="3">
-            <a:schemeClr val="accent1"/>
-          </a:fillRef>
-          <a:effectRef idx="2">
-            <a:schemeClr val="accent1"/>
-          </a:effectRef>
-          <a:fontRef idx="minor">
-            <a:schemeClr val="lt1"/>
-          </a:fontRef>
-        </p:style>
-        <p:txBody>
-          <a:bodyPr rtlCol="0" anchor="ctr"/>
-          <a:lstStyle/>
-          <a:p>
-            <a:pPr algn="ctr"/>
-          </a:p>
-        </p:txBody>
-      </p:sp>
-      <p:sp>
-        <p:nvSpPr>
-          <p:cNvPr id="11" name="TextBox 10"/>
-          <p:cNvSpPr txBox="1"/>
-          <p:nvPr/>
-        </p:nvSpPr>
-        <p:spPr>
-          <a:xfrm>
-            <a:off x="6473952" y="2039111"/>
-            <a:ext cx="4937760" cy="365760"/>
-          </a:xfrm>
-          <a:prstGeom prst="rect">
-            <a:avLst/>
-          </a:prstGeom>
-          <a:noFill/>
-        </p:spPr>
-        <p:txBody>
-          <a:bodyPr wrap="square">
-            <a:spAutoFit/>
-          </a:bodyPr>
-          <a:lstStyle/>
-          <a:p>
-            <a:pPr algn="l">
-              <a:spcAft>
-                <a:spcPts val="600"/>
-              </a:spcAft>
-              <a:buNone/>
-            </a:pPr>
-            <a:r>
-              <a:rPr sz="1500" b="1">
-                <a:solidFill>
-                  <a:srgbClr val="0A2540"/>
-                </a:solidFill>
-                <a:latin typeface="Arial"/>
-              </a:rPr>
-              <a:t>Hugging Face Spaces: free hosting</a:t>
-            </a:r>
-          </a:p>
-        </p:txBody>
-      </p:sp>
-      <p:sp>
-        <p:nvSpPr>
-          <p:cNvPr id="12" name="TextBox 11"/>
-          <p:cNvSpPr txBox="1"/>
-          <p:nvPr/>
-        </p:nvSpPr>
-        <p:spPr>
-          <a:xfrm>
-            <a:off x="6473952" y="2441447"/>
-            <a:ext cx="4937760" cy="3566160"/>
-          </a:xfrm>
-          <a:prstGeom prst="rect">
-            <a:avLst/>
-          </a:prstGeom>
-          <a:noFill/>
-        </p:spPr>
-        <p:txBody>
-          <a:bodyPr wrap="square">
-            <a:spAutoFit/>
-          </a:bodyPr>
-          <a:lstStyle/>
+              <a:t>A probability is confidence, not a guarantee about one individual.</a:t>
+            </a:r>
+          </a:p>
           <a:p>
             <a:pPr algn="l" indent="-228600" marL="228600">
               <a:spcAft>
-                <a:spcPts val="600"/>
+                <a:spcPts val="800"/>
               </a:spcAft>
               <a:buClr>
                 <a:srgbClr val="1E5EF3"/>
@@ -4380,107 +4189,51 @@
               <a:buChar char="—"/>
             </a:pPr>
             <a:r>
-              <a:rPr sz="1300" b="0">
+              <a:rPr sz="1450" b="0">
                 <a:solidFill>
                   <a:srgbClr val="202B38"/>
                 </a:solidFill>
                 <a:latin typeface="Arial"/>
               </a:rPr>
-              <a:t>Four files: app.py, the model, requirements.txt, README.md.</a:t>
-            </a:r>
-          </a:p>
-          <a:p>
-            <a:pPr algn="l" indent="-228600" marL="228600">
-              <a:spcAft>
-                <a:spcPts val="600"/>
-              </a:spcAft>
-              <a:buClr>
-                <a:srgbClr val="1E5EF3"/>
-              </a:buClr>
-              <a:buChar char="—"/>
-            </a:pPr>
-            <a:r>
-              <a:rPr sz="1300" b="0">
-                <a:solidFill>
-                  <a:srgbClr val="202B38"/>
-                </a:solidFill>
-                <a:latin typeface="Arial"/>
-              </a:rPr>
-              <a:t>Pin the scikit-learn version in requirements.txt.</a:t>
-            </a:r>
-          </a:p>
-          <a:p>
-            <a:pPr algn="l" indent="-228600" marL="228600">
-              <a:spcAft>
-                <a:spcPts val="600"/>
-              </a:spcAft>
-              <a:buClr>
-                <a:srgbClr val="1E5EF3"/>
-              </a:buClr>
-              <a:buChar char="—"/>
-            </a:pPr>
-            <a:r>
-              <a:rPr sz="1300" b="0">
-                <a:solidFill>
-                  <a:srgbClr val="202B38"/>
-                </a:solidFill>
-                <a:latin typeface="Arial"/>
-              </a:rPr>
-              <a:t>Upload the files in the browser - that is the whole deploy.</a:t>
-            </a:r>
-          </a:p>
-          <a:p>
-            <a:pPr algn="l" indent="-228600" marL="228600">
-              <a:spcAft>
-                <a:spcPts val="600"/>
-              </a:spcAft>
-              <a:buClr>
-                <a:srgbClr val="1E5EF3"/>
-              </a:buClr>
-              <a:buChar char="—"/>
-            </a:pPr>
-            <a:r>
-              <a:rPr sz="1300" b="0">
-                <a:solidFill>
-                  <a:srgbClr val="202B38"/>
-                </a:solidFill>
-                <a:latin typeface="Arial"/>
-              </a:rPr>
-              <a:t>No tokens or keys in code, ever - uploads stay in the browser.</a:t>
-            </a:r>
-          </a:p>
-          <a:p>
-            <a:pPr algn="l" indent="-228600" marL="228600">
-              <a:spcAft>
-                <a:spcPts val="600"/>
-              </a:spcAft>
-              <a:buClr>
-                <a:srgbClr val="1E5EF3"/>
-              </a:buClr>
-              <a:buChar char="—"/>
-            </a:pPr>
-            <a:r>
-              <a:rPr sz="1300" b="0">
-                <a:solidFill>
-                  <a:srgbClr val="202B38"/>
-                </a:solidFill>
-                <a:latin typeface="Arial"/>
-              </a:rPr>
-              <a:t>Result: a public URL anyone can open.</a:t>
-            </a:r>
-          </a:p>
-        </p:txBody>
-      </p:sp>
-      <p:sp>
-        <p:nvSpPr>
-          <p:cNvPr id="13" name="TextBox 12"/>
+              <a:t>The gap reflects the Titanic's reality: class and sex decided lifeboat seats.</a:t>
+            </a:r>
+          </a:p>
+        </p:txBody>
+      </p:sp>
+      <p:pic>
+        <p:nvPicPr>
+          <p:cNvPr id="8" name="Picture 7" descr="two_passengers.png"/>
+          <p:cNvPicPr>
+            <a:picLocks noChangeAspect="1"/>
+          </p:cNvPicPr>
+          <p:nvPr/>
+        </p:nvPicPr>
+        <p:blipFill>
+          <a:blip r:embed="rId2"/>
+          <a:stretch>
+            <a:fillRect/>
+          </a:stretch>
+        </p:blipFill>
+        <p:spPr>
+          <a:xfrm>
+            <a:off x="5120640" y="1874519"/>
+            <a:ext cx="6492240" cy="2938007"/>
+          </a:xfrm>
+          <a:prstGeom prst="rect">
+            <a:avLst/>
+          </a:prstGeom>
+        </p:spPr>
+      </p:pic>
+      <p:sp>
+        <p:nvSpPr>
+          <p:cNvPr id="9" name="TextBox 8"/>
           <p:cNvSpPr txBox="1"/>
           <p:nvPr/>
         </p:nvSpPr>
         <p:spPr>
           <a:xfrm>
-            <a:off x="548640" y="6473952"/>
-            <a:ext cx="7315200" cy="292608"/>
+            <a:off x="5120640" y="6062471"/>
+            <a:ext cx="6492240" cy="365760"/>
           </a:xfrm>
           <a:prstGeom prst="rect">
             <a:avLst/>
@@ -4493,6 +4246,46 @@
           </a:bodyPr>
           <a:lstStyle/>
           <a:p>
+            <a:pPr algn="ctr">
+              <a:spcAft>
+                <a:spcPts val="600"/>
+              </a:spcAft>
+              <a:buNone/>
+            </a:pPr>
+            <a:r>
+              <a:rPr sz="1100" b="0">
+                <a:solidFill>
+                  <a:srgbClr val="5B6774"/>
+                </a:solidFill>
+                <a:latin typeface="Arial"/>
+              </a:rPr>
+              <a:t>Two invented sanity-check passengers, scored by the saved pipeline. Module 2, notebook 3.</a:t>
+            </a:r>
+          </a:p>
+        </p:txBody>
+      </p:sp>
+      <p:sp>
+        <p:nvSpPr>
+          <p:cNvPr id="10" name="TextBox 9"/>
+          <p:cNvSpPr txBox="1"/>
+          <p:nvPr/>
+        </p:nvSpPr>
+        <p:spPr>
+          <a:xfrm>
+            <a:off x="548640" y="6473952"/>
+            <a:ext cx="7315200" cy="292608"/>
+          </a:xfrm>
+          <a:prstGeom prst="rect">
+            <a:avLst/>
+          </a:prstGeom>
+          <a:noFill/>
+        </p:spPr>
+        <p:txBody>
+          <a:bodyPr wrap="square">
+            <a:spAutoFit/>
+          </a:bodyPr>
+          <a:lstStyle/>
+          <a:p>
             <a:pPr algn="l">
               <a:spcAft>
                 <a:spcPts val="600"/>
@@ -4513,7 +4306,7 @@
       </p:sp>
       <p:sp>
         <p:nvSpPr>
-          <p:cNvPr id="14" name="TextBox 13"/>
+          <p:cNvPr id="11" name="TextBox 10"/>
           <p:cNvSpPr txBox="1"/>
           <p:nvPr/>
         </p:nvSpPr>
@@ -4692,7 +4485,7 @@
                 </a:solidFill>
                 <a:latin typeface="Arial"/>
               </a:rPr>
-              <a:t>AFTER LAUNCH</a:t>
+              <a:t>FROM MODEL TO APP</a:t>
             </a:r>
           </a:p>
         </p:txBody>
@@ -4732,7 +4525,7 @@
                 </a:solidFill>
                 <a:latin typeface="Arial"/>
               </a:rPr>
-              <a:t>After launch, reality bites: models go stale and accuracy alone does not ship</a:t>
+              <a:t>A few lines of Gradio turn the pipeline into a web app anyone can use</a:t>
             </a:r>
           </a:p>
         </p:txBody>
@@ -4783,14 +4576,58 @@
       </p:sp>
       <p:sp>
         <p:nvSpPr>
-          <p:cNvPr id="7" name="TextBox 6"/>
+          <p:cNvPr id="7" name="Rectangle 6"/>
+          <p:cNvSpPr/>
+          <p:nvPr/>
+        </p:nvSpPr>
+        <p:spPr>
+          <a:xfrm>
+            <a:off x="548640" y="1874519"/>
+            <a:ext cx="5394960" cy="4297680"/>
+          </a:xfrm>
+          <a:prstGeom prst="rect">
+            <a:avLst/>
+          </a:prstGeom>
+          <a:solidFill>
+            <a:srgbClr val="EEF3FD"/>
+          </a:solidFill>
+          <a:ln>
+            <a:noFill/>
+          </a:ln>
+          <a:effectLst/>
+        </p:spPr>
+        <p:style>
+          <a:lnRef idx="1">
+            <a:schemeClr val="accent1"/>
+          </a:lnRef>
+          <a:fillRef idx="3">
+            <a:schemeClr val="accent1"/>
+          </a:fillRef>
+          <a:effectRef idx="2">
+            <a:schemeClr val="accent1"/>
+          </a:effectRef>
+          <a:fontRef idx="minor">
+            <a:schemeClr val="lt1"/>
+          </a:fontRef>
+        </p:style>
+        <p:txBody>
+          <a:bodyPr rtlCol="0" anchor="ctr"/>
+          <a:lstStyle/>
+          <a:p>
+            <a:pPr algn="ctr"/>
+          </a:p>
+        </p:txBody>
+      </p:sp>
+      <p:sp>
+        <p:nvSpPr>
+          <p:cNvPr id="8" name="TextBox 7"/>
           <p:cNvSpPr txBox="1"/>
           <p:nvPr/>
         </p:nvSpPr>
         <p:spPr>
           <a:xfrm>
-            <a:off x="548640" y="1874519"/>
-            <a:ext cx="11091672" cy="4206240"/>
+            <a:off x="777240" y="2039111"/>
+            <a:ext cx="4937760" cy="365760"/>
           </a:xfrm>
           <a:prstGeom prst="rect">
             <a:avLst/>
@@ -4803,9 +4640,49 @@
           </a:bodyPr>
           <a:lstStyle/>
           <a:p>
+            <a:pPr algn="l">
+              <a:spcAft>
+                <a:spcPts val="600"/>
+              </a:spcAft>
+              <a:buNone/>
+            </a:pPr>
+            <a:r>
+              <a:rPr sz="1500" b="1">
+                <a:solidFill>
+                  <a:srgbClr val="0A2540"/>
+                </a:solidFill>
+                <a:latin typeface="Arial"/>
+              </a:rPr>
+              <a:t>Gradio: a function becomes a web form</a:t>
+            </a:r>
+          </a:p>
+        </p:txBody>
+      </p:sp>
+      <p:sp>
+        <p:nvSpPr>
+          <p:cNvPr id="9" name="TextBox 8"/>
+          <p:cNvSpPr txBox="1"/>
+          <p:nvPr/>
+        </p:nvSpPr>
+        <p:spPr>
+          <a:xfrm>
+            <a:off x="777240" y="2441447"/>
+            <a:ext cx="4937760" cy="3566160"/>
+          </a:xfrm>
+          <a:prstGeom prst="rect">
+            <a:avLst/>
+          </a:prstGeom>
+          <a:noFill/>
+        </p:spPr>
+        <p:txBody>
+          <a:bodyPr wrap="square">
+            <a:spAutoFit/>
+          </a:bodyPr>
+          <a:lstStyle/>
+          <a:p>
             <a:pPr algn="l" indent="-228600" marL="228600">
               <a:spcAft>
-                <a:spcPts val="800"/>
+                <a:spcPts val="600"/>
               </a:spcAft>
               <a:buClr>
                 <a:srgbClr val="1E5EF3"/>
@@ -4813,39 +4690,19 @@
               <a:buChar char="—"/>
             </a:pPr>
             <a:r>
-              <a:rPr sz="1600" b="0">
+              <a:rPr sz="1300" b="0">
                 <a:solidFill>
                   <a:srgbClr val="202B38"/>
                 </a:solidFill>
                 <a:latin typeface="Arial"/>
               </a:rPr>
-              <a:t>The $1M Netflix Prize ensemble (about 800 models, a 10% RMSE gain) was never put into production.</a:t>
-            </a:r>
-          </a:p>
-          <a:p>
-            <a:pPr algn="l" lvl="1" indent="-228600" marL="514350">
+              <a:t>Write a normal Python function: inputs in, answer out.</a:t>
+            </a:r>
+          </a:p>
+          <a:p>
+            <a:pPr algn="l" indent="-228600" marL="228600">
               <a:spcAft>
                 <a:spcPts val="600"/>
-              </a:spcAft>
-              <a:buClr>
-                <a:srgbClr val="1E5EF3"/>
-              </a:buClr>
-              <a:buChar char="·"/>
-            </a:pPr>
-            <a:r>
-              <a:rPr sz="1350" b="0">
-                <a:solidFill>
-                  <a:srgbClr val="5B6774"/>
-                </a:solidFill>
-                <a:latin typeface="Arial"/>
-              </a:rPr>
-              <a:t>Engineering cost outweighed the accuracy gain, and the business had moved to streaming. Netflix tech blog, 2012.</a:t>
-            </a:r>
-          </a:p>
-          <a:p>
-            <a:pPr algn="l" indent="-228600" marL="228600">
-              <a:spcAft>
-                <a:spcPts val="800"/>
               </a:spcAft>
               <a:buClr>
                 <a:srgbClr val="1E5EF3"/>
@@ -4853,39 +4710,19 @@
               <a:buChar char="—"/>
             </a:pPr>
             <a:r>
-              <a:rPr sz="1600" b="0">
+              <a:rPr sz="1300" b="0">
                 <a:solidFill>
                   <a:srgbClr val="202B38"/>
                 </a:solidFill>
                 <a:latin typeface="Arial"/>
               </a:rPr>
-              <a:t>Data drift: the world changes and yesterday's model slowly goes stale.</a:t>
-            </a:r>
-          </a:p>
-          <a:p>
-            <a:pPr algn="l" lvl="1" indent="-228600" marL="514350">
+              <a:t>Gradio renders it as sliders, dropdowns and a text box.</a:t>
+            </a:r>
+          </a:p>
+          <a:p>
+            <a:pPr algn="l" indent="-228600" marL="228600">
               <a:spcAft>
                 <a:spcPts val="600"/>
-              </a:spcAft>
-              <a:buClr>
-                <a:srgbClr val="1E5EF3"/>
-              </a:buClr>
-              <a:buChar char="·"/>
-            </a:pPr>
-            <a:r>
-              <a:rPr sz="1350" b="0">
-                <a:solidFill>
-                  <a:srgbClr val="5B6774"/>
-                </a:solidFill>
-                <a:latin typeface="Arial"/>
-              </a:rPr>
-              <a:t>A model trained on 2024 customers may misjudge 2026 customers.</a:t>
-            </a:r>
-          </a:p>
-          <a:p>
-            <a:pPr algn="l" indent="-228600" marL="228600">
-              <a:spcAft>
-                <a:spcPts val="800"/>
               </a:spcAft>
               <a:buClr>
                 <a:srgbClr val="1E5EF3"/>
@@ -4893,59 +4730,19 @@
               <a:buChar char="—"/>
             </a:pPr>
             <a:r>
-              <a:rPr sz="1600" b="0">
+              <a:rPr sz="1300" b="0">
                 <a:solidFill>
                   <a:srgbClr val="202B38"/>
                 </a:solidFill>
                 <a:latin typeface="Arial"/>
               </a:rPr>
-              <a:t>Google Flu Trends overestimated flu by more than 50% in 2011-13.</a:t>
-            </a:r>
-          </a:p>
-          <a:p>
-            <a:pPr algn="l" lvl="1" indent="-228600" marL="514350">
+              <a:t>Title is derived by rule (boys under 13 Master, men Mr).</a:t>
+            </a:r>
+          </a:p>
+          <a:p>
+            <a:pPr algn="l" indent="-228600" marL="228600">
               <a:spcAft>
                 <a:spcPts val="600"/>
-              </a:spcAft>
-              <a:buClr>
-                <a:srgbClr val="1E5EF3"/>
-              </a:buClr>
-              <a:buChar char="·"/>
-            </a:pPr>
-            <a:r>
-              <a:rPr sz="1350" b="0">
-                <a:solidFill>
-                  <a:srgbClr val="5B6774"/>
-                </a:solidFill>
-                <a:latin typeface="Arial"/>
-              </a:rPr>
-              <a:t>It once claimed about 11% of the US had flu; CDC data said about 6%.</a:t>
-            </a:r>
-          </a:p>
-          <a:p>
-            <a:pPr algn="l" lvl="1" indent="-228600" marL="514350">
-              <a:spcAft>
-                <a:spcPts val="600"/>
-              </a:spcAft>
-              <a:buClr>
-                <a:srgbClr val="1E5EF3"/>
-              </a:buClr>
-              <a:buChar char="·"/>
-            </a:pPr>
-            <a:r>
-              <a:rPr sz="1350" b="0">
-                <a:solidFill>
-                  <a:srgbClr val="5B6774"/>
-                </a:solidFill>
-                <a:latin typeface="Arial"/>
-              </a:rPr>
-              <a:t>It was essentially never retrained after 2009. Lazer et al., Science, 2014.</a:t>
-            </a:r>
-          </a:p>
-          <a:p>
-            <a:pPr algn="l" indent="-228600" marL="228600">
-              <a:spcAft>
-                <a:spcPts val="800"/>
               </a:spcAft>
               <a:buClr>
                 <a:srgbClr val="1E5EF3"/>
@@ -4953,19 +4750,126 @@
               <a:buChar char="—"/>
             </a:pPr>
             <a:r>
-              <a:rPr sz="1600" b="0">
+              <a:rPr sz="1300" b="0">
                 <a:solidFill>
                   <a:srgbClr val="202B38"/>
                 </a:solidFill>
                 <a:latin typeface="Arial"/>
               </a:rPr>
-              <a:t>Version every saved model (model_v1, model_2026_09_06) so you can always roll back.</a:t>
-            </a:r>
-          </a:p>
+              <a:t>On Colab, launch() gives a shareable temporary link.</a:t>
+            </a:r>
+          </a:p>
+        </p:txBody>
+      </p:sp>
+      <p:sp>
+        <p:nvSpPr>
+          <p:cNvPr id="10" name="Rectangle 9"/>
+          <p:cNvSpPr/>
+          <p:nvPr/>
+        </p:nvSpPr>
+        <p:spPr>
+          <a:xfrm>
+            <a:off x="6245352" y="1874519"/>
+            <a:ext cx="5394960" cy="4297680"/>
+          </a:xfrm>
+          <a:prstGeom prst="rect">
+            <a:avLst/>
+          </a:prstGeom>
+          <a:solidFill>
+            <a:srgbClr val="EEF3FD"/>
+          </a:solidFill>
+          <a:ln>
+            <a:noFill/>
+          </a:ln>
+          <a:effectLst/>
+        </p:spPr>
+        <p:style>
+          <a:lnRef idx="1">
+            <a:schemeClr val="accent1"/>
+          </a:lnRef>
+          <a:fillRef idx="3">
+            <a:schemeClr val="accent1"/>
+          </a:fillRef>
+          <a:effectRef idx="2">
+            <a:schemeClr val="accent1"/>
+          </a:effectRef>
+          <a:fontRef idx="minor">
+            <a:schemeClr val="lt1"/>
+          </a:fontRef>
+        </p:style>
+        <p:txBody>
+          <a:bodyPr rtlCol="0" anchor="ctr"/>
+          <a:lstStyle/>
+          <a:p>
+            <a:pPr algn="ctr"/>
+          </a:p>
+        </p:txBody>
+      </p:sp>
+      <p:sp>
+        <p:nvSpPr>
+          <p:cNvPr id="11" name="TextBox 10"/>
+          <p:cNvSpPr txBox="1"/>
+          <p:nvPr/>
+        </p:nvSpPr>
+        <p:spPr>
+          <a:xfrm>
+            <a:off x="6473952" y="2039111"/>
+            <a:ext cx="4937760" cy="365760"/>
+          </a:xfrm>
+          <a:prstGeom prst="rect">
+            <a:avLst/>
+          </a:prstGeom>
+          <a:noFill/>
+        </p:spPr>
+        <p:txBody>
+          <a:bodyPr wrap="square">
+            <a:spAutoFit/>
+          </a:bodyPr>
+          <a:lstStyle/>
+          <a:p>
+            <a:pPr algn="l">
+              <a:spcAft>
+                <a:spcPts val="600"/>
+              </a:spcAft>
+              <a:buNone/>
+            </a:pPr>
+            <a:r>
+              <a:rPr sz="1500" b="1">
+                <a:solidFill>
+                  <a:srgbClr val="0A2540"/>
+                </a:solidFill>
+                <a:latin typeface="Arial"/>
+              </a:rPr>
+              <a:t>Hugging Face Spaces: free hosting</a:t>
+            </a:r>
+          </a:p>
+        </p:txBody>
+      </p:sp>
+      <p:sp>
+        <p:nvSpPr>
+          <p:cNvPr id="12" name="TextBox 11"/>
+          <p:cNvSpPr txBox="1"/>
+          <p:nvPr/>
+        </p:nvSpPr>
+        <p:spPr>
+          <a:xfrm>
+            <a:off x="6473952" y="2441447"/>
+            <a:ext cx="4937760" cy="3566160"/>
+          </a:xfrm>
+          <a:prstGeom prst="rect">
+            <a:avLst/>
+          </a:prstGeom>
+          <a:noFill/>
+        </p:spPr>
+        <p:txBody>
+          <a:bodyPr wrap="square">
+            <a:spAutoFit/>
+          </a:bodyPr>
+          <a:lstStyle/>
           <a:p>
             <a:pPr algn="l" indent="-228600" marL="228600">
               <a:spcAft>
-                <a:spcPts val="800"/>
+                <a:spcPts val="600"/>
               </a:spcAft>
               <a:buClr>
                 <a:srgbClr val="1E5EF3"/>
@@ -4973,20 +4877,100 @@
               <a:buChar char="—"/>
             </a:pPr>
             <a:r>
-              <a:rPr sz="1600" b="0">
+              <a:rPr sz="1300" b="0">
                 <a:solidFill>
                   <a:srgbClr val="202B38"/>
                 </a:solidFill>
                 <a:latin typeface="Arial"/>
               </a:rPr>
-              <a:t>Retrain on a schedule and re-score; monitoring is step 5 of the loop, not an afterthought.</a:t>
-            </a:r>
-          </a:p>
-        </p:txBody>
-      </p:sp>
-      <p:sp>
-        <p:nvSpPr>
-          <p:cNvPr id="8" name="TextBox 7"/>
+              <a:t>Four files: app.py, the model, requirements.txt, README.md.</a:t>
+            </a:r>
+          </a:p>
+          <a:p>
+            <a:pPr algn="l" indent="-228600" marL="228600">
+              <a:spcAft>
+                <a:spcPts val="600"/>
+              </a:spcAft>
+              <a:buClr>
+                <a:srgbClr val="1E5EF3"/>
+              </a:buClr>
+              <a:buChar char="—"/>
+            </a:pPr>
+            <a:r>
+              <a:rPr sz="1300" b="0">
+                <a:solidFill>
+                  <a:srgbClr val="202B38"/>
+                </a:solidFill>
+                <a:latin typeface="Arial"/>
+              </a:rPr>
+              <a:t>Pin the scikit-learn version in requirements.txt.</a:t>
+            </a:r>
+          </a:p>
+          <a:p>
+            <a:pPr algn="l" indent="-228600" marL="228600">
+              <a:spcAft>
+                <a:spcPts val="600"/>
+              </a:spcAft>
+              <a:buClr>
+                <a:srgbClr val="1E5EF3"/>
+              </a:buClr>
+              <a:buChar char="—"/>
+            </a:pPr>
+            <a:r>
+              <a:rPr sz="1300" b="0">
+                <a:solidFill>
+                  <a:srgbClr val="202B38"/>
+                </a:solidFill>
+                <a:latin typeface="Arial"/>
+              </a:rPr>
+              <a:t>Upload the files in the browser - that is the whole deploy.</a:t>
+            </a:r>
+          </a:p>
+          <a:p>
+            <a:pPr algn="l" indent="-228600" marL="228600">
+              <a:spcAft>
+                <a:spcPts val="600"/>
+              </a:spcAft>
+              <a:buClr>
+                <a:srgbClr val="1E5EF3"/>
+              </a:buClr>
+              <a:buChar char="—"/>
+            </a:pPr>
+            <a:r>
+              <a:rPr sz="1300" b="0">
+                <a:solidFill>
+                  <a:srgbClr val="202B38"/>
+                </a:solidFill>
+                <a:latin typeface="Arial"/>
+              </a:rPr>
+              <a:t>No tokens or keys in code, ever - uploads stay in the browser.</a:t>
+            </a:r>
+          </a:p>
+          <a:p>
+            <a:pPr algn="l" indent="-228600" marL="228600">
+              <a:spcAft>
+                <a:spcPts val="600"/>
+              </a:spcAft>
+              <a:buClr>
+                <a:srgbClr val="1E5EF3"/>
+              </a:buClr>
+              <a:buChar char="—"/>
+            </a:pPr>
+            <a:r>
+              <a:rPr sz="1300" b="0">
+                <a:solidFill>
+                  <a:srgbClr val="202B38"/>
+                </a:solidFill>
+                <a:latin typeface="Arial"/>
+              </a:rPr>
+              <a:t>Result: a public URL anyone can open.</a:t>
+            </a:r>
+          </a:p>
+        </p:txBody>
+      </p:sp>
+      <p:sp>
+        <p:nvSpPr>
+          <p:cNvPr id="13" name="TextBox 12"/>
           <p:cNvSpPr txBox="1"/>
           <p:nvPr/>
         </p:nvSpPr>
@@ -5026,7 +5010,7 @@
       </p:sp>
       <p:sp>
         <p:nvSpPr>
-          <p:cNvPr id="9" name="TextBox 8"/>
+          <p:cNvPr id="14" name="TextBox 13"/>
           <p:cNvSpPr txBox="1"/>
           <p:nvPr/>
         </p:nvSpPr>
@@ -5205,7 +5189,7 @@
                 </a:solidFill>
                 <a:latin typeface="Arial"/>
               </a:rPr>
-              <a:t>THE MODULE'S ARC, CLOSED</a:t>
+              <a:t>AFTER LAUNCH</a:t>
             </a:r>
           </a:p>
         </p:txBody>
@@ -5245,7 +5229,7 @@
                 </a:solidFill>
                 <a:latin typeface="Arial"/>
               </a:rPr>
-              <a:t>M1 dashboards inform people - M2 models act inside products</a:t>
+              <a:t>After launch, reality bites: models go stale and accuracy alone does not ship</a:t>
             </a:r>
           </a:p>
         </p:txBody>
@@ -5294,40 +5278,16 @@
           </a:p>
         </p:txBody>
       </p:sp>
-      <p:pic>
-        <p:nvPicPr>
-          <p:cNvPr id="7" name="Picture 6" descr="echo_da_vs_ml.png"/>
-          <p:cNvPicPr>
-            <a:picLocks noChangeAspect="1"/>
-          </p:cNvPicPr>
-          <p:nvPr/>
-        </p:nvPicPr>
-        <p:blipFill>
-          <a:blip r:embed="rId2"/>
-          <a:stretch>
-            <a:fillRect/>
-          </a:stretch>
-        </p:blipFill>
-        <p:spPr>
-          <a:xfrm>
-            <a:off x="1554480" y="1874519"/>
-            <a:ext cx="9052560" cy="3416150"/>
-          </a:xfrm>
-          <a:prstGeom prst="rect">
-            <a:avLst/>
-          </a:prstGeom>
-        </p:spPr>
-      </p:pic>
-      <p:sp>
-        <p:nvSpPr>
-          <p:cNvPr id="8" name="TextBox 7"/>
+      <p:sp>
+        <p:nvSpPr>
+          <p:cNvPr id="7" name="TextBox 6"/>
           <p:cNvSpPr txBox="1"/>
           <p:nvPr/>
         </p:nvSpPr>
         <p:spPr>
           <a:xfrm>
-            <a:off x="1554480" y="6062471"/>
-            <a:ext cx="9052560" cy="365760"/>
+            <a:off x="548640" y="1874519"/>
+            <a:ext cx="11091672" cy="4206240"/>
           </a:xfrm>
           <a:prstGeom prst="rect">
             <a:avLst/>
@@ -5340,27 +5300,190 @@
           </a:bodyPr>
           <a:lstStyle/>
           <a:p>
-            <a:pPr algn="ctr">
+            <a:pPr algn="l" indent="-228600" marL="228600">
+              <a:spcAft>
+                <a:spcPts val="800"/>
+              </a:spcAft>
+              <a:buClr>
+                <a:srgbClr val="1E5EF3"/>
+              </a:buClr>
+              <a:buChar char="—"/>
+            </a:pPr>
+            <a:r>
+              <a:rPr sz="1600" b="0">
+                <a:solidFill>
+                  <a:srgbClr val="202B38"/>
+                </a:solidFill>
+                <a:latin typeface="Arial"/>
+              </a:rPr>
+              <a:t>The $1M Netflix Prize ensemble (about 800 models, a 10% RMSE gain) was never put into production.</a:t>
+            </a:r>
+          </a:p>
+          <a:p>
+            <a:pPr algn="l" lvl="1" indent="-228600" marL="514350">
               <a:spcAft>
                 <a:spcPts val="600"/>
               </a:spcAft>
-              <a:buNone/>
-            </a:pPr>
-            <a:r>
-              <a:rPr sz="1100" b="0">
+              <a:buClr>
+                <a:srgbClr val="1E5EF3"/>
+              </a:buClr>
+              <a:buChar char="·"/>
+            </a:pPr>
+            <a:r>
+              <a:rPr sz="1350" b="0">
                 <a:solidFill>
                   <a:srgbClr val="5B6774"/>
                 </a:solidFill>
                 <a:latin typeface="Arial"/>
               </a:rPr>
-              <a:t>The contrast that opened Session 1, now with the module behind it: M1 described the crowd; M2 answers about the next person. Module 2, notebooks 1 and 3.</a:t>
-            </a:r>
-          </a:p>
-        </p:txBody>
-      </p:sp>
-      <p:sp>
-        <p:nvSpPr>
-          <p:cNvPr id="9" name="TextBox 8"/>
+              <a:t>Engineering cost outweighed the accuracy gain, and the business had moved to streaming. Netflix tech blog, 2012.</a:t>
+            </a:r>
+          </a:p>
+          <a:p>
+            <a:pPr algn="l" indent="-228600" marL="228600">
+              <a:spcAft>
+                <a:spcPts val="800"/>
+              </a:spcAft>
+              <a:buClr>
+                <a:srgbClr val="1E5EF3"/>
+              </a:buClr>
+              <a:buChar char="—"/>
+            </a:pPr>
+            <a:r>
+              <a:rPr sz="1600" b="0">
+                <a:solidFill>
+                  <a:srgbClr val="202B38"/>
+                </a:solidFill>
+                <a:latin typeface="Arial"/>
+              </a:rPr>
+              <a:t>Two kinds of drift: DATA drift - the inputs change (different passengers start arriving); CONCEPT drift - the hidden rule f itself moves.</a:t>
+            </a:r>
+          </a:p>
+          <a:p>
+            <a:pPr algn="l" lvl="1" indent="-228600" marL="514350">
+              <a:spcAft>
+                <a:spcPts val="600"/>
+              </a:spcAft>
+              <a:buClr>
+                <a:srgbClr val="1E5EF3"/>
+              </a:buClr>
+              <a:buChar char="·"/>
+            </a:pPr>
+            <a:r>
+              <a:rPr sz="1350" b="0">
+                <a:solidFill>
+                  <a:srgbClr val="5B6774"/>
+                </a:solidFill>
+                <a:latin typeface="Arial"/>
+              </a:rPr>
+              <a:t>Same inputs, new outcomes: Session 1's Y = f(X) + ε, with f no longer standing still. Monitor inputs and outputs separately.</a:t>
+            </a:r>
+          </a:p>
+          <a:p>
+            <a:pPr algn="l" indent="-228600" marL="228600">
+              <a:spcAft>
+                <a:spcPts val="800"/>
+              </a:spcAft>
+              <a:buClr>
+                <a:srgbClr val="1E5EF3"/>
+              </a:buClr>
+              <a:buChar char="—"/>
+            </a:pPr>
+            <a:r>
+              <a:rPr sz="1600" b="0">
+                <a:solidFill>
+                  <a:srgbClr val="202B38"/>
+                </a:solidFill>
+                <a:latin typeface="Arial"/>
+              </a:rPr>
+              <a:t>Google Flu Trends overestimated flu by more than 50% in 2011-13.</a:t>
+            </a:r>
+          </a:p>
+          <a:p>
+            <a:pPr algn="l" lvl="1" indent="-228600" marL="514350">
+              <a:spcAft>
+                <a:spcPts val="600"/>
+              </a:spcAft>
+              <a:buClr>
+                <a:srgbClr val="1E5EF3"/>
+              </a:buClr>
+              <a:buChar char="·"/>
+            </a:pPr>
+            <a:r>
+              <a:rPr sz="1350" b="0">
+                <a:solidFill>
+                  <a:srgbClr val="5B6774"/>
+                </a:solidFill>
+                <a:latin typeface="Arial"/>
+              </a:rPr>
+              <a:t>It once claimed about 11% of the US had flu; CDC data said about 6%.</a:t>
+            </a:r>
+          </a:p>
+          <a:p>
+            <a:pPr algn="l" lvl="1" indent="-228600" marL="514350">
+              <a:spcAft>
+                <a:spcPts val="600"/>
+              </a:spcAft>
+              <a:buClr>
+                <a:srgbClr val="1E5EF3"/>
+              </a:buClr>
+              <a:buChar char="·"/>
+            </a:pPr>
+            <a:r>
+              <a:rPr sz="1350" b="0">
+                <a:solidFill>
+                  <a:srgbClr val="5B6774"/>
+                </a:solidFill>
+                <a:latin typeface="Arial"/>
+              </a:rPr>
+              <a:t>It was essentially never retrained after 2009. Lazer et al., Science, 2014.</a:t>
+            </a:r>
+          </a:p>
+          <a:p>
+            <a:pPr algn="l" indent="-228600" marL="228600">
+              <a:spcAft>
+                <a:spcPts val="800"/>
+              </a:spcAft>
+              <a:buClr>
+                <a:srgbClr val="1E5EF3"/>
+              </a:buClr>
+              <a:buChar char="—"/>
+            </a:pPr>
+            <a:r>
+              <a:rPr sz="1600" b="0">
+                <a:solidFill>
+                  <a:srgbClr val="202B38"/>
+                </a:solidFill>
+                <a:latin typeface="Arial"/>
+              </a:rPr>
+              <a:t>Version every saved model (model_v1, model_2026_09_06) so you can always roll back.</a:t>
+            </a:r>
+          </a:p>
+          <a:p>
+            <a:pPr algn="l" indent="-228600" marL="228600">
+              <a:spcAft>
+                <a:spcPts val="800"/>
+              </a:spcAft>
+              <a:buClr>
+                <a:srgbClr val="1E5EF3"/>
+              </a:buClr>
+              <a:buChar char="—"/>
+            </a:pPr>
+            <a:r>
+              <a:rPr sz="1600" b="0">
+                <a:solidFill>
+                  <a:srgbClr val="202B38"/>
+                </a:solidFill>
+                <a:latin typeface="Arial"/>
+              </a:rPr>
+              <a:t>Retrain on a schedule and re-score; monitoring is step 5 of the loop, not an afterthought.</a:t>
+            </a:r>
+          </a:p>
+        </p:txBody>
+      </p:sp>
+      <p:sp>
+        <p:nvSpPr>
+          <p:cNvPr id="8" name="TextBox 7"/>
           <p:cNvSpPr txBox="1"/>
           <p:nvPr/>
         </p:nvSpPr>
@@ -5400,7 +5523,7 @@
       </p:sp>
       <p:sp>
         <p:nvSpPr>
-          <p:cNvPr id="10" name="TextBox 9"/>
+          <p:cNvPr id="9" name="TextBox 8"/>
           <p:cNvSpPr txBox="1"/>
           <p:nvPr/>
         </p:nvSpPr>
@@ -5619,7 +5742,7 @@
                 </a:solidFill>
                 <a:latin typeface="Arial"/>
               </a:rPr>
-              <a:t>The whole module is one honest pipeline: prep, select, tune, ship</a:t>
+              <a:t>M1 dashboards inform people - M2 models act inside products: the whole module in one table</a:t>
             </a:r>
           </a:p>
         </p:txBody>
@@ -5677,7 +5800,7 @@
           <p:nvPr/>
         </p:nvGraphicFramePr>
         <p:xfrm>
-          <a:off x="548640" y="1874519"/>
+          <a:off x="548640" y="3310128"/>
           <a:ext cx="11091670" cy="2286000"/>
         </p:xfrm>
         <a:graphic>
@@ -6165,9 +6288,33 @@
           </a:p>
         </p:txBody>
       </p:sp>
-      <p:sp>
-        <p:nvSpPr>
-          <p:cNvPr id="9" name="TextBox 8"/>
+      <p:pic>
+        <p:nvPicPr>
+          <p:cNvPr id="9" name="Picture 8" descr="echo_da_vs_ml_strip.png"/>
+          <p:cNvPicPr>
+            <a:picLocks noChangeAspect="1"/>
+          </p:cNvPicPr>
+          <p:nvPr/>
+        </p:nvPicPr>
+        <p:blipFill>
+          <a:blip r:embed="rId2"/>
+          <a:stretch>
+            <a:fillRect/>
+          </a:stretch>
+        </p:blipFill>
+        <p:spPr>
+          <a:xfrm>
+            <a:off x="548640" y="1847088"/>
+            <a:ext cx="11091672" cy="1401053"/>
+          </a:xfrm>
+          <a:prstGeom prst="rect">
+            <a:avLst/>
+          </a:prstGeom>
+        </p:spPr>
+      </p:pic>
+      <p:sp>
+        <p:nvSpPr>
+          <p:cNvPr id="10" name="TextBox 9"/>
           <p:cNvSpPr txBox="1"/>
           <p:nvPr/>
         </p:nvSpPr>
@@ -6207,7 +6354,7 @@
       </p:sp>
       <p:sp>
         <p:nvSpPr>
-          <p:cNvPr id="10" name="TextBox 9"/>
+          <p:cNvPr id="11" name="TextBox 10"/>
           <p:cNvSpPr txBox="1"/>
           <p:nvPr/>
         </p:nvSpPr>
@@ -6385,7 +6532,7 @@
                 </a:solidFill>
                 <a:latin typeface="Arial"/>
               </a:rPr>
-              <a:t>Hyperparameters are knobs you set before training; search them with CV, never the test set.</a:t>
+              <a:t>Hyperparameters are the algorithm's own settings - tune them with CV, never the test set; every setting is a different algorithm.</a:t>
             </a:r>
           </a:p>
           <a:p>
@@ -6405,7 +6552,7 @@
                 </a:solidFill>
                 <a:latin typeface="Arial"/>
               </a:rPr>
-              <a:t>Random search reached CV 0.8274; the single test look scored 0.8268 - the tuning did not fool itself.</a:t>
+              <a:t>Diagnose the failing bar before turning any knob; when knobs stall, count your errors before guessing.</a:t>
             </a:r>
           </a:p>
           <a:p>
@@ -6425,7 +6572,7 @@
                 </a:solidFill>
                 <a:latin typeface="Arial"/>
               </a:rPr>
-              <a:t>Ship the whole pipeline: save, load, wrap in Gradio, host on Spaces, monitor.</a:t>
+              <a:t>Random search reached CV 0.8274; the one test look said 0.8268 - the tuning did not fool itself.</a:t>
             </a:r>
           </a:p>
           <a:p>
@@ -6445,7 +6592,7 @@
                 </a:solidFill>
                 <a:latin typeface="Arial"/>
               </a:rPr>
-              <a:t>Models go stale: version them, watch for drift, retrain on a schedule.</a:t>
+              <a:t>Ship the recipe retrained on everything, then the loop: save, load, wrap, host, monitor - and watch for data drift AND concept drift.</a:t>
             </a:r>
           </a:p>
           <a:p>
@@ -6751,7 +6898,7 @@
                 </a:solidFill>
                 <a:latin typeface="Arial"/>
               </a:rPr>
-              <a:t>WHERE WE ARE</a:t>
+              <a:t>WHERE WE ARE - NG'S ORTHOGONALIZATION</a:t>
             </a:r>
           </a:p>
         </p:txBody>
@@ -6791,7 +6938,7 @@
                 </a:solidFill>
                 <a:latin typeface="Arial"/>
               </a:rPr>
-              <a:t>Session 3 crowned a champion - today we tune the runner-up and ship it</a:t>
+              <a:t>Tune one knob per problem: four bars, each with its own dials</a:t>
             </a:r>
           </a:p>
         </p:txBody>
@@ -6849,7 +6996,7 @@
         <p:spPr>
           <a:xfrm>
             <a:off x="548640" y="1874519"/>
-            <a:ext cx="11091672" cy="4206240"/>
+            <a:ext cx="4297680" cy="4206240"/>
           </a:xfrm>
           <a:prstGeom prst="rect">
             <a:avLst/>
@@ -6872,13 +7019,13 @@
               <a:buChar char="—"/>
             </a:pPr>
             <a:r>
-              <a:rPr sz="1600" b="0">
+              <a:rPr sz="1450" b="0">
                 <a:solidFill>
                   <a:srgbClr val="202B38"/>
                 </a:solidFill>
                 <a:latin typeface="Arial"/>
               </a:rPr>
-              <a:t>Notebook 1 built a leak-proof pipeline: 712 train / 179 test rows, 18 model-ready features.</a:t>
+              <a:t>Where we are: leak-proof pipeline (712/179, 18 features); LogReg champion CV 0.819 / test 0.838, no knobs left; Random Forest 0.797 has the most knobs - today's candidate.</a:t>
             </a:r>
           </a:p>
           <a:p>
@@ -6892,13 +7039,13 @@
               <a:buChar char="—"/>
             </a:pPr>
             <a:r>
-              <a:rPr sz="1600" b="0">
+              <a:rPr sz="1450" b="0">
                 <a:solidFill>
                   <a:srgbClr val="202B38"/>
                 </a:solidFill>
                 <a:latin typeface="Arial"/>
               </a:rPr>
-              <a:t>Notebook 2 ran the tournament: Logistic Regression won with CV accuracy 0.819, test 0.838.</a:t>
+              <a:t>Ng's tuning philosophy: clear four bars in order - fit the training set, generalize to validation, hold up on test, work in the real world - and each bar has its OWN knobs.</a:t>
             </a:r>
           </a:p>
           <a:p>
@@ -6912,13 +7059,13 @@
               <a:buChar char="—"/>
             </a:pPr>
             <a:r>
-              <a:rPr sz="1600" b="0">
+              <a:rPr sz="1450" b="0">
                 <a:solidFill>
                   <a:srgbClr val="202B38"/>
                 </a:solidFill>
                 <a:latin typeface="Arial"/>
               </a:rPr>
-              <a:t>The winning scorecard has almost no knobs left to turn - it is already at its ceiling.</a:t>
+              <a:t>Failing training: bigger/better model. Failing validation: regularize (= penalize complexity) or add data. Failing test: your validation was over-tuned. Failing the world: your data or metric misses reality.</a:t>
             </a:r>
           </a:p>
           <a:p>
@@ -6932,13 +7079,13 @@
               <a:buChar char="—"/>
             </a:pPr>
             <a:r>
-              <a:rPr sz="1600" b="0">
+              <a:rPr sz="1450" b="0">
                 <a:solidFill>
                   <a:srgbClr val="202B38"/>
                 </a:solidFill>
                 <a:latin typeface="Arial"/>
               </a:rPr>
-              <a:t>Random Forest (CV 0.797) has the most knobs and the most headroom: today's tuning candidate.</a:t>
+              <a:t>Diagnose WHICH bar you are failing (Session 3's two numbers) before touching any knob - turning random knobs at once is an untunable radio.</a:t>
             </a:r>
           </a:p>
           <a:p>
@@ -6952,27 +7099,51 @@
               <a:buChar char="—"/>
             </a:pPr>
             <a:r>
-              <a:rPr sz="1600" b="0">
+              <a:rPr sz="1450" b="0">
                 <a:solidFill>
                   <a:srgbClr val="202B38"/>
                 </a:solidFill>
                 <a:latin typeface="Arial"/>
               </a:rPr>
-              <a:t>Plan: tune the forest honestly, take one look at the test set, then ship it as a live app.</a:t>
-            </a:r>
-          </a:p>
-        </p:txBody>
-      </p:sp>
-      <p:sp>
-        <p:nvSpPr>
-          <p:cNvPr id="8" name="TextBox 7"/>
+              <a:t>Today: the validation bar's knobs, then the world bar.</a:t>
+            </a:r>
+          </a:p>
+        </p:txBody>
+      </p:sp>
+      <p:pic>
+        <p:nvPicPr>
+          <p:cNvPr id="8" name="Picture 7" descr="orthogonalization_ladder.png"/>
+          <p:cNvPicPr>
+            <a:picLocks noChangeAspect="1"/>
+          </p:cNvPicPr>
+          <p:nvPr/>
+        </p:nvPicPr>
+        <p:blipFill>
+          <a:blip r:embed="rId2"/>
+          <a:stretch>
+            <a:fillRect/>
+          </a:stretch>
+        </p:blipFill>
+        <p:spPr>
+          <a:xfrm>
+            <a:off x="5291025" y="1874519"/>
+            <a:ext cx="6151470" cy="4114800"/>
+          </a:xfrm>
+          <a:prstGeom prst="rect">
+            <a:avLst/>
+          </a:prstGeom>
+        </p:spPr>
+      </p:pic>
+      <p:sp>
+        <p:nvSpPr>
+          <p:cNvPr id="9" name="TextBox 8"/>
           <p:cNvSpPr txBox="1"/>
           <p:nvPr/>
         </p:nvSpPr>
         <p:spPr>
           <a:xfrm>
-            <a:off x="548640" y="6473952"/>
-            <a:ext cx="7315200" cy="292608"/>
+            <a:off x="5120640" y="6062471"/>
+            <a:ext cx="6492240" cy="365760"/>
           </a:xfrm>
           <a:prstGeom prst="rect">
             <a:avLst/>
@@ -6985,6 +7156,46 @@
           </a:bodyPr>
           <a:lstStyle/>
           <a:p>
+            <a:pPr algn="ctr">
+              <a:spcAft>
+                <a:spcPts val="600"/>
+              </a:spcAft>
+              <a:buNone/>
+            </a:pPr>
+            <a:r>
+              <a:rPr sz="1100" b="0">
+                <a:solidFill>
+                  <a:srgbClr val="5B6774"/>
+                </a:solidFill>
+                <a:latin typeface="Arial"/>
+              </a:rPr>
+              <a:t>Ng's orthogonalization ladder: one job per knob. Ng, Deep Learning Specialization C3 "Structuring ML Projects".</a:t>
+            </a:r>
+          </a:p>
+        </p:txBody>
+      </p:sp>
+      <p:sp>
+        <p:nvSpPr>
+          <p:cNvPr id="10" name="TextBox 9"/>
+          <p:cNvSpPr txBox="1"/>
+          <p:nvPr/>
+        </p:nvSpPr>
+        <p:spPr>
+          <a:xfrm>
+            <a:off x="548640" y="6473952"/>
+            <a:ext cx="7315200" cy="292608"/>
+          </a:xfrm>
+          <a:prstGeom prst="rect">
+            <a:avLst/>
+          </a:prstGeom>
+          <a:noFill/>
+        </p:spPr>
+        <p:txBody>
+          <a:bodyPr wrap="square">
+            <a:spAutoFit/>
+          </a:bodyPr>
+          <a:lstStyle/>
+          <a:p>
             <a:pPr algn="l">
               <a:spcAft>
                 <a:spcPts val="600"/>
@@ -7005,7 +7216,7 @@
       </p:sp>
       <p:sp>
         <p:nvSpPr>
-          <p:cNvPr id="9" name="TextBox 8"/>
+          <p:cNvPr id="11" name="TextBox 10"/>
           <p:cNvSpPr txBox="1"/>
           <p:nvPr/>
         </p:nvSpPr>
@@ -7867,6 +8078,46 @@
               <a:t>Tuning = try different knob positions, keep the best result.</a:t>
             </a:r>
           </a:p>
+          <a:p>
+            <a:pPr algn="l" indent="-228600" marL="228600">
+              <a:spcAft>
+                <a:spcPts val="600"/>
+              </a:spcAft>
+              <a:buClr>
+                <a:srgbClr val="1E5EF3"/>
+              </a:buClr>
+              <a:buChar char="—"/>
+            </a:pPr>
+            <a:r>
+              <a:rPr sz="1300" b="0">
+                <a:solidFill>
+                  <a:srgbClr val="202B38"/>
+                </a:solidFill>
+                <a:latin typeface="Arial"/>
+              </a:rPr>
+              <a:t>MIT's sharper cut: hyperparameters are settings of the ALGORITHM itself - knobs OUTSIDE Session 1's three slots (model + loss + optimizer); they define the game the learner plays.</a:t>
+            </a:r>
+          </a:p>
+          <a:p>
+            <a:pPr algn="l" indent="-228600" marL="228600">
+              <a:spcAft>
+                <a:spcPts val="600"/>
+              </a:spcAft>
+              <a:buClr>
+                <a:srgbClr val="1E5EF3"/>
+              </a:buClr>
+              <a:buChar char="—"/>
+            </a:pPr>
+            <a:r>
+              <a:rPr sz="1300" b="0">
+                <a:solidFill>
+                  <a:srgbClr val="202B38"/>
+                </a:solidFill>
+                <a:latin typeface="Arial"/>
+              </a:rPr>
+              <a:t>The same algorithm with two settings is best thought of as two different algorithms. MIT 6.390, Appendix C.</a:t>
+            </a:r>
+          </a:p>
         </p:txBody>
       </p:sp>
       <p:sp>
@@ -8130,7 +8381,7 @@
                 </a:solidFill>
                 <a:latin typeface="Arial"/>
               </a:rPr>
-              <a:t>TUNING - GRID SEARCH</a:t>
+              <a:t>TUNING - GRID AND RANDOM SEARCH</a:t>
             </a:r>
           </a:p>
         </p:txBody>
@@ -8170,7 +8421,7 @@
                 </a:solidFill>
                 <a:latin typeface="Arial"/>
               </a:rPr>
-              <a:t>Grid search is just cross-validation plus a for-loop - 18 combinations, best CV 0.8259</a:t>
+              <a:t>Tuning is Session 3's tournament again - every setting is a contestant, CV is the referee</a:t>
             </a:r>
           </a:p>
         </p:txBody>
@@ -8219,897 +8470,16 @@
           </a:p>
         </p:txBody>
       </p:sp>
-      <p:graphicFrame>
-        <p:nvGraphicFramePr>
-          <p:cNvPr id="7" name="Table 6"/>
-          <p:cNvGraphicFramePr>
-            <a:graphicFrameLocks noGrp="1"/>
-          </p:cNvGraphicFramePr>
-          <p:nvPr/>
-        </p:nvGraphicFramePr>
-        <p:xfrm>
-          <a:off x="548640" y="1874519"/>
-          <a:ext cx="11091669" cy="2743200"/>
-        </p:xfrm>
-        <a:graphic>
-          <a:graphicData uri="http://schemas.openxmlformats.org/drawingml/2006/table">
-            <a:tbl>
-              <a:tblPr firstRow="1" bandRow="1">
-                <a:tableStyleId>{5C22544A-7EE6-4342-B048-85BDC9FD1C3A}</a:tableStyleId>
-              </a:tblPr>
-              <a:tblGrid>
-                <a:gridCol w="2174837"/>
-                <a:gridCol w="1957353"/>
-                <a:gridCol w="2609805"/>
-                <a:gridCol w="2827288"/>
-                <a:gridCol w="1522386"/>
-              </a:tblGrid>
-              <a:tr h="457200">
-                <a:tc>
-                  <a:txBody>
-                    <a:bodyPr wrap="square"/>
-                    <a:lstStyle/>
-                    <a:p>
-                      <a:pPr algn="l">
-                        <a:spcAft>
-                          <a:spcPts val="0"/>
-                        </a:spcAft>
-                        <a:buNone/>
-                      </a:pPr>
-                      <a:r>
-                        <a:rPr sz="1300" b="1">
-                          <a:solidFill>
-                            <a:srgbClr val="FFFFFF"/>
-                          </a:solidFill>
-                          <a:latin typeface="Arial"/>
-                        </a:rPr>
-                        <a:t>n_estimators</a:t>
-                      </a:r>
-                    </a:p>
-                  </a:txBody>
-                  <a:tcPr>
-                    <a:solidFill>
-                      <a:srgbClr val="0A2540"/>
-                    </a:solidFill>
-                  </a:tcPr>
-                </a:tc>
-                <a:tc>
-                  <a:txBody>
-                    <a:bodyPr wrap="square"/>
-                    <a:lstStyle/>
-                    <a:p>
-                      <a:pPr algn="l">
-                        <a:spcAft>
-                          <a:spcPts val="0"/>
-                        </a:spcAft>
-                        <a:buNone/>
-                      </a:pPr>
-                      <a:r>
-                        <a:rPr sz="1300" b="1">
-                          <a:solidFill>
-                            <a:srgbClr val="FFFFFF"/>
-                          </a:solidFill>
-                          <a:latin typeface="Arial"/>
-                        </a:rPr>
-                        <a:t>max_depth</a:t>
-                      </a:r>
-                    </a:p>
-                  </a:txBody>
-                  <a:tcPr>
-                    <a:solidFill>
-                      <a:srgbClr val="0A2540"/>
-                    </a:solidFill>
-                  </a:tcPr>
-                </a:tc>
-                <a:tc>
-                  <a:txBody>
-                    <a:bodyPr wrap="square"/>
-                    <a:lstStyle/>
-                    <a:p>
-                      <a:pPr algn="l">
-                        <a:spcAft>
-                          <a:spcPts val="0"/>
-                        </a:spcAft>
-                        <a:buNone/>
-                      </a:pPr>
-                      <a:r>
-                        <a:rPr sz="1300" b="1">
-                          <a:solidFill>
-                            <a:srgbClr val="FFFFFF"/>
-                          </a:solidFill>
-                          <a:latin typeface="Arial"/>
-                        </a:rPr>
-                        <a:t>min_samples_leaf</a:t>
-                      </a:r>
-                    </a:p>
-                  </a:txBody>
-                  <a:tcPr>
-                    <a:solidFill>
-                      <a:srgbClr val="0A2540"/>
-                    </a:solidFill>
-                  </a:tcPr>
-                </a:tc>
-                <a:tc>
-                  <a:txBody>
-                    <a:bodyPr wrap="square"/>
-                    <a:lstStyle/>
-                    <a:p>
-                      <a:pPr algn="l">
-                        <a:spcAft>
-                          <a:spcPts val="0"/>
-                        </a:spcAft>
-                        <a:buNone/>
-                      </a:pPr>
-                      <a:r>
-                        <a:rPr sz="1300" b="1">
-                          <a:solidFill>
-                            <a:srgbClr val="FFFFFF"/>
-                          </a:solidFill>
-                          <a:latin typeface="Arial"/>
-                        </a:rPr>
-                        <a:t>Mean CV accuracy</a:t>
-                      </a:r>
-                    </a:p>
-                  </a:txBody>
-                  <a:tcPr>
-                    <a:solidFill>
-                      <a:srgbClr val="0A2540"/>
-                    </a:solidFill>
-                  </a:tcPr>
-                </a:tc>
-                <a:tc>
-                  <a:txBody>
-                    <a:bodyPr wrap="square"/>
-                    <a:lstStyle/>
-                    <a:p>
-                      <a:pPr algn="l">
-                        <a:spcAft>
-                          <a:spcPts val="0"/>
-                        </a:spcAft>
-                        <a:buNone/>
-                      </a:pPr>
-                      <a:r>
-                        <a:rPr sz="1300" b="1">
-                          <a:solidFill>
-                            <a:srgbClr val="FFFFFF"/>
-                          </a:solidFill>
-                          <a:latin typeface="Arial"/>
-                        </a:rPr>
-                        <a:t>Std</a:t>
-                      </a:r>
-                    </a:p>
-                  </a:txBody>
-                  <a:tcPr>
-                    <a:solidFill>
-                      <a:srgbClr val="0A2540"/>
-                    </a:solidFill>
-                  </a:tcPr>
-                </a:tc>
-              </a:tr>
-              <a:tr h="457200">
-                <a:tc>
-                  <a:txBody>
-                    <a:bodyPr wrap="square"/>
-                    <a:lstStyle/>
-                    <a:p>
-                      <a:pPr algn="l">
-                        <a:spcAft>
-                          <a:spcPts val="0"/>
-                        </a:spcAft>
-                        <a:buNone/>
-                      </a:pPr>
-                      <a:r>
-                        <a:rPr sz="1250" b="0">
-                          <a:solidFill>
-                            <a:srgbClr val="202B38"/>
-                          </a:solidFill>
-                          <a:latin typeface="Arial"/>
-                        </a:rPr>
-                        <a:t>100</a:t>
-                      </a:r>
-                    </a:p>
-                  </a:txBody>
-                  <a:tcPr>
-                    <a:solidFill>
-                      <a:srgbClr val="FFFFFF"/>
-                    </a:solidFill>
-                  </a:tcPr>
-                </a:tc>
-                <a:tc>
-                  <a:txBody>
-                    <a:bodyPr wrap="square"/>
-                    <a:lstStyle/>
-                    <a:p>
-                      <a:pPr algn="l">
-                        <a:spcAft>
-                          <a:spcPts val="0"/>
-                        </a:spcAft>
-                        <a:buNone/>
-                      </a:pPr>
-                      <a:r>
-                        <a:rPr sz="1250" b="0">
-                          <a:solidFill>
-                            <a:srgbClr val="202B38"/>
-                          </a:solidFill>
-                          <a:latin typeface="Arial"/>
-                        </a:rPr>
-                        <a:t>4</a:t>
-                      </a:r>
-                    </a:p>
-                  </a:txBody>
-                  <a:tcPr>
-                    <a:solidFill>
-                      <a:srgbClr val="FFFFFF"/>
-                    </a:solidFill>
-                  </a:tcPr>
-                </a:tc>
-                <a:tc>
-                  <a:txBody>
-                    <a:bodyPr wrap="square"/>
-                    <a:lstStyle/>
-                    <a:p>
-                      <a:pPr algn="l">
-                        <a:spcAft>
-                          <a:spcPts val="0"/>
-                        </a:spcAft>
-                        <a:buNone/>
-                      </a:pPr>
-                      <a:r>
-                        <a:rPr sz="1250" b="0">
-                          <a:solidFill>
-                            <a:srgbClr val="202B38"/>
-                          </a:solidFill>
-                          <a:latin typeface="Arial"/>
-                        </a:rPr>
-                        <a:t>5</a:t>
-                      </a:r>
-                    </a:p>
-                  </a:txBody>
-                  <a:tcPr>
-                    <a:solidFill>
-                      <a:srgbClr val="FFFFFF"/>
-                    </a:solidFill>
-                  </a:tcPr>
-                </a:tc>
-                <a:tc>
-                  <a:txBody>
-                    <a:bodyPr wrap="square"/>
-                    <a:lstStyle/>
-                    <a:p>
-                      <a:pPr algn="l">
-                        <a:spcAft>
-                          <a:spcPts val="0"/>
-                        </a:spcAft>
-                        <a:buNone/>
-                      </a:pPr>
-                      <a:r>
-                        <a:rPr sz="1250" b="0">
-                          <a:solidFill>
-                            <a:srgbClr val="202B38"/>
-                          </a:solidFill>
-                          <a:latin typeface="Arial"/>
-                        </a:rPr>
-                        <a:t>0.8259  (best)</a:t>
-                      </a:r>
-                    </a:p>
-                  </a:txBody>
-                  <a:tcPr>
-                    <a:solidFill>
-                      <a:srgbClr val="FFFFFF"/>
-                    </a:solidFill>
-                  </a:tcPr>
-                </a:tc>
-                <a:tc>
-                  <a:txBody>
-                    <a:bodyPr wrap="square"/>
-                    <a:lstStyle/>
-                    <a:p>
-                      <a:pPr algn="l">
-                        <a:spcAft>
-                          <a:spcPts val="0"/>
-                        </a:spcAft>
-                        <a:buNone/>
-                      </a:pPr>
-                      <a:r>
-                        <a:rPr sz="1250" b="0">
-                          <a:solidFill>
-                            <a:srgbClr val="202B38"/>
-                          </a:solidFill>
-                          <a:latin typeface="Arial"/>
-                        </a:rPr>
-                        <a:t>0.0138</a:t>
-                      </a:r>
-                    </a:p>
-                  </a:txBody>
-                  <a:tcPr>
-                    <a:solidFill>
-                      <a:srgbClr val="FFFFFF"/>
-                    </a:solidFill>
-                  </a:tcPr>
-                </a:tc>
-              </a:tr>
-              <a:tr h="457200">
-                <a:tc>
-                  <a:txBody>
-                    <a:bodyPr wrap="square"/>
-                    <a:lstStyle/>
-                    <a:p>
-                      <a:pPr algn="l">
-                        <a:spcAft>
-                          <a:spcPts val="0"/>
-                        </a:spcAft>
-                        <a:buNone/>
-                      </a:pPr>
-                      <a:r>
-                        <a:rPr sz="1250" b="0">
-                          <a:solidFill>
-                            <a:srgbClr val="202B38"/>
-                          </a:solidFill>
-                          <a:latin typeface="Arial"/>
-                        </a:rPr>
-                        <a:t>100</a:t>
-                      </a:r>
-                    </a:p>
-                  </a:txBody>
-                  <a:tcPr>
-                    <a:solidFill>
-                      <a:srgbClr val="EEF3FD"/>
-                    </a:solidFill>
-                  </a:tcPr>
-                </a:tc>
-                <a:tc>
-                  <a:txBody>
-                    <a:bodyPr wrap="square"/>
-                    <a:lstStyle/>
-                    <a:p>
-                      <a:pPr algn="l">
-                        <a:spcAft>
-                          <a:spcPts val="0"/>
-                        </a:spcAft>
-                        <a:buNone/>
-                      </a:pPr>
-                      <a:r>
-                        <a:rPr sz="1250" b="0">
-                          <a:solidFill>
-                            <a:srgbClr val="202B38"/>
-                          </a:solidFill>
-                          <a:latin typeface="Arial"/>
-                        </a:rPr>
-                        <a:t>None</a:t>
-                      </a:r>
-                    </a:p>
-                  </a:txBody>
-                  <a:tcPr>
-                    <a:solidFill>
-                      <a:srgbClr val="EEF3FD"/>
-                    </a:solidFill>
-                  </a:tcPr>
-                </a:tc>
-                <a:tc>
-                  <a:txBody>
-                    <a:bodyPr wrap="square"/>
-                    <a:lstStyle/>
-                    <a:p>
-                      <a:pPr algn="l">
-                        <a:spcAft>
-                          <a:spcPts val="0"/>
-                        </a:spcAft>
-                        <a:buNone/>
-                      </a:pPr>
-                      <a:r>
-                        <a:rPr sz="1250" b="0">
-                          <a:solidFill>
-                            <a:srgbClr val="202B38"/>
-                          </a:solidFill>
-                          <a:latin typeface="Arial"/>
-                        </a:rPr>
-                        <a:t>3</a:t>
-                      </a:r>
-                    </a:p>
-                  </a:txBody>
-                  <a:tcPr>
-                    <a:solidFill>
-                      <a:srgbClr val="EEF3FD"/>
-                    </a:solidFill>
-                  </a:tcPr>
-                </a:tc>
-                <a:tc>
-                  <a:txBody>
-                    <a:bodyPr wrap="square"/>
-                    <a:lstStyle/>
-                    <a:p>
-                      <a:pPr algn="l">
-                        <a:spcAft>
-                          <a:spcPts val="0"/>
-                        </a:spcAft>
-                        <a:buNone/>
-                      </a:pPr>
-                      <a:r>
-                        <a:rPr sz="1250" b="0">
-                          <a:solidFill>
-                            <a:srgbClr val="202B38"/>
-                          </a:solidFill>
-                          <a:latin typeface="Arial"/>
-                        </a:rPr>
-                        <a:t>0.8245</a:t>
-                      </a:r>
-                    </a:p>
-                  </a:txBody>
-                  <a:tcPr>
-                    <a:solidFill>
-                      <a:srgbClr val="EEF3FD"/>
-                    </a:solidFill>
-                  </a:tcPr>
-                </a:tc>
-                <a:tc>
-                  <a:txBody>
-                    <a:bodyPr wrap="square"/>
-                    <a:lstStyle/>
-                    <a:p>
-                      <a:pPr algn="l">
-                        <a:spcAft>
-                          <a:spcPts val="0"/>
-                        </a:spcAft>
-                        <a:buNone/>
-                      </a:pPr>
-                      <a:r>
-                        <a:rPr sz="1250" b="0">
-                          <a:solidFill>
-                            <a:srgbClr val="202B38"/>
-                          </a:solidFill>
-                          <a:latin typeface="Arial"/>
-                        </a:rPr>
-                        <a:t>0.0212</a:t>
-                      </a:r>
-                    </a:p>
-                  </a:txBody>
-                  <a:tcPr>
-                    <a:solidFill>
-                      <a:srgbClr val="EEF3FD"/>
-                    </a:solidFill>
-                  </a:tcPr>
-                </a:tc>
-              </a:tr>
-              <a:tr h="457200">
-                <a:tc>
-                  <a:txBody>
-                    <a:bodyPr wrap="square"/>
-                    <a:lstStyle/>
-                    <a:p>
-                      <a:pPr algn="l">
-                        <a:spcAft>
-                          <a:spcPts val="0"/>
-                        </a:spcAft>
-                        <a:buNone/>
-                      </a:pPr>
-                      <a:r>
-                        <a:rPr sz="1250" b="0">
-                          <a:solidFill>
-                            <a:srgbClr val="202B38"/>
-                          </a:solidFill>
-                          <a:latin typeface="Arial"/>
-                        </a:rPr>
-                        <a:t>100</a:t>
-                      </a:r>
-                    </a:p>
-                  </a:txBody>
-                  <a:tcPr>
-                    <a:solidFill>
-                      <a:srgbClr val="FFFFFF"/>
-                    </a:solidFill>
-                  </a:tcPr>
-                </a:tc>
-                <a:tc>
-                  <a:txBody>
-                    <a:bodyPr wrap="square"/>
-                    <a:lstStyle/>
-                    <a:p>
-                      <a:pPr algn="l">
-                        <a:spcAft>
-                          <a:spcPts val="0"/>
-                        </a:spcAft>
-                        <a:buNone/>
-                      </a:pPr>
-                      <a:r>
-                        <a:rPr sz="1250" b="0">
-                          <a:solidFill>
-                            <a:srgbClr val="202B38"/>
-                          </a:solidFill>
-                          <a:latin typeface="Arial"/>
-                        </a:rPr>
-                        <a:t>4</a:t>
-                      </a:r>
-                    </a:p>
-                  </a:txBody>
-                  <a:tcPr>
-                    <a:solidFill>
-                      <a:srgbClr val="FFFFFF"/>
-                    </a:solidFill>
-                  </a:tcPr>
-                </a:tc>
-                <a:tc>
-                  <a:txBody>
-                    <a:bodyPr wrap="square"/>
-                    <a:lstStyle/>
-                    <a:p>
-                      <a:pPr algn="l">
-                        <a:spcAft>
-                          <a:spcPts val="0"/>
-                        </a:spcAft>
-                        <a:buNone/>
-                      </a:pPr>
-                      <a:r>
-                        <a:rPr sz="1250" b="0">
-                          <a:solidFill>
-                            <a:srgbClr val="202B38"/>
-                          </a:solidFill>
-                          <a:latin typeface="Arial"/>
-                        </a:rPr>
-                        <a:t>3</a:t>
-                      </a:r>
-                    </a:p>
-                  </a:txBody>
-                  <a:tcPr>
-                    <a:solidFill>
-                      <a:srgbClr val="FFFFFF"/>
-                    </a:solidFill>
-                  </a:tcPr>
-                </a:tc>
-                <a:tc>
-                  <a:txBody>
-                    <a:bodyPr wrap="square"/>
-                    <a:lstStyle/>
-                    <a:p>
-                      <a:pPr algn="l">
-                        <a:spcAft>
-                          <a:spcPts val="0"/>
-                        </a:spcAft>
-                        <a:buNone/>
-                      </a:pPr>
-                      <a:r>
-                        <a:rPr sz="1250" b="0">
-                          <a:solidFill>
-                            <a:srgbClr val="202B38"/>
-                          </a:solidFill>
-                          <a:latin typeface="Arial"/>
-                        </a:rPr>
-                        <a:t>0.8245</a:t>
-                      </a:r>
-                    </a:p>
-                  </a:txBody>
-                  <a:tcPr>
-                    <a:solidFill>
-                      <a:srgbClr val="FFFFFF"/>
-                    </a:solidFill>
-                  </a:tcPr>
-                </a:tc>
-                <a:tc>
-                  <a:txBody>
-                    <a:bodyPr wrap="square"/>
-                    <a:lstStyle/>
-                    <a:p>
-                      <a:pPr algn="l">
-                        <a:spcAft>
-                          <a:spcPts val="0"/>
-                        </a:spcAft>
-                        <a:buNone/>
-                      </a:pPr>
-                      <a:r>
-                        <a:rPr sz="1250" b="0">
-                          <a:solidFill>
-                            <a:srgbClr val="202B38"/>
-                          </a:solidFill>
-                          <a:latin typeface="Arial"/>
-                        </a:rPr>
-                        <a:t>0.0143</a:t>
-                      </a:r>
-                    </a:p>
-                  </a:txBody>
-                  <a:tcPr>
-                    <a:solidFill>
-                      <a:srgbClr val="FFFFFF"/>
-                    </a:solidFill>
-                  </a:tcPr>
-                </a:tc>
-              </a:tr>
-              <a:tr h="457200">
-                <a:tc>
-                  <a:txBody>
-                    <a:bodyPr wrap="square"/>
-                    <a:lstStyle/>
-                    <a:p>
-                      <a:pPr algn="l">
-                        <a:spcAft>
-                          <a:spcPts val="0"/>
-                        </a:spcAft>
-                        <a:buNone/>
-                      </a:pPr>
-                      <a:r>
-                        <a:rPr sz="1250" b="0">
-                          <a:solidFill>
-                            <a:srgbClr val="202B38"/>
-                          </a:solidFill>
-                          <a:latin typeface="Arial"/>
-                        </a:rPr>
-                        <a:t>300</a:t>
-                      </a:r>
-                    </a:p>
-                  </a:txBody>
-                  <a:tcPr>
-                    <a:solidFill>
-                      <a:srgbClr val="EEF3FD"/>
-                    </a:solidFill>
-                  </a:tcPr>
-                </a:tc>
-                <a:tc>
-                  <a:txBody>
-                    <a:bodyPr wrap="square"/>
-                    <a:lstStyle/>
-                    <a:p>
-                      <a:pPr algn="l">
-                        <a:spcAft>
-                          <a:spcPts val="0"/>
-                        </a:spcAft>
-                        <a:buNone/>
-                      </a:pPr>
-                      <a:r>
-                        <a:rPr sz="1250" b="0">
-                          <a:solidFill>
-                            <a:srgbClr val="202B38"/>
-                          </a:solidFill>
-                          <a:latin typeface="Arial"/>
-                        </a:rPr>
-                        <a:t>8</a:t>
-                      </a:r>
-                    </a:p>
-                  </a:txBody>
-                  <a:tcPr>
-                    <a:solidFill>
-                      <a:srgbClr val="EEF3FD"/>
-                    </a:solidFill>
-                  </a:tcPr>
-                </a:tc>
-                <a:tc>
-                  <a:txBody>
-                    <a:bodyPr wrap="square"/>
-                    <a:lstStyle/>
-                    <a:p>
-                      <a:pPr algn="l">
-                        <a:spcAft>
-                          <a:spcPts val="0"/>
-                        </a:spcAft>
-                        <a:buNone/>
-                      </a:pPr>
-                      <a:r>
-                        <a:rPr sz="1250" b="0">
-                          <a:solidFill>
-                            <a:srgbClr val="202B38"/>
-                          </a:solidFill>
-                          <a:latin typeface="Arial"/>
-                        </a:rPr>
-                        <a:t>3</a:t>
-                      </a:r>
-                    </a:p>
-                  </a:txBody>
-                  <a:tcPr>
-                    <a:solidFill>
-                      <a:srgbClr val="EEF3FD"/>
-                    </a:solidFill>
-                  </a:tcPr>
-                </a:tc>
-                <a:tc>
-                  <a:txBody>
-                    <a:bodyPr wrap="square"/>
-                    <a:lstStyle/>
-                    <a:p>
-                      <a:pPr algn="l">
-                        <a:spcAft>
-                          <a:spcPts val="0"/>
-                        </a:spcAft>
-                        <a:buNone/>
-                      </a:pPr>
-                      <a:r>
-                        <a:rPr sz="1250" b="0">
-                          <a:solidFill>
-                            <a:srgbClr val="202B38"/>
-                          </a:solidFill>
-                          <a:latin typeface="Arial"/>
-                        </a:rPr>
-                        <a:t>0.8231</a:t>
-                      </a:r>
-                    </a:p>
-                  </a:txBody>
-                  <a:tcPr>
-                    <a:solidFill>
-                      <a:srgbClr val="EEF3FD"/>
-                    </a:solidFill>
-                  </a:tcPr>
-                </a:tc>
-                <a:tc>
-                  <a:txBody>
-                    <a:bodyPr wrap="square"/>
-                    <a:lstStyle/>
-                    <a:p>
-                      <a:pPr algn="l">
-                        <a:spcAft>
-                          <a:spcPts val="0"/>
-                        </a:spcAft>
-                        <a:buNone/>
-                      </a:pPr>
-                      <a:r>
-                        <a:rPr sz="1250" b="0">
-                          <a:solidFill>
-                            <a:srgbClr val="202B38"/>
-                          </a:solidFill>
-                          <a:latin typeface="Arial"/>
-                        </a:rPr>
-                        <a:t>0.0209</a:t>
-                      </a:r>
-                    </a:p>
-                  </a:txBody>
-                  <a:tcPr>
-                    <a:solidFill>
-                      <a:srgbClr val="EEF3FD"/>
-                    </a:solidFill>
-                  </a:tcPr>
-                </a:tc>
-              </a:tr>
-              <a:tr h="457200">
-                <a:tc>
-                  <a:txBody>
-                    <a:bodyPr wrap="square"/>
-                    <a:lstStyle/>
-                    <a:p>
-                      <a:pPr algn="l">
-                        <a:spcAft>
-                          <a:spcPts val="0"/>
-                        </a:spcAft>
-                        <a:buNone/>
-                      </a:pPr>
-                      <a:r>
-                        <a:rPr sz="1250" b="0">
-                          <a:solidFill>
-                            <a:srgbClr val="202B38"/>
-                          </a:solidFill>
-                          <a:latin typeface="Arial"/>
-                        </a:rPr>
-                        <a:t>300</a:t>
-                      </a:r>
-                    </a:p>
-                  </a:txBody>
-                  <a:tcPr>
-                    <a:solidFill>
-                      <a:srgbClr val="FFFFFF"/>
-                    </a:solidFill>
-                  </a:tcPr>
-                </a:tc>
-                <a:tc>
-                  <a:txBody>
-                    <a:bodyPr wrap="square"/>
-                    <a:lstStyle/>
-                    <a:p>
-                      <a:pPr algn="l">
-                        <a:spcAft>
-                          <a:spcPts val="0"/>
-                        </a:spcAft>
-                        <a:buNone/>
-                      </a:pPr>
-                      <a:r>
-                        <a:rPr sz="1250" b="0">
-                          <a:solidFill>
-                            <a:srgbClr val="202B38"/>
-                          </a:solidFill>
-                          <a:latin typeface="Arial"/>
-                        </a:rPr>
-                        <a:t>4</a:t>
-                      </a:r>
-                    </a:p>
-                  </a:txBody>
-                  <a:tcPr>
-                    <a:solidFill>
-                      <a:srgbClr val="FFFFFF"/>
-                    </a:solidFill>
-                  </a:tcPr>
-                </a:tc>
-                <a:tc>
-                  <a:txBody>
-                    <a:bodyPr wrap="square"/>
-                    <a:lstStyle/>
-                    <a:p>
-                      <a:pPr algn="l">
-                        <a:spcAft>
-                          <a:spcPts val="0"/>
-                        </a:spcAft>
-                        <a:buNone/>
-                      </a:pPr>
-                      <a:r>
-                        <a:rPr sz="1250" b="0">
-                          <a:solidFill>
-                            <a:srgbClr val="202B38"/>
-                          </a:solidFill>
-                          <a:latin typeface="Arial"/>
-                        </a:rPr>
-                        <a:t>1</a:t>
-                      </a:r>
-                    </a:p>
-                  </a:txBody>
-                  <a:tcPr>
-                    <a:solidFill>
-                      <a:srgbClr val="FFFFFF"/>
-                    </a:solidFill>
-                  </a:tcPr>
-                </a:tc>
-                <a:tc>
-                  <a:txBody>
-                    <a:bodyPr wrap="square"/>
-                    <a:lstStyle/>
-                    <a:p>
-                      <a:pPr algn="l">
-                        <a:spcAft>
-                          <a:spcPts val="0"/>
-                        </a:spcAft>
-                        <a:buNone/>
-                      </a:pPr>
-                      <a:r>
-                        <a:rPr sz="1250" b="0">
-                          <a:solidFill>
-                            <a:srgbClr val="202B38"/>
-                          </a:solidFill>
-                          <a:latin typeface="Arial"/>
-                        </a:rPr>
-                        <a:t>0.8231</a:t>
-                      </a:r>
-                    </a:p>
-                  </a:txBody>
-                  <a:tcPr>
-                    <a:solidFill>
-                      <a:srgbClr val="FFFFFF"/>
-                    </a:solidFill>
-                  </a:tcPr>
-                </a:tc>
-                <a:tc>
-                  <a:txBody>
-                    <a:bodyPr wrap="square"/>
-                    <a:lstStyle/>
-                    <a:p>
-                      <a:pPr algn="l">
-                        <a:spcAft>
-                          <a:spcPts val="0"/>
-                        </a:spcAft>
-                        <a:buNone/>
-                      </a:pPr>
-                      <a:r>
-                        <a:rPr sz="1250" b="0">
-                          <a:solidFill>
-                            <a:srgbClr val="202B38"/>
-                          </a:solidFill>
-                          <a:latin typeface="Arial"/>
-                        </a:rPr>
-                        <a:t>0.0174</a:t>
-                      </a:r>
-                    </a:p>
-                  </a:txBody>
-                  <a:tcPr>
-                    <a:solidFill>
-                      <a:srgbClr val="FFFFFF"/>
-                    </a:solidFill>
-                  </a:tcPr>
-                </a:tc>
-              </a:tr>
-            </a:tbl>
-          </a:graphicData>
-        </a:graphic>
-      </p:graphicFrame>
-      <p:sp>
-        <p:nvSpPr>
-          <p:cNvPr id="8" name="TextBox 7"/>
+      <p:sp>
+        <p:nvSpPr>
+          <p:cNvPr id="7" name="TextBox 6"/>
           <p:cNvSpPr txBox="1"/>
           <p:nvPr/>
         </p:nvSpPr>
         <p:spPr>
           <a:xfrm>
-            <a:off x="548640" y="6053328"/>
-            <a:ext cx="11091672" cy="502920"/>
+            <a:off x="548640" y="1874519"/>
+            <a:ext cx="4297680" cy="4206240"/>
           </a:xfrm>
           <a:prstGeom prst="rect">
             <a:avLst/>
@@ -9122,24 +8492,111 @@
           </a:bodyPr>
           <a:lstStyle/>
           <a:p>
-            <a:pPr algn="l">
-              <a:spcAft>
-                <a:spcPts val="600"/>
-              </a:spcAft>
-              <a:buNone/>
-            </a:pPr>
-            <a:r>
-              <a:rPr sz="1200" b="0">
-                <a:solidFill>
-                  <a:srgbClr val="1E5EF3"/>
-                </a:solidFill>
-                <a:latin typeface="Arial"/>
-              </a:rPr>
-              <a:t>GridSearchCV is nested for-loops around CV: 2x3x3 = 18 combos x 5 folds = 90 trainings; best gains +0.0322 over the 0.7937 default. Module 2, notebook 3.</a:t>
-            </a:r>
-          </a:p>
-        </p:txBody>
-      </p:sp>
+            <a:pPr algn="l" indent="-228600" marL="228600">
+              <a:spcAft>
+                <a:spcPts val="800"/>
+              </a:spcAft>
+              <a:buClr>
+                <a:srgbClr val="1E5EF3"/>
+              </a:buClr>
+              <a:buChar char="—"/>
+            </a:pPr>
+            <a:r>
+              <a:rPr sz="1450" b="0">
+                <a:solidFill>
+                  <a:srgbClr val="202B38"/>
+                </a:solidFill>
+                <a:latin typeface="Arial"/>
+              </a:rPr>
+              <a:t>Grid search = CV plus nested for-loops, no magic: 2x3x3 = 18 combos x 5 folds = 90 trainings. Best (max_depth 4, min_samples_leaf 5, 100 trees): CV 0.8259, +0.0322 over the 0.7937 default.</a:t>
+            </a:r>
+          </a:p>
+          <a:p>
+            <a:pPr algn="l" indent="-228600" marL="228600">
+              <a:spcAft>
+                <a:spcPts val="800"/>
+              </a:spcAft>
+              <a:buClr>
+                <a:srgbClr val="1E5EF3"/>
+              </a:buClr>
+              <a:buChar char="—"/>
+            </a:pPr>
+            <a:r>
+              <a:rPr sz="1450" b="0">
+                <a:solidFill>
+                  <a:srgbClr val="202B38"/>
+                </a:solidFill>
+                <a:latin typeface="Arial"/>
+              </a:rPr>
+              <a:t>Grids explode: 5 knobs x 6 values = 7,776 combos - nearly 39,000 trainings. 15 random draws instead test up to 15 distinct values of every knob: CV 0.8274, beating the grid with fewer tries.</a:t>
+            </a:r>
+          </a:p>
+          <a:p>
+            <a:pPr algn="l" indent="-228600" marL="228600">
+              <a:spcAft>
+                <a:spcPts val="800"/>
+              </a:spcAft>
+              <a:buClr>
+                <a:srgbClr val="1E5EF3"/>
+              </a:buClr>
+              <a:buChar char="—"/>
+            </a:pPr>
+            <a:r>
+              <a:rPr sz="1450" b="0">
+                <a:solidFill>
+                  <a:srgbClr val="202B38"/>
+                </a:solidFill>
+                <a:latin typeface="Arial"/>
+              </a:rPr>
+              <a:t>MIT's reframe: picking a hyperparameter value IS comparing learning algorithms - same referee, same rules; the contestants are settings instead of model families.</a:t>
+            </a:r>
+          </a:p>
+          <a:p>
+            <a:pPr algn="l" indent="-228600" marL="228600">
+              <a:spcAft>
+                <a:spcPts val="800"/>
+              </a:spcAft>
+              <a:buClr>
+                <a:srgbClr val="1E5EF3"/>
+              </a:buClr>
+              <a:buChar char="—"/>
+            </a:pPr>
+            <a:r>
+              <a:rPr sz="1450" b="0">
+                <a:solidFill>
+                  <a:srgbClr val="202B38"/>
+                </a:solidFill>
+                <a:latin typeface="Arial"/>
+              </a:rPr>
+              <a:t>Read the winning knobs: capped depth and bigger leaves are complexity BRAKES - regularization by another name: a little bias buys a big drop in variance. Session 3's U-curve, found automatically.</a:t>
+            </a:r>
+          </a:p>
+        </p:txBody>
+      </p:sp>
+      <p:pic>
+        <p:nvPicPr>
+          <p:cNvPr id="8" name="Picture 7" descr="tuning_arc.png"/>
+          <p:cNvPicPr>
+            <a:picLocks noChangeAspect="1"/>
+          </p:cNvPicPr>
+          <p:nvPr/>
+        </p:nvPicPr>
+        <p:blipFill>
+          <a:blip r:embed="rId2"/>
+          <a:stretch>
+            <a:fillRect/>
+          </a:stretch>
+        </p:blipFill>
+        <p:spPr>
+          <a:xfrm>
+            <a:off x="5120640" y="1874519"/>
+            <a:ext cx="6492240" cy="3892428"/>
+          </a:xfrm>
+          <a:prstGeom prst="rect">
+            <a:avLst/>
+          </a:prstGeom>
+        </p:spPr>
+      </p:pic>
       <p:sp>
         <p:nvSpPr>
           <p:cNvPr id="9" name="TextBox 8"/>
@@ -9148,8 +8605,8 @@
         </p:nvSpPr>
         <p:spPr>
           <a:xfrm>
-            <a:off x="548640" y="6473952"/>
-            <a:ext cx="7315200" cy="292608"/>
+            <a:off x="5120640" y="6062471"/>
+            <a:ext cx="6492240" cy="365760"/>
           </a:xfrm>
           <a:prstGeom prst="rect">
             <a:avLst/>
@@ -9162,6 +8619,46 @@
           </a:bodyPr>
           <a:lstStyle/>
           <a:p>
+            <a:pPr algn="ctr">
+              <a:spcAft>
+                <a:spcPts val="600"/>
+              </a:spcAft>
+              <a:buNone/>
+            </a:pPr>
+            <a:r>
+              <a:rPr sz="1100" b="0">
+                <a:solidFill>
+                  <a:srgbClr val="5B6774"/>
+                </a:solidFill>
+                <a:latin typeface="Arial"/>
+              </a:rPr>
+              <a:t>Random Forest 5-fold CV accuracy at each tuning stage. Module 2, notebook 3. MIT 6.390, Appendix C.</a:t>
+            </a:r>
+          </a:p>
+        </p:txBody>
+      </p:sp>
+      <p:sp>
+        <p:nvSpPr>
+          <p:cNvPr id="10" name="TextBox 9"/>
+          <p:cNvSpPr txBox="1"/>
+          <p:nvPr/>
+        </p:nvSpPr>
+        <p:spPr>
+          <a:xfrm>
+            <a:off x="548640" y="6473952"/>
+            <a:ext cx="7315200" cy="292608"/>
+          </a:xfrm>
+          <a:prstGeom prst="rect">
+            <a:avLst/>
+          </a:prstGeom>
+          <a:noFill/>
+        </p:spPr>
+        <p:txBody>
+          <a:bodyPr wrap="square">
+            <a:spAutoFit/>
+          </a:bodyPr>
+          <a:lstStyle/>
+          <a:p>
             <a:pPr algn="l">
               <a:spcAft>
                 <a:spcPts val="600"/>
@@ -9182,7 +8679,7 @@
       </p:sp>
       <p:sp>
         <p:nvSpPr>
-          <p:cNvPr id="10" name="TextBox 9"/>
+          <p:cNvPr id="11" name="TextBox 10"/>
           <p:cNvSpPr txBox="1"/>
           <p:nvPr/>
         </p:nvSpPr>
@@ -9361,7 +8858,7 @@
                 </a:solidFill>
                 <a:latin typeface="Arial"/>
               </a:rPr>
-              <a:t>TUNING - RANDOM SEARCH</a:t>
+              <a:t>TUNING - ERROR ANALYSIS</a:t>
             </a:r>
           </a:p>
         </p:txBody>
@@ -9401,7 +8898,7 @@
                 </a:solidFill>
                 <a:latin typeface="Arial"/>
               </a:rPr>
-              <a:t>Fifteen random tries beat the whole grid - more distinct values per knob</a:t>
+              <a:t>Before turning more knobs, read the mistakes - an hour of counting beats a week of guessing</a:t>
             </a:r>
           </a:p>
         </p:txBody>
@@ -9488,7 +8985,7 @@
                 </a:solidFill>
                 <a:latin typeface="Arial"/>
               </a:rPr>
-              <a:t>Grids explode: 5 knobs x 6 values = 7,776 combos - nearly 39,000 trainings.</a:t>
+              <a:t>Pull the misclassified validation examples and look at them by hand - about 100 when you have them.</a:t>
             </a:r>
           </a:p>
           <a:p>
@@ -9508,7 +9005,7 @@
                 </a:solidFill>
                 <a:latin typeface="Arial"/>
               </a:rPr>
-              <a:t>15 random draws test up to 15 distinct values of every knob at once.</a:t>
+              <a:t>Tally them into categories in a spreadsheet; add new categories as they emerge.</a:t>
             </a:r>
           </a:p>
           <a:p>
@@ -9528,7 +9025,7 @@
                 </a:solidFill>
                 <a:latin typeface="Arial"/>
               </a:rPr>
-              <a:t>If only one or two knobs really matter (typical), random explores them better.</a:t>
+              <a:t>The bottom row of percentages IS your priority list: a category worth 5% of errors caps its payoff at almost nothing; one worth 50% is where the month goes.</a:t>
             </a:r>
           </a:p>
           <a:p>
@@ -9548,7 +9045,7 @@
                 </a:solidFill>
                 <a:latin typeface="Arial"/>
               </a:rPr>
-              <a:t>Best found: max_depth 8, max_features None, min_samples_leaf 3, n_estimators 314.</a:t>
+              <a:t>Guard: split a large validation set into an "Eyeball" part you inspect and a "Blackbox" part you never look at - you will overfit whatever you stare at.</a:t>
             </a:r>
           </a:p>
           <a:p>
@@ -9568,14 +9065,14 @@
                 </a:solidFill>
                 <a:latin typeface="Arial"/>
               </a:rPr>
-              <a:t>CV 0.8274 - beats the grid's 0.8259 with fewer tries.</a:t>
+              <a:t>Exercise: pull our champion's misclassified test-set passengers in the notebook and tally your own categories (family size? fare band? title?) - no fixing allowed before the counting.</a:t>
             </a:r>
           </a:p>
         </p:txBody>
       </p:sp>
       <p:pic>
         <p:nvPicPr>
-          <p:cNvPr id="8" name="Picture 7" descr="tuning_arc.png"/>
+          <p:cNvPr id="8" name="Picture 7" descr="error_analysis_sheet.png"/>
           <p:cNvPicPr>
             <a:picLocks noChangeAspect="1"/>
           </p:cNvPicPr>
@@ -9590,7 +9087,7 @@
         <p:spPr>
           <a:xfrm>
             <a:off x="5120640" y="1874519"/>
-            <a:ext cx="6492240" cy="3892428"/>
+            <a:ext cx="6492240" cy="4026761"/>
           </a:xfrm>
           <a:prstGeom prst="rect">
             <a:avLst/>
@@ -9632,7 +9129,7 @@
                 </a:solidFill>
                 <a:latin typeface="Arial"/>
               </a:rPr>
-              <a:t>Random Forest 5-fold CV accuracy at each tuning stage. Module 2, notebook 3.</a:t>
+              <a:t>The method, on Ng's classic image-classifier example - illustration, not our data. Ng, Machine Learning Yearning chs. 14-19.</a:t>
             </a:r>
           </a:p>
         </p:txBody>
@@ -9985,7 +9482,7 @@
                 </a:solidFill>
                 <a:latin typeface="Arial"/>
               </a:rPr>
-              <a:t>Final exam: 179 passengers the model has never seen, scored one time.</a:t>
+              <a:t>Final exam: 179 passengers the model has never seen, scored one time: accuracy 0.8268, F1 0.7597.</a:t>
             </a:r>
           </a:p>
           <a:p>
@@ -10005,7 +9502,7 @@
                 </a:solidFill>
                 <a:latin typeface="Arial"/>
               </a:rPr>
-              <a:t>Test accuracy 0.8268, F1 0.7597.</a:t>
+              <a:t>Test is close to CV (0.8274): the tuning did not fool itself.</a:t>
             </a:r>
           </a:p>
           <a:p>
@@ -10025,7 +9522,7 @@
                 </a:solidFill>
                 <a:latin typeface="Arial"/>
               </a:rPr>
-              <a:t>Test is close to CV (0.8274): the tuning did not fool itself.</a:t>
+              <a:t>Peeking at test scores while tuning silently turns the test set into training data.</a:t>
             </a:r>
           </a:p>
           <a:p>
@@ -10045,7 +9542,7 @@
                 </a:solidFill>
                 <a:latin typeface="Arial"/>
               </a:rPr>
-              <a:t>Peeking at test scores while tuning silently turns the test set into training data.</a:t>
+              <a:t>Honest expectation: tuning buys a percentage point or two, not miracles.</a:t>
             </a:r>
           </a:p>
           <a:p>
@@ -10065,14 +9562,14 @@
                 </a:solidFill>
                 <a:latin typeface="Arial"/>
               </a:rPr>
-              <a:t>Honest expectation: tuning buys a percentage point or two, not miracles.</a:t>
+              <a:t>The bar closes: we FIT on 712 rows, CHOSE by CV inside them - the REPORT band opens now, exactly once, and its score (0.8268) is the only forecast of real-world performance we own.</a:t>
             </a:r>
           </a:p>
         </p:txBody>
       </p:sp>
       <p:pic>
         <p:nvPicPr>
-          <p:cNvPr id="8" name="Picture 7" descr="cv_vs_test.png"/>
+          <p:cNvPr id="8" name="Picture 7" descr="cv_vs_test_bar.png"/>
           <p:cNvPicPr>
             <a:picLocks noChangeAspect="1"/>
           </p:cNvPicPr>
@@ -10086,8 +9583,8 @@
         </p:blipFill>
         <p:spPr>
           <a:xfrm>
-            <a:off x="5120640" y="1874519"/>
-            <a:ext cx="6492240" cy="3889517"/>
+            <a:off x="5320532" y="1874519"/>
+            <a:ext cx="6092456" cy="4114800"/>
           </a:xfrm>
           <a:prstGeom prst="rect">
             <a:avLst/>
@@ -10129,7 +9626,7 @@
                 </a:solidFill>
                 <a:latin typeface="Arial"/>
               </a:rPr>
-              <a:t>Tuned forest: CV score vs the single test-set look. Module 2, notebook 3.</a:t>
+              <a:t>Tuned forest: CV score vs the single test-set look. Module 2, notebook 3. Harvard CS109A / ISLR ch. 5 (model selection vs model assessment).</a:t>
             </a:r>
           </a:p>
         </p:txBody>
@@ -10247,7 +9744,7 @@
             <a:avLst/>
           </a:prstGeom>
           <a:solidFill>
-            <a:srgbClr val="0A2540"/>
+            <a:srgbClr val="FFFFFF"/>
           </a:solidFill>
           <a:ln>
             <a:noFill/>
@@ -10278,14 +9775,58 @@
       </p:sp>
       <p:sp>
         <p:nvSpPr>
-          <p:cNvPr id="3" name="TextBox 2"/>
+          <p:cNvPr id="3" name="Rectangle 2"/>
+          <p:cNvSpPr/>
+          <p:nvPr/>
+        </p:nvSpPr>
+        <p:spPr>
+          <a:xfrm>
+            <a:off x="548640" y="475488"/>
+            <a:ext cx="457200" cy="54864"/>
+          </a:xfrm>
+          <a:prstGeom prst="rect">
+            <a:avLst/>
+          </a:prstGeom>
+          <a:solidFill>
+            <a:srgbClr val="1E5EF3"/>
+          </a:solidFill>
+          <a:ln>
+            <a:noFill/>
+          </a:ln>
+          <a:effectLst/>
+        </p:spPr>
+        <p:style>
+          <a:lnRef idx="1">
+            <a:schemeClr val="accent1"/>
+          </a:lnRef>
+          <a:fillRef idx="3">
+            <a:schemeClr val="accent1"/>
+          </a:fillRef>
+          <a:effectRef idx="2">
+            <a:schemeClr val="accent1"/>
+          </a:effectRef>
+          <a:fontRef idx="minor">
+            <a:schemeClr val="lt1"/>
+          </a:fontRef>
+        </p:style>
+        <p:txBody>
+          <a:bodyPr rtlCol="0" anchor="ctr"/>
+          <a:lstStyle/>
+          <a:p>
+            <a:pPr algn="ctr"/>
+          </a:p>
+        </p:txBody>
+      </p:sp>
+      <p:sp>
+        <p:nvSpPr>
+          <p:cNvPr id="4" name="TextBox 3"/>
           <p:cNvSpPr txBox="1"/>
           <p:nvPr/>
         </p:nvSpPr>
         <p:spPr>
           <a:xfrm>
-            <a:off x="822960" y="1463040"/>
-            <a:ext cx="3657600" cy="2011680"/>
+            <a:off x="548640" y="603504"/>
+            <a:ext cx="11091672" cy="274320"/>
           </a:xfrm>
           <a:prstGeom prst="rect">
             <a:avLst/>
@@ -10305,27 +9846,27 @@
               <a:buNone/>
             </a:pPr>
             <a:r>
-              <a:rPr sz="11000" b="1">
+              <a:rPr sz="1100" b="1">
                 <a:solidFill>
                   <a:srgbClr val="1E5EF3"/>
                 </a:solidFill>
                 <a:latin typeface="Arial"/>
               </a:rPr>
-              <a:t>02</a:t>
-            </a:r>
-          </a:p>
-        </p:txBody>
-      </p:sp>
-      <p:sp>
-        <p:nvSpPr>
-          <p:cNvPr id="4" name="TextBox 3"/>
+              <a:t>THE LAST STEP BEFORE SHIPPING</a:t>
+            </a:r>
+          </a:p>
+        </p:txBody>
+      </p:sp>
+      <p:sp>
+        <p:nvSpPr>
+          <p:cNvPr id="5" name="TextBox 4"/>
           <p:cNvSpPr txBox="1"/>
           <p:nvPr/>
         </p:nvSpPr>
         <p:spPr>
           <a:xfrm>
-            <a:off x="868680" y="3566160"/>
-            <a:ext cx="10424160" cy="1280160"/>
+            <a:off x="548640" y="868680"/>
+            <a:ext cx="11091672" cy="777240"/>
           </a:xfrm>
           <a:prstGeom prst="rect">
             <a:avLst/>
@@ -10340,32 +9881,76 @@
           <a:p>
             <a:pPr algn="l">
               <a:spcAft>
-                <a:spcPts val="600"/>
-              </a:spcAft>
-              <a:buNone/>
-            </a:pPr>
-            <a:r>
-              <a:rPr sz="3400" b="1">
-                <a:solidFill>
-                  <a:srgbClr val="FFFFFF"/>
-                </a:solidFill>
-                <a:latin typeface="Arial"/>
-              </a:rPr>
-              <a:t>Ship it</a:t>
-            </a:r>
-          </a:p>
-        </p:txBody>
-      </p:sp>
-      <p:sp>
-        <p:nvSpPr>
-          <p:cNvPr id="5" name="TextBox 4"/>
+                <a:spcPts val="0"/>
+              </a:spcAft>
+              <a:buNone/>
+            </a:pPr>
+            <a:r>
+              <a:rPr sz="2600" b="1">
+                <a:solidFill>
+                  <a:srgbClr val="0A2540"/>
+                </a:solidFill>
+                <a:latin typeface="Arial"/>
+              </a:rPr>
+              <a:t>You don't ship the CV copy: after choosing, retrain the winning recipe on all the data</a:t>
+            </a:r>
+          </a:p>
+        </p:txBody>
+      </p:sp>
+      <p:sp>
+        <p:nvSpPr>
+          <p:cNvPr id="6" name="Rectangle 5"/>
+          <p:cNvSpPr/>
+          <p:nvPr/>
+        </p:nvSpPr>
+        <p:spPr>
+          <a:xfrm>
+            <a:off x="548640" y="1664208"/>
+            <a:ext cx="11091672" cy="12801"/>
+          </a:xfrm>
+          <a:prstGeom prst="rect">
+            <a:avLst/>
+          </a:prstGeom>
+          <a:solidFill>
+            <a:srgbClr val="B9D0FA"/>
+          </a:solidFill>
+          <a:ln>
+            <a:noFill/>
+          </a:ln>
+          <a:effectLst/>
+        </p:spPr>
+        <p:style>
+          <a:lnRef idx="1">
+            <a:schemeClr val="accent1"/>
+          </a:lnRef>
+          <a:fillRef idx="3">
+            <a:schemeClr val="accent1"/>
+          </a:fillRef>
+          <a:effectRef idx="2">
+            <a:schemeClr val="accent1"/>
+          </a:effectRef>
+          <a:fontRef idx="minor">
+            <a:schemeClr val="lt1"/>
+          </a:fontRef>
+        </p:style>
+        <p:txBody>
+          <a:bodyPr rtlCol="0" anchor="ctr"/>
+          <a:lstStyle/>
+          <a:p>
+            <a:pPr algn="ctr"/>
+          </a:p>
+        </p:txBody>
+      </p:sp>
+      <p:sp>
+        <p:nvSpPr>
+          <p:cNvPr id="7" name="TextBox 6"/>
           <p:cNvSpPr txBox="1"/>
           <p:nvPr/>
         </p:nvSpPr>
         <p:spPr>
           <a:xfrm>
-            <a:off x="868680" y="4709160"/>
-            <a:ext cx="10058400" cy="914400"/>
+            <a:off x="548640" y="1874519"/>
+            <a:ext cx="4297680" cy="4206240"/>
           </a:xfrm>
           <a:prstGeom prst="rect">
             <a:avLst/>
@@ -10378,34 +9963,141 @@
           </a:bodyPr>
           <a:lstStyle/>
           <a:p>
-            <a:pPr algn="l">
-              <a:spcAft>
-                <a:spcPts val="600"/>
-              </a:spcAft>
-              <a:buNone/>
-            </a:pPr>
-            <a:r>
-              <a:rPr sz="1600" b="0">
-                <a:solidFill>
-                  <a:srgbClr val="B9D0FA"/>
-                </a:solidFill>
-                <a:latin typeface="Arial"/>
-              </a:rPr>
-              <a:t>A model in a notebook helps nobody - ship it where anyone can ask about a passenger like Owen or Florence.</a:t>
-            </a:r>
-          </a:p>
-        </p:txBody>
-      </p:sp>
-      <p:sp>
-        <p:nvSpPr>
-          <p:cNvPr id="6" name="TextBox 5"/>
+            <a:pPr algn="l" indent="-228600" marL="228600">
+              <a:spcAft>
+                <a:spcPts val="800"/>
+              </a:spcAft>
+              <a:buClr>
+                <a:srgbClr val="1E5EF3"/>
+              </a:buClr>
+              <a:buChar char="—"/>
+            </a:pPr>
+            <a:r>
+              <a:rPr sz="1450" b="0">
+                <a:solidFill>
+                  <a:srgbClr val="202B38"/>
+                </a:solidFill>
+                <a:latin typeface="Arial"/>
+              </a:rPr>
+              <a:t>MIT's five steps: compare variants by CV, pick the winner, RETRAIN the winning recipe on all available data, ship, and be judged on data nobody at the table has seen.</a:t>
+            </a:r>
+          </a:p>
+          <a:p>
+            <a:pPr algn="l" indent="-228600" marL="228600">
+              <a:spcAft>
+                <a:spcPts val="800"/>
+              </a:spcAft>
+              <a:buClr>
+                <a:srgbClr val="1E5EF3"/>
+              </a:buClr>
+              <a:buChar char="—"/>
+            </a:pPr>
+            <a:r>
+              <a:rPr sz="1450" b="0">
+                <a:solidFill>
+                  <a:srgbClr val="202B38"/>
+                </a:solidFill>
+                <a:latin typeface="Arial"/>
+              </a:rPr>
+              <a:t>Step 3 surprises beginners: the fold models were scaffolding; more data = a better final model, so refit everything.</a:t>
+            </a:r>
+          </a:p>
+          <a:p>
+            <a:pPr algn="l" indent="-228600" marL="228600">
+              <a:spcAft>
+                <a:spcPts val="800"/>
+              </a:spcAft>
+              <a:buClr>
+                <a:srgbClr val="1E5EF3"/>
+              </a:buClr>
+              <a:buChar char="—"/>
+            </a:pPr>
+            <a:r>
+              <a:rPr sz="1450" b="0">
+                <a:solidFill>
+                  <a:srgbClr val="202B38"/>
+                </a:solidFill>
+                <a:latin typeface="Arial"/>
+              </a:rPr>
+              <a:t>sklearn already does the training-set version: refit=True retrains the best settings on all 712 rows automatically - that is the model we saved.</a:t>
+            </a:r>
+          </a:p>
+          <a:p>
+            <a:pPr algn="l" indent="-228600" marL="228600">
+              <a:spcAft>
+                <a:spcPts val="800"/>
+              </a:spcAft>
+              <a:buClr>
+                <a:srgbClr val="1E5EF3"/>
+              </a:buClr>
+              <a:buChar char="—"/>
+            </a:pPr>
+            <a:r>
+              <a:rPr sz="1450" b="0">
+                <a:solidFill>
+                  <a:srgbClr val="202B38"/>
+                </a:solidFill>
+                <a:latin typeface="Arial"/>
+              </a:rPr>
+              <a:t>Once the single test look is spent, the recipe - not the score - is what you trust: retraining it on all 891 rows before shipping is legitimate; re-scoring it is not, because no honest data remains.</a:t>
+            </a:r>
+          </a:p>
+          <a:p>
+            <a:pPr algn="l" indent="-228600" marL="228600">
+              <a:spcAft>
+                <a:spcPts val="800"/>
+              </a:spcAft>
+              <a:buClr>
+                <a:srgbClr val="1E5EF3"/>
+              </a:buClr>
+              <a:buChar char="—"/>
+            </a:pPr>
+            <a:r>
+              <a:rPr sz="1450" b="0">
+                <a:solidFill>
+                  <a:srgbClr val="202B38"/>
+                </a:solidFill>
+                <a:latin typeface="Arial"/>
+              </a:rPr>
+              <a:t>Two contamination arrows are forever forbidden: test data into training, and validation scores reused as the final report card.</a:t>
+            </a:r>
+          </a:p>
+        </p:txBody>
+      </p:sp>
+      <p:pic>
+        <p:nvPicPr>
+          <p:cNvPr id="8" name="Picture 7" descr="retrain_pipeline.png"/>
+          <p:cNvPicPr>
+            <a:picLocks noChangeAspect="1"/>
+          </p:cNvPicPr>
+          <p:nvPr/>
+        </p:nvPicPr>
+        <p:blipFill>
+          <a:blip r:embed="rId2"/>
+          <a:stretch>
+            <a:fillRect/>
+          </a:stretch>
+        </p:blipFill>
+        <p:spPr>
+          <a:xfrm>
+            <a:off x="5120640" y="1874519"/>
+            <a:ext cx="6492240" cy="3319412"/>
+          </a:xfrm>
+          <a:prstGeom prst="rect">
+            <a:avLst/>
+          </a:prstGeom>
+        </p:spPr>
+      </p:pic>
+      <p:sp>
+        <p:nvSpPr>
+          <p:cNvPr id="9" name="TextBox 8"/>
           <p:cNvSpPr txBox="1"/>
           <p:nvPr/>
         </p:nvSpPr>
         <p:spPr>
           <a:xfrm>
-            <a:off x="548640" y="6473952"/>
-            <a:ext cx="7315200" cy="292608"/>
+            <a:off x="5120640" y="6062471"/>
+            <a:ext cx="6492240" cy="365760"/>
           </a:xfrm>
           <a:prstGeom prst="rect">
             <a:avLst/>
@@ -10418,34 +10110,34 @@
           </a:bodyPr>
           <a:lstStyle/>
           <a:p>
-            <a:pPr algn="l">
+            <a:pPr algn="ctr">
               <a:spcAft>
                 <a:spcPts val="600"/>
               </a:spcAft>
               <a:buNone/>
             </a:pPr>
             <a:r>
-              <a:rPr sz="900" b="0">
-                <a:solidFill>
-                  <a:srgbClr val="B9D0FA"/>
-                </a:solidFill>
-                <a:latin typeface="Arial"/>
-              </a:rPr>
-              <a:t>M2 Session 4 - Optimization and Deployment</a:t>
-            </a:r>
-          </a:p>
-        </p:txBody>
-      </p:sp>
-      <p:sp>
-        <p:nvSpPr>
-          <p:cNvPr id="7" name="TextBox 6"/>
+              <a:rPr sz="1100" b="0">
+                <a:solidFill>
+                  <a:srgbClr val="5B6774"/>
+                </a:solidFill>
+                <a:latin typeface="Arial"/>
+              </a:rPr>
+              <a:t>MIT's end-to-end evaluation pipeline - the two red arrows are never allowed. MIT 6.390, Appendix C.</a:t>
+            </a:r>
+          </a:p>
+        </p:txBody>
+      </p:sp>
+      <p:sp>
+        <p:nvSpPr>
+          <p:cNvPr id="10" name="TextBox 9"/>
           <p:cNvSpPr txBox="1"/>
           <p:nvPr/>
         </p:nvSpPr>
         <p:spPr>
           <a:xfrm>
-            <a:off x="11292840" y="6473952"/>
-            <a:ext cx="548640" cy="292608"/>
+            <a:off x="548640" y="6473952"/>
+            <a:ext cx="7315200" cy="292608"/>
           </a:xfrm>
           <a:prstGeom prst="rect">
             <a:avLst/>
@@ -10458,6 +10150,46 @@
           </a:bodyPr>
           <a:lstStyle/>
           <a:p>
+            <a:pPr algn="l">
+              <a:spcAft>
+                <a:spcPts val="600"/>
+              </a:spcAft>
+              <a:buNone/>
+            </a:pPr>
+            <a:r>
+              <a:rPr sz="900" b="0">
+                <a:solidFill>
+                  <a:srgbClr val="5B6774"/>
+                </a:solidFill>
+                <a:latin typeface="Arial"/>
+              </a:rPr>
+              <a:t>M2 Session 4 - Optimization and Deployment</a:t>
+            </a:r>
+          </a:p>
+        </p:txBody>
+      </p:sp>
+      <p:sp>
+        <p:nvSpPr>
+          <p:cNvPr id="11" name="TextBox 10"/>
+          <p:cNvSpPr txBox="1"/>
+          <p:nvPr/>
+        </p:nvSpPr>
+        <p:spPr>
+          <a:xfrm>
+            <a:off x="11292840" y="6473952"/>
+            <a:ext cx="548640" cy="292608"/>
+          </a:xfrm>
+          <a:prstGeom prst="rect">
+            <a:avLst/>
+          </a:prstGeom>
+          <a:noFill/>
+        </p:spPr>
+        <p:txBody>
+          <a:bodyPr wrap="square">
+            <a:spAutoFit/>
+          </a:bodyPr>
+          <a:lstStyle/>
+          <a:p>
             <a:pPr algn="r">
               <a:spcAft>
                 <a:spcPts val="600"/>
@@ -10467,7 +10199,7 @@
             <a:r>
               <a:rPr sz="900" b="0">
                 <a:solidFill>
-                  <a:srgbClr val="B9D0FA"/>
+                  <a:srgbClr val="5B6774"/>
                 </a:solidFill>
                 <a:latin typeface="Arial"/>
               </a:rPr>
@@ -10509,7 +10241,7 @@
             <a:avLst/>
           </a:prstGeom>
           <a:solidFill>
-            <a:srgbClr val="FFFFFF"/>
+            <a:srgbClr val="0A2540"/>
           </a:solidFill>
           <a:ln>
             <a:noFill/>
@@ -10540,58 +10272,14 @@
       </p:sp>
       <p:sp>
         <p:nvSpPr>
-          <p:cNvPr id="3" name="Rectangle 2"/>
-          <p:cNvSpPr/>
-          <p:nvPr/>
-        </p:nvSpPr>
-        <p:spPr>
-          <a:xfrm>
-            <a:off x="548640" y="475488"/>
-            <a:ext cx="457200" cy="54864"/>
-          </a:xfrm>
-          <a:prstGeom prst="rect">
-            <a:avLst/>
-          </a:prstGeom>
-          <a:solidFill>
-            <a:srgbClr val="1E5EF3"/>
-          </a:solidFill>
-          <a:ln>
-            <a:noFill/>
-          </a:ln>
-          <a:effectLst/>
-        </p:spPr>
-        <p:style>
-          <a:lnRef idx="1">
-            <a:schemeClr val="accent1"/>
-          </a:lnRef>
-          <a:fillRef idx="3">
-            <a:schemeClr val="accent1"/>
-          </a:fillRef>
-          <a:effectRef idx="2">
-            <a:schemeClr val="accent1"/>
-          </a:effectRef>
-          <a:fontRef idx="minor">
-            <a:schemeClr val="lt1"/>
-          </a:fontRef>
-        </p:style>
-        <p:txBody>
-          <a:bodyPr rtlCol="0" anchor="ctr"/>
-          <a:lstStyle/>
-          <a:p>
-            <a:pPr algn="ctr"/>
-          </a:p>
-        </p:txBody>
-      </p:sp>
-      <p:sp>
-        <p:nvSpPr>
-          <p:cNvPr id="4" name="TextBox 3"/>
+          <p:cNvPr id="3" name="TextBox 2"/>
           <p:cNvSpPr txBox="1"/>
           <p:nvPr/>
         </p:nvSpPr>
         <p:spPr>
           <a:xfrm>
-            <a:off x="548640" y="603504"/>
-            <a:ext cx="11091672" cy="274320"/>
+            <a:off x="822960" y="1463040"/>
+            <a:ext cx="3657600" cy="2011680"/>
           </a:xfrm>
           <a:prstGeom prst="rect">
             <a:avLst/>
@@ -10611,27 +10299,27 @@
               <a:buNone/>
             </a:pPr>
             <a:r>
-              <a:rPr sz="1100" b="1">
+              <a:rPr sz="11000" b="1">
                 <a:solidFill>
                   <a:srgbClr val="1E5EF3"/>
                 </a:solidFill>
                 <a:latin typeface="Arial"/>
               </a:rPr>
-              <a:t>FROM NOTEBOOK TO PRODUCTION</a:t>
-            </a:r>
-          </a:p>
-        </p:txBody>
-      </p:sp>
-      <p:sp>
-        <p:nvSpPr>
-          <p:cNvPr id="5" name="TextBox 4"/>
+              <a:t>02</a:t>
+            </a:r>
+          </a:p>
+        </p:txBody>
+      </p:sp>
+      <p:sp>
+        <p:nvSpPr>
+          <p:cNvPr id="4" name="TextBox 3"/>
           <p:cNvSpPr txBox="1"/>
           <p:nvPr/>
         </p:nvSpPr>
         <p:spPr>
           <a:xfrm>
-            <a:off x="548640" y="868680"/>
-            <a:ext cx="11091672" cy="777240"/>
+            <a:off x="868680" y="3566160"/>
+            <a:ext cx="10424160" cy="1280160"/>
           </a:xfrm>
           <a:prstGeom prst="rect">
             <a:avLst/>
@@ -10646,76 +10334,32 @@
           <a:p>
             <a:pPr algn="l">
               <a:spcAft>
-                <a:spcPts val="0"/>
-              </a:spcAft>
-              <a:buNone/>
-            </a:pPr>
-            <a:r>
-              <a:rPr sz="2600" b="1">
-                <a:solidFill>
-                  <a:srgbClr val="0A2540"/>
-                </a:solidFill>
-                <a:latin typeface="Arial"/>
-              </a:rPr>
-              <a:t>Production is a loop, not a finish line - the model runs where real users can reach it</a:t>
-            </a:r>
-          </a:p>
-        </p:txBody>
-      </p:sp>
-      <p:sp>
-        <p:nvSpPr>
-          <p:cNvPr id="6" name="Rectangle 5"/>
-          <p:cNvSpPr/>
-          <p:nvPr/>
-        </p:nvSpPr>
-        <p:spPr>
-          <a:xfrm>
-            <a:off x="548640" y="1664208"/>
-            <a:ext cx="11091672" cy="12801"/>
-          </a:xfrm>
-          <a:prstGeom prst="rect">
-            <a:avLst/>
-          </a:prstGeom>
-          <a:solidFill>
-            <a:srgbClr val="B9D0FA"/>
-          </a:solidFill>
-          <a:ln>
-            <a:noFill/>
-          </a:ln>
-          <a:effectLst/>
-        </p:spPr>
-        <p:style>
-          <a:lnRef idx="1">
-            <a:schemeClr val="accent1"/>
-          </a:lnRef>
-          <a:fillRef idx="3">
-            <a:schemeClr val="accent1"/>
-          </a:fillRef>
-          <a:effectRef idx="2">
-            <a:schemeClr val="accent1"/>
-          </a:effectRef>
-          <a:fontRef idx="minor">
-            <a:schemeClr val="lt1"/>
-          </a:fontRef>
-        </p:style>
-        <p:txBody>
-          <a:bodyPr rtlCol="0" anchor="ctr"/>
-          <a:lstStyle/>
-          <a:p>
-            <a:pPr algn="ctr"/>
-          </a:p>
-        </p:txBody>
-      </p:sp>
-      <p:sp>
-        <p:nvSpPr>
-          <p:cNvPr id="7" name="TextBox 6"/>
+                <a:spcPts val="600"/>
+              </a:spcAft>
+              <a:buNone/>
+            </a:pPr>
+            <a:r>
+              <a:rPr sz="3400" b="1">
+                <a:solidFill>
+                  <a:srgbClr val="FFFFFF"/>
+                </a:solidFill>
+                <a:latin typeface="Arial"/>
+              </a:rPr>
+              <a:t>Ship it</a:t>
+            </a:r>
+          </a:p>
+        </p:txBody>
+      </p:sp>
+      <p:sp>
+        <p:nvSpPr>
+          <p:cNvPr id="5" name="TextBox 4"/>
           <p:cNvSpPr txBox="1"/>
           <p:nvPr/>
         </p:nvSpPr>
         <p:spPr>
           <a:xfrm>
-            <a:off x="548640" y="1874519"/>
-            <a:ext cx="4297680" cy="4206240"/>
+            <a:off x="868680" y="4709160"/>
+            <a:ext cx="10058400" cy="914400"/>
           </a:xfrm>
           <a:prstGeom prst="rect">
             <a:avLst/>
@@ -10728,141 +10372,34 @@
           </a:bodyPr>
           <a:lstStyle/>
           <a:p>
-            <a:pPr algn="l" indent="-228600" marL="228600">
-              <a:spcAft>
-                <a:spcPts val="800"/>
-              </a:spcAft>
-              <a:buClr>
-                <a:srgbClr val="1E5EF3"/>
-              </a:buClr>
-              <a:buChar char="—"/>
-            </a:pPr>
-            <a:r>
-              <a:rPr sz="1450" b="0">
-                <a:solidFill>
-                  <a:srgbClr val="202B38"/>
-                </a:solidFill>
-                <a:latin typeface="Arial"/>
-              </a:rPr>
-              <a:t>Save the WHOLE pipeline: titanic_model_v1.joblib, 2,599 KB - raw data in, prediction out</a:t>
-            </a:r>
-          </a:p>
-          <a:p>
-            <a:pPr algn="l" indent="-228600" marL="228600">
-              <a:spcAft>
-                <a:spcPts val="800"/>
-              </a:spcAft>
-              <a:buClr>
-                <a:srgbClr val="1E5EF3"/>
-              </a:buClr>
-              <a:buChar char="—"/>
-            </a:pPr>
-            <a:r>
-              <a:rPr sz="1450" b="0">
-                <a:solidFill>
-                  <a:srgbClr val="202B38"/>
-                </a:solidFill>
-                <a:latin typeface="Arial"/>
-              </a:rPr>
-              <a:t>Re-coding the prep by hand invites silently wrong predictions</a:t>
-            </a:r>
-          </a:p>
-          <a:p>
-            <a:pPr algn="l" indent="-228600" marL="228600">
-              <a:spcAft>
-                <a:spcPts val="800"/>
-              </a:spcAft>
-              <a:buClr>
-                <a:srgbClr val="1E5EF3"/>
-              </a:buClr>
-              <a:buChar char="—"/>
-            </a:pPr>
-            <a:r>
-              <a:rPr sz="1450" b="0">
-                <a:solidFill>
-                  <a:srgbClr val="202B38"/>
-                </a:solidFill>
-                <a:latin typeface="Arial"/>
-              </a:rPr>
-              <a:t>Load in a fresh process: no retraining, no notebook required</a:t>
-            </a:r>
-          </a:p>
-          <a:p>
-            <a:pPr algn="l" indent="-228600" marL="228600">
-              <a:spcAft>
-                <a:spcPts val="800"/>
-              </a:spcAft>
-              <a:buClr>
-                <a:srgbClr val="1E5EF3"/>
-              </a:buClr>
-              <a:buChar char="—"/>
-            </a:pPr>
-            <a:r>
-              <a:rPr sz="1450" b="0">
-                <a:solidFill>
-                  <a:srgbClr val="202B38"/>
-                </a:solidFill>
-                <a:latin typeface="Arial"/>
-              </a:rPr>
-              <a:t>Version the file name (v1) so you always know what is running - and can roll back</a:t>
-            </a:r>
-          </a:p>
-          <a:p>
-            <a:pPr algn="l" indent="-228600" marL="228600">
-              <a:spcAft>
-                <a:spcPts val="800"/>
-              </a:spcAft>
-              <a:buClr>
-                <a:srgbClr val="1E5EF3"/>
-              </a:buClr>
-              <a:buChar char="—"/>
-            </a:pPr>
-            <a:r>
-              <a:rPr sz="1450" b="0">
-                <a:solidFill>
-                  <a:srgbClr val="202B38"/>
-                </a:solidFill>
-                <a:latin typeface="Arial"/>
-              </a:rPr>
-              <a:t>Monitoring closes the loop: drift detected means retrain and reship</a:t>
-            </a:r>
-          </a:p>
-        </p:txBody>
-      </p:sp>
-      <p:pic>
-        <p:nvPicPr>
-          <p:cNvPr id="8" name="Picture 7" descr="s4_production_loop.png"/>
-          <p:cNvPicPr>
-            <a:picLocks noChangeAspect="1"/>
-          </p:cNvPicPr>
-          <p:nvPr/>
-        </p:nvPicPr>
-        <p:blipFill>
-          <a:blip r:embed="rId2"/>
-          <a:stretch>
-            <a:fillRect/>
-          </a:stretch>
-        </p:blipFill>
-        <p:spPr>
-          <a:xfrm>
-            <a:off x="5120640" y="1874519"/>
-            <a:ext cx="6492240" cy="3931990"/>
-          </a:xfrm>
-          <a:prstGeom prst="rect">
-            <a:avLst/>
-          </a:prstGeom>
-        </p:spPr>
-      </p:pic>
-      <p:sp>
-        <p:nvSpPr>
-          <p:cNvPr id="9" name="TextBox 8"/>
+            <a:pPr algn="l">
+              <a:spcAft>
+                <a:spcPts val="600"/>
+              </a:spcAft>
+              <a:buNone/>
+            </a:pPr>
+            <a:r>
+              <a:rPr sz="1600" b="0">
+                <a:solidFill>
+                  <a:srgbClr val="B9D0FA"/>
+                </a:solidFill>
+                <a:latin typeface="Arial"/>
+              </a:rPr>
+              <a:t>A model in a notebook helps nobody - ship it where anyone can ask about a passenger like Owen or Florence.</a:t>
+            </a:r>
+          </a:p>
+        </p:txBody>
+      </p:sp>
+      <p:sp>
+        <p:nvSpPr>
+          <p:cNvPr id="6" name="TextBox 5"/>
           <p:cNvSpPr txBox="1"/>
           <p:nvPr/>
         </p:nvSpPr>
         <p:spPr>
           <a:xfrm>
-            <a:off x="5120640" y="6062471"/>
-            <a:ext cx="6492240" cy="365760"/>
+            <a:off x="548640" y="6473952"/>
+            <a:ext cx="7315200" cy="292608"/>
           </a:xfrm>
           <a:prstGeom prst="rect">
             <a:avLst/>
@@ -10875,34 +10412,34 @@
           </a:bodyPr>
           <a:lstStyle/>
           <a:p>
-            <a:pPr algn="ctr">
+            <a:pPr algn="l">
               <a:spcAft>
                 <a:spcPts val="600"/>
               </a:spcAft>
               <a:buNone/>
             </a:pPr>
             <a:r>
-              <a:rPr sz="1100" b="0">
-                <a:solidFill>
-                  <a:srgbClr val="5B6774"/>
-                </a:solidFill>
-                <a:latin typeface="Arial"/>
-              </a:rPr>
-              <a:t>The production loop: save, load, wrap, host, monitor, retrain. Module 2, notebook 3.</a:t>
-            </a:r>
-          </a:p>
-        </p:txBody>
-      </p:sp>
-      <p:sp>
-        <p:nvSpPr>
-          <p:cNvPr id="10" name="TextBox 9"/>
+              <a:rPr sz="900" b="0">
+                <a:solidFill>
+                  <a:srgbClr val="B9D0FA"/>
+                </a:solidFill>
+                <a:latin typeface="Arial"/>
+              </a:rPr>
+              <a:t>M2 Session 4 - Optimization and Deployment</a:t>
+            </a:r>
+          </a:p>
+        </p:txBody>
+      </p:sp>
+      <p:sp>
+        <p:nvSpPr>
+          <p:cNvPr id="7" name="TextBox 6"/>
           <p:cNvSpPr txBox="1"/>
           <p:nvPr/>
         </p:nvSpPr>
         <p:spPr>
           <a:xfrm>
-            <a:off x="548640" y="6473952"/>
-            <a:ext cx="7315200" cy="292608"/>
+            <a:off x="11292840" y="6473952"/>
+            <a:ext cx="548640" cy="292608"/>
           </a:xfrm>
           <a:prstGeom prst="rect">
             <a:avLst/>
@@ -10915,7 +10452,7 @@
           </a:bodyPr>
           <a:lstStyle/>
           <a:p>
-            <a:pPr algn="l">
+            <a:pPr algn="r">
               <a:spcAft>
                 <a:spcPts val="600"/>
               </a:spcAft>
@@ -10924,47 +10461,7 @@
             <a:r>
               <a:rPr sz="900" b="0">
                 <a:solidFill>
-                  <a:srgbClr val="5B6774"/>
-                </a:solidFill>
-                <a:latin typeface="Arial"/>
-              </a:rPr>
-              <a:t>M2 Session 4 - Optimization and Deployment</a:t>
-            </a:r>
-          </a:p>
-        </p:txBody>
-      </p:sp>
-      <p:sp>
-        <p:nvSpPr>
-          <p:cNvPr id="11" name="TextBox 10"/>
-          <p:cNvSpPr txBox="1"/>
-          <p:nvPr/>
-        </p:nvSpPr>
-        <p:spPr>
-          <a:xfrm>
-            <a:off x="11292840" y="6473952"/>
-            <a:ext cx="548640" cy="292608"/>
-          </a:xfrm>
-          <a:prstGeom prst="rect">
-            <a:avLst/>
-          </a:prstGeom>
-          <a:noFill/>
-        </p:spPr>
-        <p:txBody>
-          <a:bodyPr wrap="square">
-            <a:spAutoFit/>
-          </a:bodyPr>
-          <a:lstStyle/>
-          <a:p>
-            <a:pPr algn="r">
-              <a:spcAft>
-                <a:spcPts val="600"/>
-              </a:spcAft>
-              <a:buNone/>
-            </a:pPr>
-            <a:r>
-              <a:rPr sz="900" b="0">
-                <a:solidFill>
-                  <a:srgbClr val="5B6774"/>
+                  <a:srgbClr val="B9D0FA"/>
                 </a:solidFill>
                 <a:latin typeface="Arial"/>
               </a:rPr>

--- a/presentations/m2-session-4-optimization-and-deployment.pptx
+++ b/presentations/m2-session-4-optimization-and-deployment.pptx
@@ -20,6 +20,10 @@
     <p:sldId id="268" r:id="rId19"/>
     <p:sldId id="269" r:id="rId20"/>
     <p:sldId id="270" r:id="rId21"/>
+    <p:sldId id="271" r:id="rId22"/>
+    <p:sldId id="272" r:id="rId23"/>
+    <p:sldId id="273" r:id="rId24"/>
+    <p:sldId id="274" r:id="rId25"/>
   </p:sldIdLst>
   <p:sldSz cx="12191695" cy="6858000" type="screen4x3"/>
   <p:notesSz cx="6858000" cy="9144000"/>
@@ -3383,7 +3387,7 @@
             <a:avLst/>
           </a:prstGeom>
           <a:solidFill>
-            <a:srgbClr val="FFFFFF"/>
+            <a:srgbClr val="0A2540"/>
           </a:solidFill>
           <a:ln>
             <a:noFill/>
@@ -3414,58 +3418,14 @@
       </p:sp>
       <p:sp>
         <p:nvSpPr>
-          <p:cNvPr id="3" name="Rectangle 2"/>
-          <p:cNvSpPr/>
-          <p:nvPr/>
-        </p:nvSpPr>
-        <p:spPr>
-          <a:xfrm>
-            <a:off x="548640" y="475488"/>
-            <a:ext cx="457200" cy="54864"/>
-          </a:xfrm>
-          <a:prstGeom prst="rect">
-            <a:avLst/>
-          </a:prstGeom>
-          <a:solidFill>
-            <a:srgbClr val="1E5EF3"/>
-          </a:solidFill>
-          <a:ln>
-            <a:noFill/>
-          </a:ln>
-          <a:effectLst/>
-        </p:spPr>
-        <p:style>
-          <a:lnRef idx="1">
-            <a:schemeClr val="accent1"/>
-          </a:lnRef>
-          <a:fillRef idx="3">
-            <a:schemeClr val="accent1"/>
-          </a:fillRef>
-          <a:effectRef idx="2">
-            <a:schemeClr val="accent1"/>
-          </a:effectRef>
-          <a:fontRef idx="minor">
-            <a:schemeClr val="lt1"/>
-          </a:fontRef>
-        </p:style>
-        <p:txBody>
-          <a:bodyPr rtlCol="0" anchor="ctr"/>
-          <a:lstStyle/>
-          <a:p>
-            <a:pPr algn="ctr"/>
-          </a:p>
-        </p:txBody>
-      </p:sp>
-      <p:sp>
-        <p:nvSpPr>
-          <p:cNvPr id="4" name="TextBox 3"/>
+          <p:cNvPr id="3" name="TextBox 2"/>
           <p:cNvSpPr txBox="1"/>
           <p:nvPr/>
         </p:nvSpPr>
         <p:spPr>
           <a:xfrm>
-            <a:off x="548640" y="603504"/>
-            <a:ext cx="11091672" cy="274320"/>
+            <a:off x="822960" y="1463040"/>
+            <a:ext cx="3657600" cy="2011680"/>
           </a:xfrm>
           <a:prstGeom prst="rect">
             <a:avLst/>
@@ -3485,27 +3445,27 @@
               <a:buNone/>
             </a:pPr>
             <a:r>
-              <a:rPr sz="1100" b="1">
+              <a:rPr sz="11000" b="1">
                 <a:solidFill>
                   <a:srgbClr val="1E5EF3"/>
                 </a:solidFill>
                 <a:latin typeface="Arial"/>
               </a:rPr>
-              <a:t>FROM NOTEBOOK TO PRODUCTION</a:t>
-            </a:r>
-          </a:p>
-        </p:txBody>
-      </p:sp>
-      <p:sp>
-        <p:nvSpPr>
-          <p:cNvPr id="5" name="TextBox 4"/>
+              <a:t>02</a:t>
+            </a:r>
+          </a:p>
+        </p:txBody>
+      </p:sp>
+      <p:sp>
+        <p:nvSpPr>
+          <p:cNvPr id="4" name="TextBox 3"/>
           <p:cNvSpPr txBox="1"/>
           <p:nvPr/>
         </p:nvSpPr>
         <p:spPr>
           <a:xfrm>
-            <a:off x="548640" y="868680"/>
-            <a:ext cx="11091672" cy="777240"/>
+            <a:off x="868680" y="3566160"/>
+            <a:ext cx="10424160" cy="1280160"/>
           </a:xfrm>
           <a:prstGeom prst="rect">
             <a:avLst/>
@@ -3520,76 +3480,32 @@
           <a:p>
             <a:pPr algn="l">
               <a:spcAft>
-                <a:spcPts val="0"/>
-              </a:spcAft>
-              <a:buNone/>
-            </a:pPr>
-            <a:r>
-              <a:rPr sz="2600" b="1">
-                <a:solidFill>
-                  <a:srgbClr val="0A2540"/>
-                </a:solidFill>
-                <a:latin typeface="Arial"/>
-              </a:rPr>
-              <a:t>Production is a loop, not a finish line - the model runs where real users can reach it</a:t>
-            </a:r>
-          </a:p>
-        </p:txBody>
-      </p:sp>
-      <p:sp>
-        <p:nvSpPr>
-          <p:cNvPr id="6" name="Rectangle 5"/>
-          <p:cNvSpPr/>
-          <p:nvPr/>
-        </p:nvSpPr>
-        <p:spPr>
-          <a:xfrm>
-            <a:off x="548640" y="1664208"/>
-            <a:ext cx="11091672" cy="12801"/>
-          </a:xfrm>
-          <a:prstGeom prst="rect">
-            <a:avLst/>
-          </a:prstGeom>
-          <a:solidFill>
-            <a:srgbClr val="B9D0FA"/>
-          </a:solidFill>
-          <a:ln>
-            <a:noFill/>
-          </a:ln>
-          <a:effectLst/>
-        </p:spPr>
-        <p:style>
-          <a:lnRef idx="1">
-            <a:schemeClr val="accent1"/>
-          </a:lnRef>
-          <a:fillRef idx="3">
-            <a:schemeClr val="accent1"/>
-          </a:fillRef>
-          <a:effectRef idx="2">
-            <a:schemeClr val="accent1"/>
-          </a:effectRef>
-          <a:fontRef idx="minor">
-            <a:schemeClr val="lt1"/>
-          </a:fontRef>
-        </p:style>
-        <p:txBody>
-          <a:bodyPr rtlCol="0" anchor="ctr"/>
-          <a:lstStyle/>
-          <a:p>
-            <a:pPr algn="ctr"/>
-          </a:p>
-        </p:txBody>
-      </p:sp>
-      <p:sp>
-        <p:nvSpPr>
-          <p:cNvPr id="7" name="TextBox 6"/>
+                <a:spcPts val="600"/>
+              </a:spcAft>
+              <a:buNone/>
+            </a:pPr>
+            <a:r>
+              <a:rPr sz="3400" b="1">
+                <a:solidFill>
+                  <a:srgbClr val="FFFFFF"/>
+                </a:solidFill>
+                <a:latin typeface="Arial"/>
+              </a:rPr>
+              <a:t>Part 2 - Practice: tune it, prove it, ship it</a:t>
+            </a:r>
+          </a:p>
+        </p:txBody>
+      </p:sp>
+      <p:sp>
+        <p:nvSpPr>
+          <p:cNvPr id="5" name="TextBox 4"/>
           <p:cNvSpPr txBox="1"/>
           <p:nvPr/>
         </p:nvSpPr>
         <p:spPr>
           <a:xfrm>
-            <a:off x="548640" y="1874519"/>
-            <a:ext cx="4297680" cy="4206240"/>
+            <a:off x="868680" y="4709160"/>
+            <a:ext cx="10058400" cy="914400"/>
           </a:xfrm>
           <a:prstGeom prst="rect">
             <a:avLst/>
@@ -3602,141 +3518,34 @@
           </a:bodyPr>
           <a:lstStyle/>
           <a:p>
-            <a:pPr algn="l" indent="-228600" marL="228600">
-              <a:spcAft>
-                <a:spcPts val="800"/>
-              </a:spcAft>
-              <a:buClr>
-                <a:srgbClr val="1E5EF3"/>
-              </a:buClr>
-              <a:buChar char="—"/>
-            </a:pPr>
-            <a:r>
-              <a:rPr sz="1450" b="0">
-                <a:solidFill>
-                  <a:srgbClr val="202B38"/>
-                </a:solidFill>
-                <a:latin typeface="Arial"/>
-              </a:rPr>
-              <a:t>Save the WHOLE pipeline: titanic_model_v1.joblib, 2,599 KB - raw data in, prediction out; re-coding the prep by hand invites silently wrong predictions</a:t>
-            </a:r>
-          </a:p>
-          <a:p>
-            <a:pPr algn="l" indent="-228600" marL="228600">
-              <a:spcAft>
-                <a:spcPts val="800"/>
-              </a:spcAft>
-              <a:buClr>
-                <a:srgbClr val="1E5EF3"/>
-              </a:buClr>
-              <a:buChar char="—"/>
-            </a:pPr>
-            <a:r>
-              <a:rPr sz="1450" b="0">
-                <a:solidFill>
-                  <a:srgbClr val="202B38"/>
-                </a:solidFill>
-                <a:latin typeface="Arial"/>
-              </a:rPr>
-              <a:t>Load in a fresh process: no retraining, no notebook required</a:t>
-            </a:r>
-          </a:p>
-          <a:p>
-            <a:pPr algn="l" indent="-228600" marL="228600">
-              <a:spcAft>
-                <a:spcPts val="800"/>
-              </a:spcAft>
-              <a:buClr>
-                <a:srgbClr val="1E5EF3"/>
-              </a:buClr>
-              <a:buChar char="—"/>
-            </a:pPr>
-            <a:r>
-              <a:rPr sz="1450" b="0">
-                <a:solidFill>
-                  <a:srgbClr val="202B38"/>
-                </a:solidFill>
-                <a:latin typeface="Arial"/>
-              </a:rPr>
-              <a:t>Version the file name (v1) so you always know what is running - and can roll back</a:t>
-            </a:r>
-          </a:p>
-          <a:p>
-            <a:pPr algn="l" indent="-228600" marL="228600">
-              <a:spcAft>
-                <a:spcPts val="800"/>
-              </a:spcAft>
-              <a:buClr>
-                <a:srgbClr val="1E5EF3"/>
-              </a:buClr>
-              <a:buChar char="—"/>
-            </a:pPr>
-            <a:r>
-              <a:rPr sz="1450" b="0">
-                <a:solidFill>
-                  <a:srgbClr val="202B38"/>
-                </a:solidFill>
-                <a:latin typeface="Arial"/>
-              </a:rPr>
-              <a:t>Ng's rollout ladder for steps 4-5: SHADOW mode (model runs beside the human, predictions logged but unused), then CANARY (~5% of real traffic, watch, ramp), then full swap with a rollback path - deployment is a dial, not a switch</a:t>
-            </a:r>
-          </a:p>
-          <a:p>
-            <a:pPr algn="l" indent="-228600" marL="228600">
-              <a:spcAft>
-                <a:spcPts val="800"/>
-              </a:spcAft>
-              <a:buClr>
-                <a:srgbClr val="1E5EF3"/>
-              </a:buClr>
-              <a:buChar char="—"/>
-            </a:pPr>
-            <a:r>
-              <a:rPr sz="1450" b="0">
-                <a:solidFill>
-                  <a:srgbClr val="202B38"/>
-                </a:solidFill>
-                <a:latin typeface="Arial"/>
-              </a:rPr>
-              <a:t>Monitoring closes the loop: drift detected means retrain and reship</a:t>
-            </a:r>
-          </a:p>
-        </p:txBody>
-      </p:sp>
-      <p:pic>
-        <p:nvPicPr>
-          <p:cNvPr id="8" name="Picture 7" descr="s4_production_loop.png"/>
-          <p:cNvPicPr>
-            <a:picLocks noChangeAspect="1"/>
-          </p:cNvPicPr>
-          <p:nvPr/>
-        </p:nvPicPr>
-        <p:blipFill>
-          <a:blip r:embed="rId2"/>
-          <a:stretch>
-            <a:fillRect/>
-          </a:stretch>
-        </p:blipFill>
-        <p:spPr>
-          <a:xfrm>
-            <a:off x="5120640" y="1874519"/>
-            <a:ext cx="6492240" cy="3931990"/>
-          </a:xfrm>
-          <a:prstGeom prst="rect">
-            <a:avLst/>
-          </a:prstGeom>
-        </p:spPr>
-      </p:pic>
-      <p:sp>
-        <p:nvSpPr>
-          <p:cNvPr id="9" name="TextBox 8"/>
+            <a:pPr algn="l">
+              <a:spcAft>
+                <a:spcPts val="600"/>
+              </a:spcAft>
+              <a:buNone/>
+            </a:pPr>
+            <a:r>
+              <a:rPr sz="1600" b="0">
+                <a:solidFill>
+                  <a:srgbClr val="B9D0FA"/>
+                </a:solidFill>
+                <a:latin typeface="Arial"/>
+              </a:rPr>
+              <a:t>Grid and random search for real, one honest look at the test set, then the model leaves the notebook - a public app anyone can ask about a passenger like Owen or Florence.</a:t>
+            </a:r>
+          </a:p>
+        </p:txBody>
+      </p:sp>
+      <p:sp>
+        <p:nvSpPr>
+          <p:cNvPr id="6" name="TextBox 5"/>
           <p:cNvSpPr txBox="1"/>
           <p:nvPr/>
         </p:nvSpPr>
         <p:spPr>
           <a:xfrm>
-            <a:off x="5120640" y="6062471"/>
-            <a:ext cx="6492240" cy="365760"/>
+            <a:off x="548640" y="6473952"/>
+            <a:ext cx="7315200" cy="292608"/>
           </a:xfrm>
           <a:prstGeom prst="rect">
             <a:avLst/>
@@ -3749,34 +3558,34 @@
           </a:bodyPr>
           <a:lstStyle/>
           <a:p>
-            <a:pPr algn="ctr">
+            <a:pPr algn="l">
               <a:spcAft>
                 <a:spcPts val="600"/>
               </a:spcAft>
               <a:buNone/>
             </a:pPr>
             <a:r>
-              <a:rPr sz="1100" b="0">
-                <a:solidFill>
-                  <a:srgbClr val="5B6774"/>
-                </a:solidFill>
-                <a:latin typeface="Arial"/>
-              </a:rPr>
-              <a:t>The production loop: save, load, wrap, host, monitor, retrain. Module 2, notebook 3. Ng, Machine Learning Engineering for Production C1.</a:t>
-            </a:r>
-          </a:p>
-        </p:txBody>
-      </p:sp>
-      <p:sp>
-        <p:nvSpPr>
-          <p:cNvPr id="10" name="TextBox 9"/>
+              <a:rPr sz="900" b="0">
+                <a:solidFill>
+                  <a:srgbClr val="B9D0FA"/>
+                </a:solidFill>
+                <a:latin typeface="Arial"/>
+              </a:rPr>
+              <a:t>M2 Session 4 - Optimization and Deployment</a:t>
+            </a:r>
+          </a:p>
+        </p:txBody>
+      </p:sp>
+      <p:sp>
+        <p:nvSpPr>
+          <p:cNvPr id="7" name="TextBox 6"/>
           <p:cNvSpPr txBox="1"/>
           <p:nvPr/>
         </p:nvSpPr>
         <p:spPr>
           <a:xfrm>
-            <a:off x="548640" y="6473952"/>
-            <a:ext cx="7315200" cy="292608"/>
+            <a:off x="11292840" y="6473952"/>
+            <a:ext cx="548640" cy="292608"/>
           </a:xfrm>
           <a:prstGeom prst="rect">
             <a:avLst/>
@@ -3789,7 +3598,7 @@
           </a:bodyPr>
           <a:lstStyle/>
           <a:p>
-            <a:pPr algn="l">
+            <a:pPr algn="r">
               <a:spcAft>
                 <a:spcPts val="600"/>
               </a:spcAft>
@@ -3798,47 +3607,7 @@
             <a:r>
               <a:rPr sz="900" b="0">
                 <a:solidFill>
-                  <a:srgbClr val="5B6774"/>
-                </a:solidFill>
-                <a:latin typeface="Arial"/>
-              </a:rPr>
-              <a:t>M2 Session 4 - Optimization and Deployment</a:t>
-            </a:r>
-          </a:p>
-        </p:txBody>
-      </p:sp>
-      <p:sp>
-        <p:nvSpPr>
-          <p:cNvPr id="11" name="TextBox 10"/>
-          <p:cNvSpPr txBox="1"/>
-          <p:nvPr/>
-        </p:nvSpPr>
-        <p:spPr>
-          <a:xfrm>
-            <a:off x="11292840" y="6473952"/>
-            <a:ext cx="548640" cy="292608"/>
-          </a:xfrm>
-          <a:prstGeom prst="rect">
-            <a:avLst/>
-          </a:prstGeom>
-          <a:noFill/>
-        </p:spPr>
-        <p:txBody>
-          <a:bodyPr wrap="square">
-            <a:spAutoFit/>
-          </a:bodyPr>
-          <a:lstStyle/>
-          <a:p>
-            <a:pPr algn="r">
-              <a:spcAft>
-                <a:spcPts val="600"/>
-              </a:spcAft>
-              <a:buNone/>
-            </a:pPr>
-            <a:r>
-              <a:rPr sz="900" b="0">
-                <a:solidFill>
-                  <a:srgbClr val="5B6774"/>
+                  <a:srgbClr val="B9D0FA"/>
                 </a:solidFill>
                 <a:latin typeface="Arial"/>
               </a:rPr>
@@ -3988,7 +3757,7 @@
                 </a:solidFill>
                 <a:latin typeface="Arial"/>
               </a:rPr>
-              <a:t>SANITY CHECK ON TWO PASSENGERS</a:t>
+              <a:t>PRACTICE - GRID AND RANDOM SEARCH</a:t>
             </a:r>
           </a:p>
         </p:txBody>
@@ -4028,7 +3797,7 @@
                 </a:solidFill>
                 <a:latin typeface="Arial"/>
               </a:rPr>
-              <a:t>The loaded pipeline answers a real question - a survival gap of 100% vs 3%</a:t>
+              <a:t>Grid and random search lift the forest from 0.7937 to 0.8274 - random wins with fewer tries</a:t>
             </a:r>
           </a:p>
         </p:txBody>
@@ -4115,7 +3884,7 @@
                 </a:solidFill>
                 <a:latin typeface="Arial"/>
               </a:rPr>
-              <a:t>Loaded from disk, no retraining: raw passenger details in, verdict out.</a:t>
+              <a:t>Grid search = CV plus nested for-loops, no magic: 2x3x3 = 18 combos x 5 folds = 90 trainings. Best (max_depth 4, min_samples_leaf 5, 100 trees): CV 0.8259, +0.0322 over the 0.7937 default.</a:t>
             </a:r>
           </a:p>
           <a:p>
@@ -4135,7 +3904,7 @@
                 </a:solidFill>
                 <a:latin typeface="Arial"/>
               </a:rPr>
-              <a:t>An invented first-class woman, 30 (Fare 80, Cherbourg) - a passenger like Florence: survives, 100%.</a:t>
+              <a:t>Grids explode: 5 knobs x 6 values = 7,776 combos - nearly 39,000 trainings. 15 random draws instead test up to 15 distinct values of every knob: CV 0.8274, beating the grid with fewer tries.</a:t>
             </a:r>
           </a:p>
           <a:p>
@@ -4155,7 +3924,7 @@
                 </a:solidFill>
                 <a:latin typeface="Arial"/>
               </a:rPr>
-              <a:t>An invented third-class man, 28 (Fare 7.9, Southampton) - a passenger like Owen: does not survive, 3%.</a:t>
+              <a:t>Part 1 in action: all 33 candidates ran Session 3's tournament again - same referee (5-fold CV), new contestants - and the test set stayed sealed.</a:t>
             </a:r>
           </a:p>
           <a:p>
@@ -4175,34 +3944,14 @@
                 </a:solidFill>
                 <a:latin typeface="Arial"/>
               </a:rPr>
-              <a:t>A probability is confidence, not a guarantee about one individual.</a:t>
-            </a:r>
-          </a:p>
-          <a:p>
-            <a:pPr algn="l" indent="-228600" marL="228600">
-              <a:spcAft>
-                <a:spcPts val="800"/>
-              </a:spcAft>
-              <a:buClr>
-                <a:srgbClr val="1E5EF3"/>
-              </a:buClr>
-              <a:buChar char="—"/>
-            </a:pPr>
-            <a:r>
-              <a:rPr sz="1450" b="0">
-                <a:solidFill>
-                  <a:srgbClr val="202B38"/>
-                </a:solidFill>
-                <a:latin typeface="Arial"/>
-              </a:rPr>
-              <a:t>The gap reflects the Titanic's reality: class and sex decided lifeboat seats.</a:t>
+              <a:t>Read the winning knobs: capped depth and bigger leaves are complexity BRAKES - regularization by another name: a little bias buys a big drop in variance. Session 3's U-curve, found automatically.</a:t>
             </a:r>
           </a:p>
         </p:txBody>
       </p:sp>
       <p:pic>
         <p:nvPicPr>
-          <p:cNvPr id="8" name="Picture 7" descr="two_passengers.png"/>
+          <p:cNvPr id="8" name="Picture 7" descr="tuning_arc.png"/>
           <p:cNvPicPr>
             <a:picLocks noChangeAspect="1"/>
           </p:cNvPicPr>
@@ -4217,7 +3966,7 @@
         <p:spPr>
           <a:xfrm>
             <a:off x="5120640" y="1874519"/>
-            <a:ext cx="6492240" cy="2938007"/>
+            <a:ext cx="6492240" cy="3892428"/>
           </a:xfrm>
           <a:prstGeom prst="rect">
             <a:avLst/>
@@ -4259,7 +4008,7 @@
                 </a:solidFill>
                 <a:latin typeface="Arial"/>
               </a:rPr>
-              <a:t>Two invented sanity-check passengers, scored by the saved pipeline. Module 2, notebook 3.</a:t>
+              <a:t>Random Forest 5-fold CV accuracy at each tuning stage. Module 2, notebook 3.</a:t>
             </a:r>
           </a:p>
         </p:txBody>
@@ -4485,7 +4234,7 @@
                 </a:solidFill>
                 <a:latin typeface="Arial"/>
               </a:rPr>
-              <a:t>FROM MODEL TO APP</a:t>
+              <a:t>PRACTICE - THE HONEST FINAL EXAM</a:t>
             </a:r>
           </a:p>
         </p:txBody>
@@ -4525,7 +4274,7 @@
                 </a:solidFill>
                 <a:latin typeface="Arial"/>
               </a:rPr>
-              <a:t>A few lines of Gradio turn the pipeline into a web app anyone can use</a:t>
+              <a:t>One look at 179 unseen passengers: 0.8268 - within 0.0006 of CV, the tuning did not fool itself</a:t>
             </a:r>
           </a:p>
         </p:txBody>
@@ -4576,58 +4325,14 @@
       </p:sp>
       <p:sp>
         <p:nvSpPr>
-          <p:cNvPr id="7" name="Rectangle 6"/>
-          <p:cNvSpPr/>
+          <p:cNvPr id="7" name="TextBox 6"/>
+          <p:cNvSpPr txBox="1"/>
           <p:nvPr/>
         </p:nvSpPr>
         <p:spPr>
           <a:xfrm>
             <a:off x="548640" y="1874519"/>
-            <a:ext cx="5394960" cy="4297680"/>
-          </a:xfrm>
-          <a:prstGeom prst="rect">
-            <a:avLst/>
-          </a:prstGeom>
-          <a:solidFill>
-            <a:srgbClr val="EEF3FD"/>
-          </a:solidFill>
-          <a:ln>
-            <a:noFill/>
-          </a:ln>
-          <a:effectLst/>
-        </p:spPr>
-        <p:style>
-          <a:lnRef idx="1">
-            <a:schemeClr val="accent1"/>
-          </a:lnRef>
-          <a:fillRef idx="3">
-            <a:schemeClr val="accent1"/>
-          </a:fillRef>
-          <a:effectRef idx="2">
-            <a:schemeClr val="accent1"/>
-          </a:effectRef>
-          <a:fontRef idx="minor">
-            <a:schemeClr val="lt1"/>
-          </a:fontRef>
-        </p:style>
-        <p:txBody>
-          <a:bodyPr rtlCol="0" anchor="ctr"/>
-          <a:lstStyle/>
-          <a:p>
-            <a:pPr algn="ctr"/>
-          </a:p>
-        </p:txBody>
-      </p:sp>
-      <p:sp>
-        <p:nvSpPr>
-          <p:cNvPr id="8" name="TextBox 7"/>
-          <p:cNvSpPr txBox="1"/>
-          <p:nvPr/>
-        </p:nvSpPr>
-        <p:spPr>
-          <a:xfrm>
-            <a:off x="777240" y="2039111"/>
-            <a:ext cx="4937760" cy="365760"/>
+            <a:ext cx="4297680" cy="4206240"/>
           </a:xfrm>
           <a:prstGeom prst="rect">
             <a:avLst/>
@@ -4640,49 +4345,9 @@
           </a:bodyPr>
           <a:lstStyle/>
           <a:p>
-            <a:pPr algn="l">
-              <a:spcAft>
-                <a:spcPts val="600"/>
-              </a:spcAft>
-              <a:buNone/>
-            </a:pPr>
-            <a:r>
-              <a:rPr sz="1500" b="1">
-                <a:solidFill>
-                  <a:srgbClr val="0A2540"/>
-                </a:solidFill>
-                <a:latin typeface="Arial"/>
-              </a:rPr>
-              <a:t>Gradio: a function becomes a web form</a:t>
-            </a:r>
-          </a:p>
-        </p:txBody>
-      </p:sp>
-      <p:sp>
-        <p:nvSpPr>
-          <p:cNvPr id="9" name="TextBox 8"/>
-          <p:cNvSpPr txBox="1"/>
-          <p:nvPr/>
-        </p:nvSpPr>
-        <p:spPr>
-          <a:xfrm>
-            <a:off x="777240" y="2441447"/>
-            <a:ext cx="4937760" cy="3566160"/>
-          </a:xfrm>
-          <a:prstGeom prst="rect">
-            <a:avLst/>
-          </a:prstGeom>
-          <a:noFill/>
-        </p:spPr>
-        <p:txBody>
-          <a:bodyPr wrap="square">
-            <a:spAutoFit/>
-          </a:bodyPr>
-          <a:lstStyle/>
-          <a:p>
             <a:pPr algn="l" indent="-228600" marL="228600">
               <a:spcAft>
-                <a:spcPts val="600"/>
+                <a:spcPts val="800"/>
               </a:spcAft>
               <a:buClr>
                 <a:srgbClr val="1E5EF3"/>
@@ -4690,19 +4355,19 @@
               <a:buChar char="—"/>
             </a:pPr>
             <a:r>
-              <a:rPr sz="1300" b="0">
+              <a:rPr sz="1450" b="0">
                 <a:solidFill>
                   <a:srgbClr val="202B38"/>
                 </a:solidFill>
                 <a:latin typeface="Arial"/>
               </a:rPr>
-              <a:t>Write a normal Python function: inputs in, answer out.</a:t>
+              <a:t>Final exam: 179 passengers the model has never seen, scored one time: accuracy 0.8268, F1 0.7597.</a:t>
             </a:r>
           </a:p>
           <a:p>
             <a:pPr algn="l" indent="-228600" marL="228600">
               <a:spcAft>
-                <a:spcPts val="600"/>
+                <a:spcPts val="800"/>
               </a:spcAft>
               <a:buClr>
                 <a:srgbClr val="1E5EF3"/>
@@ -4710,19 +4375,19 @@
               <a:buChar char="—"/>
             </a:pPr>
             <a:r>
-              <a:rPr sz="1300" b="0">
+              <a:rPr sz="1450" b="0">
                 <a:solidFill>
                   <a:srgbClr val="202B38"/>
                 </a:solidFill>
                 <a:latin typeface="Arial"/>
               </a:rPr>
-              <a:t>Gradio renders it as sliders, dropdowns and a text box.</a:t>
+              <a:t>CV promised 0.8274; the sealed test answered 0.8268 - a search judged honestly generalizes.</a:t>
             </a:r>
           </a:p>
           <a:p>
             <a:pPr algn="l" indent="-228600" marL="228600">
               <a:spcAft>
-                <a:spcPts val="600"/>
+                <a:spcPts val="800"/>
               </a:spcAft>
               <a:buClr>
                 <a:srgbClr val="1E5EF3"/>
@@ -4730,19 +4395,19 @@
               <a:buChar char="—"/>
             </a:pPr>
             <a:r>
-              <a:rPr sz="1300" b="0">
+              <a:rPr sz="1450" b="0">
                 <a:solidFill>
                   <a:srgbClr val="202B38"/>
                 </a:solidFill>
                 <a:latin typeface="Arial"/>
               </a:rPr>
-              <a:t>Title is derived by rule (boys under 13 Master, men Mr).</a:t>
+              <a:t>Peeking at test scores while tuning silently turns the test set into training data.</a:t>
             </a:r>
           </a:p>
           <a:p>
             <a:pPr algn="l" indent="-228600" marL="228600">
               <a:spcAft>
-                <a:spcPts val="600"/>
+                <a:spcPts val="800"/>
               </a:spcAft>
               <a:buClr>
                 <a:srgbClr val="1E5EF3"/>
@@ -4750,126 +4415,19 @@
               <a:buChar char="—"/>
             </a:pPr>
             <a:r>
-              <a:rPr sz="1300" b="0">
+              <a:rPr sz="1450" b="0">
                 <a:solidFill>
                   <a:srgbClr val="202B38"/>
                 </a:solidFill>
                 <a:latin typeface="Arial"/>
               </a:rPr>
-              <a:t>On Colab, launch() gives a shareable temporary link.</a:t>
-            </a:r>
-          </a:p>
-        </p:txBody>
-      </p:sp>
-      <p:sp>
-        <p:nvSpPr>
-          <p:cNvPr id="10" name="Rectangle 9"/>
-          <p:cNvSpPr/>
-          <p:nvPr/>
-        </p:nvSpPr>
-        <p:spPr>
-          <a:xfrm>
-            <a:off x="6245352" y="1874519"/>
-            <a:ext cx="5394960" cy="4297680"/>
-          </a:xfrm>
-          <a:prstGeom prst="rect">
-            <a:avLst/>
-          </a:prstGeom>
-          <a:solidFill>
-            <a:srgbClr val="EEF3FD"/>
-          </a:solidFill>
-          <a:ln>
-            <a:noFill/>
-          </a:ln>
-          <a:effectLst/>
-        </p:spPr>
-        <p:style>
-          <a:lnRef idx="1">
-            <a:schemeClr val="accent1"/>
-          </a:lnRef>
-          <a:fillRef idx="3">
-            <a:schemeClr val="accent1"/>
-          </a:fillRef>
-          <a:effectRef idx="2">
-            <a:schemeClr val="accent1"/>
-          </a:effectRef>
-          <a:fontRef idx="minor">
-            <a:schemeClr val="lt1"/>
-          </a:fontRef>
-        </p:style>
-        <p:txBody>
-          <a:bodyPr rtlCol="0" anchor="ctr"/>
-          <a:lstStyle/>
-          <a:p>
-            <a:pPr algn="ctr"/>
-          </a:p>
-        </p:txBody>
-      </p:sp>
-      <p:sp>
-        <p:nvSpPr>
-          <p:cNvPr id="11" name="TextBox 10"/>
-          <p:cNvSpPr txBox="1"/>
-          <p:nvPr/>
-        </p:nvSpPr>
-        <p:spPr>
-          <a:xfrm>
-            <a:off x="6473952" y="2039111"/>
-            <a:ext cx="4937760" cy="365760"/>
-          </a:xfrm>
-          <a:prstGeom prst="rect">
-            <a:avLst/>
-          </a:prstGeom>
-          <a:noFill/>
-        </p:spPr>
-        <p:txBody>
-          <a:bodyPr wrap="square">
-            <a:spAutoFit/>
-          </a:bodyPr>
-          <a:lstStyle/>
-          <a:p>
-            <a:pPr algn="l">
-              <a:spcAft>
-                <a:spcPts val="600"/>
-              </a:spcAft>
-              <a:buNone/>
-            </a:pPr>
-            <a:r>
-              <a:rPr sz="1500" b="1">
-                <a:solidFill>
-                  <a:srgbClr val="0A2540"/>
-                </a:solidFill>
-                <a:latin typeface="Arial"/>
-              </a:rPr>
-              <a:t>Hugging Face Spaces: free hosting</a:t>
-            </a:r>
-          </a:p>
-        </p:txBody>
-      </p:sp>
-      <p:sp>
-        <p:nvSpPr>
-          <p:cNvPr id="12" name="TextBox 11"/>
-          <p:cNvSpPr txBox="1"/>
-          <p:nvPr/>
-        </p:nvSpPr>
-        <p:spPr>
-          <a:xfrm>
-            <a:off x="6473952" y="2441447"/>
-            <a:ext cx="4937760" cy="3566160"/>
-          </a:xfrm>
-          <a:prstGeom prst="rect">
-            <a:avLst/>
-          </a:prstGeom>
-          <a:noFill/>
-        </p:spPr>
-        <p:txBody>
-          <a:bodyPr wrap="square">
-            <a:spAutoFit/>
-          </a:bodyPr>
-          <a:lstStyle/>
+              <a:t>Honest expectation: tuning buys a percentage point or two, not miracles.</a:t>
+            </a:r>
+          </a:p>
           <a:p>
             <a:pPr algn="l" indent="-228600" marL="228600">
               <a:spcAft>
-                <a:spcPts val="600"/>
+                <a:spcPts val="800"/>
               </a:spcAft>
               <a:buClr>
                 <a:srgbClr val="1E5EF3"/>
@@ -4877,107 +4435,51 @@
               <a:buChar char="—"/>
             </a:pPr>
             <a:r>
-              <a:rPr sz="1300" b="0">
+              <a:rPr sz="1450" b="0">
                 <a:solidFill>
                   <a:srgbClr val="202B38"/>
                 </a:solidFill>
                 <a:latin typeface="Arial"/>
               </a:rPr>
-              <a:t>Four files: app.py, the model, requirements.txt, README.md.</a:t>
-            </a:r>
-          </a:p>
-          <a:p>
-            <a:pPr algn="l" indent="-228600" marL="228600">
-              <a:spcAft>
-                <a:spcPts val="600"/>
-              </a:spcAft>
-              <a:buClr>
-                <a:srgbClr val="1E5EF3"/>
-              </a:buClr>
-              <a:buChar char="—"/>
-            </a:pPr>
-            <a:r>
-              <a:rPr sz="1300" b="0">
-                <a:solidFill>
-                  <a:srgbClr val="202B38"/>
-                </a:solidFill>
-                <a:latin typeface="Arial"/>
-              </a:rPr>
-              <a:t>Pin the scikit-learn version in requirements.txt.</a:t>
-            </a:r>
-          </a:p>
-          <a:p>
-            <a:pPr algn="l" indent="-228600" marL="228600">
-              <a:spcAft>
-                <a:spcPts val="600"/>
-              </a:spcAft>
-              <a:buClr>
-                <a:srgbClr val="1E5EF3"/>
-              </a:buClr>
-              <a:buChar char="—"/>
-            </a:pPr>
-            <a:r>
-              <a:rPr sz="1300" b="0">
-                <a:solidFill>
-                  <a:srgbClr val="202B38"/>
-                </a:solidFill>
-                <a:latin typeface="Arial"/>
-              </a:rPr>
-              <a:t>Upload the files in the browser - that is the whole deploy.</a:t>
-            </a:r>
-          </a:p>
-          <a:p>
-            <a:pPr algn="l" indent="-228600" marL="228600">
-              <a:spcAft>
-                <a:spcPts val="600"/>
-              </a:spcAft>
-              <a:buClr>
-                <a:srgbClr val="1E5EF3"/>
-              </a:buClr>
-              <a:buChar char="—"/>
-            </a:pPr>
-            <a:r>
-              <a:rPr sz="1300" b="0">
-                <a:solidFill>
-                  <a:srgbClr val="202B38"/>
-                </a:solidFill>
-                <a:latin typeface="Arial"/>
-              </a:rPr>
-              <a:t>No tokens or keys in code, ever - uploads stay in the browser.</a:t>
-            </a:r>
-          </a:p>
-          <a:p>
-            <a:pPr algn="l" indent="-228600" marL="228600">
-              <a:spcAft>
-                <a:spcPts val="600"/>
-              </a:spcAft>
-              <a:buClr>
-                <a:srgbClr val="1E5EF3"/>
-              </a:buClr>
-              <a:buChar char="—"/>
-            </a:pPr>
-            <a:r>
-              <a:rPr sz="1300" b="0">
-                <a:solidFill>
-                  <a:srgbClr val="202B38"/>
-                </a:solidFill>
-                <a:latin typeface="Arial"/>
-              </a:rPr>
-              <a:t>Result: a public URL anyone can open.</a:t>
-            </a:r>
-          </a:p>
-        </p:txBody>
-      </p:sp>
-      <p:sp>
-        <p:nvSpPr>
-          <p:cNvPr id="13" name="TextBox 12"/>
+              <a:t>This was Part 1's assessment step, executed: selection used CV only, and 0.8268 is the only forecast of real-world performance we own.</a:t>
+            </a:r>
+          </a:p>
+        </p:txBody>
+      </p:sp>
+      <p:pic>
+        <p:nvPicPr>
+          <p:cNvPr id="8" name="Picture 7" descr="cv_vs_test_bar.png"/>
+          <p:cNvPicPr>
+            <a:picLocks noChangeAspect="1"/>
+          </p:cNvPicPr>
+          <p:nvPr/>
+        </p:nvPicPr>
+        <p:blipFill>
+          <a:blip r:embed="rId2"/>
+          <a:stretch>
+            <a:fillRect/>
+          </a:stretch>
+        </p:blipFill>
+        <p:spPr>
+          <a:xfrm>
+            <a:off x="5120640" y="1874519"/>
+            <a:ext cx="6492240" cy="4035192"/>
+          </a:xfrm>
+          <a:prstGeom prst="rect">
+            <a:avLst/>
+          </a:prstGeom>
+        </p:spPr>
+      </p:pic>
+      <p:sp>
+        <p:nvSpPr>
+          <p:cNvPr id="9" name="TextBox 8"/>
           <p:cNvSpPr txBox="1"/>
           <p:nvPr/>
         </p:nvSpPr>
         <p:spPr>
           <a:xfrm>
-            <a:off x="548640" y="6473952"/>
-            <a:ext cx="7315200" cy="292608"/>
+            <a:off x="5120640" y="6062471"/>
+            <a:ext cx="6492240" cy="365760"/>
           </a:xfrm>
           <a:prstGeom prst="rect">
             <a:avLst/>
@@ -4990,6 +4492,46 @@
           </a:bodyPr>
           <a:lstStyle/>
           <a:p>
+            <a:pPr algn="ctr">
+              <a:spcAft>
+                <a:spcPts val="600"/>
+              </a:spcAft>
+              <a:buNone/>
+            </a:pPr>
+            <a:r>
+              <a:rPr sz="1100" b="0">
+                <a:solidFill>
+                  <a:srgbClr val="5B6774"/>
+                </a:solidFill>
+                <a:latin typeface="Arial"/>
+              </a:rPr>
+              <a:t>Tuned forest: CV score vs the single test-set look. Module 2, notebook 3.</a:t>
+            </a:r>
+          </a:p>
+        </p:txBody>
+      </p:sp>
+      <p:sp>
+        <p:nvSpPr>
+          <p:cNvPr id="10" name="TextBox 9"/>
+          <p:cNvSpPr txBox="1"/>
+          <p:nvPr/>
+        </p:nvSpPr>
+        <p:spPr>
+          <a:xfrm>
+            <a:off x="548640" y="6473952"/>
+            <a:ext cx="7315200" cy="292608"/>
+          </a:xfrm>
+          <a:prstGeom prst="rect">
+            <a:avLst/>
+          </a:prstGeom>
+          <a:noFill/>
+        </p:spPr>
+        <p:txBody>
+          <a:bodyPr wrap="square">
+            <a:spAutoFit/>
+          </a:bodyPr>
+          <a:lstStyle/>
+          <a:p>
             <a:pPr algn="l">
               <a:spcAft>
                 <a:spcPts val="600"/>
@@ -5010,7 +4552,7 @@
       </p:sp>
       <p:sp>
         <p:nvSpPr>
-          <p:cNvPr id="14" name="TextBox 13"/>
+          <p:cNvPr id="11" name="TextBox 10"/>
           <p:cNvSpPr txBox="1"/>
           <p:nvPr/>
         </p:nvSpPr>
@@ -5189,7 +4731,7 @@
                 </a:solidFill>
                 <a:latin typeface="Arial"/>
               </a:rPr>
-              <a:t>AFTER LAUNCH</a:t>
+              <a:t>THE LAST STEP BEFORE SHIPPING</a:t>
             </a:r>
           </a:p>
         </p:txBody>
@@ -5229,7 +4771,7 @@
                 </a:solidFill>
                 <a:latin typeface="Arial"/>
               </a:rPr>
-              <a:t>After launch, reality bites: models go stale and accuracy alone does not ship</a:t>
+              <a:t>You don't ship the CV copy: after choosing, retrain the winning recipe on all the data</a:t>
             </a:r>
           </a:p>
         </p:txBody>
@@ -5287,7 +4829,7 @@
         <p:spPr>
           <a:xfrm>
             <a:off x="548640" y="1874519"/>
-            <a:ext cx="11091672" cy="4206240"/>
+            <a:ext cx="4297680" cy="4206240"/>
           </a:xfrm>
           <a:prstGeom prst="rect">
             <a:avLst/>
@@ -5310,33 +4852,13 @@
               <a:buChar char="—"/>
             </a:pPr>
             <a:r>
-              <a:rPr sz="1600" b="0">
+              <a:rPr sz="1450" b="0">
                 <a:solidFill>
                   <a:srgbClr val="202B38"/>
                 </a:solidFill>
                 <a:latin typeface="Arial"/>
               </a:rPr>
-              <a:t>The $1M Netflix Prize ensemble (about 800 models, a 10% RMSE gain) was never put into production.</a:t>
-            </a:r>
-          </a:p>
-          <a:p>
-            <a:pPr algn="l" lvl="1" indent="-228600" marL="514350">
-              <a:spcAft>
-                <a:spcPts val="600"/>
-              </a:spcAft>
-              <a:buClr>
-                <a:srgbClr val="1E5EF3"/>
-              </a:buClr>
-              <a:buChar char="·"/>
-            </a:pPr>
-            <a:r>
-              <a:rPr sz="1350" b="0">
-                <a:solidFill>
-                  <a:srgbClr val="5B6774"/>
-                </a:solidFill>
-                <a:latin typeface="Arial"/>
-              </a:rPr>
-              <a:t>Engineering cost outweighed the accuracy gain, and the business had moved to streaming. Netflix tech blog, 2012.</a:t>
+              <a:t>MIT's five steps: compare variants by CV, pick the winner, RETRAIN the winning recipe on all available data, ship, and be judged on data nobody at the table has seen.</a:t>
             </a:r>
           </a:p>
           <a:p>
@@ -5350,33 +4872,13 @@
               <a:buChar char="—"/>
             </a:pPr>
             <a:r>
-              <a:rPr sz="1600" b="0">
+              <a:rPr sz="1450" b="0">
                 <a:solidFill>
                   <a:srgbClr val="202B38"/>
                 </a:solidFill>
                 <a:latin typeface="Arial"/>
               </a:rPr>
-              <a:t>Two kinds of drift: DATA drift - the inputs change (different passengers start arriving); CONCEPT drift - the hidden rule f itself moves.</a:t>
-            </a:r>
-          </a:p>
-          <a:p>
-            <a:pPr algn="l" lvl="1" indent="-228600" marL="514350">
-              <a:spcAft>
-                <a:spcPts val="600"/>
-              </a:spcAft>
-              <a:buClr>
-                <a:srgbClr val="1E5EF3"/>
-              </a:buClr>
-              <a:buChar char="·"/>
-            </a:pPr>
-            <a:r>
-              <a:rPr sz="1350" b="0">
-                <a:solidFill>
-                  <a:srgbClr val="5B6774"/>
-                </a:solidFill>
-                <a:latin typeface="Arial"/>
-              </a:rPr>
-              <a:t>Same inputs, new outcomes: Session 1's Y = f(X) + ε, with f no longer standing still. Monitor inputs and outputs separately.</a:t>
+              <a:t>Step 3 surprises beginners: the fold models were scaffolding; more data = a better final model, so refit everything.</a:t>
             </a:r>
           </a:p>
           <a:p>
@@ -5390,53 +4892,13 @@
               <a:buChar char="—"/>
             </a:pPr>
             <a:r>
-              <a:rPr sz="1600" b="0">
+              <a:rPr sz="1450" b="0">
                 <a:solidFill>
                   <a:srgbClr val="202B38"/>
                 </a:solidFill>
                 <a:latin typeface="Arial"/>
               </a:rPr>
-              <a:t>Google Flu Trends overestimated flu by more than 50% in 2011-13.</a:t>
-            </a:r>
-          </a:p>
-          <a:p>
-            <a:pPr algn="l" lvl="1" indent="-228600" marL="514350">
-              <a:spcAft>
-                <a:spcPts val="600"/>
-              </a:spcAft>
-              <a:buClr>
-                <a:srgbClr val="1E5EF3"/>
-              </a:buClr>
-              <a:buChar char="·"/>
-            </a:pPr>
-            <a:r>
-              <a:rPr sz="1350" b="0">
-                <a:solidFill>
-                  <a:srgbClr val="5B6774"/>
-                </a:solidFill>
-                <a:latin typeface="Arial"/>
-              </a:rPr>
-              <a:t>It once claimed about 11% of the US had flu; CDC data said about 6%.</a:t>
-            </a:r>
-          </a:p>
-          <a:p>
-            <a:pPr algn="l" lvl="1" indent="-228600" marL="514350">
-              <a:spcAft>
-                <a:spcPts val="600"/>
-              </a:spcAft>
-              <a:buClr>
-                <a:srgbClr val="1E5EF3"/>
-              </a:buClr>
-              <a:buChar char="·"/>
-            </a:pPr>
-            <a:r>
-              <a:rPr sz="1350" b="0">
-                <a:solidFill>
-                  <a:srgbClr val="5B6774"/>
-                </a:solidFill>
-                <a:latin typeface="Arial"/>
-              </a:rPr>
-              <a:t>It was essentially never retrained after 2009. Lazer et al., Science, 2014.</a:t>
+              <a:t>sklearn already does the training-set version: refit=True retrains the best settings on all 712 rows automatically - that is the model we saved.</a:t>
             </a:r>
           </a:p>
           <a:p>
@@ -5450,13 +4912,13 @@
               <a:buChar char="—"/>
             </a:pPr>
             <a:r>
-              <a:rPr sz="1600" b="0">
+              <a:rPr sz="1450" b="0">
                 <a:solidFill>
                   <a:srgbClr val="202B38"/>
                 </a:solidFill>
                 <a:latin typeface="Arial"/>
               </a:rPr>
-              <a:t>Version every saved model (model_v1, model_2026_09_06) so you can always roll back.</a:t>
+              <a:t>Once the single test look is spent, the recipe - not the score - is what you trust: retraining it on all 891 rows before shipping is legitimate; re-scoring it is not, because no honest data remains.</a:t>
             </a:r>
           </a:p>
           <a:p>
@@ -5470,27 +4932,51 @@
               <a:buChar char="—"/>
             </a:pPr>
             <a:r>
-              <a:rPr sz="1600" b="0">
+              <a:rPr sz="1450" b="0">
                 <a:solidFill>
                   <a:srgbClr val="202B38"/>
                 </a:solidFill>
                 <a:latin typeface="Arial"/>
               </a:rPr>
-              <a:t>Retrain on a schedule and re-score; monitoring is step 5 of the loop, not an afterthought.</a:t>
-            </a:r>
-          </a:p>
-        </p:txBody>
-      </p:sp>
-      <p:sp>
-        <p:nvSpPr>
-          <p:cNvPr id="8" name="TextBox 7"/>
+              <a:t>Two contamination arrows are forever forbidden: test data into training, and validation scores reused as the final report card.</a:t>
+            </a:r>
+          </a:p>
+        </p:txBody>
+      </p:sp>
+      <p:pic>
+        <p:nvPicPr>
+          <p:cNvPr id="8" name="Picture 7" descr="retrain_pipeline.png"/>
+          <p:cNvPicPr>
+            <a:picLocks noChangeAspect="1"/>
+          </p:cNvPicPr>
+          <p:nvPr/>
+        </p:nvPicPr>
+        <p:blipFill>
+          <a:blip r:embed="rId2"/>
+          <a:stretch>
+            <a:fillRect/>
+          </a:stretch>
+        </p:blipFill>
+        <p:spPr>
+          <a:xfrm>
+            <a:off x="5120640" y="1874519"/>
+            <a:ext cx="6492240" cy="3319412"/>
+          </a:xfrm>
+          <a:prstGeom prst="rect">
+            <a:avLst/>
+          </a:prstGeom>
+        </p:spPr>
+      </p:pic>
+      <p:sp>
+        <p:nvSpPr>
+          <p:cNvPr id="9" name="TextBox 8"/>
           <p:cNvSpPr txBox="1"/>
           <p:nvPr/>
         </p:nvSpPr>
         <p:spPr>
           <a:xfrm>
-            <a:off x="548640" y="6473952"/>
-            <a:ext cx="7315200" cy="292608"/>
+            <a:off x="5120640" y="6062471"/>
+            <a:ext cx="6492240" cy="365760"/>
           </a:xfrm>
           <a:prstGeom prst="rect">
             <a:avLst/>
@@ -5503,6 +4989,46 @@
           </a:bodyPr>
           <a:lstStyle/>
           <a:p>
+            <a:pPr algn="ctr">
+              <a:spcAft>
+                <a:spcPts val="600"/>
+              </a:spcAft>
+              <a:buNone/>
+            </a:pPr>
+            <a:r>
+              <a:rPr sz="1100" b="0">
+                <a:solidFill>
+                  <a:srgbClr val="5B6774"/>
+                </a:solidFill>
+                <a:latin typeface="Arial"/>
+              </a:rPr>
+              <a:t>MIT's end-to-end evaluation pipeline - the two red arrows are never allowed. MIT 6.390, Appendix C.</a:t>
+            </a:r>
+          </a:p>
+        </p:txBody>
+      </p:sp>
+      <p:sp>
+        <p:nvSpPr>
+          <p:cNvPr id="10" name="TextBox 9"/>
+          <p:cNvSpPr txBox="1"/>
+          <p:nvPr/>
+        </p:nvSpPr>
+        <p:spPr>
+          <a:xfrm>
+            <a:off x="548640" y="6473952"/>
+            <a:ext cx="7315200" cy="292608"/>
+          </a:xfrm>
+          <a:prstGeom prst="rect">
+            <a:avLst/>
+          </a:prstGeom>
+          <a:noFill/>
+        </p:spPr>
+        <p:txBody>
+          <a:bodyPr wrap="square">
+            <a:spAutoFit/>
+          </a:bodyPr>
+          <a:lstStyle/>
+          <a:p>
             <a:pPr algn="l">
               <a:spcAft>
                 <a:spcPts val="600"/>
@@ -5523,7 +5049,7 @@
       </p:sp>
       <p:sp>
         <p:nvSpPr>
-          <p:cNvPr id="9" name="TextBox 8"/>
+          <p:cNvPr id="11" name="TextBox 10"/>
           <p:cNvSpPr txBox="1"/>
           <p:nvPr/>
         </p:nvSpPr>
@@ -5570,6 +5096,2217 @@
 </file>
 
 <file path=ppt/slides/slide14.xml><?xml version="1.0" encoding="utf-8"?>
+<p:sld xmlns:a="http://schemas.openxmlformats.org/drawingml/2006/main" xmlns:p="http://schemas.openxmlformats.org/presentationml/2006/main" xmlns:r="http://schemas.openxmlformats.org/officeDocument/2006/relationships">
+  <p:cSld>
+    <p:spTree>
+      <p:nvGrpSpPr>
+        <p:cNvPr id="1" name=""/>
+        <p:cNvGrpSpPr/>
+        <p:nvPr/>
+      </p:nvGrpSpPr>
+      <p:grpSpPr/>
+      <p:sp>
+        <p:nvSpPr>
+          <p:cNvPr id="2" name="Rectangle 1"/>
+          <p:cNvSpPr/>
+          <p:nvPr/>
+        </p:nvSpPr>
+        <p:spPr>
+          <a:xfrm>
+            <a:off x="0" y="0"/>
+            <a:ext cx="12191695" cy="6858000"/>
+          </a:xfrm>
+          <a:prstGeom prst="rect">
+            <a:avLst/>
+          </a:prstGeom>
+          <a:solidFill>
+            <a:srgbClr val="FFFFFF"/>
+          </a:solidFill>
+          <a:ln>
+            <a:noFill/>
+          </a:ln>
+          <a:effectLst/>
+        </p:spPr>
+        <p:style>
+          <a:lnRef idx="1">
+            <a:schemeClr val="accent1"/>
+          </a:lnRef>
+          <a:fillRef idx="3">
+            <a:schemeClr val="accent1"/>
+          </a:fillRef>
+          <a:effectRef idx="2">
+            <a:schemeClr val="accent1"/>
+          </a:effectRef>
+          <a:fontRef idx="minor">
+            <a:schemeClr val="lt1"/>
+          </a:fontRef>
+        </p:style>
+        <p:txBody>
+          <a:bodyPr rtlCol="0" anchor="ctr"/>
+          <a:lstStyle/>
+          <a:p>
+            <a:pPr algn="ctr"/>
+          </a:p>
+        </p:txBody>
+      </p:sp>
+      <p:sp>
+        <p:nvSpPr>
+          <p:cNvPr id="3" name="Rectangle 2"/>
+          <p:cNvSpPr/>
+          <p:nvPr/>
+        </p:nvSpPr>
+        <p:spPr>
+          <a:xfrm>
+            <a:off x="548640" y="475488"/>
+            <a:ext cx="457200" cy="54864"/>
+          </a:xfrm>
+          <a:prstGeom prst="rect">
+            <a:avLst/>
+          </a:prstGeom>
+          <a:solidFill>
+            <a:srgbClr val="1E5EF3"/>
+          </a:solidFill>
+          <a:ln>
+            <a:noFill/>
+          </a:ln>
+          <a:effectLst/>
+        </p:spPr>
+        <p:style>
+          <a:lnRef idx="1">
+            <a:schemeClr val="accent1"/>
+          </a:lnRef>
+          <a:fillRef idx="3">
+            <a:schemeClr val="accent1"/>
+          </a:fillRef>
+          <a:effectRef idx="2">
+            <a:schemeClr val="accent1"/>
+          </a:effectRef>
+          <a:fontRef idx="minor">
+            <a:schemeClr val="lt1"/>
+          </a:fontRef>
+        </p:style>
+        <p:txBody>
+          <a:bodyPr rtlCol="0" anchor="ctr"/>
+          <a:lstStyle/>
+          <a:p>
+            <a:pPr algn="ctr"/>
+          </a:p>
+        </p:txBody>
+      </p:sp>
+      <p:sp>
+        <p:nvSpPr>
+          <p:cNvPr id="4" name="TextBox 3"/>
+          <p:cNvSpPr txBox="1"/>
+          <p:nvPr/>
+        </p:nvSpPr>
+        <p:spPr>
+          <a:xfrm>
+            <a:off x="548640" y="603504"/>
+            <a:ext cx="11091672" cy="274320"/>
+          </a:xfrm>
+          <a:prstGeom prst="rect">
+            <a:avLst/>
+          </a:prstGeom>
+          <a:noFill/>
+        </p:spPr>
+        <p:txBody>
+          <a:bodyPr wrap="square">
+            <a:spAutoFit/>
+          </a:bodyPr>
+          <a:lstStyle/>
+          <a:p>
+            <a:pPr algn="l">
+              <a:spcAft>
+                <a:spcPts val="600"/>
+              </a:spcAft>
+              <a:buNone/>
+            </a:pPr>
+            <a:r>
+              <a:rPr sz="1100" b="1">
+                <a:solidFill>
+                  <a:srgbClr val="1E5EF3"/>
+                </a:solidFill>
+                <a:latin typeface="Arial"/>
+              </a:rPr>
+              <a:t>FROM NOTEBOOK TO PRODUCTION</a:t>
+            </a:r>
+          </a:p>
+        </p:txBody>
+      </p:sp>
+      <p:sp>
+        <p:nvSpPr>
+          <p:cNvPr id="5" name="TextBox 4"/>
+          <p:cNvSpPr txBox="1"/>
+          <p:nvPr/>
+        </p:nvSpPr>
+        <p:spPr>
+          <a:xfrm>
+            <a:off x="548640" y="868680"/>
+            <a:ext cx="11091672" cy="777240"/>
+          </a:xfrm>
+          <a:prstGeom prst="rect">
+            <a:avLst/>
+          </a:prstGeom>
+          <a:noFill/>
+        </p:spPr>
+        <p:txBody>
+          <a:bodyPr wrap="square">
+            <a:spAutoFit/>
+          </a:bodyPr>
+          <a:lstStyle/>
+          <a:p>
+            <a:pPr algn="l">
+              <a:spcAft>
+                <a:spcPts val="0"/>
+              </a:spcAft>
+              <a:buNone/>
+            </a:pPr>
+            <a:r>
+              <a:rPr sz="2600" b="1">
+                <a:solidFill>
+                  <a:srgbClr val="0A2540"/>
+                </a:solidFill>
+                <a:latin typeface="Arial"/>
+              </a:rPr>
+              <a:t>Production is a loop, not a finish line - the model runs where real users can reach it</a:t>
+            </a:r>
+          </a:p>
+        </p:txBody>
+      </p:sp>
+      <p:sp>
+        <p:nvSpPr>
+          <p:cNvPr id="6" name="Rectangle 5"/>
+          <p:cNvSpPr/>
+          <p:nvPr/>
+        </p:nvSpPr>
+        <p:spPr>
+          <a:xfrm>
+            <a:off x="548640" y="1664208"/>
+            <a:ext cx="11091672" cy="12801"/>
+          </a:xfrm>
+          <a:prstGeom prst="rect">
+            <a:avLst/>
+          </a:prstGeom>
+          <a:solidFill>
+            <a:srgbClr val="B9D0FA"/>
+          </a:solidFill>
+          <a:ln>
+            <a:noFill/>
+          </a:ln>
+          <a:effectLst/>
+        </p:spPr>
+        <p:style>
+          <a:lnRef idx="1">
+            <a:schemeClr val="accent1"/>
+          </a:lnRef>
+          <a:fillRef idx="3">
+            <a:schemeClr val="accent1"/>
+          </a:fillRef>
+          <a:effectRef idx="2">
+            <a:schemeClr val="accent1"/>
+          </a:effectRef>
+          <a:fontRef idx="minor">
+            <a:schemeClr val="lt1"/>
+          </a:fontRef>
+        </p:style>
+        <p:txBody>
+          <a:bodyPr rtlCol="0" anchor="ctr"/>
+          <a:lstStyle/>
+          <a:p>
+            <a:pPr algn="ctr"/>
+          </a:p>
+        </p:txBody>
+      </p:sp>
+      <p:sp>
+        <p:nvSpPr>
+          <p:cNvPr id="7" name="TextBox 6"/>
+          <p:cNvSpPr txBox="1"/>
+          <p:nvPr/>
+        </p:nvSpPr>
+        <p:spPr>
+          <a:xfrm>
+            <a:off x="548640" y="1874519"/>
+            <a:ext cx="4297680" cy="4206240"/>
+          </a:xfrm>
+          <a:prstGeom prst="rect">
+            <a:avLst/>
+          </a:prstGeom>
+          <a:noFill/>
+        </p:spPr>
+        <p:txBody>
+          <a:bodyPr wrap="square">
+            <a:spAutoFit/>
+          </a:bodyPr>
+          <a:lstStyle/>
+          <a:p>
+            <a:pPr algn="l" indent="-228600" marL="228600">
+              <a:spcAft>
+                <a:spcPts val="800"/>
+              </a:spcAft>
+              <a:buClr>
+                <a:srgbClr val="1E5EF3"/>
+              </a:buClr>
+              <a:buChar char="—"/>
+            </a:pPr>
+            <a:r>
+              <a:rPr sz="1450" b="0">
+                <a:solidFill>
+                  <a:srgbClr val="202B38"/>
+                </a:solidFill>
+                <a:latin typeface="Arial"/>
+              </a:rPr>
+              <a:t>Save the WHOLE pipeline: titanic_model_v1.joblib, 2,599 KB - raw data in, prediction out; re-coding the prep by hand invites silently wrong predictions</a:t>
+            </a:r>
+          </a:p>
+          <a:p>
+            <a:pPr algn="l" indent="-228600" marL="228600">
+              <a:spcAft>
+                <a:spcPts val="800"/>
+              </a:spcAft>
+              <a:buClr>
+                <a:srgbClr val="1E5EF3"/>
+              </a:buClr>
+              <a:buChar char="—"/>
+            </a:pPr>
+            <a:r>
+              <a:rPr sz="1450" b="0">
+                <a:solidFill>
+                  <a:srgbClr val="202B38"/>
+                </a:solidFill>
+                <a:latin typeface="Arial"/>
+              </a:rPr>
+              <a:t>Load in a fresh process: no retraining, no notebook required</a:t>
+            </a:r>
+          </a:p>
+          <a:p>
+            <a:pPr algn="l" indent="-228600" marL="228600">
+              <a:spcAft>
+                <a:spcPts val="800"/>
+              </a:spcAft>
+              <a:buClr>
+                <a:srgbClr val="1E5EF3"/>
+              </a:buClr>
+              <a:buChar char="—"/>
+            </a:pPr>
+            <a:r>
+              <a:rPr sz="1450" b="0">
+                <a:solidFill>
+                  <a:srgbClr val="202B38"/>
+                </a:solidFill>
+                <a:latin typeface="Arial"/>
+              </a:rPr>
+              <a:t>Version the file name (v1) so you always know what is running - and can roll back</a:t>
+            </a:r>
+          </a:p>
+          <a:p>
+            <a:pPr algn="l" indent="-228600" marL="228600">
+              <a:spcAft>
+                <a:spcPts val="800"/>
+              </a:spcAft>
+              <a:buClr>
+                <a:srgbClr val="1E5EF3"/>
+              </a:buClr>
+              <a:buChar char="—"/>
+            </a:pPr>
+            <a:r>
+              <a:rPr sz="1450" b="0">
+                <a:solidFill>
+                  <a:srgbClr val="202B38"/>
+                </a:solidFill>
+                <a:latin typeface="Arial"/>
+              </a:rPr>
+              <a:t>Ng's rollout ladder for steps 4-5: SHADOW mode (model runs beside the human, predictions logged but unused), then CANARY (~5% of real traffic, watch, ramp), then full swap with a rollback path - deployment is a dial, not a switch</a:t>
+            </a:r>
+          </a:p>
+          <a:p>
+            <a:pPr algn="l" indent="-228600" marL="228600">
+              <a:spcAft>
+                <a:spcPts val="800"/>
+              </a:spcAft>
+              <a:buClr>
+                <a:srgbClr val="1E5EF3"/>
+              </a:buClr>
+              <a:buChar char="—"/>
+            </a:pPr>
+            <a:r>
+              <a:rPr sz="1450" b="0">
+                <a:solidFill>
+                  <a:srgbClr val="202B38"/>
+                </a:solidFill>
+                <a:latin typeface="Arial"/>
+              </a:rPr>
+              <a:t>Monitoring closes the loop: drift detected means retrain and reship</a:t>
+            </a:r>
+          </a:p>
+        </p:txBody>
+      </p:sp>
+      <p:pic>
+        <p:nvPicPr>
+          <p:cNvPr id="8" name="Picture 7" descr="s4_production_loop.png"/>
+          <p:cNvPicPr>
+            <a:picLocks noChangeAspect="1"/>
+          </p:cNvPicPr>
+          <p:nvPr/>
+        </p:nvPicPr>
+        <p:blipFill>
+          <a:blip r:embed="rId2"/>
+          <a:stretch>
+            <a:fillRect/>
+          </a:stretch>
+        </p:blipFill>
+        <p:spPr>
+          <a:xfrm>
+            <a:off x="5120640" y="1874519"/>
+            <a:ext cx="6492240" cy="3931990"/>
+          </a:xfrm>
+          <a:prstGeom prst="rect">
+            <a:avLst/>
+          </a:prstGeom>
+        </p:spPr>
+      </p:pic>
+      <p:sp>
+        <p:nvSpPr>
+          <p:cNvPr id="9" name="TextBox 8"/>
+          <p:cNvSpPr txBox="1"/>
+          <p:nvPr/>
+        </p:nvSpPr>
+        <p:spPr>
+          <a:xfrm>
+            <a:off x="5120640" y="6062471"/>
+            <a:ext cx="6492240" cy="365760"/>
+          </a:xfrm>
+          <a:prstGeom prst="rect">
+            <a:avLst/>
+          </a:prstGeom>
+          <a:noFill/>
+        </p:spPr>
+        <p:txBody>
+          <a:bodyPr wrap="square">
+            <a:spAutoFit/>
+          </a:bodyPr>
+          <a:lstStyle/>
+          <a:p>
+            <a:pPr algn="ctr">
+              <a:spcAft>
+                <a:spcPts val="600"/>
+              </a:spcAft>
+              <a:buNone/>
+            </a:pPr>
+            <a:r>
+              <a:rPr sz="1100" b="0">
+                <a:solidFill>
+                  <a:srgbClr val="5B6774"/>
+                </a:solidFill>
+                <a:latin typeface="Arial"/>
+              </a:rPr>
+              <a:t>The production loop: save, load, wrap, host, monitor, retrain. Module 2, notebook 3. Ng, Machine Learning Engineering for Production C1.</a:t>
+            </a:r>
+          </a:p>
+        </p:txBody>
+      </p:sp>
+      <p:sp>
+        <p:nvSpPr>
+          <p:cNvPr id="10" name="TextBox 9"/>
+          <p:cNvSpPr txBox="1"/>
+          <p:nvPr/>
+        </p:nvSpPr>
+        <p:spPr>
+          <a:xfrm>
+            <a:off x="548640" y="6473952"/>
+            <a:ext cx="7315200" cy="292608"/>
+          </a:xfrm>
+          <a:prstGeom prst="rect">
+            <a:avLst/>
+          </a:prstGeom>
+          <a:noFill/>
+        </p:spPr>
+        <p:txBody>
+          <a:bodyPr wrap="square">
+            <a:spAutoFit/>
+          </a:bodyPr>
+          <a:lstStyle/>
+          <a:p>
+            <a:pPr algn="l">
+              <a:spcAft>
+                <a:spcPts val="600"/>
+              </a:spcAft>
+              <a:buNone/>
+            </a:pPr>
+            <a:r>
+              <a:rPr sz="900" b="0">
+                <a:solidFill>
+                  <a:srgbClr val="5B6774"/>
+                </a:solidFill>
+                <a:latin typeface="Arial"/>
+              </a:rPr>
+              <a:t>M2 Session 4 - Optimization and Deployment</a:t>
+            </a:r>
+          </a:p>
+        </p:txBody>
+      </p:sp>
+      <p:sp>
+        <p:nvSpPr>
+          <p:cNvPr id="11" name="TextBox 10"/>
+          <p:cNvSpPr txBox="1"/>
+          <p:nvPr/>
+        </p:nvSpPr>
+        <p:spPr>
+          <a:xfrm>
+            <a:off x="11292840" y="6473952"/>
+            <a:ext cx="548640" cy="292608"/>
+          </a:xfrm>
+          <a:prstGeom prst="rect">
+            <a:avLst/>
+          </a:prstGeom>
+          <a:noFill/>
+        </p:spPr>
+        <p:txBody>
+          <a:bodyPr wrap="square">
+            <a:spAutoFit/>
+          </a:bodyPr>
+          <a:lstStyle/>
+          <a:p>
+            <a:pPr algn="r">
+              <a:spcAft>
+                <a:spcPts val="600"/>
+              </a:spcAft>
+              <a:buNone/>
+            </a:pPr>
+            <a:r>
+              <a:rPr sz="900" b="0">
+                <a:solidFill>
+                  <a:srgbClr val="5B6774"/>
+                </a:solidFill>
+                <a:latin typeface="Arial"/>
+              </a:rPr>
+              <a:t>14</a:t>
+            </a:r>
+          </a:p>
+        </p:txBody>
+      </p:sp>
+    </p:spTree>
+  </p:cSld>
+  <p:clrMapOvr>
+    <a:masterClrMapping/>
+  </p:clrMapOvr>
+</p:sld>
+</file>
+
+<file path=ppt/slides/slide15.xml><?xml version="1.0" encoding="utf-8"?>
+<p:sld xmlns:a="http://schemas.openxmlformats.org/drawingml/2006/main" xmlns:p="http://schemas.openxmlformats.org/presentationml/2006/main" xmlns:r="http://schemas.openxmlformats.org/officeDocument/2006/relationships">
+  <p:cSld>
+    <p:spTree>
+      <p:nvGrpSpPr>
+        <p:cNvPr id="1" name=""/>
+        <p:cNvGrpSpPr/>
+        <p:nvPr/>
+      </p:nvGrpSpPr>
+      <p:grpSpPr/>
+      <p:sp>
+        <p:nvSpPr>
+          <p:cNvPr id="2" name="Rectangle 1"/>
+          <p:cNvSpPr/>
+          <p:nvPr/>
+        </p:nvSpPr>
+        <p:spPr>
+          <a:xfrm>
+            <a:off x="0" y="0"/>
+            <a:ext cx="12191695" cy="6858000"/>
+          </a:xfrm>
+          <a:prstGeom prst="rect">
+            <a:avLst/>
+          </a:prstGeom>
+          <a:solidFill>
+            <a:srgbClr val="FFFFFF"/>
+          </a:solidFill>
+          <a:ln>
+            <a:noFill/>
+          </a:ln>
+          <a:effectLst/>
+        </p:spPr>
+        <p:style>
+          <a:lnRef idx="1">
+            <a:schemeClr val="accent1"/>
+          </a:lnRef>
+          <a:fillRef idx="3">
+            <a:schemeClr val="accent1"/>
+          </a:fillRef>
+          <a:effectRef idx="2">
+            <a:schemeClr val="accent1"/>
+          </a:effectRef>
+          <a:fontRef idx="minor">
+            <a:schemeClr val="lt1"/>
+          </a:fontRef>
+        </p:style>
+        <p:txBody>
+          <a:bodyPr rtlCol="0" anchor="ctr"/>
+          <a:lstStyle/>
+          <a:p>
+            <a:pPr algn="ctr"/>
+          </a:p>
+        </p:txBody>
+      </p:sp>
+      <p:sp>
+        <p:nvSpPr>
+          <p:cNvPr id="3" name="Rectangle 2"/>
+          <p:cNvSpPr/>
+          <p:nvPr/>
+        </p:nvSpPr>
+        <p:spPr>
+          <a:xfrm>
+            <a:off x="548640" y="475488"/>
+            <a:ext cx="457200" cy="54864"/>
+          </a:xfrm>
+          <a:prstGeom prst="rect">
+            <a:avLst/>
+          </a:prstGeom>
+          <a:solidFill>
+            <a:srgbClr val="1E5EF3"/>
+          </a:solidFill>
+          <a:ln>
+            <a:noFill/>
+          </a:ln>
+          <a:effectLst/>
+        </p:spPr>
+        <p:style>
+          <a:lnRef idx="1">
+            <a:schemeClr val="accent1"/>
+          </a:lnRef>
+          <a:fillRef idx="3">
+            <a:schemeClr val="accent1"/>
+          </a:fillRef>
+          <a:effectRef idx="2">
+            <a:schemeClr val="accent1"/>
+          </a:effectRef>
+          <a:fontRef idx="minor">
+            <a:schemeClr val="lt1"/>
+          </a:fontRef>
+        </p:style>
+        <p:txBody>
+          <a:bodyPr rtlCol="0" anchor="ctr"/>
+          <a:lstStyle/>
+          <a:p>
+            <a:pPr algn="ctr"/>
+          </a:p>
+        </p:txBody>
+      </p:sp>
+      <p:sp>
+        <p:nvSpPr>
+          <p:cNvPr id="4" name="TextBox 3"/>
+          <p:cNvSpPr txBox="1"/>
+          <p:nvPr/>
+        </p:nvSpPr>
+        <p:spPr>
+          <a:xfrm>
+            <a:off x="548640" y="603504"/>
+            <a:ext cx="11091672" cy="274320"/>
+          </a:xfrm>
+          <a:prstGeom prst="rect">
+            <a:avLst/>
+          </a:prstGeom>
+          <a:noFill/>
+        </p:spPr>
+        <p:txBody>
+          <a:bodyPr wrap="square">
+            <a:spAutoFit/>
+          </a:bodyPr>
+          <a:lstStyle/>
+          <a:p>
+            <a:pPr algn="l">
+              <a:spcAft>
+                <a:spcPts val="600"/>
+              </a:spcAft>
+              <a:buNone/>
+            </a:pPr>
+            <a:r>
+              <a:rPr sz="1100" b="1">
+                <a:solidFill>
+                  <a:srgbClr val="1E5EF3"/>
+                </a:solidFill>
+                <a:latin typeface="Arial"/>
+              </a:rPr>
+              <a:t>SANITY CHECK ON TWO PASSENGERS</a:t>
+            </a:r>
+          </a:p>
+        </p:txBody>
+      </p:sp>
+      <p:sp>
+        <p:nvSpPr>
+          <p:cNvPr id="5" name="TextBox 4"/>
+          <p:cNvSpPr txBox="1"/>
+          <p:nvPr/>
+        </p:nvSpPr>
+        <p:spPr>
+          <a:xfrm>
+            <a:off x="548640" y="868680"/>
+            <a:ext cx="11091672" cy="777240"/>
+          </a:xfrm>
+          <a:prstGeom prst="rect">
+            <a:avLst/>
+          </a:prstGeom>
+          <a:noFill/>
+        </p:spPr>
+        <p:txBody>
+          <a:bodyPr wrap="square">
+            <a:spAutoFit/>
+          </a:bodyPr>
+          <a:lstStyle/>
+          <a:p>
+            <a:pPr algn="l">
+              <a:spcAft>
+                <a:spcPts val="0"/>
+              </a:spcAft>
+              <a:buNone/>
+            </a:pPr>
+            <a:r>
+              <a:rPr sz="2600" b="1">
+                <a:solidFill>
+                  <a:srgbClr val="0A2540"/>
+                </a:solidFill>
+                <a:latin typeface="Arial"/>
+              </a:rPr>
+              <a:t>The loaded pipeline answers a real question - a survival gap of 100% vs 3%</a:t>
+            </a:r>
+          </a:p>
+        </p:txBody>
+      </p:sp>
+      <p:sp>
+        <p:nvSpPr>
+          <p:cNvPr id="6" name="Rectangle 5"/>
+          <p:cNvSpPr/>
+          <p:nvPr/>
+        </p:nvSpPr>
+        <p:spPr>
+          <a:xfrm>
+            <a:off x="548640" y="1664208"/>
+            <a:ext cx="11091672" cy="12801"/>
+          </a:xfrm>
+          <a:prstGeom prst="rect">
+            <a:avLst/>
+          </a:prstGeom>
+          <a:solidFill>
+            <a:srgbClr val="B9D0FA"/>
+          </a:solidFill>
+          <a:ln>
+            <a:noFill/>
+          </a:ln>
+          <a:effectLst/>
+        </p:spPr>
+        <p:style>
+          <a:lnRef idx="1">
+            <a:schemeClr val="accent1"/>
+          </a:lnRef>
+          <a:fillRef idx="3">
+            <a:schemeClr val="accent1"/>
+          </a:fillRef>
+          <a:effectRef idx="2">
+            <a:schemeClr val="accent1"/>
+          </a:effectRef>
+          <a:fontRef idx="minor">
+            <a:schemeClr val="lt1"/>
+          </a:fontRef>
+        </p:style>
+        <p:txBody>
+          <a:bodyPr rtlCol="0" anchor="ctr"/>
+          <a:lstStyle/>
+          <a:p>
+            <a:pPr algn="ctr"/>
+          </a:p>
+        </p:txBody>
+      </p:sp>
+      <p:sp>
+        <p:nvSpPr>
+          <p:cNvPr id="7" name="TextBox 6"/>
+          <p:cNvSpPr txBox="1"/>
+          <p:nvPr/>
+        </p:nvSpPr>
+        <p:spPr>
+          <a:xfrm>
+            <a:off x="548640" y="1874519"/>
+            <a:ext cx="4297680" cy="4206240"/>
+          </a:xfrm>
+          <a:prstGeom prst="rect">
+            <a:avLst/>
+          </a:prstGeom>
+          <a:noFill/>
+        </p:spPr>
+        <p:txBody>
+          <a:bodyPr wrap="square">
+            <a:spAutoFit/>
+          </a:bodyPr>
+          <a:lstStyle/>
+          <a:p>
+            <a:pPr algn="l" indent="-228600" marL="228600">
+              <a:spcAft>
+                <a:spcPts val="800"/>
+              </a:spcAft>
+              <a:buClr>
+                <a:srgbClr val="1E5EF3"/>
+              </a:buClr>
+              <a:buChar char="—"/>
+            </a:pPr>
+            <a:r>
+              <a:rPr sz="1450" b="0">
+                <a:solidFill>
+                  <a:srgbClr val="202B38"/>
+                </a:solidFill>
+                <a:latin typeface="Arial"/>
+              </a:rPr>
+              <a:t>Loaded from disk, no retraining: raw passenger details in, verdict out.</a:t>
+            </a:r>
+          </a:p>
+          <a:p>
+            <a:pPr algn="l" indent="-228600" marL="228600">
+              <a:spcAft>
+                <a:spcPts val="800"/>
+              </a:spcAft>
+              <a:buClr>
+                <a:srgbClr val="1E5EF3"/>
+              </a:buClr>
+              <a:buChar char="—"/>
+            </a:pPr>
+            <a:r>
+              <a:rPr sz="1450" b="0">
+                <a:solidFill>
+                  <a:srgbClr val="202B38"/>
+                </a:solidFill>
+                <a:latin typeface="Arial"/>
+              </a:rPr>
+              <a:t>An invented first-class woman, 30 (Fare 80, Cherbourg) - a passenger like Florence: survives, 100%.</a:t>
+            </a:r>
+          </a:p>
+          <a:p>
+            <a:pPr algn="l" indent="-228600" marL="228600">
+              <a:spcAft>
+                <a:spcPts val="800"/>
+              </a:spcAft>
+              <a:buClr>
+                <a:srgbClr val="1E5EF3"/>
+              </a:buClr>
+              <a:buChar char="—"/>
+            </a:pPr>
+            <a:r>
+              <a:rPr sz="1450" b="0">
+                <a:solidFill>
+                  <a:srgbClr val="202B38"/>
+                </a:solidFill>
+                <a:latin typeface="Arial"/>
+              </a:rPr>
+              <a:t>An invented third-class man, 28 (Fare 7.9, Southampton) - a passenger like Owen: does not survive, 3%.</a:t>
+            </a:r>
+          </a:p>
+          <a:p>
+            <a:pPr algn="l" indent="-228600" marL="228600">
+              <a:spcAft>
+                <a:spcPts val="800"/>
+              </a:spcAft>
+              <a:buClr>
+                <a:srgbClr val="1E5EF3"/>
+              </a:buClr>
+              <a:buChar char="—"/>
+            </a:pPr>
+            <a:r>
+              <a:rPr sz="1450" b="0">
+                <a:solidFill>
+                  <a:srgbClr val="202B38"/>
+                </a:solidFill>
+                <a:latin typeface="Arial"/>
+              </a:rPr>
+              <a:t>A probability is confidence, not a guarantee about one individual.</a:t>
+            </a:r>
+          </a:p>
+          <a:p>
+            <a:pPr algn="l" indent="-228600" marL="228600">
+              <a:spcAft>
+                <a:spcPts val="800"/>
+              </a:spcAft>
+              <a:buClr>
+                <a:srgbClr val="1E5EF3"/>
+              </a:buClr>
+              <a:buChar char="—"/>
+            </a:pPr>
+            <a:r>
+              <a:rPr sz="1450" b="0">
+                <a:solidFill>
+                  <a:srgbClr val="202B38"/>
+                </a:solidFill>
+                <a:latin typeface="Arial"/>
+              </a:rPr>
+              <a:t>The gap reflects the Titanic's reality: class and sex decided lifeboat seats.</a:t>
+            </a:r>
+          </a:p>
+        </p:txBody>
+      </p:sp>
+      <p:pic>
+        <p:nvPicPr>
+          <p:cNvPr id="8" name="Picture 7" descr="two_passengers.png"/>
+          <p:cNvPicPr>
+            <a:picLocks noChangeAspect="1"/>
+          </p:cNvPicPr>
+          <p:nvPr/>
+        </p:nvPicPr>
+        <p:blipFill>
+          <a:blip r:embed="rId2"/>
+          <a:stretch>
+            <a:fillRect/>
+          </a:stretch>
+        </p:blipFill>
+        <p:spPr>
+          <a:xfrm>
+            <a:off x="5120640" y="1874519"/>
+            <a:ext cx="6492240" cy="2938007"/>
+          </a:xfrm>
+          <a:prstGeom prst="rect">
+            <a:avLst/>
+          </a:prstGeom>
+        </p:spPr>
+      </p:pic>
+      <p:sp>
+        <p:nvSpPr>
+          <p:cNvPr id="9" name="TextBox 8"/>
+          <p:cNvSpPr txBox="1"/>
+          <p:nvPr/>
+        </p:nvSpPr>
+        <p:spPr>
+          <a:xfrm>
+            <a:off x="5120640" y="6062471"/>
+            <a:ext cx="6492240" cy="365760"/>
+          </a:xfrm>
+          <a:prstGeom prst="rect">
+            <a:avLst/>
+          </a:prstGeom>
+          <a:noFill/>
+        </p:spPr>
+        <p:txBody>
+          <a:bodyPr wrap="square">
+            <a:spAutoFit/>
+          </a:bodyPr>
+          <a:lstStyle/>
+          <a:p>
+            <a:pPr algn="ctr">
+              <a:spcAft>
+                <a:spcPts val="600"/>
+              </a:spcAft>
+              <a:buNone/>
+            </a:pPr>
+            <a:r>
+              <a:rPr sz="1100" b="0">
+                <a:solidFill>
+                  <a:srgbClr val="5B6774"/>
+                </a:solidFill>
+                <a:latin typeface="Arial"/>
+              </a:rPr>
+              <a:t>Two invented sanity-check passengers, scored by the saved pipeline. Module 2, notebook 3.</a:t>
+            </a:r>
+          </a:p>
+        </p:txBody>
+      </p:sp>
+      <p:sp>
+        <p:nvSpPr>
+          <p:cNvPr id="10" name="TextBox 9"/>
+          <p:cNvSpPr txBox="1"/>
+          <p:nvPr/>
+        </p:nvSpPr>
+        <p:spPr>
+          <a:xfrm>
+            <a:off x="548640" y="6473952"/>
+            <a:ext cx="7315200" cy="292608"/>
+          </a:xfrm>
+          <a:prstGeom prst="rect">
+            <a:avLst/>
+          </a:prstGeom>
+          <a:noFill/>
+        </p:spPr>
+        <p:txBody>
+          <a:bodyPr wrap="square">
+            <a:spAutoFit/>
+          </a:bodyPr>
+          <a:lstStyle/>
+          <a:p>
+            <a:pPr algn="l">
+              <a:spcAft>
+                <a:spcPts val="600"/>
+              </a:spcAft>
+              <a:buNone/>
+            </a:pPr>
+            <a:r>
+              <a:rPr sz="900" b="0">
+                <a:solidFill>
+                  <a:srgbClr val="5B6774"/>
+                </a:solidFill>
+                <a:latin typeface="Arial"/>
+              </a:rPr>
+              <a:t>M2 Session 4 - Optimization and Deployment</a:t>
+            </a:r>
+          </a:p>
+        </p:txBody>
+      </p:sp>
+      <p:sp>
+        <p:nvSpPr>
+          <p:cNvPr id="11" name="TextBox 10"/>
+          <p:cNvSpPr txBox="1"/>
+          <p:nvPr/>
+        </p:nvSpPr>
+        <p:spPr>
+          <a:xfrm>
+            <a:off x="11292840" y="6473952"/>
+            <a:ext cx="548640" cy="292608"/>
+          </a:xfrm>
+          <a:prstGeom prst="rect">
+            <a:avLst/>
+          </a:prstGeom>
+          <a:noFill/>
+        </p:spPr>
+        <p:txBody>
+          <a:bodyPr wrap="square">
+            <a:spAutoFit/>
+          </a:bodyPr>
+          <a:lstStyle/>
+          <a:p>
+            <a:pPr algn="r">
+              <a:spcAft>
+                <a:spcPts val="600"/>
+              </a:spcAft>
+              <a:buNone/>
+            </a:pPr>
+            <a:r>
+              <a:rPr sz="900" b="0">
+                <a:solidFill>
+                  <a:srgbClr val="5B6774"/>
+                </a:solidFill>
+                <a:latin typeface="Arial"/>
+              </a:rPr>
+              <a:t>15</a:t>
+            </a:r>
+          </a:p>
+        </p:txBody>
+      </p:sp>
+    </p:spTree>
+  </p:cSld>
+  <p:clrMapOvr>
+    <a:masterClrMapping/>
+  </p:clrMapOvr>
+</p:sld>
+</file>
+
+<file path=ppt/slides/slide16.xml><?xml version="1.0" encoding="utf-8"?>
+<p:sld xmlns:a="http://schemas.openxmlformats.org/drawingml/2006/main" xmlns:p="http://schemas.openxmlformats.org/presentationml/2006/main" xmlns:r="http://schemas.openxmlformats.org/officeDocument/2006/relationships">
+  <p:cSld>
+    <p:spTree>
+      <p:nvGrpSpPr>
+        <p:cNvPr id="1" name=""/>
+        <p:cNvGrpSpPr/>
+        <p:nvPr/>
+      </p:nvGrpSpPr>
+      <p:grpSpPr/>
+      <p:sp>
+        <p:nvSpPr>
+          <p:cNvPr id="2" name="Rectangle 1"/>
+          <p:cNvSpPr/>
+          <p:nvPr/>
+        </p:nvSpPr>
+        <p:spPr>
+          <a:xfrm>
+            <a:off x="0" y="0"/>
+            <a:ext cx="12191695" cy="6858000"/>
+          </a:xfrm>
+          <a:prstGeom prst="rect">
+            <a:avLst/>
+          </a:prstGeom>
+          <a:solidFill>
+            <a:srgbClr val="FFFFFF"/>
+          </a:solidFill>
+          <a:ln>
+            <a:noFill/>
+          </a:ln>
+          <a:effectLst/>
+        </p:spPr>
+        <p:style>
+          <a:lnRef idx="1">
+            <a:schemeClr val="accent1"/>
+          </a:lnRef>
+          <a:fillRef idx="3">
+            <a:schemeClr val="accent1"/>
+          </a:fillRef>
+          <a:effectRef idx="2">
+            <a:schemeClr val="accent1"/>
+          </a:effectRef>
+          <a:fontRef idx="minor">
+            <a:schemeClr val="lt1"/>
+          </a:fontRef>
+        </p:style>
+        <p:txBody>
+          <a:bodyPr rtlCol="0" anchor="ctr"/>
+          <a:lstStyle/>
+          <a:p>
+            <a:pPr algn="ctr"/>
+          </a:p>
+        </p:txBody>
+      </p:sp>
+      <p:sp>
+        <p:nvSpPr>
+          <p:cNvPr id="3" name="Rectangle 2"/>
+          <p:cNvSpPr/>
+          <p:nvPr/>
+        </p:nvSpPr>
+        <p:spPr>
+          <a:xfrm>
+            <a:off x="548640" y="475488"/>
+            <a:ext cx="457200" cy="54864"/>
+          </a:xfrm>
+          <a:prstGeom prst="rect">
+            <a:avLst/>
+          </a:prstGeom>
+          <a:solidFill>
+            <a:srgbClr val="1E5EF3"/>
+          </a:solidFill>
+          <a:ln>
+            <a:noFill/>
+          </a:ln>
+          <a:effectLst/>
+        </p:spPr>
+        <p:style>
+          <a:lnRef idx="1">
+            <a:schemeClr val="accent1"/>
+          </a:lnRef>
+          <a:fillRef idx="3">
+            <a:schemeClr val="accent1"/>
+          </a:fillRef>
+          <a:effectRef idx="2">
+            <a:schemeClr val="accent1"/>
+          </a:effectRef>
+          <a:fontRef idx="minor">
+            <a:schemeClr val="lt1"/>
+          </a:fontRef>
+        </p:style>
+        <p:txBody>
+          <a:bodyPr rtlCol="0" anchor="ctr"/>
+          <a:lstStyle/>
+          <a:p>
+            <a:pPr algn="ctr"/>
+          </a:p>
+        </p:txBody>
+      </p:sp>
+      <p:sp>
+        <p:nvSpPr>
+          <p:cNvPr id="4" name="TextBox 3"/>
+          <p:cNvSpPr txBox="1"/>
+          <p:nvPr/>
+        </p:nvSpPr>
+        <p:spPr>
+          <a:xfrm>
+            <a:off x="548640" y="603504"/>
+            <a:ext cx="11091672" cy="274320"/>
+          </a:xfrm>
+          <a:prstGeom prst="rect">
+            <a:avLst/>
+          </a:prstGeom>
+          <a:noFill/>
+        </p:spPr>
+        <p:txBody>
+          <a:bodyPr wrap="square">
+            <a:spAutoFit/>
+          </a:bodyPr>
+          <a:lstStyle/>
+          <a:p>
+            <a:pPr algn="l">
+              <a:spcAft>
+                <a:spcPts val="600"/>
+              </a:spcAft>
+              <a:buNone/>
+            </a:pPr>
+            <a:r>
+              <a:rPr sz="1100" b="1">
+                <a:solidFill>
+                  <a:srgbClr val="1E5EF3"/>
+                </a:solidFill>
+                <a:latin typeface="Arial"/>
+              </a:rPr>
+              <a:t>FROM MODEL TO APP</a:t>
+            </a:r>
+          </a:p>
+        </p:txBody>
+      </p:sp>
+      <p:sp>
+        <p:nvSpPr>
+          <p:cNvPr id="5" name="TextBox 4"/>
+          <p:cNvSpPr txBox="1"/>
+          <p:nvPr/>
+        </p:nvSpPr>
+        <p:spPr>
+          <a:xfrm>
+            <a:off x="548640" y="868680"/>
+            <a:ext cx="11091672" cy="777240"/>
+          </a:xfrm>
+          <a:prstGeom prst="rect">
+            <a:avLst/>
+          </a:prstGeom>
+          <a:noFill/>
+        </p:spPr>
+        <p:txBody>
+          <a:bodyPr wrap="square">
+            <a:spAutoFit/>
+          </a:bodyPr>
+          <a:lstStyle/>
+          <a:p>
+            <a:pPr algn="l">
+              <a:spcAft>
+                <a:spcPts val="0"/>
+              </a:spcAft>
+              <a:buNone/>
+            </a:pPr>
+            <a:r>
+              <a:rPr sz="2600" b="1">
+                <a:solidFill>
+                  <a:srgbClr val="0A2540"/>
+                </a:solidFill>
+                <a:latin typeface="Arial"/>
+              </a:rPr>
+              <a:t>A few lines of Gradio turn the pipeline into a web app anyone can use</a:t>
+            </a:r>
+          </a:p>
+        </p:txBody>
+      </p:sp>
+      <p:sp>
+        <p:nvSpPr>
+          <p:cNvPr id="6" name="Rectangle 5"/>
+          <p:cNvSpPr/>
+          <p:nvPr/>
+        </p:nvSpPr>
+        <p:spPr>
+          <a:xfrm>
+            <a:off x="548640" y="1664208"/>
+            <a:ext cx="11091672" cy="12801"/>
+          </a:xfrm>
+          <a:prstGeom prst="rect">
+            <a:avLst/>
+          </a:prstGeom>
+          <a:solidFill>
+            <a:srgbClr val="B9D0FA"/>
+          </a:solidFill>
+          <a:ln>
+            <a:noFill/>
+          </a:ln>
+          <a:effectLst/>
+        </p:spPr>
+        <p:style>
+          <a:lnRef idx="1">
+            <a:schemeClr val="accent1"/>
+          </a:lnRef>
+          <a:fillRef idx="3">
+            <a:schemeClr val="accent1"/>
+          </a:fillRef>
+          <a:effectRef idx="2">
+            <a:schemeClr val="accent1"/>
+          </a:effectRef>
+          <a:fontRef idx="minor">
+            <a:schemeClr val="lt1"/>
+          </a:fontRef>
+        </p:style>
+        <p:txBody>
+          <a:bodyPr rtlCol="0" anchor="ctr"/>
+          <a:lstStyle/>
+          <a:p>
+            <a:pPr algn="ctr"/>
+          </a:p>
+        </p:txBody>
+      </p:sp>
+      <p:sp>
+        <p:nvSpPr>
+          <p:cNvPr id="7" name="Rectangle 6"/>
+          <p:cNvSpPr/>
+          <p:nvPr/>
+        </p:nvSpPr>
+        <p:spPr>
+          <a:xfrm>
+            <a:off x="548640" y="1874519"/>
+            <a:ext cx="5394960" cy="4297680"/>
+          </a:xfrm>
+          <a:prstGeom prst="rect">
+            <a:avLst/>
+          </a:prstGeom>
+          <a:solidFill>
+            <a:srgbClr val="EEF3FD"/>
+          </a:solidFill>
+          <a:ln>
+            <a:noFill/>
+          </a:ln>
+          <a:effectLst/>
+        </p:spPr>
+        <p:style>
+          <a:lnRef idx="1">
+            <a:schemeClr val="accent1"/>
+          </a:lnRef>
+          <a:fillRef idx="3">
+            <a:schemeClr val="accent1"/>
+          </a:fillRef>
+          <a:effectRef idx="2">
+            <a:schemeClr val="accent1"/>
+          </a:effectRef>
+          <a:fontRef idx="minor">
+            <a:schemeClr val="lt1"/>
+          </a:fontRef>
+        </p:style>
+        <p:txBody>
+          <a:bodyPr rtlCol="0" anchor="ctr"/>
+          <a:lstStyle/>
+          <a:p>
+            <a:pPr algn="ctr"/>
+          </a:p>
+        </p:txBody>
+      </p:sp>
+      <p:sp>
+        <p:nvSpPr>
+          <p:cNvPr id="8" name="TextBox 7"/>
+          <p:cNvSpPr txBox="1"/>
+          <p:nvPr/>
+        </p:nvSpPr>
+        <p:spPr>
+          <a:xfrm>
+            <a:off x="777240" y="2039111"/>
+            <a:ext cx="4937760" cy="365760"/>
+          </a:xfrm>
+          <a:prstGeom prst="rect">
+            <a:avLst/>
+          </a:prstGeom>
+          <a:noFill/>
+        </p:spPr>
+        <p:txBody>
+          <a:bodyPr wrap="square">
+            <a:spAutoFit/>
+          </a:bodyPr>
+          <a:lstStyle/>
+          <a:p>
+            <a:pPr algn="l">
+              <a:spcAft>
+                <a:spcPts val="600"/>
+              </a:spcAft>
+              <a:buNone/>
+            </a:pPr>
+            <a:r>
+              <a:rPr sz="1500" b="1">
+                <a:solidFill>
+                  <a:srgbClr val="0A2540"/>
+                </a:solidFill>
+                <a:latin typeface="Arial"/>
+              </a:rPr>
+              <a:t>Gradio: a function becomes a web form</a:t>
+            </a:r>
+          </a:p>
+        </p:txBody>
+      </p:sp>
+      <p:sp>
+        <p:nvSpPr>
+          <p:cNvPr id="9" name="TextBox 8"/>
+          <p:cNvSpPr txBox="1"/>
+          <p:nvPr/>
+        </p:nvSpPr>
+        <p:spPr>
+          <a:xfrm>
+            <a:off x="777240" y="2441447"/>
+            <a:ext cx="4937760" cy="3566160"/>
+          </a:xfrm>
+          <a:prstGeom prst="rect">
+            <a:avLst/>
+          </a:prstGeom>
+          <a:noFill/>
+        </p:spPr>
+        <p:txBody>
+          <a:bodyPr wrap="square">
+            <a:spAutoFit/>
+          </a:bodyPr>
+          <a:lstStyle/>
+          <a:p>
+            <a:pPr algn="l" indent="-228600" marL="228600">
+              <a:spcAft>
+                <a:spcPts val="600"/>
+              </a:spcAft>
+              <a:buClr>
+                <a:srgbClr val="1E5EF3"/>
+              </a:buClr>
+              <a:buChar char="—"/>
+            </a:pPr>
+            <a:r>
+              <a:rPr sz="1300" b="0">
+                <a:solidFill>
+                  <a:srgbClr val="202B38"/>
+                </a:solidFill>
+                <a:latin typeface="Arial"/>
+              </a:rPr>
+              <a:t>Write a normal Python function: inputs in, answer out.</a:t>
+            </a:r>
+          </a:p>
+          <a:p>
+            <a:pPr algn="l" indent="-228600" marL="228600">
+              <a:spcAft>
+                <a:spcPts val="600"/>
+              </a:spcAft>
+              <a:buClr>
+                <a:srgbClr val="1E5EF3"/>
+              </a:buClr>
+              <a:buChar char="—"/>
+            </a:pPr>
+            <a:r>
+              <a:rPr sz="1300" b="0">
+                <a:solidFill>
+                  <a:srgbClr val="202B38"/>
+                </a:solidFill>
+                <a:latin typeface="Arial"/>
+              </a:rPr>
+              <a:t>Gradio renders it as sliders, dropdowns and a text box.</a:t>
+            </a:r>
+          </a:p>
+          <a:p>
+            <a:pPr algn="l" indent="-228600" marL="228600">
+              <a:spcAft>
+                <a:spcPts val="600"/>
+              </a:spcAft>
+              <a:buClr>
+                <a:srgbClr val="1E5EF3"/>
+              </a:buClr>
+              <a:buChar char="—"/>
+            </a:pPr>
+            <a:r>
+              <a:rPr sz="1300" b="0">
+                <a:solidFill>
+                  <a:srgbClr val="202B38"/>
+                </a:solidFill>
+                <a:latin typeface="Arial"/>
+              </a:rPr>
+              <a:t>Title is derived by rule (boys under 13 Master, men Mr).</a:t>
+            </a:r>
+          </a:p>
+          <a:p>
+            <a:pPr algn="l" indent="-228600" marL="228600">
+              <a:spcAft>
+                <a:spcPts val="600"/>
+              </a:spcAft>
+              <a:buClr>
+                <a:srgbClr val="1E5EF3"/>
+              </a:buClr>
+              <a:buChar char="—"/>
+            </a:pPr>
+            <a:r>
+              <a:rPr sz="1300" b="0">
+                <a:solidFill>
+                  <a:srgbClr val="202B38"/>
+                </a:solidFill>
+                <a:latin typeface="Arial"/>
+              </a:rPr>
+              <a:t>On Colab, launch() gives a shareable temporary link.</a:t>
+            </a:r>
+          </a:p>
+        </p:txBody>
+      </p:sp>
+      <p:sp>
+        <p:nvSpPr>
+          <p:cNvPr id="10" name="Rectangle 9"/>
+          <p:cNvSpPr/>
+          <p:nvPr/>
+        </p:nvSpPr>
+        <p:spPr>
+          <a:xfrm>
+            <a:off x="6245352" y="1874519"/>
+            <a:ext cx="5394960" cy="4297680"/>
+          </a:xfrm>
+          <a:prstGeom prst="rect">
+            <a:avLst/>
+          </a:prstGeom>
+          <a:solidFill>
+            <a:srgbClr val="EEF3FD"/>
+          </a:solidFill>
+          <a:ln>
+            <a:noFill/>
+          </a:ln>
+          <a:effectLst/>
+        </p:spPr>
+        <p:style>
+          <a:lnRef idx="1">
+            <a:schemeClr val="accent1"/>
+          </a:lnRef>
+          <a:fillRef idx="3">
+            <a:schemeClr val="accent1"/>
+          </a:fillRef>
+          <a:effectRef idx="2">
+            <a:schemeClr val="accent1"/>
+          </a:effectRef>
+          <a:fontRef idx="minor">
+            <a:schemeClr val="lt1"/>
+          </a:fontRef>
+        </p:style>
+        <p:txBody>
+          <a:bodyPr rtlCol="0" anchor="ctr"/>
+          <a:lstStyle/>
+          <a:p>
+            <a:pPr algn="ctr"/>
+          </a:p>
+        </p:txBody>
+      </p:sp>
+      <p:sp>
+        <p:nvSpPr>
+          <p:cNvPr id="11" name="TextBox 10"/>
+          <p:cNvSpPr txBox="1"/>
+          <p:nvPr/>
+        </p:nvSpPr>
+        <p:spPr>
+          <a:xfrm>
+            <a:off x="6473952" y="2039111"/>
+            <a:ext cx="4937760" cy="365760"/>
+          </a:xfrm>
+          <a:prstGeom prst="rect">
+            <a:avLst/>
+          </a:prstGeom>
+          <a:noFill/>
+        </p:spPr>
+        <p:txBody>
+          <a:bodyPr wrap="square">
+            <a:spAutoFit/>
+          </a:bodyPr>
+          <a:lstStyle/>
+          <a:p>
+            <a:pPr algn="l">
+              <a:spcAft>
+                <a:spcPts val="600"/>
+              </a:spcAft>
+              <a:buNone/>
+            </a:pPr>
+            <a:r>
+              <a:rPr sz="1500" b="1">
+                <a:solidFill>
+                  <a:srgbClr val="0A2540"/>
+                </a:solidFill>
+                <a:latin typeface="Arial"/>
+              </a:rPr>
+              <a:t>Hugging Face Spaces: free hosting</a:t>
+            </a:r>
+          </a:p>
+        </p:txBody>
+      </p:sp>
+      <p:sp>
+        <p:nvSpPr>
+          <p:cNvPr id="12" name="TextBox 11"/>
+          <p:cNvSpPr txBox="1"/>
+          <p:nvPr/>
+        </p:nvSpPr>
+        <p:spPr>
+          <a:xfrm>
+            <a:off x="6473952" y="2441447"/>
+            <a:ext cx="4937760" cy="3566160"/>
+          </a:xfrm>
+          <a:prstGeom prst="rect">
+            <a:avLst/>
+          </a:prstGeom>
+          <a:noFill/>
+        </p:spPr>
+        <p:txBody>
+          <a:bodyPr wrap="square">
+            <a:spAutoFit/>
+          </a:bodyPr>
+          <a:lstStyle/>
+          <a:p>
+            <a:pPr algn="l" indent="-228600" marL="228600">
+              <a:spcAft>
+                <a:spcPts val="600"/>
+              </a:spcAft>
+              <a:buClr>
+                <a:srgbClr val="1E5EF3"/>
+              </a:buClr>
+              <a:buChar char="—"/>
+            </a:pPr>
+            <a:r>
+              <a:rPr sz="1300" b="0">
+                <a:solidFill>
+                  <a:srgbClr val="202B38"/>
+                </a:solidFill>
+                <a:latin typeface="Arial"/>
+              </a:rPr>
+              <a:t>Four files: app.py, the model, requirements.txt, README.md.</a:t>
+            </a:r>
+          </a:p>
+          <a:p>
+            <a:pPr algn="l" indent="-228600" marL="228600">
+              <a:spcAft>
+                <a:spcPts val="600"/>
+              </a:spcAft>
+              <a:buClr>
+                <a:srgbClr val="1E5EF3"/>
+              </a:buClr>
+              <a:buChar char="—"/>
+            </a:pPr>
+            <a:r>
+              <a:rPr sz="1300" b="0">
+                <a:solidFill>
+                  <a:srgbClr val="202B38"/>
+                </a:solidFill>
+                <a:latin typeface="Arial"/>
+              </a:rPr>
+              <a:t>Pin the scikit-learn version in requirements.txt.</a:t>
+            </a:r>
+          </a:p>
+          <a:p>
+            <a:pPr algn="l" indent="-228600" marL="228600">
+              <a:spcAft>
+                <a:spcPts val="600"/>
+              </a:spcAft>
+              <a:buClr>
+                <a:srgbClr val="1E5EF3"/>
+              </a:buClr>
+              <a:buChar char="—"/>
+            </a:pPr>
+            <a:r>
+              <a:rPr sz="1300" b="0">
+                <a:solidFill>
+                  <a:srgbClr val="202B38"/>
+                </a:solidFill>
+                <a:latin typeface="Arial"/>
+              </a:rPr>
+              <a:t>Upload the files in the browser - that is the whole deploy.</a:t>
+            </a:r>
+          </a:p>
+          <a:p>
+            <a:pPr algn="l" indent="-228600" marL="228600">
+              <a:spcAft>
+                <a:spcPts val="600"/>
+              </a:spcAft>
+              <a:buClr>
+                <a:srgbClr val="1E5EF3"/>
+              </a:buClr>
+              <a:buChar char="—"/>
+            </a:pPr>
+            <a:r>
+              <a:rPr sz="1300" b="0">
+                <a:solidFill>
+                  <a:srgbClr val="202B38"/>
+                </a:solidFill>
+                <a:latin typeface="Arial"/>
+              </a:rPr>
+              <a:t>No tokens or keys in code, ever - uploads stay in the browser.</a:t>
+            </a:r>
+          </a:p>
+          <a:p>
+            <a:pPr algn="l" indent="-228600" marL="228600">
+              <a:spcAft>
+                <a:spcPts val="600"/>
+              </a:spcAft>
+              <a:buClr>
+                <a:srgbClr val="1E5EF3"/>
+              </a:buClr>
+              <a:buChar char="—"/>
+            </a:pPr>
+            <a:r>
+              <a:rPr sz="1300" b="0">
+                <a:solidFill>
+                  <a:srgbClr val="202B38"/>
+                </a:solidFill>
+                <a:latin typeface="Arial"/>
+              </a:rPr>
+              <a:t>Result: a public URL anyone can open.</a:t>
+            </a:r>
+          </a:p>
+        </p:txBody>
+      </p:sp>
+      <p:sp>
+        <p:nvSpPr>
+          <p:cNvPr id="13" name="TextBox 12"/>
+          <p:cNvSpPr txBox="1"/>
+          <p:nvPr/>
+        </p:nvSpPr>
+        <p:spPr>
+          <a:xfrm>
+            <a:off x="548640" y="6473952"/>
+            <a:ext cx="7315200" cy="292608"/>
+          </a:xfrm>
+          <a:prstGeom prst="rect">
+            <a:avLst/>
+          </a:prstGeom>
+          <a:noFill/>
+        </p:spPr>
+        <p:txBody>
+          <a:bodyPr wrap="square">
+            <a:spAutoFit/>
+          </a:bodyPr>
+          <a:lstStyle/>
+          <a:p>
+            <a:pPr algn="l">
+              <a:spcAft>
+                <a:spcPts val="600"/>
+              </a:spcAft>
+              <a:buNone/>
+            </a:pPr>
+            <a:r>
+              <a:rPr sz="900" b="0">
+                <a:solidFill>
+                  <a:srgbClr val="5B6774"/>
+                </a:solidFill>
+                <a:latin typeface="Arial"/>
+              </a:rPr>
+              <a:t>M2 Session 4 - Optimization and Deployment</a:t>
+            </a:r>
+          </a:p>
+        </p:txBody>
+      </p:sp>
+      <p:sp>
+        <p:nvSpPr>
+          <p:cNvPr id="14" name="TextBox 13"/>
+          <p:cNvSpPr txBox="1"/>
+          <p:nvPr/>
+        </p:nvSpPr>
+        <p:spPr>
+          <a:xfrm>
+            <a:off x="11292840" y="6473952"/>
+            <a:ext cx="548640" cy="292608"/>
+          </a:xfrm>
+          <a:prstGeom prst="rect">
+            <a:avLst/>
+          </a:prstGeom>
+          <a:noFill/>
+        </p:spPr>
+        <p:txBody>
+          <a:bodyPr wrap="square">
+            <a:spAutoFit/>
+          </a:bodyPr>
+          <a:lstStyle/>
+          <a:p>
+            <a:pPr algn="r">
+              <a:spcAft>
+                <a:spcPts val="600"/>
+              </a:spcAft>
+              <a:buNone/>
+            </a:pPr>
+            <a:r>
+              <a:rPr sz="900" b="0">
+                <a:solidFill>
+                  <a:srgbClr val="5B6774"/>
+                </a:solidFill>
+                <a:latin typeface="Arial"/>
+              </a:rPr>
+              <a:t>16</a:t>
+            </a:r>
+          </a:p>
+        </p:txBody>
+      </p:sp>
+    </p:spTree>
+  </p:cSld>
+  <p:clrMapOvr>
+    <a:masterClrMapping/>
+  </p:clrMapOvr>
+</p:sld>
+</file>
+
+<file path=ppt/slides/slide17.xml><?xml version="1.0" encoding="utf-8"?>
+<p:sld xmlns:a="http://schemas.openxmlformats.org/drawingml/2006/main" xmlns:p="http://schemas.openxmlformats.org/presentationml/2006/main" xmlns:r="http://schemas.openxmlformats.org/officeDocument/2006/relationships">
+  <p:cSld>
+    <p:spTree>
+      <p:nvGrpSpPr>
+        <p:cNvPr id="1" name=""/>
+        <p:cNvGrpSpPr/>
+        <p:nvPr/>
+      </p:nvGrpSpPr>
+      <p:grpSpPr/>
+      <p:sp>
+        <p:nvSpPr>
+          <p:cNvPr id="2" name="Rectangle 1"/>
+          <p:cNvSpPr/>
+          <p:nvPr/>
+        </p:nvSpPr>
+        <p:spPr>
+          <a:xfrm>
+            <a:off x="0" y="0"/>
+            <a:ext cx="12191695" cy="6858000"/>
+          </a:xfrm>
+          <a:prstGeom prst="rect">
+            <a:avLst/>
+          </a:prstGeom>
+          <a:solidFill>
+            <a:srgbClr val="FFFFFF"/>
+          </a:solidFill>
+          <a:ln>
+            <a:noFill/>
+          </a:ln>
+          <a:effectLst/>
+        </p:spPr>
+        <p:style>
+          <a:lnRef idx="1">
+            <a:schemeClr val="accent1"/>
+          </a:lnRef>
+          <a:fillRef idx="3">
+            <a:schemeClr val="accent1"/>
+          </a:fillRef>
+          <a:effectRef idx="2">
+            <a:schemeClr val="accent1"/>
+          </a:effectRef>
+          <a:fontRef idx="minor">
+            <a:schemeClr val="lt1"/>
+          </a:fontRef>
+        </p:style>
+        <p:txBody>
+          <a:bodyPr rtlCol="0" anchor="ctr"/>
+          <a:lstStyle/>
+          <a:p>
+            <a:pPr algn="ctr"/>
+          </a:p>
+        </p:txBody>
+      </p:sp>
+      <p:sp>
+        <p:nvSpPr>
+          <p:cNvPr id="3" name="Rectangle 2"/>
+          <p:cNvSpPr/>
+          <p:nvPr/>
+        </p:nvSpPr>
+        <p:spPr>
+          <a:xfrm>
+            <a:off x="548640" y="475488"/>
+            <a:ext cx="457200" cy="54864"/>
+          </a:xfrm>
+          <a:prstGeom prst="rect">
+            <a:avLst/>
+          </a:prstGeom>
+          <a:solidFill>
+            <a:srgbClr val="1E5EF3"/>
+          </a:solidFill>
+          <a:ln>
+            <a:noFill/>
+          </a:ln>
+          <a:effectLst/>
+        </p:spPr>
+        <p:style>
+          <a:lnRef idx="1">
+            <a:schemeClr val="accent1"/>
+          </a:lnRef>
+          <a:fillRef idx="3">
+            <a:schemeClr val="accent1"/>
+          </a:fillRef>
+          <a:effectRef idx="2">
+            <a:schemeClr val="accent1"/>
+          </a:effectRef>
+          <a:fontRef idx="minor">
+            <a:schemeClr val="lt1"/>
+          </a:fontRef>
+        </p:style>
+        <p:txBody>
+          <a:bodyPr rtlCol="0" anchor="ctr"/>
+          <a:lstStyle/>
+          <a:p>
+            <a:pPr algn="ctr"/>
+          </a:p>
+        </p:txBody>
+      </p:sp>
+      <p:sp>
+        <p:nvSpPr>
+          <p:cNvPr id="4" name="TextBox 3"/>
+          <p:cNvSpPr txBox="1"/>
+          <p:nvPr/>
+        </p:nvSpPr>
+        <p:spPr>
+          <a:xfrm>
+            <a:off x="548640" y="603504"/>
+            <a:ext cx="11091672" cy="274320"/>
+          </a:xfrm>
+          <a:prstGeom prst="rect">
+            <a:avLst/>
+          </a:prstGeom>
+          <a:noFill/>
+        </p:spPr>
+        <p:txBody>
+          <a:bodyPr wrap="square">
+            <a:spAutoFit/>
+          </a:bodyPr>
+          <a:lstStyle/>
+          <a:p>
+            <a:pPr algn="l">
+              <a:spcAft>
+                <a:spcPts val="600"/>
+              </a:spcAft>
+              <a:buNone/>
+            </a:pPr>
+            <a:r>
+              <a:rPr sz="1100" b="1">
+                <a:solidFill>
+                  <a:srgbClr val="1E5EF3"/>
+                </a:solidFill>
+                <a:latin typeface="Arial"/>
+              </a:rPr>
+              <a:t>AFTER LAUNCH</a:t>
+            </a:r>
+          </a:p>
+        </p:txBody>
+      </p:sp>
+      <p:sp>
+        <p:nvSpPr>
+          <p:cNvPr id="5" name="TextBox 4"/>
+          <p:cNvSpPr txBox="1"/>
+          <p:nvPr/>
+        </p:nvSpPr>
+        <p:spPr>
+          <a:xfrm>
+            <a:off x="548640" y="868680"/>
+            <a:ext cx="11091672" cy="777240"/>
+          </a:xfrm>
+          <a:prstGeom prst="rect">
+            <a:avLst/>
+          </a:prstGeom>
+          <a:noFill/>
+        </p:spPr>
+        <p:txBody>
+          <a:bodyPr wrap="square">
+            <a:spAutoFit/>
+          </a:bodyPr>
+          <a:lstStyle/>
+          <a:p>
+            <a:pPr algn="l">
+              <a:spcAft>
+                <a:spcPts val="0"/>
+              </a:spcAft>
+              <a:buNone/>
+            </a:pPr>
+            <a:r>
+              <a:rPr sz="2600" b="1">
+                <a:solidFill>
+                  <a:srgbClr val="0A2540"/>
+                </a:solidFill>
+                <a:latin typeface="Arial"/>
+              </a:rPr>
+              <a:t>After launch, reality bites: models go stale and accuracy alone does not ship</a:t>
+            </a:r>
+          </a:p>
+        </p:txBody>
+      </p:sp>
+      <p:sp>
+        <p:nvSpPr>
+          <p:cNvPr id="6" name="Rectangle 5"/>
+          <p:cNvSpPr/>
+          <p:nvPr/>
+        </p:nvSpPr>
+        <p:spPr>
+          <a:xfrm>
+            <a:off x="548640" y="1664208"/>
+            <a:ext cx="11091672" cy="12801"/>
+          </a:xfrm>
+          <a:prstGeom prst="rect">
+            <a:avLst/>
+          </a:prstGeom>
+          <a:solidFill>
+            <a:srgbClr val="B9D0FA"/>
+          </a:solidFill>
+          <a:ln>
+            <a:noFill/>
+          </a:ln>
+          <a:effectLst/>
+        </p:spPr>
+        <p:style>
+          <a:lnRef idx="1">
+            <a:schemeClr val="accent1"/>
+          </a:lnRef>
+          <a:fillRef idx="3">
+            <a:schemeClr val="accent1"/>
+          </a:fillRef>
+          <a:effectRef idx="2">
+            <a:schemeClr val="accent1"/>
+          </a:effectRef>
+          <a:fontRef idx="minor">
+            <a:schemeClr val="lt1"/>
+          </a:fontRef>
+        </p:style>
+        <p:txBody>
+          <a:bodyPr rtlCol="0" anchor="ctr"/>
+          <a:lstStyle/>
+          <a:p>
+            <a:pPr algn="ctr"/>
+          </a:p>
+        </p:txBody>
+      </p:sp>
+      <p:sp>
+        <p:nvSpPr>
+          <p:cNvPr id="7" name="TextBox 6"/>
+          <p:cNvSpPr txBox="1"/>
+          <p:nvPr/>
+        </p:nvSpPr>
+        <p:spPr>
+          <a:xfrm>
+            <a:off x="548640" y="1874519"/>
+            <a:ext cx="11091672" cy="4206240"/>
+          </a:xfrm>
+          <a:prstGeom prst="rect">
+            <a:avLst/>
+          </a:prstGeom>
+          <a:noFill/>
+        </p:spPr>
+        <p:txBody>
+          <a:bodyPr wrap="square">
+            <a:spAutoFit/>
+          </a:bodyPr>
+          <a:lstStyle/>
+          <a:p>
+            <a:pPr algn="l" indent="-228600" marL="228600">
+              <a:spcAft>
+                <a:spcPts val="800"/>
+              </a:spcAft>
+              <a:buClr>
+                <a:srgbClr val="1E5EF3"/>
+              </a:buClr>
+              <a:buChar char="—"/>
+            </a:pPr>
+            <a:r>
+              <a:rPr sz="1600" b="0">
+                <a:solidFill>
+                  <a:srgbClr val="202B38"/>
+                </a:solidFill>
+                <a:latin typeface="Arial"/>
+              </a:rPr>
+              <a:t>The $1M Netflix Prize ensemble (about 800 models, a 10% RMSE gain) was never put into production.</a:t>
+            </a:r>
+          </a:p>
+          <a:p>
+            <a:pPr algn="l" lvl="1" indent="-228600" marL="514350">
+              <a:spcAft>
+                <a:spcPts val="600"/>
+              </a:spcAft>
+              <a:buClr>
+                <a:srgbClr val="1E5EF3"/>
+              </a:buClr>
+              <a:buChar char="·"/>
+            </a:pPr>
+            <a:r>
+              <a:rPr sz="1350" b="0">
+                <a:solidFill>
+                  <a:srgbClr val="5B6774"/>
+                </a:solidFill>
+                <a:latin typeface="Arial"/>
+              </a:rPr>
+              <a:t>Engineering cost outweighed the accuracy gain, and the business had moved to streaming. Netflix tech blog, 2012.</a:t>
+            </a:r>
+          </a:p>
+          <a:p>
+            <a:pPr algn="l" indent="-228600" marL="228600">
+              <a:spcAft>
+                <a:spcPts val="800"/>
+              </a:spcAft>
+              <a:buClr>
+                <a:srgbClr val="1E5EF3"/>
+              </a:buClr>
+              <a:buChar char="—"/>
+            </a:pPr>
+            <a:r>
+              <a:rPr sz="1600" b="0">
+                <a:solidFill>
+                  <a:srgbClr val="202B38"/>
+                </a:solidFill>
+                <a:latin typeface="Arial"/>
+              </a:rPr>
+              <a:t>Two kinds of drift: DATA drift - the inputs change (different passengers start arriving); CONCEPT drift - the hidden rule f itself moves.</a:t>
+            </a:r>
+          </a:p>
+          <a:p>
+            <a:pPr algn="l" lvl="1" indent="-228600" marL="514350">
+              <a:spcAft>
+                <a:spcPts val="600"/>
+              </a:spcAft>
+              <a:buClr>
+                <a:srgbClr val="1E5EF3"/>
+              </a:buClr>
+              <a:buChar char="·"/>
+            </a:pPr>
+            <a:r>
+              <a:rPr sz="1350" b="0">
+                <a:solidFill>
+                  <a:srgbClr val="5B6774"/>
+                </a:solidFill>
+                <a:latin typeface="Arial"/>
+              </a:rPr>
+              <a:t>Same inputs, new outcomes: Session 1's Y = f(X) + ε, with f no longer standing still. Monitor inputs and outputs separately.</a:t>
+            </a:r>
+          </a:p>
+          <a:p>
+            <a:pPr algn="l" indent="-228600" marL="228600">
+              <a:spcAft>
+                <a:spcPts val="800"/>
+              </a:spcAft>
+              <a:buClr>
+                <a:srgbClr val="1E5EF3"/>
+              </a:buClr>
+              <a:buChar char="—"/>
+            </a:pPr>
+            <a:r>
+              <a:rPr sz="1600" b="0">
+                <a:solidFill>
+                  <a:srgbClr val="202B38"/>
+                </a:solidFill>
+                <a:latin typeface="Arial"/>
+              </a:rPr>
+              <a:t>Google Flu Trends overestimated flu by more than 50% in 2011-13.</a:t>
+            </a:r>
+          </a:p>
+          <a:p>
+            <a:pPr algn="l" lvl="1" indent="-228600" marL="514350">
+              <a:spcAft>
+                <a:spcPts val="600"/>
+              </a:spcAft>
+              <a:buClr>
+                <a:srgbClr val="1E5EF3"/>
+              </a:buClr>
+              <a:buChar char="·"/>
+            </a:pPr>
+            <a:r>
+              <a:rPr sz="1350" b="0">
+                <a:solidFill>
+                  <a:srgbClr val="5B6774"/>
+                </a:solidFill>
+                <a:latin typeface="Arial"/>
+              </a:rPr>
+              <a:t>It once claimed about 11% of the US had flu; CDC data said about 6%.</a:t>
+            </a:r>
+          </a:p>
+          <a:p>
+            <a:pPr algn="l" lvl="1" indent="-228600" marL="514350">
+              <a:spcAft>
+                <a:spcPts val="600"/>
+              </a:spcAft>
+              <a:buClr>
+                <a:srgbClr val="1E5EF3"/>
+              </a:buClr>
+              <a:buChar char="·"/>
+            </a:pPr>
+            <a:r>
+              <a:rPr sz="1350" b="0">
+                <a:solidFill>
+                  <a:srgbClr val="5B6774"/>
+                </a:solidFill>
+                <a:latin typeface="Arial"/>
+              </a:rPr>
+              <a:t>It was essentially never retrained after 2009. Lazer et al., Science, 2014.</a:t>
+            </a:r>
+          </a:p>
+          <a:p>
+            <a:pPr algn="l" indent="-228600" marL="228600">
+              <a:spcAft>
+                <a:spcPts val="800"/>
+              </a:spcAft>
+              <a:buClr>
+                <a:srgbClr val="1E5EF3"/>
+              </a:buClr>
+              <a:buChar char="—"/>
+            </a:pPr>
+            <a:r>
+              <a:rPr sz="1600" b="0">
+                <a:solidFill>
+                  <a:srgbClr val="202B38"/>
+                </a:solidFill>
+                <a:latin typeface="Arial"/>
+              </a:rPr>
+              <a:t>Version every saved model (model_v1, model_2026_09_06) so you can always roll back.</a:t>
+            </a:r>
+          </a:p>
+          <a:p>
+            <a:pPr algn="l" indent="-228600" marL="228600">
+              <a:spcAft>
+                <a:spcPts val="800"/>
+              </a:spcAft>
+              <a:buClr>
+                <a:srgbClr val="1E5EF3"/>
+              </a:buClr>
+              <a:buChar char="—"/>
+            </a:pPr>
+            <a:r>
+              <a:rPr sz="1600" b="0">
+                <a:solidFill>
+                  <a:srgbClr val="202B38"/>
+                </a:solidFill>
+                <a:latin typeface="Arial"/>
+              </a:rPr>
+              <a:t>Retrain on a schedule and re-score; monitoring is step 5 of the loop, not an afterthought.</a:t>
+            </a:r>
+          </a:p>
+        </p:txBody>
+      </p:sp>
+      <p:sp>
+        <p:nvSpPr>
+          <p:cNvPr id="8" name="TextBox 7"/>
+          <p:cNvSpPr txBox="1"/>
+          <p:nvPr/>
+        </p:nvSpPr>
+        <p:spPr>
+          <a:xfrm>
+            <a:off x="548640" y="6473952"/>
+            <a:ext cx="7315200" cy="292608"/>
+          </a:xfrm>
+          <a:prstGeom prst="rect">
+            <a:avLst/>
+          </a:prstGeom>
+          <a:noFill/>
+        </p:spPr>
+        <p:txBody>
+          <a:bodyPr wrap="square">
+            <a:spAutoFit/>
+          </a:bodyPr>
+          <a:lstStyle/>
+          <a:p>
+            <a:pPr algn="l">
+              <a:spcAft>
+                <a:spcPts val="600"/>
+              </a:spcAft>
+              <a:buNone/>
+            </a:pPr>
+            <a:r>
+              <a:rPr sz="900" b="0">
+                <a:solidFill>
+                  <a:srgbClr val="5B6774"/>
+                </a:solidFill>
+                <a:latin typeface="Arial"/>
+              </a:rPr>
+              <a:t>M2 Session 4 - Optimization and Deployment</a:t>
+            </a:r>
+          </a:p>
+        </p:txBody>
+      </p:sp>
+      <p:sp>
+        <p:nvSpPr>
+          <p:cNvPr id="9" name="TextBox 8"/>
+          <p:cNvSpPr txBox="1"/>
+          <p:nvPr/>
+        </p:nvSpPr>
+        <p:spPr>
+          <a:xfrm>
+            <a:off x="11292840" y="6473952"/>
+            <a:ext cx="548640" cy="292608"/>
+          </a:xfrm>
+          <a:prstGeom prst="rect">
+            <a:avLst/>
+          </a:prstGeom>
+          <a:noFill/>
+        </p:spPr>
+        <p:txBody>
+          <a:bodyPr wrap="square">
+            <a:spAutoFit/>
+          </a:bodyPr>
+          <a:lstStyle/>
+          <a:p>
+            <a:pPr algn="r">
+              <a:spcAft>
+                <a:spcPts val="600"/>
+              </a:spcAft>
+              <a:buNone/>
+            </a:pPr>
+            <a:r>
+              <a:rPr sz="900" b="0">
+                <a:solidFill>
+                  <a:srgbClr val="5B6774"/>
+                </a:solidFill>
+                <a:latin typeface="Arial"/>
+              </a:rPr>
+              <a:t>17</a:t>
+            </a:r>
+          </a:p>
+        </p:txBody>
+      </p:sp>
+    </p:spTree>
+  </p:cSld>
+  <p:clrMapOvr>
+    <a:masterClrMapping/>
+  </p:clrMapOvr>
+</p:sld>
+</file>
+
+<file path=ppt/slides/slide18.xml><?xml version="1.0" encoding="utf-8"?>
 <p:sld xmlns:a="http://schemas.openxmlformats.org/drawingml/2006/main" xmlns:p="http://schemas.openxmlformats.org/presentationml/2006/main" xmlns:r="http://schemas.openxmlformats.org/officeDocument/2006/relationships">
   <p:cSld>
     <p:spTree>
@@ -6387,7 +8124,7 @@
                 </a:solidFill>
                 <a:latin typeface="Arial"/>
               </a:rPr>
-              <a:t>14</a:t>
+              <a:t>18</a:t>
             </a:r>
           </a:p>
         </p:txBody>
@@ -6400,7 +8137,7 @@
 </p:sld>
 </file>
 
-<file path=ppt/slides/slide15.xml><?xml version="1.0" encoding="utf-8"?>
+<file path=ppt/slides/slide19.xml><?xml version="1.0" encoding="utf-8"?>
 <p:sld xmlns:a="http://schemas.openxmlformats.org/drawingml/2006/main" xmlns:p="http://schemas.openxmlformats.org/presentationml/2006/main" xmlns:r="http://schemas.openxmlformats.org/officeDocument/2006/relationships">
   <p:cSld>
     <p:spTree>
@@ -6532,7 +8269,7 @@
                 </a:solidFill>
                 <a:latin typeface="Arial"/>
               </a:rPr>
-              <a:t>Hyperparameters are the algorithm's own settings - tune them with CV, never the test set; every setting is a different algorithm.</a:t>
+              <a:t>Part 1, the theory: every setting is a different algorithm - tune with CV, never the test set; random search spends trials where grids waste them.</a:t>
             </a:r>
           </a:p>
           <a:p>
@@ -6552,7 +8289,7 @@
                 </a:solidFill>
                 <a:latin typeface="Arial"/>
               </a:rPr>
-              <a:t>Diagnose the failing bar before turning any knob; when knobs stall, count your errors before guessing.</a:t>
+              <a:t>Diagnose the failing bar before turning any knob; when knobs stall, count errors; steer by ONE metric - CHOOSE often, REPORT once.</a:t>
             </a:r>
           </a:p>
           <a:p>
@@ -6572,7 +8309,7 @@
                 </a:solidFill>
                 <a:latin typeface="Arial"/>
               </a:rPr>
-              <a:t>Random search reached CV 0.8274; the one test look said 0.8268 - the tuning did not fool itself.</a:t>
+              <a:t>Part 2, the practice: random search reached CV 0.8274; the one test look said 0.8268 - the tuning did not fool itself.</a:t>
             </a:r>
           </a:p>
           <a:p>
@@ -6592,7 +8329,7 @@
                 </a:solidFill>
                 <a:latin typeface="Arial"/>
               </a:rPr>
-              <a:t>Ship the recipe retrained on everything, then the loop: save, load, wrap, host, monitor - and watch for data drift AND concept drift.</a:t>
+              <a:t>Ship the recipe retrained on everything, then the loop: save, load, wrap, host, monitor - watch for data AND concept drift.</a:t>
             </a:r>
           </a:p>
           <a:p>
@@ -6612,7 +8349,7 @@
                 </a:solidFill>
                 <a:latin typeface="Arial"/>
               </a:rPr>
-              <a:t>The manifest's last word: Survived = 0 for Owen, 1 for Florence, 1 for Frankie. The odds were never abstract.</a:t>
+              <a:t>Survived = 0 for Owen, 1 for Florence, 1 for Frankie - the odds were never abstract.</a:t>
             </a:r>
           </a:p>
           <a:p>
@@ -6752,7 +8489,7 @@
                 </a:solidFill>
                 <a:latin typeface="Arial"/>
               </a:rPr>
-              <a:t>15</a:t>
+              <a:t>19</a:t>
             </a:r>
           </a:p>
         </p:txBody>
@@ -7085,27 +8822,7 @@
                 </a:solidFill>
                 <a:latin typeface="Arial"/>
               </a:rPr>
-              <a:t>Diagnose WHICH bar you are failing (Session 3's two numbers) before touching any knob - turning random knobs at once is an untunable radio.</a:t>
-            </a:r>
-          </a:p>
-          <a:p>
-            <a:pPr algn="l" indent="-228600" marL="228600">
-              <a:spcAft>
-                <a:spcPts val="800"/>
-              </a:spcAft>
-              <a:buClr>
-                <a:srgbClr val="1E5EF3"/>
-              </a:buClr>
-              <a:buChar char="—"/>
-            </a:pPr>
-            <a:r>
-              <a:rPr sz="1450" b="0">
-                <a:solidFill>
-                  <a:srgbClr val="202B38"/>
-                </a:solidFill>
-                <a:latin typeface="Arial"/>
-              </a:rPr>
-              <a:t>Today: the validation bar's knobs, then the world bar.</a:t>
+              <a:t>Diagnose WHICH bar you are failing (Session 3's two numbers) before touching any knob - random knob-turning is an untunable radio. Today: the validation bar's knobs, then the world bar.</a:t>
             </a:r>
           </a:p>
         </p:txBody>
@@ -7391,7 +9108,7 @@
                 </a:solidFill>
                 <a:latin typeface="Arial"/>
               </a:rPr>
-              <a:t>Squeeze more from the forest</a:t>
+              <a:t>Part 1 - The theory: tuning and judging without fooling yourself</a:t>
             </a:r>
           </a:p>
         </p:txBody>
@@ -7431,7 +9148,7 @@
                 </a:solidFill>
                 <a:latin typeface="Arial"/>
               </a:rPr>
-              <a:t>Search the settings honestly - the referee stays 5-fold cross-validation, and the test set stays sealed.</a:t>
+              <a:t>Six ideas that hold for every model you will ever tune - the referee stays cross-validation, and the test set stays sealed.</a:t>
             </a:r>
           </a:p>
         </p:txBody>
@@ -7657,7 +9374,7 @@
                 </a:solidFill>
                 <a:latin typeface="Arial"/>
               </a:rPr>
-              <a:t>TUNING - TWO KINDS OF SETTINGS</a:t>
+              <a:t>THEORY - TWO KINDS OF SETTINGS</a:t>
             </a:r>
           </a:p>
         </p:txBody>
@@ -8381,7 +10098,7 @@
                 </a:solidFill>
                 <a:latin typeface="Arial"/>
               </a:rPr>
-              <a:t>TUNING - GRID AND RANDOM SEARCH</a:t>
+              <a:t>THEORY - TUNING IS COMPARING</a:t>
             </a:r>
           </a:p>
         </p:txBody>
@@ -8421,7 +10138,7 @@
                 </a:solidFill>
                 <a:latin typeface="Arial"/>
               </a:rPr>
-              <a:t>Tuning is Session 3's tournament again - every setting is a contestant, CV is the referee</a:t>
+              <a:t>Tuning is not a new skill - two settings of one algorithm are two different algorithms</a:t>
             </a:r>
           </a:p>
         </p:txBody>
@@ -8508,7 +10225,7 @@
                 </a:solidFill>
                 <a:latin typeface="Arial"/>
               </a:rPr>
-              <a:t>Grid search = CV plus nested for-loops, no magic: 2x3x3 = 18 combos x 5 folds = 90 trainings. Best (max_depth 4, min_samples_leaf 5, 100 trees): CV 0.8259, +0.0322 over the 0.7937 default.</a:t>
+              <a:t>MIT's reframe: a forest capped at depth 4 and a forest allowed depth 8 are literally two different algorithms - same name, different game.</a:t>
             </a:r>
           </a:p>
           <a:p>
@@ -8528,7 +10245,7 @@
                 </a:solidFill>
                 <a:latin typeface="Arial"/>
               </a:rPr>
-              <a:t>Grids explode: 5 knobs x 6 values = 7,776 combos - nearly 39,000 trainings. 15 random draws instead test up to 15 distinct values of every knob: CV 0.8274, beating the grid with fewer tries.</a:t>
+              <a:t>That collapses tuning into a problem you already solved: Session 3 compared six model families; tuning compares variants of one.</a:t>
             </a:r>
           </a:p>
           <a:p>
@@ -8548,7 +10265,7 @@
                 </a:solidFill>
                 <a:latin typeface="Arial"/>
               </a:rPr>
-              <a:t>MIT's reframe: picking a hyperparameter value IS comparing learning algorithms - same referee, same rules; the contestants are settings instead of model families.</a:t>
+              <a:t>Cross-validation referees both questions the same way: run each variant, score it on folds it never trained on, keep the best.</a:t>
             </a:r>
           </a:p>
           <a:p>
@@ -8568,14 +10285,34 @@
                 </a:solidFill>
                 <a:latin typeface="Arial"/>
               </a:rPr>
-              <a:t>Read the winning knobs: capped depth and bigger leaves are complexity BRAKES - regularization by another name: a little bias buys a big drop in variance. Session 3's U-curve, found automatically.</a:t>
+              <a:t>So everything Session 3 taught about honest comparison applies unchanged - same referee, same rules; only the contestants changed.</a:t>
+            </a:r>
+          </a:p>
+          <a:p>
+            <a:pPr algn="l" indent="-228600" marL="228600">
+              <a:spcAft>
+                <a:spcPts val="800"/>
+              </a:spcAft>
+              <a:buClr>
+                <a:srgbClr val="1E5EF3"/>
+              </a:buClr>
+              <a:buChar char="—"/>
+            </a:pPr>
+            <a:r>
+              <a:rPr sz="1450" b="0">
+                <a:solidFill>
+                  <a:srgbClr val="202B38"/>
+                </a:solidFill>
+                <a:latin typeface="Arial"/>
+              </a:rPr>
+              <a:t>Harvard files hyperparameter tuning under model selection, next to choosing predictors and polynomial degree: one discipline, not two.</a:t>
             </a:r>
           </a:p>
         </p:txBody>
       </p:sp>
       <p:pic>
         <p:nvPicPr>
-          <p:cNvPr id="8" name="Picture 7" descr="tuning_arc.png"/>
+          <p:cNvPr id="8" name="Picture 7" descr="two_settings_one_referee.png"/>
           <p:cNvPicPr>
             <a:picLocks noChangeAspect="1"/>
           </p:cNvPicPr>
@@ -8590,7 +10327,7 @@
         <p:spPr>
           <a:xfrm>
             <a:off x="5120640" y="1874519"/>
-            <a:ext cx="6492240" cy="3892428"/>
+            <a:ext cx="6492240" cy="3289330"/>
           </a:xfrm>
           <a:prstGeom prst="rect">
             <a:avLst/>
@@ -8632,7 +10369,7 @@
                 </a:solidFill>
                 <a:latin typeface="Arial"/>
               </a:rPr>
-              <a:t>Random Forest 5-fold CV accuracy at each tuning stage. Module 2, notebook 3. MIT 6.390, Appendix C.</a:t>
+              <a:t>Two settings of one forest, judged by the same referee - illustration. MIT 6.390, Appendix C; Harvard CS109A.</a:t>
             </a:r>
           </a:p>
         </p:txBody>
@@ -8858,7 +10595,7 @@
                 </a:solidFill>
                 <a:latin typeface="Arial"/>
               </a:rPr>
-              <a:t>TUNING - ERROR ANALYSIS</a:t>
+              <a:t>THEORY - SEARCH STRATEGY</a:t>
             </a:r>
           </a:p>
         </p:txBody>
@@ -8898,7 +10635,7 @@
                 </a:solidFill>
                 <a:latin typeface="Arial"/>
               </a:rPr>
-              <a:t>Before turning more knobs, read the mistakes - an hour of counting beats a week of guessing</a:t>
+              <a:t>Knobs are not equally important - random search tests nine values of the one that matters, a grid tests three</a:t>
             </a:r>
           </a:p>
         </p:txBody>
@@ -8985,7 +10722,7 @@
                 </a:solidFill>
                 <a:latin typeface="Arial"/>
               </a:rPr>
-              <a:t>Pull the misclassified validation examples and look at them by hand - about 100 when you have them.</a:t>
+              <a:t>Typically one or two knobs dominate the score and the rest barely move it - and you do not know in advance which is which.</a:t>
             </a:r>
           </a:p>
           <a:p>
@@ -9005,7 +10742,7 @@
                 </a:solidFill>
                 <a:latin typeface="Arial"/>
               </a:rPr>
-              <a:t>Tally them into categories in a spreadsheet; add new categories as they emerge.</a:t>
+              <a:t>A 3x3 grid spends nine trials on only three distinct values of each knob: every value of the knob that matters is re-tested three times while the knob that does not soaks up the repeats.</a:t>
             </a:r>
           </a:p>
           <a:p>
@@ -9025,7 +10762,7 @@
                 </a:solidFill>
                 <a:latin typeface="Arial"/>
               </a:rPr>
-              <a:t>The bottom row of percentages IS your priority list: a category worth 5% of errors caps its payoff at almost nothing; one worth 50% is where the month goes.</a:t>
+              <a:t>Nine random draws test nine NEW values of every knob at once - the important dimension gets nine chances instead of three.</a:t>
             </a:r>
           </a:p>
           <a:p>
@@ -9045,7 +10782,7 @@
                 </a:solidFill>
                 <a:latin typeface="Arial"/>
               </a:rPr>
-              <a:t>Guard: split a large validation set into an "Eyeball" part you inspect and a "Blackbox" part you never look at - you will overfit whatever you stare at.</a:t>
+              <a:t>Same budget, more information where it counts: that is why random search usually wins once you tune more than a couple of knobs.</a:t>
             </a:r>
           </a:p>
           <a:p>
@@ -9065,14 +10802,14 @@
                 </a:solidFill>
                 <a:latin typeface="Arial"/>
               </a:rPr>
-              <a:t>Exercise: pull our champion's misclassified test-set passengers in the notebook and tally your own categories (family size? fare band? title?) - no fixing allowed before the counting.</a:t>
+              <a:t>The referee never changes: every candidate - grid cell or random draw - is scored by the same cross-validation.</a:t>
             </a:r>
           </a:p>
         </p:txBody>
       </p:sp>
       <p:pic>
         <p:nvPicPr>
-          <p:cNvPr id="8" name="Picture 7" descr="error_analysis_sheet.png"/>
+          <p:cNvPr id="8" name="Picture 7" descr="grid_vs_random.png"/>
           <p:cNvPicPr>
             <a:picLocks noChangeAspect="1"/>
           </p:cNvPicPr>
@@ -9086,8 +10823,8 @@
         </p:blipFill>
         <p:spPr>
           <a:xfrm>
-            <a:off x="5120640" y="1874519"/>
-            <a:ext cx="6492240" cy="4026761"/>
+            <a:off x="5140324" y="1874519"/>
+            <a:ext cx="6452871" cy="4114800"/>
           </a:xfrm>
           <a:prstGeom prst="rect">
             <a:avLst/>
@@ -9129,7 +10866,7 @@
                 </a:solidFill>
                 <a:latin typeface="Arial"/>
               </a:rPr>
-              <a:t>The method, on Ng's classic image-classifier example - illustration, not our data. Ng, Machine Learning Yearning chs. 14-19.</a:t>
+              <a:t>Nine trials spent two ways on a landscape where one knob matters - illustration.</a:t>
             </a:r>
           </a:p>
         </p:txBody>
@@ -9355,7 +11092,7 @@
                 </a:solidFill>
                 <a:latin typeface="Arial"/>
               </a:rPr>
-              <a:t>THE HONEST FINAL EXAM</a:t>
+              <a:t>THEORY - ERROR ANALYSIS</a:t>
             </a:r>
           </a:p>
         </p:txBody>
@@ -9395,7 +11132,7 @@
                 </a:solidFill>
                 <a:latin typeface="Arial"/>
               </a:rPr>
-              <a:t>The test set is used exactly once - tune against it and it becomes training data</a:t>
+              <a:t>Before turning more knobs, read the mistakes - an hour of counting beats a week of guessing</a:t>
             </a:r>
           </a:p>
         </p:txBody>
@@ -9482,7 +11219,7 @@
                 </a:solidFill>
                 <a:latin typeface="Arial"/>
               </a:rPr>
-              <a:t>Final exam: 179 passengers the model has never seen, scored one time: accuracy 0.8268, F1 0.7597.</a:t>
+              <a:t>Pull the misclassified validation examples and look at them by hand - about 100 when you have them.</a:t>
             </a:r>
           </a:p>
           <a:p>
@@ -9502,7 +11239,7 @@
                 </a:solidFill>
                 <a:latin typeface="Arial"/>
               </a:rPr>
-              <a:t>Test is close to CV (0.8274): the tuning did not fool itself.</a:t>
+              <a:t>Tally them into categories in a spreadsheet; add new categories as they emerge.</a:t>
             </a:r>
           </a:p>
           <a:p>
@@ -9522,7 +11259,7 @@
                 </a:solidFill>
                 <a:latin typeface="Arial"/>
               </a:rPr>
-              <a:t>Peeking at test scores while tuning silently turns the test set into training data.</a:t>
+              <a:t>The bottom row of percentages IS your priority list: a category worth 5% of errors caps its payoff at almost nothing; one worth 50% is where the month goes.</a:t>
             </a:r>
           </a:p>
           <a:p>
@@ -9542,7 +11279,7 @@
                 </a:solidFill>
                 <a:latin typeface="Arial"/>
               </a:rPr>
-              <a:t>Honest expectation: tuning buys a percentage point or two, not miracles.</a:t>
+              <a:t>Guard: split a large validation set into an "Eyeball" part you inspect and a "Blackbox" part you never look at - you will overfit whatever you stare at.</a:t>
             </a:r>
           </a:p>
           <a:p>
@@ -9562,14 +11299,14 @@
                 </a:solidFill>
                 <a:latin typeface="Arial"/>
               </a:rPr>
-              <a:t>The bar closes: we FIT on 712 rows, CHOSE by CV inside them - the REPORT band opens now, exactly once, and its score (0.8268) is the only forecast of real-world performance we own.</a:t>
+              <a:t>Exercise: pull our champion's misclassified test-set passengers in the notebook and tally your own categories (family size? fare band? title?) - no fixing allowed before the counting.</a:t>
             </a:r>
           </a:p>
         </p:txBody>
       </p:sp>
       <p:pic>
         <p:nvPicPr>
-          <p:cNvPr id="8" name="Picture 7" descr="cv_vs_test_bar.png"/>
+          <p:cNvPr id="8" name="Picture 7" descr="error_analysis_sheet.png"/>
           <p:cNvPicPr>
             <a:picLocks noChangeAspect="1"/>
           </p:cNvPicPr>
@@ -9583,8 +11320,8 @@
         </p:blipFill>
         <p:spPr>
           <a:xfrm>
-            <a:off x="5320532" y="1874519"/>
-            <a:ext cx="6092456" cy="4114800"/>
+            <a:off x="5120640" y="1874519"/>
+            <a:ext cx="6492240" cy="4026761"/>
           </a:xfrm>
           <a:prstGeom prst="rect">
             <a:avLst/>
@@ -9626,7 +11363,7 @@
                 </a:solidFill>
                 <a:latin typeface="Arial"/>
               </a:rPr>
-              <a:t>Tuned forest: CV score vs the single test-set look. Module 2, notebook 3. Harvard CS109A / ISLR ch. 5 (model selection vs model assessment).</a:t>
+              <a:t>The method, on Ng's classic image-classifier example - illustration, not our data. Ng, Machine Learning Yearning chs. 14-19.</a:t>
             </a:r>
           </a:p>
         </p:txBody>
@@ -9852,7 +11589,7 @@
                 </a:solidFill>
                 <a:latin typeface="Arial"/>
               </a:rPr>
-              <a:t>THE LAST STEP BEFORE SHIPPING</a:t>
+              <a:t>THEORY - ONE NUMBER TO STEER BY</a:t>
             </a:r>
           </a:p>
         </p:txBody>
@@ -9892,7 +11629,7 @@
                 </a:solidFill>
                 <a:latin typeface="Arial"/>
               </a:rPr>
-              <a:t>You don't ship the CV copy: after choosing, retrain the winning recipe on all the data</a:t>
+              <a:t>Agree on one evaluation number before you experiment - it makes every comparison instant</a:t>
             </a:r>
           </a:p>
         </p:txBody>
@@ -9979,7 +11716,7 @@
                 </a:solidFill>
                 <a:latin typeface="Arial"/>
               </a:rPr>
-              <a:t>MIT's five steps: compare variants by CV, pick the winner, RETRAIN the winning recipe on all available data, ship, and be judged on data nobody at the table has seen.</a:t>
+              <a:t>One agreed metric ranks ten experiments at a glance; with three metrics, every comparison becomes a debate.</a:t>
             </a:r>
           </a:p>
           <a:p>
@@ -9999,7 +11736,7 @@
                 </a:solidFill>
                 <a:latin typeface="Arial"/>
               </a:rPr>
-              <a:t>Step 3 surprises beginners: the fold models were scaffolding; more data = a better final model, so refit everything.</a:t>
+              <a:t>Two numbers cannot rank two models: A wins precision, B wins recall - deadlock until one combiner (F1) breaks it.</a:t>
             </a:r>
           </a:p>
           <a:p>
@@ -10019,7 +11756,7 @@
                 </a:solidFill>
                 <a:latin typeface="Arial"/>
               </a:rPr>
-              <a:t>sklearn already does the training-set version: refit=True retrains the best settings on all 712 rows automatically - that is the model we saved.</a:t>
+              <a:t>F1 punishes imbalance: precision 0.9 with recall 0.1 scores near 0.18, not 0.5 - a useless side cannot hide behind a strong one.</a:t>
             </a:r>
           </a:p>
           <a:p>
@@ -10039,7 +11776,7 @@
                 </a:solidFill>
                 <a:latin typeface="Arial"/>
               </a:rPr>
-              <a:t>Once the single test look is spent, the recipe - not the score - is what you trust: retraining it on all 891 rows before shipping is legitimate; re-scoring it is not, because no honest data remains.</a:t>
+              <a:t>When one number is genuinely not enough (safety, latency, size): make those SATISFICING constraints - bars to clear - and keep exactly one OPTIMIZING metric to maximize.</a:t>
             </a:r>
           </a:p>
           <a:p>
@@ -10059,14 +11796,14 @@
                 </a:solidFill>
                 <a:latin typeface="Arial"/>
               </a:rPr>
-              <a:t>Two contamination arrows are forever forbidden: test data into training, and validation scores reused as the final report card.</a:t>
+              <a:t>Set the metric and the validation data at project start: together they define "better" for the whole team, and every decision gets fast.</a:t>
             </a:r>
           </a:p>
         </p:txBody>
       </p:sp>
       <p:pic>
         <p:nvPicPr>
-          <p:cNvPr id="8" name="Picture 7" descr="retrain_pipeline.png"/>
+          <p:cNvPr id="8" name="Picture 7" descr="single_number_scoreboard.png"/>
           <p:cNvPicPr>
             <a:picLocks noChangeAspect="1"/>
           </p:cNvPicPr>
@@ -10081,7 +11818,7 @@
         <p:spPr>
           <a:xfrm>
             <a:off x="5120640" y="1874519"/>
-            <a:ext cx="6492240" cy="3319412"/>
+            <a:ext cx="6492240" cy="3666913"/>
           </a:xfrm>
           <a:prstGeom prst="rect">
             <a:avLst/>
@@ -10123,7 +11860,7 @@
                 </a:solidFill>
                 <a:latin typeface="Arial"/>
               </a:rPr>
-              <a:t>MIT's end-to-end evaluation pipeline - the two red arrows are never allowed. MIT 6.390, Appendix C.</a:t>
+              <a:t>A deadlocked scoreboard resolved by one number - illustration. Ng, Machine Learning Yearning chs. 8-9.</a:t>
             </a:r>
           </a:p>
         </p:txBody>
@@ -10241,7 +11978,7 @@
             <a:avLst/>
           </a:prstGeom>
           <a:solidFill>
-            <a:srgbClr val="0A2540"/>
+            <a:srgbClr val="FFFFFF"/>
           </a:solidFill>
           <a:ln>
             <a:noFill/>
@@ -10272,14 +12009,58 @@
       </p:sp>
       <p:sp>
         <p:nvSpPr>
-          <p:cNvPr id="3" name="TextBox 2"/>
+          <p:cNvPr id="3" name="Rectangle 2"/>
+          <p:cNvSpPr/>
+          <p:nvPr/>
+        </p:nvSpPr>
+        <p:spPr>
+          <a:xfrm>
+            <a:off x="548640" y="475488"/>
+            <a:ext cx="457200" cy="54864"/>
+          </a:xfrm>
+          <a:prstGeom prst="rect">
+            <a:avLst/>
+          </a:prstGeom>
+          <a:solidFill>
+            <a:srgbClr val="1E5EF3"/>
+          </a:solidFill>
+          <a:ln>
+            <a:noFill/>
+          </a:ln>
+          <a:effectLst/>
+        </p:spPr>
+        <p:style>
+          <a:lnRef idx="1">
+            <a:schemeClr val="accent1"/>
+          </a:lnRef>
+          <a:fillRef idx="3">
+            <a:schemeClr val="accent1"/>
+          </a:fillRef>
+          <a:effectRef idx="2">
+            <a:schemeClr val="accent1"/>
+          </a:effectRef>
+          <a:fontRef idx="minor">
+            <a:schemeClr val="lt1"/>
+          </a:fontRef>
+        </p:style>
+        <p:txBody>
+          <a:bodyPr rtlCol="0" anchor="ctr"/>
+          <a:lstStyle/>
+          <a:p>
+            <a:pPr algn="ctr"/>
+          </a:p>
+        </p:txBody>
+      </p:sp>
+      <p:sp>
+        <p:nvSpPr>
+          <p:cNvPr id="4" name="TextBox 3"/>
           <p:cNvSpPr txBox="1"/>
           <p:nvPr/>
         </p:nvSpPr>
         <p:spPr>
           <a:xfrm>
-            <a:off x="822960" y="1463040"/>
-            <a:ext cx="3657600" cy="2011680"/>
+            <a:off x="548640" y="603504"/>
+            <a:ext cx="11091672" cy="274320"/>
           </a:xfrm>
           <a:prstGeom prst="rect">
             <a:avLst/>
@@ -10299,27 +12080,27 @@
               <a:buNone/>
             </a:pPr>
             <a:r>
-              <a:rPr sz="11000" b="1">
+              <a:rPr sz="1100" b="1">
                 <a:solidFill>
                   <a:srgbClr val="1E5EF3"/>
                 </a:solidFill>
                 <a:latin typeface="Arial"/>
               </a:rPr>
-              <a:t>02</a:t>
-            </a:r>
-          </a:p>
-        </p:txBody>
-      </p:sp>
-      <p:sp>
-        <p:nvSpPr>
-          <p:cNvPr id="4" name="TextBox 3"/>
+              <a:t>THEORY - SELECTION VS ASSESSMENT</a:t>
+            </a:r>
+          </a:p>
+        </p:txBody>
+      </p:sp>
+      <p:sp>
+        <p:nvSpPr>
+          <p:cNvPr id="5" name="TextBox 4"/>
           <p:cNvSpPr txBox="1"/>
           <p:nvPr/>
         </p:nvSpPr>
         <p:spPr>
           <a:xfrm>
-            <a:off x="868680" y="3566160"/>
-            <a:ext cx="10424160" cy="1280160"/>
+            <a:off x="548640" y="868680"/>
+            <a:ext cx="11091672" cy="777240"/>
           </a:xfrm>
           <a:prstGeom prst="rect">
             <a:avLst/>
@@ -10334,32 +12115,76 @@
           <a:p>
             <a:pPr algn="l">
               <a:spcAft>
-                <a:spcPts val="600"/>
-              </a:spcAft>
-              <a:buNone/>
-            </a:pPr>
-            <a:r>
-              <a:rPr sz="3400" b="1">
-                <a:solidFill>
-                  <a:srgbClr val="FFFFFF"/>
-                </a:solidFill>
-                <a:latin typeface="Arial"/>
-              </a:rPr>
-              <a:t>Ship it</a:t>
-            </a:r>
-          </a:p>
-        </p:txBody>
-      </p:sp>
-      <p:sp>
-        <p:nvSpPr>
-          <p:cNvPr id="5" name="TextBox 4"/>
+                <a:spcPts val="0"/>
+              </a:spcAft>
+              <a:buNone/>
+            </a:pPr>
+            <a:r>
+              <a:rPr sz="2600" b="1">
+                <a:solidFill>
+                  <a:srgbClr val="0A2540"/>
+                </a:solidFill>
+                <a:latin typeface="Arial"/>
+              </a:rPr>
+              <a:t>Choosing and grading are different jobs - CHOOSE as often as you like, REPORT opens once</a:t>
+            </a:r>
+          </a:p>
+        </p:txBody>
+      </p:sp>
+      <p:sp>
+        <p:nvSpPr>
+          <p:cNvPr id="6" name="Rectangle 5"/>
+          <p:cNvSpPr/>
+          <p:nvPr/>
+        </p:nvSpPr>
+        <p:spPr>
+          <a:xfrm>
+            <a:off x="548640" y="1664208"/>
+            <a:ext cx="11091672" cy="12801"/>
+          </a:xfrm>
+          <a:prstGeom prst="rect">
+            <a:avLst/>
+          </a:prstGeom>
+          <a:solidFill>
+            <a:srgbClr val="B9D0FA"/>
+          </a:solidFill>
+          <a:ln>
+            <a:noFill/>
+          </a:ln>
+          <a:effectLst/>
+        </p:spPr>
+        <p:style>
+          <a:lnRef idx="1">
+            <a:schemeClr val="accent1"/>
+          </a:lnRef>
+          <a:fillRef idx="3">
+            <a:schemeClr val="accent1"/>
+          </a:fillRef>
+          <a:effectRef idx="2">
+            <a:schemeClr val="accent1"/>
+          </a:effectRef>
+          <a:fontRef idx="minor">
+            <a:schemeClr val="lt1"/>
+          </a:fontRef>
+        </p:style>
+        <p:txBody>
+          <a:bodyPr rtlCol="0" anchor="ctr"/>
+          <a:lstStyle/>
+          <a:p>
+            <a:pPr algn="ctr"/>
+          </a:p>
+        </p:txBody>
+      </p:sp>
+      <p:sp>
+        <p:nvSpPr>
+          <p:cNvPr id="7" name="TextBox 6"/>
           <p:cNvSpPr txBox="1"/>
           <p:nvPr/>
         </p:nvSpPr>
         <p:spPr>
           <a:xfrm>
-            <a:off x="868680" y="4709160"/>
-            <a:ext cx="10058400" cy="914400"/>
+            <a:off x="548640" y="1874519"/>
+            <a:ext cx="4297680" cy="4206240"/>
           </a:xfrm>
           <a:prstGeom prst="rect">
             <a:avLst/>
@@ -10372,34 +12197,141 @@
           </a:bodyPr>
           <a:lstStyle/>
           <a:p>
-            <a:pPr algn="l">
-              <a:spcAft>
-                <a:spcPts val="600"/>
-              </a:spcAft>
-              <a:buNone/>
-            </a:pPr>
-            <a:r>
-              <a:rPr sz="1600" b="0">
-                <a:solidFill>
-                  <a:srgbClr val="B9D0FA"/>
-                </a:solidFill>
-                <a:latin typeface="Arial"/>
-              </a:rPr>
-              <a:t>A model in a notebook helps nobody - ship it where anyone can ask about a passenger like Owen or Florence.</a:t>
-            </a:r>
-          </a:p>
-        </p:txBody>
-      </p:sp>
-      <p:sp>
-        <p:nvSpPr>
-          <p:cNvPr id="6" name="TextBox 5"/>
+            <a:pPr algn="l" indent="-228600" marL="228600">
+              <a:spcAft>
+                <a:spcPts val="800"/>
+              </a:spcAft>
+              <a:buClr>
+                <a:srgbClr val="1E5EF3"/>
+              </a:buClr>
+              <a:buChar char="—"/>
+            </a:pPr>
+            <a:r>
+              <a:rPr sz="1450" b="0">
+                <a:solidFill>
+                  <a:srgbClr val="202B38"/>
+                </a:solidFill>
+                <a:latin typeface="Arial"/>
+              </a:rPr>
+              <a:t>Model SELECTION picks the flexibility and the knob values - done on validation data or by CV, repeatable a thousand times.</a:t>
+            </a:r>
+          </a:p>
+          <a:p>
+            <a:pPr algn="l" indent="-228600" marL="228600">
+              <a:spcAft>
+                <a:spcPts val="800"/>
+              </a:spcAft>
+              <a:buClr>
+                <a:srgbClr val="1E5EF3"/>
+              </a:buClr>
+              <a:buChar char="—"/>
+            </a:pPr>
+            <a:r>
+              <a:rPr sz="1450" b="0">
+                <a:solidFill>
+                  <a:srgbClr val="202B38"/>
+                </a:solidFill>
+                <a:latin typeface="Arial"/>
+              </a:rPr>
+              <a:t>Model ASSESSMENT estimates how the final model will do on genuinely new data - done exactly once, on the untouched test set.</a:t>
+            </a:r>
+          </a:p>
+          <a:p>
+            <a:pPr algn="l" indent="-228600" marL="228600">
+              <a:spcAft>
+                <a:spcPts val="800"/>
+              </a:spcAft>
+              <a:buClr>
+                <a:srgbClr val="1E5EF3"/>
+              </a:buClr>
+              <a:buChar char="—"/>
+            </a:pPr>
+            <a:r>
+              <a:rPr sz="1450" b="0">
+                <a:solidFill>
+                  <a:srgbClr val="202B38"/>
+                </a:solidFill>
+                <a:latin typeface="Arial"/>
+              </a:rPr>
+              <a:t>Select on the test set and it silently becomes a validation set: you tuned toward it, so its score can no longer surprise you - it overestimates.</a:t>
+            </a:r>
+          </a:p>
+          <a:p>
+            <a:pPr algn="l" indent="-228600" marL="228600">
+              <a:spcAft>
+                <a:spcPts val="800"/>
+              </a:spcAft>
+              <a:buClr>
+                <a:srgbClr val="1E5EF3"/>
+              </a:buClr>
+              <a:buChar char="—"/>
+            </a:pPr>
+            <a:r>
+              <a:rPr sz="1450" b="0">
+                <a:solidFill>
+                  <a:srgbClr val="202B38"/>
+                </a:solidFill>
+                <a:latin typeface="Arial"/>
+              </a:rPr>
+              <a:t>A number you optimized against is a target you hit, not a forecast - that is the whole reason the REPORT band opens once.</a:t>
+            </a:r>
+          </a:p>
+          <a:p>
+            <a:pPr algn="l" indent="-228600" marL="228600">
+              <a:spcAft>
+                <a:spcPts val="800"/>
+              </a:spcAft>
+              <a:buClr>
+                <a:srgbClr val="1E5EF3"/>
+              </a:buClr>
+              <a:buChar char="—"/>
+            </a:pPr>
+            <a:r>
+              <a:rPr sz="1450" b="0">
+                <a:solidFill>
+                  <a:srgbClr val="202B38"/>
+                </a:solidFill>
+                <a:latin typeface="Arial"/>
+              </a:rPr>
+              <a:t>The verbs bar, unchanged since Session 2: FIT on train, CHOOSE inside it by CV, REPORT on the sealed test rows.</a:t>
+            </a:r>
+          </a:p>
+        </p:txBody>
+      </p:sp>
+      <p:pic>
+        <p:nvPicPr>
+          <p:cNvPr id="8" name="Picture 7" descr="select_vs_assess.png"/>
+          <p:cNvPicPr>
+            <a:picLocks noChangeAspect="1"/>
+          </p:cNvPicPr>
+          <p:nvPr/>
+        </p:nvPicPr>
+        <p:blipFill>
+          <a:blip r:embed="rId2"/>
+          <a:stretch>
+            <a:fillRect/>
+          </a:stretch>
+        </p:blipFill>
+        <p:spPr>
+          <a:xfrm>
+            <a:off x="5120640" y="1874519"/>
+            <a:ext cx="6492240" cy="3456767"/>
+          </a:xfrm>
+          <a:prstGeom prst="rect">
+            <a:avLst/>
+          </a:prstGeom>
+        </p:spPr>
+      </p:pic>
+      <p:sp>
+        <p:nvSpPr>
+          <p:cNvPr id="9" name="TextBox 8"/>
           <p:cNvSpPr txBox="1"/>
           <p:nvPr/>
         </p:nvSpPr>
         <p:spPr>
           <a:xfrm>
-            <a:off x="548640" y="6473952"/>
-            <a:ext cx="7315200" cy="292608"/>
+            <a:off x="5120640" y="6062471"/>
+            <a:ext cx="6492240" cy="365760"/>
           </a:xfrm>
           <a:prstGeom prst="rect">
             <a:avLst/>
@@ -10412,34 +12344,34 @@
           </a:bodyPr>
           <a:lstStyle/>
           <a:p>
-            <a:pPr algn="l">
+            <a:pPr algn="ctr">
               <a:spcAft>
                 <a:spcPts val="600"/>
               </a:spcAft>
               <a:buNone/>
             </a:pPr>
             <a:r>
-              <a:rPr sz="900" b="0">
-                <a:solidFill>
-                  <a:srgbClr val="B9D0FA"/>
-                </a:solidFill>
-                <a:latin typeface="Arial"/>
-              </a:rPr>
-              <a:t>M2 Session 4 - Optimization and Deployment</a:t>
-            </a:r>
-          </a:p>
-        </p:txBody>
-      </p:sp>
-      <p:sp>
-        <p:nvSpPr>
-          <p:cNvPr id="7" name="TextBox 6"/>
+              <a:rPr sz="1100" b="0">
+                <a:solidFill>
+                  <a:srgbClr val="5B6774"/>
+                </a:solidFill>
+                <a:latin typeface="Arial"/>
+              </a:rPr>
+              <a:t>Two jobs over the same verbs bar: selection lives left of the seal; assessment spends it. Harvard CS109A / ISLR ch. 5.</a:t>
+            </a:r>
+          </a:p>
+        </p:txBody>
+      </p:sp>
+      <p:sp>
+        <p:nvSpPr>
+          <p:cNvPr id="10" name="TextBox 9"/>
           <p:cNvSpPr txBox="1"/>
           <p:nvPr/>
         </p:nvSpPr>
         <p:spPr>
           <a:xfrm>
-            <a:off x="11292840" y="6473952"/>
-            <a:ext cx="548640" cy="292608"/>
+            <a:off x="548640" y="6473952"/>
+            <a:ext cx="7315200" cy="292608"/>
           </a:xfrm>
           <a:prstGeom prst="rect">
             <a:avLst/>
@@ -10452,6 +12384,46 @@
           </a:bodyPr>
           <a:lstStyle/>
           <a:p>
+            <a:pPr algn="l">
+              <a:spcAft>
+                <a:spcPts val="600"/>
+              </a:spcAft>
+              <a:buNone/>
+            </a:pPr>
+            <a:r>
+              <a:rPr sz="900" b="0">
+                <a:solidFill>
+                  <a:srgbClr val="5B6774"/>
+                </a:solidFill>
+                <a:latin typeface="Arial"/>
+              </a:rPr>
+              <a:t>M2 Session 4 - Optimization and Deployment</a:t>
+            </a:r>
+          </a:p>
+        </p:txBody>
+      </p:sp>
+      <p:sp>
+        <p:nvSpPr>
+          <p:cNvPr id="11" name="TextBox 10"/>
+          <p:cNvSpPr txBox="1"/>
+          <p:nvPr/>
+        </p:nvSpPr>
+        <p:spPr>
+          <a:xfrm>
+            <a:off x="11292840" y="6473952"/>
+            <a:ext cx="548640" cy="292608"/>
+          </a:xfrm>
+          <a:prstGeom prst="rect">
+            <a:avLst/>
+          </a:prstGeom>
+          <a:noFill/>
+        </p:spPr>
+        <p:txBody>
+          <a:bodyPr wrap="square">
+            <a:spAutoFit/>
+          </a:bodyPr>
+          <a:lstStyle/>
+          <a:p>
             <a:pPr algn="r">
               <a:spcAft>
                 <a:spcPts val="600"/>
@@ -10461,7 +12433,7 @@
             <a:r>
               <a:rPr sz="900" b="0">
                 <a:solidFill>
-                  <a:srgbClr val="B9D0FA"/>
+                  <a:srgbClr val="5B6774"/>
                 </a:solidFill>
                 <a:latin typeface="Arial"/>
               </a:rPr>

--- a/presentations/m2-session-4-optimization-and-deployment.pptx
+++ b/presentations/m2-session-4-optimization-and-deployment.pptx
@@ -7,23 +7,23 @@
   <p:sldIdLst>
     <p:sldId id="256" r:id="rId7"/>
     <p:sldId id="257" r:id="rId8"/>
-    <p:sldId id="258" r:id="rId9"/>
-    <p:sldId id="259" r:id="rId10"/>
-    <p:sldId id="260" r:id="rId11"/>
-    <p:sldId id="261" r:id="rId12"/>
-    <p:sldId id="262" r:id="rId13"/>
-    <p:sldId id="263" r:id="rId14"/>
-    <p:sldId id="264" r:id="rId15"/>
-    <p:sldId id="265" r:id="rId16"/>
-    <p:sldId id="266" r:id="rId17"/>
-    <p:sldId id="267" r:id="rId18"/>
-    <p:sldId id="268" r:id="rId19"/>
-    <p:sldId id="269" r:id="rId20"/>
-    <p:sldId id="270" r:id="rId21"/>
-    <p:sldId id="271" r:id="rId22"/>
-    <p:sldId id="272" r:id="rId23"/>
-    <p:sldId id="273" r:id="rId24"/>
-    <p:sldId id="274" r:id="rId25"/>
+    <p:sldId id="258" r:id="rId10"/>
+    <p:sldId id="259" r:id="rId11"/>
+    <p:sldId id="260" r:id="rId12"/>
+    <p:sldId id="261" r:id="rId13"/>
+    <p:sldId id="262" r:id="rId14"/>
+    <p:sldId id="263" r:id="rId15"/>
+    <p:sldId id="264" r:id="rId16"/>
+    <p:sldId id="265" r:id="rId17"/>
+    <p:sldId id="266" r:id="rId18"/>
+    <p:sldId id="267" r:id="rId19"/>
+    <p:sldId id="268" r:id="rId20"/>
+    <p:sldId id="269" r:id="rId21"/>
+    <p:sldId id="270" r:id="rId22"/>
+    <p:sldId id="271" r:id="rId23"/>
+    <p:sldId id="272" r:id="rId24"/>
+    <p:sldId id="273" r:id="rId25"/>
+    <p:sldId id="274" r:id="rId26"/>
   </p:sldIdLst>
   <p:sldSz cx="12191695" cy="6858000" type="screen4x3"/>
   <p:notesSz cx="6858000" cy="9144000"/>
@@ -123,6 +123,986 @@
     </a:lvl9pPr>
   </p:defaultTextStyle>
 </p:presentation>
+</file>
+
+<file path=ppt/notesMasters/notesMaster1.xml><?xml version="1.0" encoding="utf-8"?>
+<p:notesMaster xmlns:a="http://schemas.openxmlformats.org/drawingml/2006/main" xmlns:p="http://schemas.openxmlformats.org/presentationml/2006/main" xmlns:r="http://schemas.openxmlformats.org/officeDocument/2006/relationships">
+  <p:cSld>
+    <p:bg>
+      <p:bgRef idx="1001">
+        <a:schemeClr val="bg1"/>
+      </p:bgRef>
+    </p:bg>
+    <p:spTree>
+      <p:nvGrpSpPr>
+        <p:cNvPr id="1" name=""/>
+        <p:cNvGrpSpPr/>
+        <p:nvPr/>
+      </p:nvGrpSpPr>
+      <p:grpSpPr>
+        <a:xfrm>
+          <a:off x="0" y="0"/>
+          <a:ext cx="0" cy="0"/>
+          <a:chOff x="0" y="0"/>
+          <a:chExt cx="0" cy="0"/>
+        </a:xfrm>
+      </p:grpSpPr>
+      <p:sp>
+        <p:nvSpPr>
+          <p:cNvPr id="2" name="Header Placeholder 1"/>
+          <p:cNvSpPr>
+            <a:spLocks noGrp="1"/>
+          </p:cNvSpPr>
+          <p:nvPr>
+            <p:ph type="hdr" sz="quarter"/>
+          </p:nvPr>
+        </p:nvSpPr>
+        <p:spPr>
+          <a:xfrm>
+            <a:off x="0" y="0"/>
+            <a:ext cx="2971800" cy="457200"/>
+          </a:xfrm>
+          <a:prstGeom prst="rect">
+            <a:avLst/>
+          </a:prstGeom>
+        </p:spPr>
+        <p:txBody>
+          <a:bodyPr vert="horz" lIns="91440" tIns="45720" rIns="91440" bIns="45720" rtlCol="0"/>
+          <a:lstStyle>
+            <a:lvl1pPr algn="l">
+              <a:defRPr sz="1200"/>
+            </a:lvl1pPr>
+          </a:lstStyle>
+          <a:p>
+            <a:endParaRPr lang="en-US"/>
+          </a:p>
+        </p:txBody>
+      </p:sp>
+      <p:sp>
+        <p:nvSpPr>
+          <p:cNvPr id="3" name="Date Placeholder 2"/>
+          <p:cNvSpPr>
+            <a:spLocks noGrp="1"/>
+          </p:cNvSpPr>
+          <p:nvPr>
+            <p:ph type="dt" idx="1"/>
+          </p:nvPr>
+        </p:nvSpPr>
+        <p:spPr>
+          <a:xfrm>
+            <a:off x="3884613" y="0"/>
+            <a:ext cx="2971800" cy="457200"/>
+          </a:xfrm>
+          <a:prstGeom prst="rect">
+            <a:avLst/>
+          </a:prstGeom>
+        </p:spPr>
+        <p:txBody>
+          <a:bodyPr vert="horz" lIns="91440" tIns="45720" rIns="91440" bIns="45720" rtlCol="0"/>
+          <a:lstStyle>
+            <a:lvl1pPr algn="r">
+              <a:defRPr sz="1200"/>
+            </a:lvl1pPr>
+          </a:lstStyle>
+          <a:p>
+            <a:fld id="{0F89C1C7-3DCD-1040-A9CF-14679D8B5DDD}" type="datetimeFigureOut">
+              <a:rPr lang="en-US" smtClean="0"/>
+              <a:t>10/17/16</a:t>
+            </a:fld>
+            <a:endParaRPr lang="en-US"/>
+          </a:p>
+        </p:txBody>
+      </p:sp>
+      <p:sp>
+        <p:nvSpPr>
+          <p:cNvPr id="4" name="Slide Image Placeholder 3"/>
+          <p:cNvSpPr>
+            <a:spLocks noGrp="1" noRot="1" noChangeAspect="1"/>
+          </p:cNvSpPr>
+          <p:nvPr>
+            <p:ph type="sldImg" idx="2"/>
+          </p:nvPr>
+        </p:nvSpPr>
+        <p:spPr>
+          <a:xfrm>
+            <a:off x="1143000" y="685800"/>
+            <a:ext cx="4572000" cy="3429000"/>
+          </a:xfrm>
+          <a:prstGeom prst="rect">
+            <a:avLst/>
+          </a:prstGeom>
+          <a:noFill/>
+          <a:ln w="12700">
+            <a:solidFill>
+              <a:prstClr val="black"/>
+            </a:solidFill>
+          </a:ln>
+        </p:spPr>
+        <p:txBody>
+          <a:bodyPr vert="horz" lIns="91440" tIns="45720" rIns="91440" bIns="45720" rtlCol="0" anchor="ctr"/>
+          <a:lstStyle/>
+          <a:p>
+            <a:endParaRPr lang="en-US"/>
+          </a:p>
+        </p:txBody>
+      </p:sp>
+      <p:sp>
+        <p:nvSpPr>
+          <p:cNvPr id="5" name="Notes Placeholder 4"/>
+          <p:cNvSpPr>
+            <a:spLocks noGrp="1"/>
+          </p:cNvSpPr>
+          <p:nvPr>
+            <p:ph type="body" sz="quarter" idx="3"/>
+          </p:nvPr>
+        </p:nvSpPr>
+        <p:spPr>
+          <a:xfrm>
+            <a:off x="685800" y="4343400"/>
+            <a:ext cx="5486400" cy="4114800"/>
+          </a:xfrm>
+          <a:prstGeom prst="rect">
+            <a:avLst/>
+          </a:prstGeom>
+        </p:spPr>
+        <p:txBody>
+          <a:bodyPr vert="horz" lIns="91440" tIns="45720" rIns="91440" bIns="45720" rtlCol="0"/>
+          <a:lstStyle/>
+          <a:p>
+            <a:pPr lvl="0"/>
+            <a:r>
+              <a:rPr lang="en-US" smtClean="0"/>
+              <a:t>Click to edit Master text styles</a:t>
+            </a:r>
+          </a:p>
+          <a:p>
+            <a:pPr lvl="1"/>
+            <a:r>
+              <a:rPr lang="en-US" smtClean="0"/>
+              <a:t>Second level</a:t>
+            </a:r>
+          </a:p>
+          <a:p>
+            <a:pPr lvl="2"/>
+            <a:r>
+              <a:rPr lang="en-US" smtClean="0"/>
+              <a:t>Third level</a:t>
+            </a:r>
+          </a:p>
+          <a:p>
+            <a:pPr lvl="3"/>
+            <a:r>
+              <a:rPr lang="en-US" smtClean="0"/>
+              <a:t>Fourth level</a:t>
+            </a:r>
+          </a:p>
+          <a:p>
+            <a:pPr lvl="4"/>
+            <a:r>
+              <a:rPr lang="en-US" smtClean="0"/>
+              <a:t>Fifth level</a:t>
+            </a:r>
+            <a:endParaRPr lang="en-US"/>
+          </a:p>
+        </p:txBody>
+      </p:sp>
+      <p:sp>
+        <p:nvSpPr>
+          <p:cNvPr id="6" name="Footer Placeholder 5"/>
+          <p:cNvSpPr>
+            <a:spLocks noGrp="1"/>
+          </p:cNvSpPr>
+          <p:nvPr>
+            <p:ph type="ftr" sz="quarter" idx="4"/>
+          </p:nvPr>
+        </p:nvSpPr>
+        <p:spPr>
+          <a:xfrm>
+            <a:off x="0" y="8685213"/>
+            <a:ext cx="2971800" cy="457200"/>
+          </a:xfrm>
+          <a:prstGeom prst="rect">
+            <a:avLst/>
+          </a:prstGeom>
+        </p:spPr>
+        <p:txBody>
+          <a:bodyPr vert="horz" lIns="91440" tIns="45720" rIns="91440" bIns="45720" rtlCol="0" anchor="b"/>
+          <a:lstStyle>
+            <a:lvl1pPr algn="l">
+              <a:defRPr sz="1200"/>
+            </a:lvl1pPr>
+          </a:lstStyle>
+          <a:p>
+            <a:endParaRPr lang="en-US"/>
+          </a:p>
+        </p:txBody>
+      </p:sp>
+      <p:sp>
+        <p:nvSpPr>
+          <p:cNvPr id="7" name="Slide Number Placeholder 6"/>
+          <p:cNvSpPr>
+            <a:spLocks noGrp="1"/>
+          </p:cNvSpPr>
+          <p:nvPr>
+            <p:ph type="sldNum" sz="quarter" idx="5"/>
+          </p:nvPr>
+        </p:nvSpPr>
+        <p:spPr>
+          <a:xfrm>
+            <a:off x="3884613" y="8685213"/>
+            <a:ext cx="2971800" cy="457200"/>
+          </a:xfrm>
+          <a:prstGeom prst="rect">
+            <a:avLst/>
+          </a:prstGeom>
+        </p:spPr>
+        <p:txBody>
+          <a:bodyPr vert="horz" lIns="91440" tIns="45720" rIns="91440" bIns="45720" rtlCol="0" anchor="b"/>
+          <a:lstStyle>
+            <a:lvl1pPr algn="r">
+              <a:defRPr sz="1200"/>
+            </a:lvl1pPr>
+          </a:lstStyle>
+          <a:p>
+            <a:fld id="{BB5E49A5-4136-284D-997B-48E1D791AD67}" type="slidenum">
+              <a:rPr lang="en-US" smtClean="0"/>
+              <a:t>‹#›</a:t>
+            </a:fld>
+            <a:endParaRPr lang="en-US"/>
+          </a:p>
+        </p:txBody>
+      </p:sp>
+    </p:spTree>
+    <p:extLst>
+      <p:ext uri="{BB962C8B-B14F-4D97-AF65-F5344CB8AC3E}">
+        <p14:creationId xmlns:p14="http://schemas.microsoft.com/office/powerpoint/2010/main" val="2623252185"/>
+      </p:ext>
+    </p:extLst>
+  </p:cSld>
+  <p:clrMap bg1="lt1" tx1="dk1" bg2="lt2" tx2="dk2" accent1="accent1" accent2="accent2" accent3="accent3" accent4="accent4" accent5="accent5" accent6="accent6" hlink="hlink" folHlink="folHlink"/>
+  <p:notesStyle>
+    <a:lvl1pPr marL="0" algn="l" defTabSz="457200" rtl="0" eaLnBrk="1" latinLnBrk="0" hangingPunct="1">
+      <a:defRPr sz="1200" kern="1200">
+        <a:solidFill>
+          <a:schemeClr val="tx1"/>
+        </a:solidFill>
+        <a:latin typeface="+mn-lt"/>
+        <a:ea typeface="+mn-ea"/>
+        <a:cs typeface="+mn-cs"/>
+      </a:defRPr>
+    </a:lvl1pPr>
+    <a:lvl2pPr marL="457200" algn="l" defTabSz="457200" rtl="0" eaLnBrk="1" latinLnBrk="0" hangingPunct="1">
+      <a:defRPr sz="1200" kern="1200">
+        <a:solidFill>
+          <a:schemeClr val="tx1"/>
+        </a:solidFill>
+        <a:latin typeface="+mn-lt"/>
+        <a:ea typeface="+mn-ea"/>
+        <a:cs typeface="+mn-cs"/>
+      </a:defRPr>
+    </a:lvl2pPr>
+    <a:lvl3pPr marL="914400" algn="l" defTabSz="457200" rtl="0" eaLnBrk="1" latinLnBrk="0" hangingPunct="1">
+      <a:defRPr sz="1200" kern="1200">
+        <a:solidFill>
+          <a:schemeClr val="tx1"/>
+        </a:solidFill>
+        <a:latin typeface="+mn-lt"/>
+        <a:ea typeface="+mn-ea"/>
+        <a:cs typeface="+mn-cs"/>
+      </a:defRPr>
+    </a:lvl3pPr>
+    <a:lvl4pPr marL="1371600" algn="l" defTabSz="457200" rtl="0" eaLnBrk="1" latinLnBrk="0" hangingPunct="1">
+      <a:defRPr sz="1200" kern="1200">
+        <a:solidFill>
+          <a:schemeClr val="tx1"/>
+        </a:solidFill>
+        <a:latin typeface="+mn-lt"/>
+        <a:ea typeface="+mn-ea"/>
+        <a:cs typeface="+mn-cs"/>
+      </a:defRPr>
+    </a:lvl4pPr>
+    <a:lvl5pPr marL="1828800" algn="l" defTabSz="457200" rtl="0" eaLnBrk="1" latinLnBrk="0" hangingPunct="1">
+      <a:defRPr sz="1200" kern="1200">
+        <a:solidFill>
+          <a:schemeClr val="tx1"/>
+        </a:solidFill>
+        <a:latin typeface="+mn-lt"/>
+        <a:ea typeface="+mn-ea"/>
+        <a:cs typeface="+mn-cs"/>
+      </a:defRPr>
+    </a:lvl5pPr>
+    <a:lvl6pPr marL="2286000" algn="l" defTabSz="457200" rtl="0" eaLnBrk="1" latinLnBrk="0" hangingPunct="1">
+      <a:defRPr sz="1200" kern="1200">
+        <a:solidFill>
+          <a:schemeClr val="tx1"/>
+        </a:solidFill>
+        <a:latin typeface="+mn-lt"/>
+        <a:ea typeface="+mn-ea"/>
+        <a:cs typeface="+mn-cs"/>
+      </a:defRPr>
+    </a:lvl6pPr>
+    <a:lvl7pPr marL="2743200" algn="l" defTabSz="457200" rtl="0" eaLnBrk="1" latinLnBrk="0" hangingPunct="1">
+      <a:defRPr sz="1200" kern="1200">
+        <a:solidFill>
+          <a:schemeClr val="tx1"/>
+        </a:solidFill>
+        <a:latin typeface="+mn-lt"/>
+        <a:ea typeface="+mn-ea"/>
+        <a:cs typeface="+mn-cs"/>
+      </a:defRPr>
+    </a:lvl7pPr>
+    <a:lvl8pPr marL="3200400" algn="l" defTabSz="457200" rtl="0" eaLnBrk="1" latinLnBrk="0" hangingPunct="1">
+      <a:defRPr sz="1200" kern="1200">
+        <a:solidFill>
+          <a:schemeClr val="tx1"/>
+        </a:solidFill>
+        <a:latin typeface="+mn-lt"/>
+        <a:ea typeface="+mn-ea"/>
+        <a:cs typeface="+mn-cs"/>
+      </a:defRPr>
+    </a:lvl8pPr>
+    <a:lvl9pPr marL="3657600" algn="l" defTabSz="457200" rtl="0" eaLnBrk="1" latinLnBrk="0" hangingPunct="1">
+      <a:defRPr sz="1200" kern="1200">
+        <a:solidFill>
+          <a:schemeClr val="tx1"/>
+        </a:solidFill>
+        <a:latin typeface="+mn-lt"/>
+        <a:ea typeface="+mn-ea"/>
+        <a:cs typeface="+mn-cs"/>
+      </a:defRPr>
+    </a:lvl9pPr>
+  </p:notesStyle>
+</p:notesMaster>
+</file>
+
+<file path=ppt/notesSlides/notesSlide1.xml><?xml version="1.0" encoding="utf-8"?>
+<p:notes xmlns:a="http://schemas.openxmlformats.org/drawingml/2006/main" xmlns:p="http://schemas.openxmlformats.org/presentationml/2006/main" xmlns:r="http://schemas.openxmlformats.org/officeDocument/2006/relationships">
+  <p:cSld>
+    <p:spTree>
+      <p:nvGrpSpPr>
+        <p:cNvPr id="1" name=""/>
+        <p:cNvGrpSpPr/>
+        <p:nvPr/>
+      </p:nvGrpSpPr>
+      <p:grpSpPr>
+        <a:xfrm>
+          <a:off x="0" y="0"/>
+          <a:ext cx="0" cy="0"/>
+          <a:chOff x="0" y="0"/>
+          <a:chExt cx="0" cy="0"/>
+        </a:xfrm>
+      </p:grpSpPr>
+      <p:sp>
+        <p:nvSpPr>
+          <p:cNvPr id="2" name="Slide Image Placeholder 1"/>
+          <p:cNvSpPr>
+            <a:spLocks noGrp="1"/>
+          </p:cNvSpPr>
+          <p:nvPr>
+            <p:ph type="sldImg" idx="2"/>
+          </p:nvPr>
+        </p:nvSpPr>
+        <p:spPr/>
+      </p:sp>
+      <p:sp>
+        <p:nvSpPr>
+          <p:cNvPr id="3" name="Notes Placeholder 2"/>
+          <p:cNvSpPr>
+            <a:spLocks noGrp="1"/>
+          </p:cNvSpPr>
+          <p:nvPr>
+            <p:ph type="body" idx="3" sz="quarter"/>
+          </p:nvPr>
+        </p:nvSpPr>
+        <p:spPr/>
+        <p:txBody>
+          <a:bodyPr/>
+          <a:lstStyle/>
+          <a:p>
+            <a:r>
+              <a:t>Orthogonalization is a long word for a simple demand: one knob, one job. A radio where every knob changes volume, station and tone at once cannot be tuned - and turning random ML knobs is that radio. First name the bar you are failing, then reach for that bar's knob only. Ask the class: your model aces training but flops on validation - which bar, which knob?</a:t>
+            </a:r>
+          </a:p>
+        </p:txBody>
+      </p:sp>
+      <p:sp>
+        <p:nvSpPr>
+          <p:cNvPr id="4" name="Slide Number Placeholder 3"/>
+          <p:cNvSpPr>
+            <a:spLocks noGrp="1"/>
+          </p:cNvSpPr>
+          <p:nvPr>
+            <p:ph type="sldNum" idx="5" sz="quarter"/>
+          </p:nvPr>
+        </p:nvSpPr>
+        <p:spPr/>
+      </p:sp>
+    </p:spTree>
+  </p:cSld>
+  <p:clrMapOvr>
+    <a:masterClrMapping/>
+  </p:clrMapOvr>
+</p:notes>
+</file>
+
+<file path=ppt/notesSlides/notesSlide2.xml><?xml version="1.0" encoding="utf-8"?>
+<p:notes xmlns:a="http://schemas.openxmlformats.org/drawingml/2006/main" xmlns:p="http://schemas.openxmlformats.org/presentationml/2006/main" xmlns:r="http://schemas.openxmlformats.org/officeDocument/2006/relationships">
+  <p:cSld>
+    <p:spTree>
+      <p:nvGrpSpPr>
+        <p:cNvPr id="1" name=""/>
+        <p:cNvGrpSpPr/>
+        <p:nvPr/>
+      </p:nvGrpSpPr>
+      <p:grpSpPr>
+        <a:xfrm>
+          <a:off x="0" y="0"/>
+          <a:ext cx="0" cy="0"/>
+          <a:chOff x="0" y="0"/>
+          <a:chExt cx="0" cy="0"/>
+        </a:xfrm>
+      </p:grpSpPr>
+      <p:sp>
+        <p:nvSpPr>
+          <p:cNvPr id="2" name="Slide Image Placeholder 1"/>
+          <p:cNvSpPr>
+            <a:spLocks noGrp="1"/>
+          </p:cNvSpPr>
+          <p:nvPr>
+            <p:ph type="sldImg" idx="2"/>
+          </p:nvPr>
+        </p:nvSpPr>
+        <p:spPr/>
+      </p:sp>
+      <p:sp>
+        <p:nvSpPr>
+          <p:cNvPr id="3" name="Notes Placeholder 2"/>
+          <p:cNvSpPr>
+            <a:spLocks noGrp="1"/>
+          </p:cNvSpPr>
+          <p:nvPr>
+            <p:ph type="body" idx="3" sz="quarter"/>
+          </p:nvPr>
+        </p:nvSpPr>
+        <p:spPr/>
+        <p:txBody>
+          <a:bodyPr/>
+          <a:lstStyle/>
+          <a:p>
+            <a:r>
+              <a:t>The kitchen carries this one: the oven temperature is a hyperparameter - you set it before baking; what happens to the ingredients inside is the parameters - the process finds those itself. You never hand-set a parameter, and the model never chooses a hyperparameter. Ask the class: max_depth of a tree - oven dial or cake batter?</a:t>
+            </a:r>
+          </a:p>
+        </p:txBody>
+      </p:sp>
+      <p:sp>
+        <p:nvSpPr>
+          <p:cNvPr id="4" name="Slide Number Placeholder 3"/>
+          <p:cNvSpPr>
+            <a:spLocks noGrp="1"/>
+          </p:cNvSpPr>
+          <p:nvPr>
+            <p:ph type="sldNum" idx="5" sz="quarter"/>
+          </p:nvPr>
+        </p:nvSpPr>
+        <p:spPr/>
+      </p:sp>
+    </p:spTree>
+  </p:cSld>
+  <p:clrMapOvr>
+    <a:masterClrMapping/>
+  </p:clrMapOvr>
+</p:notes>
+</file>
+
+<file path=ppt/notesSlides/notesSlide3.xml><?xml version="1.0" encoding="utf-8"?>
+<p:notes xmlns:a="http://schemas.openxmlformats.org/drawingml/2006/main" xmlns:p="http://schemas.openxmlformats.org/presentationml/2006/main" xmlns:r="http://schemas.openxmlformats.org/officeDocument/2006/relationships">
+  <p:cSld>
+    <p:spTree>
+      <p:nvGrpSpPr>
+        <p:cNvPr id="1" name=""/>
+        <p:cNvGrpSpPr/>
+        <p:nvPr/>
+      </p:nvGrpSpPr>
+      <p:grpSpPr>
+        <a:xfrm>
+          <a:off x="0" y="0"/>
+          <a:ext cx="0" cy="0"/>
+          <a:chOff x="0" y="0"/>
+          <a:chExt cx="0" cy="0"/>
+        </a:xfrm>
+      </p:grpSpPr>
+      <p:sp>
+        <p:nvSpPr>
+          <p:cNvPr id="2" name="Slide Image Placeholder 1"/>
+          <p:cNvSpPr>
+            <a:spLocks noGrp="1"/>
+          </p:cNvSpPr>
+          <p:nvPr>
+            <p:ph type="sldImg" idx="2"/>
+          </p:nvPr>
+        </p:nvSpPr>
+        <p:spPr/>
+      </p:sp>
+      <p:sp>
+        <p:nvSpPr>
+          <p:cNvPr id="3" name="Notes Placeholder 2"/>
+          <p:cNvSpPr>
+            <a:spLocks noGrp="1"/>
+          </p:cNvSpPr>
+          <p:nvPr>
+            <p:ph type="body" idx="3" sz="quarter"/>
+          </p:nvPr>
+        </p:nvSpPr>
+        <p:spPr/>
+        <p:txBody>
+          <a:bodyPr/>
+          <a:lstStyle/>
+          <a:p>
+            <a:r>
+              <a:t>Deflate the new word: tuning is nothing but Session 3's tournament run again, with versions of one model as the contestants instead of six different families. MIT's reframe makes it legitimate: two settings really are two algorithms. Same referee, same rules, new entrants. Ask the class: if you already trust the tournament from last week, what is actually new today?</a:t>
+            </a:r>
+          </a:p>
+        </p:txBody>
+      </p:sp>
+      <p:sp>
+        <p:nvSpPr>
+          <p:cNvPr id="4" name="Slide Number Placeholder 3"/>
+          <p:cNvSpPr>
+            <a:spLocks noGrp="1"/>
+          </p:cNvSpPr>
+          <p:nvPr>
+            <p:ph type="sldNum" idx="5" sz="quarter"/>
+          </p:nvPr>
+        </p:nvSpPr>
+        <p:spPr/>
+      </p:sp>
+    </p:spTree>
+  </p:cSld>
+  <p:clrMapOvr>
+    <a:masterClrMapping/>
+  </p:clrMapOvr>
+</p:notes>
+</file>
+
+<file path=ppt/notesSlides/notesSlide4.xml><?xml version="1.0" encoding="utf-8"?>
+<p:notes xmlns:a="http://schemas.openxmlformats.org/drawingml/2006/main" xmlns:p="http://schemas.openxmlformats.org/presentationml/2006/main" xmlns:r="http://schemas.openxmlformats.org/officeDocument/2006/relationships">
+  <p:cSld>
+    <p:spTree>
+      <p:nvGrpSpPr>
+        <p:cNvPr id="1" name=""/>
+        <p:cNvGrpSpPr/>
+        <p:nvPr/>
+      </p:nvGrpSpPr>
+      <p:grpSpPr>
+        <a:xfrm>
+          <a:off x="0" y="0"/>
+          <a:ext cx="0" cy="0"/>
+          <a:chOff x="0" y="0"/>
+          <a:chExt cx="0" cy="0"/>
+        </a:xfrm>
+      </p:grpSpPr>
+      <p:sp>
+        <p:nvSpPr>
+          <p:cNvPr id="2" name="Slide Image Placeholder 1"/>
+          <p:cNvSpPr>
+            <a:spLocks noGrp="1"/>
+          </p:cNvSpPr>
+          <p:nvPr>
+            <p:ph type="sldImg" idx="2"/>
+          </p:nvPr>
+        </p:nvSpPr>
+        <p:spPr/>
+      </p:sp>
+      <p:sp>
+        <p:nvSpPr>
+          <p:cNvPr id="3" name="Notes Placeholder 2"/>
+          <p:cNvSpPr>
+            <a:spLocks noGrp="1"/>
+          </p:cNvSpPr>
+          <p:nvPr>
+            <p:ph type="body" idx="3" sz="quarter"/>
+          </p:nvPr>
+        </p:nvSpPr>
+        <p:spPr/>
+        <p:txBody>
+          <a:bodyPr/>
+          <a:lstStyle/>
+          <a:p>
+            <a:r>
+              <a:t>The picture does the arguing: both panels spend nine trials, but the grid lines its shots up in three columns, so the knob that matters only ever sees three values - the ticks under the axis count them. Random scatters, so the important knob gets nine different values for the same budget. Ask the class: you get 20 trials and five knobs - grid or random, and why?</a:t>
+            </a:r>
+          </a:p>
+        </p:txBody>
+      </p:sp>
+      <p:sp>
+        <p:nvSpPr>
+          <p:cNvPr id="4" name="Slide Number Placeholder 3"/>
+          <p:cNvSpPr>
+            <a:spLocks noGrp="1"/>
+          </p:cNvSpPr>
+          <p:nvPr>
+            <p:ph type="sldNum" idx="5" sz="quarter"/>
+          </p:nvPr>
+        </p:nvSpPr>
+        <p:spPr/>
+      </p:sp>
+    </p:spTree>
+  </p:cSld>
+  <p:clrMapOvr>
+    <a:masterClrMapping/>
+  </p:clrMapOvr>
+</p:notes>
+</file>
+
+<file path=ppt/notesSlides/notesSlide5.xml><?xml version="1.0" encoding="utf-8"?>
+<p:notes xmlns:a="http://schemas.openxmlformats.org/drawingml/2006/main" xmlns:p="http://schemas.openxmlformats.org/presentationml/2006/main" xmlns:r="http://schemas.openxmlformats.org/officeDocument/2006/relationships">
+  <p:cSld>
+    <p:spTree>
+      <p:nvGrpSpPr>
+        <p:cNvPr id="1" name=""/>
+        <p:cNvGrpSpPr/>
+        <p:nvPr/>
+      </p:nvGrpSpPr>
+      <p:grpSpPr>
+        <a:xfrm>
+          <a:off x="0" y="0"/>
+          <a:ext cx="0" cy="0"/>
+          <a:chOff x="0" y="0"/>
+          <a:chExt cx="0" cy="0"/>
+        </a:xfrm>
+      </p:grpSpPr>
+      <p:sp>
+        <p:nvSpPr>
+          <p:cNvPr id="2" name="Slide Image Placeholder 1"/>
+          <p:cNvSpPr>
+            <a:spLocks noGrp="1"/>
+          </p:cNvSpPr>
+          <p:nvPr>
+            <p:ph type="sldImg" idx="2"/>
+          </p:nvPr>
+        </p:nvSpPr>
+        <p:spPr/>
+      </p:sp>
+      <p:sp>
+        <p:nvSpPr>
+          <p:cNvPr id="3" name="Notes Placeholder 2"/>
+          <p:cNvSpPr>
+            <a:spLocks noGrp="1"/>
+          </p:cNvSpPr>
+          <p:nvPr>
+            <p:ph type="body" idx="3" sz="quarter"/>
+          </p:nvPr>
+        </p:nvSpPr>
+        <p:spPr/>
+        <p:txBody>
+          <a:bodyPr/>
+          <a:lstStyle/>
+          <a:p>
+            <a:r>
+              <a:t>Error analysis is deliberately low-tech: open the mistakes, look at them by hand, and tally them into categories in a spreadsheet. The bottom row of percentages is the priority list - a 5% category cannot pay for a month of work, a 50% category is the month. Warn them about the guard: you will overfit whatever you stare at, hence the Eyeball/Blackbox split. Ask the class: why count first and fix second, not the other way round?</a:t>
+            </a:r>
+          </a:p>
+        </p:txBody>
+      </p:sp>
+      <p:sp>
+        <p:nvSpPr>
+          <p:cNvPr id="4" name="Slide Number Placeholder 3"/>
+          <p:cNvSpPr>
+            <a:spLocks noGrp="1"/>
+          </p:cNvSpPr>
+          <p:nvPr>
+            <p:ph type="sldNum" idx="5" sz="quarter"/>
+          </p:nvPr>
+        </p:nvSpPr>
+        <p:spPr/>
+      </p:sp>
+    </p:spTree>
+  </p:cSld>
+  <p:clrMapOvr>
+    <a:masterClrMapping/>
+  </p:clrMapOvr>
+</p:notes>
+</file>
+
+<file path=ppt/notesSlides/notesSlide6.xml><?xml version="1.0" encoding="utf-8"?>
+<p:notes xmlns:a="http://schemas.openxmlformats.org/drawingml/2006/main" xmlns:p="http://schemas.openxmlformats.org/presentationml/2006/main" xmlns:r="http://schemas.openxmlformats.org/officeDocument/2006/relationships">
+  <p:cSld>
+    <p:spTree>
+      <p:nvGrpSpPr>
+        <p:cNvPr id="1" name=""/>
+        <p:cNvGrpSpPr/>
+        <p:nvPr/>
+      </p:nvGrpSpPr>
+      <p:grpSpPr>
+        <a:xfrm>
+          <a:off x="0" y="0"/>
+          <a:ext cx="0" cy="0"/>
+          <a:chOff x="0" y="0"/>
+          <a:chExt cx="0" cy="0"/>
+        </a:xfrm>
+      </p:grpSpPr>
+      <p:sp>
+        <p:nvSpPr>
+          <p:cNvPr id="2" name="Slide Image Placeholder 1"/>
+          <p:cNvSpPr>
+            <a:spLocks noGrp="1"/>
+          </p:cNvSpPr>
+          <p:nvPr>
+            <p:ph type="sldImg" idx="2"/>
+          </p:nvPr>
+        </p:nvSpPr>
+        <p:spPr/>
+      </p:sp>
+      <p:sp>
+        <p:nvSpPr>
+          <p:cNvPr id="3" name="Notes Placeholder 2"/>
+          <p:cNvSpPr>
+            <a:spLocks noGrp="1"/>
+          </p:cNvSpPr>
+          <p:nvPr>
+            <p:ph type="body" idx="3" sz="quarter"/>
+          </p:nvPr>
+        </p:nvSpPr>
+        <p:spPr/>
+        <p:txBody>
+          <a:bodyPr/>
+          <a:lstStyle/>
+          <a:p>
+            <a:r>
+              <a:t>One scoreboard: with a single agreed number, ten experiments rank themselves; with three numbers, every comparison becomes a meeting. When something else genuinely matters - safety, speed - it becomes a bar to clear, not a second score to chase; exactly one number stays on the scoreboard. Ask the class: A wins precision, B wins recall - without a combiner, who ships?</a:t>
+            </a:r>
+          </a:p>
+        </p:txBody>
+      </p:sp>
+      <p:sp>
+        <p:nvSpPr>
+          <p:cNvPr id="4" name="Slide Number Placeholder 3"/>
+          <p:cNvSpPr>
+            <a:spLocks noGrp="1"/>
+          </p:cNvSpPr>
+          <p:nvPr>
+            <p:ph type="sldNum" idx="5" sz="quarter"/>
+          </p:nvPr>
+        </p:nvSpPr>
+        <p:spPr/>
+      </p:sp>
+    </p:spTree>
+  </p:cSld>
+  <p:clrMapOvr>
+    <a:masterClrMapping/>
+  </p:clrMapOvr>
+</p:notes>
+</file>
+
+<file path=ppt/notesSlides/notesSlide7.xml><?xml version="1.0" encoding="utf-8"?>
+<p:notes xmlns:a="http://schemas.openxmlformats.org/drawingml/2006/main" xmlns:p="http://schemas.openxmlformats.org/presentationml/2006/main" xmlns:r="http://schemas.openxmlformats.org/officeDocument/2006/relationships">
+  <p:cSld>
+    <p:spTree>
+      <p:nvGrpSpPr>
+        <p:cNvPr id="1" name=""/>
+        <p:cNvGrpSpPr/>
+        <p:nvPr/>
+      </p:nvGrpSpPr>
+      <p:grpSpPr>
+        <a:xfrm>
+          <a:off x="0" y="0"/>
+          <a:ext cx="0" cy="0"/>
+          <a:chOff x="0" y="0"/>
+          <a:chExt cx="0" cy="0"/>
+        </a:xfrm>
+      </p:grpSpPr>
+      <p:sp>
+        <p:nvSpPr>
+          <p:cNvPr id="2" name="Slide Image Placeholder 1"/>
+          <p:cNvSpPr>
+            <a:spLocks noGrp="1"/>
+          </p:cNvSpPr>
+          <p:nvPr>
+            <p:ph type="sldImg" idx="2"/>
+          </p:nvPr>
+        </p:nvSpPr>
+        <p:spPr/>
+      </p:sp>
+      <p:sp>
+        <p:nvSpPr>
+          <p:cNvPr id="3" name="Notes Placeholder 2"/>
+          <p:cNvSpPr>
+            <a:spLocks noGrp="1"/>
+          </p:cNvSpPr>
+          <p:nvPr>
+            <p:ph type="body" idx="3" sz="quarter"/>
+          </p:nvPr>
+        </p:nvSpPr>
+        <p:spPr/>
+        <p:txBody>
+          <a:bodyPr/>
+          <a:lstStyle/>
+          <a:p>
+            <a:r>
+              <a:t>Close the theory on the exam metaphor: practice tests choose your strategy - retake them all you like; the final exam grades it - and you sit it once. The moment you pick your strategy using the final's questions, the final stops measuring anything. Ask the class: why does a score you optimized against stop being a forecast?</a:t>
+            </a:r>
+          </a:p>
+        </p:txBody>
+      </p:sp>
+      <p:sp>
+        <p:nvSpPr>
+          <p:cNvPr id="4" name="Slide Number Placeholder 3"/>
+          <p:cNvSpPr>
+            <a:spLocks noGrp="1"/>
+          </p:cNvSpPr>
+          <p:nvPr>
+            <p:ph type="sldNum" idx="5" sz="quarter"/>
+          </p:nvPr>
+        </p:nvSpPr>
+        <p:spPr/>
+      </p:sp>
+    </p:spTree>
+  </p:cSld>
+  <p:clrMapOvr>
+    <a:masterClrMapping/>
+  </p:clrMapOvr>
+</p:notes>
+</file>
+
+<file path=ppt/notesSlides/notesSlide8.xml><?xml version="1.0" encoding="utf-8"?>
+<p:notes xmlns:a="http://schemas.openxmlformats.org/drawingml/2006/main" xmlns:p="http://schemas.openxmlformats.org/presentationml/2006/main" xmlns:r="http://schemas.openxmlformats.org/officeDocument/2006/relationships">
+  <p:cSld>
+    <p:spTree>
+      <p:nvGrpSpPr>
+        <p:cNvPr id="1" name=""/>
+        <p:cNvGrpSpPr/>
+        <p:nvPr/>
+      </p:nvGrpSpPr>
+      <p:grpSpPr>
+        <a:xfrm>
+          <a:off x="0" y="0"/>
+          <a:ext cx="0" cy="0"/>
+          <a:chOff x="0" y="0"/>
+          <a:chExt cx="0" cy="0"/>
+        </a:xfrm>
+      </p:grpSpPr>
+      <p:sp>
+        <p:nvSpPr>
+          <p:cNvPr id="2" name="Slide Image Placeholder 1"/>
+          <p:cNvSpPr>
+            <a:spLocks noGrp="1"/>
+          </p:cNvSpPr>
+          <p:nvPr>
+            <p:ph type="sldImg" idx="2"/>
+          </p:nvPr>
+        </p:nvSpPr>
+        <p:spPr/>
+      </p:sp>
+      <p:sp>
+        <p:nvSpPr>
+          <p:cNvPr id="3" name="Notes Placeholder 2"/>
+          <p:cNvSpPr>
+            <a:spLocks noGrp="1"/>
+          </p:cNvSpPr>
+          <p:nvPr>
+            <p:ph type="body" idx="3" sz="quarter"/>
+          </p:nvPr>
+        </p:nvSpPr>
+        <p:spPr/>
+        <p:txBody>
+          <a:bodyPr/>
+          <a:lstStyle/>
+          <a:p>
+            <a:r>
+              <a:t>Theory made real: 18 grid combos and 15 random draws all ran Session 3's tournament again, refereed by the same 5-fold CV, test set sealed. Random found a better setting than the grid with fewer tries - exactly the slide-6 prediction. Read the winning knobs out loud: capped depth and bigger leaves are brakes, regularization by another name. Ask the class: why is it no surprise the winner has LESS freedom than the default forest?</a:t>
+            </a:r>
+          </a:p>
+        </p:txBody>
+      </p:sp>
+      <p:sp>
+        <p:nvSpPr>
+          <p:cNvPr id="4" name="Slide Number Placeholder 3"/>
+          <p:cNvSpPr>
+            <a:spLocks noGrp="1"/>
+          </p:cNvSpPr>
+          <p:nvPr>
+            <p:ph type="sldNum" idx="5" sz="quarter"/>
+          </p:nvPr>
+        </p:nvSpPr>
+        <p:spPr/>
+      </p:sp>
+    </p:spTree>
+  </p:cSld>
+  <p:clrMapOvr>
+    <a:masterClrMapping/>
+  </p:clrMapOvr>
+</p:notes>
+</file>
+
+<file path=ppt/notesSlides/notesSlide9.xml><?xml version="1.0" encoding="utf-8"?>
+<p:notes xmlns:a="http://schemas.openxmlformats.org/drawingml/2006/main" xmlns:p="http://schemas.openxmlformats.org/presentationml/2006/main" xmlns:r="http://schemas.openxmlformats.org/officeDocument/2006/relationships">
+  <p:cSld>
+    <p:spTree>
+      <p:nvGrpSpPr>
+        <p:cNvPr id="1" name=""/>
+        <p:cNvGrpSpPr/>
+        <p:nvPr/>
+      </p:nvGrpSpPr>
+      <p:grpSpPr>
+        <a:xfrm>
+          <a:off x="0" y="0"/>
+          <a:ext cx="0" cy="0"/>
+          <a:chOff x="0" y="0"/>
+          <a:chExt cx="0" cy="0"/>
+        </a:xfrm>
+      </p:grpSpPr>
+      <p:sp>
+        <p:nvSpPr>
+          <p:cNvPr id="2" name="Slide Image Placeholder 1"/>
+          <p:cNvSpPr>
+            <a:spLocks noGrp="1"/>
+          </p:cNvSpPr>
+          <p:nvPr>
+            <p:ph type="sldImg" idx="2"/>
+          </p:nvPr>
+        </p:nvSpPr>
+        <p:spPr/>
+      </p:sp>
+      <p:sp>
+        <p:nvSpPr>
+          <p:cNvPr id="3" name="Notes Placeholder 2"/>
+          <p:cNvSpPr>
+            <a:spLocks noGrp="1"/>
+          </p:cNvSpPr>
+          <p:nvPr>
+            <p:ph type="body" idx="3" sz="quarter"/>
+          </p:nvPr>
+        </p:nvSpPr>
+        <p:spPr/>
+        <p:txBody>
+          <a:bodyPr/>
+          <a:lstStyle/>
+          <a:p>
+            <a:r>
+              <a:t>The final exam, sat once: the practice tests promised 0.8274 and the sealed final answered 0.8268 - a gap of 0.0006. That agreement is the reward for never peeking: a search judged honestly generalizes. Also set expectations: tuning bought about one percentage point, not a miracle. Ask the class: if we had checked the test score after every tuning try, what would this chart look like - and could we still trust it?</a:t>
+            </a:r>
+          </a:p>
+        </p:txBody>
+      </p:sp>
+      <p:sp>
+        <p:nvSpPr>
+          <p:cNvPr id="4" name="Slide Number Placeholder 3"/>
+          <p:cNvSpPr>
+            <a:spLocks noGrp="1"/>
+          </p:cNvSpPr>
+          <p:nvPr>
+            <p:ph type="sldNum" idx="5" sz="quarter"/>
+          </p:nvPr>
+        </p:nvSpPr>
+        <p:spPr/>
+      </p:sp>
+    </p:spTree>
+  </p:cSld>
+  <p:clrMapOvr>
+    <a:masterClrMapping/>
+  </p:clrMapOvr>
+</p:notes>
 </file>
 
 <file path=ppt/slideLayouts/slideLayout1.xml><?xml version="1.0" encoding="utf-8"?>
@@ -8762,7 +9742,7 @@
                 </a:solidFill>
                 <a:latin typeface="Arial"/>
               </a:rPr>
-              <a:t>Where we are: leak-proof pipeline (712/179, 18 features); LogReg champion CV 0.819 / test 0.838, no knobs left; Random Forest 0.797 has the most knobs - today's candidate.</a:t>
+              <a:t>Orthogonalization - in plain words: one knob does one job; a radio whose knobs all do everything is untunable.</a:t>
             </a:r>
           </a:p>
           <a:p>
@@ -8782,7 +9762,7 @@
                 </a:solidFill>
                 <a:latin typeface="Arial"/>
               </a:rPr>
-              <a:t>Ng's tuning philosophy: clear four bars in order - fit the training set, generalize to validation, hold up on test, work in the real world - and each bar has its OWN knobs.</a:t>
+              <a:t>Where we are: leak-proof pipeline (712/179, 18 features); LogReg champion CV 0.819 / test 0.838, no knobs left; Random Forest 0.797 has the most knobs - today's candidate.</a:t>
             </a:r>
           </a:p>
           <a:p>
@@ -8802,7 +9782,7 @@
                 </a:solidFill>
                 <a:latin typeface="Arial"/>
               </a:rPr>
-              <a:t>Failing training: bigger/better model. Failing validation: regularize (= penalize complexity) or add data. Failing test: your validation was over-tuned. Failing the world: your data or metric misses reality.</a:t>
+              <a:t>Ng's tuning philosophy: clear four bars in order - fit training, generalize to validation, hold up on test, work in the world - each bar with its OWN knobs.</a:t>
             </a:r>
           </a:p>
           <a:p>
@@ -8822,7 +9802,27 @@
                 </a:solidFill>
                 <a:latin typeface="Arial"/>
               </a:rPr>
-              <a:t>Diagnose WHICH bar you are failing (Session 3's two numbers) before touching any knob - random knob-turning is an untunable radio. Today: the validation bar's knobs, then the world bar.</a:t>
+              <a:t>The cures, per bar: bigger model / regularize or add data / a fresher validation set / fix the data or the metric.</a:t>
+            </a:r>
+          </a:p>
+          <a:p>
+            <a:pPr algn="l" indent="-228600" marL="228600">
+              <a:spcAft>
+                <a:spcPts val="800"/>
+              </a:spcAft>
+              <a:buClr>
+                <a:srgbClr val="1E5EF3"/>
+              </a:buClr>
+              <a:buChar char="—"/>
+            </a:pPr>
+            <a:r>
+              <a:rPr sz="1450" b="0">
+                <a:solidFill>
+                  <a:srgbClr val="202B38"/>
+                </a:solidFill>
+                <a:latin typeface="Arial"/>
+              </a:rPr>
+              <a:t>Diagnose WHICH bar you are failing (Session 3's two numbers) before touching any knob. Today: the validation bar, then the world bar.</a:t>
             </a:r>
           </a:p>
         </p:txBody>
@@ -9628,6 +10628,26 @@
               <a:t>There are thousands; you never set one by hand.</a:t>
             </a:r>
           </a:p>
+          <a:p>
+            <a:pPr algn="l" indent="-228600" marL="228600">
+              <a:spcAft>
+                <a:spcPts val="600"/>
+              </a:spcAft>
+              <a:buClr>
+                <a:srgbClr val="1E5EF3"/>
+              </a:buClr>
+              <a:buChar char="—"/>
+            </a:pPr>
+            <a:r>
+              <a:rPr sz="1300" b="0">
+                <a:solidFill>
+                  <a:srgbClr val="202B38"/>
+                </a:solidFill>
+                <a:latin typeface="Arial"/>
+              </a:rPr>
+              <a:t>In the kitchen: how the ingredients turn into cake.</a:t>
+            </a:r>
+          </a:p>
         </p:txBody>
       </p:sp>
       <p:sp>
@@ -9812,7 +10832,7 @@
                 </a:solidFill>
                 <a:latin typeface="Arial"/>
               </a:rPr>
-              <a:t>MIT's sharper cut: hyperparameters are settings of the ALGORITHM itself - knobs OUTSIDE Session 1's three slots (model + loss + optimizer); they define the game the learner plays.</a:t>
+              <a:t>In the kitchen: the oven temperature - set before baking.</a:t>
             </a:r>
           </a:p>
           <a:p>
@@ -9832,7 +10852,27 @@
                 </a:solidFill>
                 <a:latin typeface="Arial"/>
               </a:rPr>
-              <a:t>The same algorithm with two settings is best thought of as two different algorithms. MIT 6.390, Appendix C.</a:t>
+              <a:t>MIT's sharper cut: hyperparameters sit OUTSIDE Session 1's three slots - they define the game the learner plays.</a:t>
+            </a:r>
+          </a:p>
+          <a:p>
+            <a:pPr algn="l" indent="-228600" marL="228600">
+              <a:spcAft>
+                <a:spcPts val="600"/>
+              </a:spcAft>
+              <a:buClr>
+                <a:srgbClr val="1E5EF3"/>
+              </a:buClr>
+              <a:buChar char="—"/>
+            </a:pPr>
+            <a:r>
+              <a:rPr sz="1300" b="0">
+                <a:solidFill>
+                  <a:srgbClr val="202B38"/>
+                </a:solidFill>
+                <a:latin typeface="Arial"/>
+              </a:rPr>
+              <a:t>Same algorithm, two settings = best thought of as two different algorithms. MIT 6.390, Appendix C.</a:t>
             </a:r>
           </a:p>
         </p:txBody>
@@ -10225,7 +11265,7 @@
                 </a:solidFill>
                 <a:latin typeface="Arial"/>
               </a:rPr>
-              <a:t>MIT's reframe: a forest capped at depth 4 and a forest allowed depth 8 are literally two different algorithms - same name, different game.</a:t>
+              <a:t>Tuning - in plain words: Session 3's tournament again, now between versions of one model.</a:t>
             </a:r>
           </a:p>
           <a:p>
@@ -10245,7 +11285,7 @@
                 </a:solidFill>
                 <a:latin typeface="Arial"/>
               </a:rPr>
-              <a:t>That collapses tuning into a problem you already solved: Session 3 compared six model families; tuning compares variants of one.</a:t>
+              <a:t>MIT's reframe: a forest capped at depth 4 and a forest allowed depth 8 are two different algorithms - same name, different game.</a:t>
             </a:r>
           </a:p>
           <a:p>
@@ -10265,7 +11305,7 @@
                 </a:solidFill>
                 <a:latin typeface="Arial"/>
               </a:rPr>
-              <a:t>Cross-validation referees both questions the same way: run each variant, score it on folds it never trained on, keep the best.</a:t>
+              <a:t>So tuning is a problem you already solved: Session 3 compared six families; tuning compares variants of one.</a:t>
             </a:r>
           </a:p>
           <a:p>
@@ -10285,7 +11325,7 @@
                 </a:solidFill>
                 <a:latin typeface="Arial"/>
               </a:rPr>
-              <a:t>So everything Session 3 taught about honest comparison applies unchanged - same referee, same rules; only the contestants changed.</a:t>
+              <a:t>The referee never changes: run each variant, score it on folds it never trained on, keep the best.</a:t>
             </a:r>
           </a:p>
           <a:p>
@@ -10305,7 +11345,7 @@
                 </a:solidFill>
                 <a:latin typeface="Arial"/>
               </a:rPr>
-              <a:t>Harvard files hyperparameter tuning under model selection, next to choosing predictors and polynomial degree: one discipline, not two.</a:t>
+              <a:t>Harvard files hyperparameter tuning under model selection, next to choosing predictors: one discipline, not two.</a:t>
             </a:r>
           </a:p>
         </p:txBody>
@@ -10722,7 +11762,7 @@
                 </a:solidFill>
                 <a:latin typeface="Arial"/>
               </a:rPr>
-              <a:t>Typically one or two knobs dominate the score and the rest barely move it - and you do not know in advance which is which.</a:t>
+              <a:t>Grid vs random - in plain words: a grid re-tests the same few values; random tries a new value every time.</a:t>
             </a:r>
           </a:p>
           <a:p>
@@ -10742,7 +11782,7 @@
                 </a:solidFill>
                 <a:latin typeface="Arial"/>
               </a:rPr>
-              <a:t>A 3x3 grid spends nine trials on only three distinct values of each knob: every value of the knob that matters is re-tested three times while the knob that does not soaks up the repeats.</a:t>
+              <a:t>Typically one or two knobs dominate the score - and you do not know in advance which.</a:t>
             </a:r>
           </a:p>
           <a:p>
@@ -10762,7 +11802,7 @@
                 </a:solidFill>
                 <a:latin typeface="Arial"/>
               </a:rPr>
-              <a:t>Nine random draws test nine NEW values of every knob at once - the important dimension gets nine chances instead of three.</a:t>
+              <a:t>A 3x3 grid spends nine trials on only three distinct values of each knob - six trials are repeats.</a:t>
             </a:r>
           </a:p>
           <a:p>
@@ -10782,7 +11822,27 @@
                 </a:solidFill>
                 <a:latin typeface="Arial"/>
               </a:rPr>
-              <a:t>Same budget, more information where it counts: that is why random search usually wins once you tune more than a couple of knobs.</a:t>
+              <a:t>Nine random draws test nine NEW values of every knob at once - nine chances instead of three where it counts.</a:t>
+            </a:r>
+          </a:p>
+          <a:p>
+            <a:pPr algn="l" indent="-228600" marL="228600">
+              <a:spcAft>
+                <a:spcPts val="800"/>
+              </a:spcAft>
+              <a:buClr>
+                <a:srgbClr val="1E5EF3"/>
+              </a:buClr>
+              <a:buChar char="—"/>
+            </a:pPr>
+            <a:r>
+              <a:rPr sz="1450" b="0">
+                <a:solidFill>
+                  <a:srgbClr val="202B38"/>
+                </a:solidFill>
+                <a:latin typeface="Arial"/>
+              </a:rPr>
+              <a:t>Same budget, more information: that is why random search usually wins beyond a couple of knobs.</a:t>
             </a:r>
           </a:p>
           <a:p>
@@ -11716,7 +12776,7 @@
                 </a:solidFill>
                 <a:latin typeface="Arial"/>
               </a:rPr>
-              <a:t>One agreed metric ranks ten experiments at a glance; with three metrics, every comparison becomes a debate.</a:t>
+              <a:t>The doctrine - in plain words: one scoreboard; teams argue forever with two scoreboards.</a:t>
             </a:r>
           </a:p>
           <a:p>
@@ -11756,7 +12816,7 @@
                 </a:solidFill>
                 <a:latin typeface="Arial"/>
               </a:rPr>
-              <a:t>F1 punishes imbalance: precision 0.9 with recall 0.1 scores near 0.18, not 0.5 - a useless side cannot hide behind a strong one.</a:t>
+              <a:t>F1 punishes imbalance: precision 0.9 with recall 0.1 scores near 0.18, not 0.5 - a useless side cannot hide.</a:t>
             </a:r>
           </a:p>
           <a:p>
@@ -11776,7 +12836,7 @@
                 </a:solidFill>
                 <a:latin typeface="Arial"/>
               </a:rPr>
-              <a:t>When one number is genuinely not enough (safety, latency, size): make those SATISFICING constraints - bars to clear - and keep exactly one OPTIMIZING metric to maximize.</a:t>
+              <a:t>When one number is genuinely not enough (safety, latency): make those SATISFICING - bars to clear, not scores to chase - and keep exactly ONE metric to maximize.</a:t>
             </a:r>
           </a:p>
           <a:p>
@@ -11796,7 +12856,7 @@
                 </a:solidFill>
                 <a:latin typeface="Arial"/>
               </a:rPr>
-              <a:t>Set the metric and the validation data at project start: together they define "better" for the whole team, and every decision gets fast.</a:t>
+              <a:t>Set the metric and the validation data at project start: they define "better" for the whole team.</a:t>
             </a:r>
           </a:p>
         </p:txBody>
@@ -12213,7 +13273,7 @@
                 </a:solidFill>
                 <a:latin typeface="Arial"/>
               </a:rPr>
-              <a:t>Model SELECTION picks the flexibility and the knob values - done on validation data or by CV, repeatable a thousand times.</a:t>
+              <a:t>In plain words: practice tests choose your strategy; the final exam grades it - and you only sit the final once.</a:t>
             </a:r>
           </a:p>
           <a:p>
@@ -12233,7 +13293,7 @@
                 </a:solidFill>
                 <a:latin typeface="Arial"/>
               </a:rPr>
-              <a:t>Model ASSESSMENT estimates how the final model will do on genuinely new data - done exactly once, on the untouched test set.</a:t>
+              <a:t>Model SELECTION picks the knob values - done on validation data or by CV, repeatable a thousand times.</a:t>
             </a:r>
           </a:p>
           <a:p>
@@ -12253,7 +13313,7 @@
                 </a:solidFill>
                 <a:latin typeface="Arial"/>
               </a:rPr>
-              <a:t>Select on the test set and it silently becomes a validation set: you tuned toward it, so its score can no longer surprise you - it overestimates.</a:t>
+              <a:t>Model ASSESSMENT estimates real-world performance - done exactly once, on the untouched test set.</a:t>
             </a:r>
           </a:p>
           <a:p>
@@ -12273,7 +13333,27 @@
                 </a:solidFill>
                 <a:latin typeface="Arial"/>
               </a:rPr>
-              <a:t>A number you optimized against is a target you hit, not a forecast - that is the whole reason the REPORT band opens once.</a:t>
+              <a:t>Select on the test set and it silently becomes a practice test: you tuned toward it, so its score flatters.</a:t>
+            </a:r>
+          </a:p>
+          <a:p>
+            <a:pPr algn="l" indent="-228600" marL="228600">
+              <a:spcAft>
+                <a:spcPts val="800"/>
+              </a:spcAft>
+              <a:buClr>
+                <a:srgbClr val="1E5EF3"/>
+              </a:buClr>
+              <a:buChar char="—"/>
+            </a:pPr>
+            <a:r>
+              <a:rPr sz="1450" b="0">
+                <a:solidFill>
+                  <a:srgbClr val="202B38"/>
+                </a:solidFill>
+                <a:latin typeface="Arial"/>
+              </a:rPr>
+              <a:t>A number you optimized against is a target you hit, not a forecast - that is why REPORT opens once.</a:t>
             </a:r>
           </a:p>
           <a:p>
@@ -12768,4 +13848,324 @@
   </a:objectDefaults>
   <a:extraClrSchemeLst/>
 </a:theme>
+</file>
+
+<file path=ppt/theme/theme2.xml><?xml version="1.0" encoding="utf-8"?>
+<a:theme xmlns:a="http://schemas.openxmlformats.org/drawingml/2006/main" name="Office Theme">
+  <a:themeElements>
+    <a:clrScheme name="Office">
+      <a:dk1>
+        <a:sysClr val="windowText" lastClr="000000"/>
+      </a:dk1>
+      <a:lt1>
+        <a:sysClr val="window" lastClr="FFFFFF"/>
+      </a:lt1>
+      <a:dk2>
+        <a:srgbClr val="1F497D"/>
+      </a:dk2>
+      <a:lt2>
+        <a:srgbClr val="EEECE1"/>
+      </a:lt2>
+      <a:accent1>
+        <a:srgbClr val="4F81BD"/>
+      </a:accent1>
+      <a:accent2>
+        <a:srgbClr val="C0504D"/>
+      </a:accent2>
+      <a:accent3>
+        <a:srgbClr val="9BBB59"/>
+      </a:accent3>
+      <a:accent4>
+        <a:srgbClr val="8064A2"/>
+      </a:accent4>
+      <a:accent5>
+        <a:srgbClr val="4BACC6"/>
+      </a:accent5>
+      <a:accent6>
+        <a:srgbClr val="F79646"/>
+      </a:accent6>
+      <a:hlink>
+        <a:srgbClr val="0000FF"/>
+      </a:hlink>
+      <a:folHlink>
+        <a:srgbClr val="800080"/>
+      </a:folHlink>
+    </a:clrScheme>
+    <a:fontScheme name="Office">
+      <a:majorFont>
+        <a:latin typeface="Calibri"/>
+        <a:ea typeface=""/>
+        <a:cs typeface=""/>
+        <a:font script="Jpan" typeface="ＭＳ Ｐゴシック"/>
+        <a:font script="Hang" typeface="맑은 고딕"/>
+        <a:font script="Hans" typeface="宋体"/>
+        <a:font script="Hant" typeface="新細明體"/>
+        <a:font script="Arab" typeface="Times New Roman"/>
+        <a:font script="Hebr" typeface="Times New Roman"/>
+        <a:font script="Thai" typeface="Angsana New"/>
+        <a:font script="Ethi" typeface="Nyala"/>
+        <a:font script="Beng" typeface="Vrinda"/>
+        <a:font script="Gujr" typeface="Shruti"/>
+        <a:font script="Khmr" typeface="MoolBoran"/>
+        <a:font script="Knda" typeface="Tunga"/>
+        <a:font script="Guru" typeface="Raavi"/>
+        <a:font script="Cans" typeface="Euphemia"/>
+        <a:font script="Cher" typeface="Plantagenet Cherokee"/>
+        <a:font script="Yiii" typeface="Microsoft Yi Baiti"/>
+        <a:font script="Tibt" typeface="Microsoft Himalaya"/>
+        <a:font script="Thaa" typeface="MV Boli"/>
+        <a:font script="Deva" typeface="Mangal"/>
+        <a:font script="Telu" typeface="Gautami"/>
+        <a:font script="Taml" typeface="Latha"/>
+        <a:font script="Syrc" typeface="Estrangelo Edessa"/>
+        <a:font script="Orya" typeface="Kalinga"/>
+        <a:font script="Mlym" typeface="Kartika"/>
+        <a:font script="Laoo" typeface="DokChampa"/>
+        <a:font script="Sinh" typeface="Iskoola Pota"/>
+        <a:font script="Mong" typeface="Mongolian Baiti"/>
+        <a:font script="Viet" typeface="Times New Roman"/>
+        <a:font script="Uigh" typeface="Microsoft Uighur"/>
+        <a:font script="Geor" typeface="Sylfaen"/>
+      </a:majorFont>
+      <a:minorFont>
+        <a:latin typeface="Calibri"/>
+        <a:ea typeface=""/>
+        <a:cs typeface=""/>
+        <a:font script="Jpan" typeface="ＭＳ Ｐゴシック"/>
+        <a:font script="Hang" typeface="맑은 고딕"/>
+        <a:font script="Hans" typeface="宋体"/>
+        <a:font script="Hant" typeface="新細明體"/>
+        <a:font script="Arab" typeface="Arial"/>
+        <a:font script="Hebr" typeface="Arial"/>
+        <a:font script="Thai" typeface="Cordia New"/>
+        <a:font script="Ethi" typeface="Nyala"/>
+        <a:font script="Beng" typeface="Vrinda"/>
+        <a:font script="Gujr" typeface="Shruti"/>
+        <a:font script="Khmr" typeface="DaunPenh"/>
+        <a:font script="Knda" typeface="Tunga"/>
+        <a:font script="Guru" typeface="Raavi"/>
+        <a:font script="Cans" typeface="Euphemia"/>
+        <a:font script="Cher" typeface="Plantagenet Cherokee"/>
+        <a:font script="Yiii" typeface="Microsoft Yi Baiti"/>
+        <a:font script="Tibt" typeface="Microsoft Himalaya"/>
+        <a:font script="Thaa" typeface="MV Boli"/>
+        <a:font script="Deva" typeface="Mangal"/>
+        <a:font script="Telu" typeface="Gautami"/>
+        <a:font script="Taml" typeface="Latha"/>
+        <a:font script="Syrc" typeface="Estrangelo Edessa"/>
+        <a:font script="Orya" typeface="Kalinga"/>
+        <a:font script="Mlym" typeface="Kartika"/>
+        <a:font script="Laoo" typeface="DokChampa"/>
+        <a:font script="Sinh" typeface="Iskoola Pota"/>
+        <a:font script="Mong" typeface="Mongolian Baiti"/>
+        <a:font script="Viet" typeface="Arial"/>
+        <a:font script="Uigh" typeface="Microsoft Uighur"/>
+        <a:font script="Geor" typeface="Sylfaen"/>
+      </a:minorFont>
+    </a:fontScheme>
+    <a:fmtScheme name="Office">
+      <a:fillStyleLst>
+        <a:solidFill>
+          <a:schemeClr val="phClr"/>
+        </a:solidFill>
+        <a:gradFill rotWithShape="1">
+          <a:gsLst>
+            <a:gs pos="0">
+              <a:schemeClr val="phClr">
+                <a:tint val="50000"/>
+                <a:satMod val="300000"/>
+              </a:schemeClr>
+            </a:gs>
+            <a:gs pos="35000">
+              <a:schemeClr val="phClr">
+                <a:tint val="37000"/>
+                <a:satMod val="300000"/>
+              </a:schemeClr>
+            </a:gs>
+            <a:gs pos="100000">
+              <a:schemeClr val="phClr">
+                <a:tint val="15000"/>
+                <a:satMod val="350000"/>
+              </a:schemeClr>
+            </a:gs>
+          </a:gsLst>
+          <a:lin ang="16200000" scaled="1"/>
+        </a:gradFill>
+        <a:gradFill rotWithShape="1">
+          <a:gsLst>
+            <a:gs pos="0">
+              <a:schemeClr val="phClr">
+                <a:tint val="100000"/>
+                <a:shade val="100000"/>
+                <a:satMod val="130000"/>
+              </a:schemeClr>
+            </a:gs>
+            <a:gs pos="100000">
+              <a:schemeClr val="phClr">
+                <a:tint val="50000"/>
+                <a:shade val="100000"/>
+                <a:satMod val="350000"/>
+              </a:schemeClr>
+            </a:gs>
+          </a:gsLst>
+          <a:lin ang="16200000" scaled="0"/>
+        </a:gradFill>
+      </a:fillStyleLst>
+      <a:lnStyleLst>
+        <a:ln w="9525" cap="flat" cmpd="sng" algn="ctr">
+          <a:solidFill>
+            <a:schemeClr val="phClr">
+              <a:shade val="95000"/>
+              <a:satMod val="105000"/>
+            </a:schemeClr>
+          </a:solidFill>
+          <a:prstDash val="solid"/>
+        </a:ln>
+        <a:ln w="25400" cap="flat" cmpd="sng" algn="ctr">
+          <a:solidFill>
+            <a:schemeClr val="phClr"/>
+          </a:solidFill>
+          <a:prstDash val="solid"/>
+        </a:ln>
+        <a:ln w="38100" cap="flat" cmpd="sng" algn="ctr">
+          <a:solidFill>
+            <a:schemeClr val="phClr"/>
+          </a:solidFill>
+          <a:prstDash val="solid"/>
+        </a:ln>
+      </a:lnStyleLst>
+      <a:effectStyleLst>
+        <a:effectStyle>
+          <a:effectLst>
+            <a:outerShdw blurRad="40000" dist="20000" dir="5400000" rotWithShape="0">
+              <a:srgbClr val="000000">
+                <a:alpha val="38000"/>
+              </a:srgbClr>
+            </a:outerShdw>
+          </a:effectLst>
+        </a:effectStyle>
+        <a:effectStyle>
+          <a:effectLst>
+            <a:outerShdw blurRad="40000" dist="23000" dir="5400000" rotWithShape="0">
+              <a:srgbClr val="000000">
+                <a:alpha val="35000"/>
+              </a:srgbClr>
+            </a:outerShdw>
+          </a:effectLst>
+        </a:effectStyle>
+        <a:effectStyle>
+          <a:effectLst>
+            <a:outerShdw blurRad="40000" dist="23000" dir="5400000" rotWithShape="0">
+              <a:srgbClr val="000000">
+                <a:alpha val="35000"/>
+              </a:srgbClr>
+            </a:outerShdw>
+          </a:effectLst>
+          <a:scene3d>
+            <a:camera prst="orthographicFront">
+              <a:rot lat="0" lon="0" rev="0"/>
+            </a:camera>
+            <a:lightRig rig="threePt" dir="t">
+              <a:rot lat="0" lon="0" rev="1200000"/>
+            </a:lightRig>
+          </a:scene3d>
+          <a:sp3d>
+            <a:bevelT w="63500" h="25400"/>
+          </a:sp3d>
+        </a:effectStyle>
+      </a:effectStyleLst>
+      <a:bgFillStyleLst>
+        <a:solidFill>
+          <a:schemeClr val="phClr"/>
+        </a:solidFill>
+        <a:gradFill rotWithShape="1">
+          <a:gsLst>
+            <a:gs pos="0">
+              <a:schemeClr val="phClr">
+                <a:tint val="40000"/>
+                <a:satMod val="350000"/>
+              </a:schemeClr>
+            </a:gs>
+            <a:gs pos="40000">
+              <a:schemeClr val="phClr">
+                <a:tint val="45000"/>
+                <a:shade val="99000"/>
+                <a:satMod val="350000"/>
+              </a:schemeClr>
+            </a:gs>
+            <a:gs pos="100000">
+              <a:schemeClr val="phClr">
+                <a:shade val="20000"/>
+                <a:satMod val="255000"/>
+              </a:schemeClr>
+            </a:gs>
+          </a:gsLst>
+          <a:path path="circle">
+            <a:fillToRect l="50000" t="-80000" r="50000" b="180000"/>
+          </a:path>
+        </a:gradFill>
+        <a:gradFill rotWithShape="1">
+          <a:gsLst>
+            <a:gs pos="0">
+              <a:schemeClr val="phClr">
+                <a:tint val="80000"/>
+                <a:satMod val="300000"/>
+              </a:schemeClr>
+            </a:gs>
+            <a:gs pos="100000">
+              <a:schemeClr val="phClr">
+                <a:shade val="30000"/>
+                <a:satMod val="200000"/>
+              </a:schemeClr>
+            </a:gs>
+          </a:gsLst>
+          <a:path path="circle">
+            <a:fillToRect l="50000" t="50000" r="50000" b="50000"/>
+          </a:path>
+        </a:gradFill>
+      </a:bgFillStyleLst>
+    </a:fmtScheme>
+  </a:themeElements>
+  <a:objectDefaults>
+    <a:spDef>
+      <a:spPr/>
+      <a:bodyPr/>
+      <a:lstStyle/>
+      <a:style>
+        <a:lnRef idx="1">
+          <a:schemeClr val="accent1"/>
+        </a:lnRef>
+        <a:fillRef idx="3">
+          <a:schemeClr val="accent1"/>
+        </a:fillRef>
+        <a:effectRef idx="2">
+          <a:schemeClr val="accent1"/>
+        </a:effectRef>
+        <a:fontRef idx="minor">
+          <a:schemeClr val="lt1"/>
+        </a:fontRef>
+      </a:style>
+    </a:spDef>
+    <a:lnDef>
+      <a:spPr/>
+      <a:bodyPr/>
+      <a:lstStyle/>
+      <a:style>
+        <a:lnRef idx="2">
+          <a:schemeClr val="accent1"/>
+        </a:lnRef>
+        <a:fillRef idx="0">
+          <a:schemeClr val="accent1"/>
+        </a:fillRef>
+        <a:effectRef idx="1">
+          <a:schemeClr val="accent1"/>
+        </a:effectRef>
+        <a:fontRef idx="minor">
+          <a:schemeClr val="tx1"/>
+        </a:fontRef>
+      </a:style>
+    </a:lnDef>
+  </a:objectDefaults>
+  <a:extraClrSchemeLst/>
+</a:theme>
 </file>
--- a/presentations/m2-session-4-optimization-and-deployment.pptx
+++ b/presentations/m2-session-4-optimization-and-deployment.pptx
@@ -520,7 +520,357 @@
           <a:lstStyle/>
           <a:p>
             <a:r>
-              <a:t>Orthogonalization is a long word for a simple demand: one knob, one job. A radio where every knob changes volume, station and tone at once cannot be tuned - and turning random ML knobs is that radio. First name the bar you are failing, then reach for that bar's knob only. Ask the class: your model aces training but flops on validation - which bar, which knob?</a:t>
+              <a:t>Orthogonalization is a long word for a simple demand: one knob, one job. A radio where every knob changes volume, station and tone at once cannot be tuned - and turning random ML knobs is that radio. Walk the ladder bottom-up: learn the training data, pass the practice tests (that is cross-validation from Session 3), hold up on the final exam, work in the real world. First name the rung you are failing, then reach for that rung's knob only. Ask the class: your model aces training but flops on the practice tests - which rung, which knob?</a:t>
+            </a:r>
+          </a:p>
+        </p:txBody>
+      </p:sp>
+      <p:sp>
+        <p:nvSpPr>
+          <p:cNvPr id="4" name="Slide Number Placeholder 3"/>
+          <p:cNvSpPr>
+            <a:spLocks noGrp="1"/>
+          </p:cNvSpPr>
+          <p:nvPr>
+            <p:ph type="sldNum" idx="5" sz="quarter"/>
+          </p:nvPr>
+        </p:nvSpPr>
+        <p:spPr/>
+      </p:sp>
+    </p:spTree>
+  </p:cSld>
+  <p:clrMapOvr>
+    <a:masterClrMapping/>
+  </p:clrMapOvr>
+</p:notes>
+</file>
+
+<file path=ppt/notesSlides/notesSlide10.xml><?xml version="1.0" encoding="utf-8"?>
+<p:notes xmlns:a="http://schemas.openxmlformats.org/drawingml/2006/main" xmlns:p="http://schemas.openxmlformats.org/presentationml/2006/main" xmlns:r="http://schemas.openxmlformats.org/officeDocument/2006/relationships">
+  <p:cSld>
+    <p:spTree>
+      <p:nvGrpSpPr>
+        <p:cNvPr id="1" name=""/>
+        <p:cNvGrpSpPr/>
+        <p:nvPr/>
+      </p:nvGrpSpPr>
+      <p:grpSpPr>
+        <a:xfrm>
+          <a:off x="0" y="0"/>
+          <a:ext cx="0" cy="0"/>
+          <a:chOff x="0" y="0"/>
+          <a:chExt cx="0" cy="0"/>
+        </a:xfrm>
+      </p:grpSpPr>
+      <p:sp>
+        <p:nvSpPr>
+          <p:cNvPr id="2" name="Slide Image Placeholder 1"/>
+          <p:cNvSpPr>
+            <a:spLocks noGrp="1"/>
+          </p:cNvSpPr>
+          <p:nvPr>
+            <p:ph type="sldImg" idx="2"/>
+          </p:nvPr>
+        </p:nvSpPr>
+        <p:spPr/>
+      </p:sp>
+      <p:sp>
+        <p:nvSpPr>
+          <p:cNvPr id="3" name="Notes Placeholder 2"/>
+          <p:cNvSpPr>
+            <a:spLocks noGrp="1"/>
+          </p:cNvSpPr>
+          <p:nvPr>
+            <p:ph type="body" idx="3" sz="quarter"/>
+          </p:nvPr>
+        </p:nvSpPr>
+        <p:spPr/>
+        <p:txBody>
+          <a:bodyPr/>
+          <a:lstStyle/>
+          <a:p>
+            <a:r>
+              <a:t>Walk the boxes left to right; the raised blue one is the step beginners never guess: after CV has chosen the winner, throw the fold models away and retrain the winning RECIPE on every row you own - more data makes a better final model. Then the two red arrows: test data may never flow back into training, and a score you selected with may never be your report card. Ask the class: after retraining on all 891 rows, why can't we measure the new model's accuracy?</a:t>
+            </a:r>
+          </a:p>
+        </p:txBody>
+      </p:sp>
+      <p:sp>
+        <p:nvSpPr>
+          <p:cNvPr id="4" name="Slide Number Placeholder 3"/>
+          <p:cNvSpPr>
+            <a:spLocks noGrp="1"/>
+          </p:cNvSpPr>
+          <p:nvPr>
+            <p:ph type="sldNum" idx="5" sz="quarter"/>
+          </p:nvPr>
+        </p:nvSpPr>
+        <p:spPr/>
+      </p:sp>
+    </p:spTree>
+  </p:cSld>
+  <p:clrMapOvr>
+    <a:masterClrMapping/>
+  </p:clrMapOvr>
+</p:notes>
+</file>
+
+<file path=ppt/notesSlides/notesSlide11.xml><?xml version="1.0" encoding="utf-8"?>
+<p:notes xmlns:a="http://schemas.openxmlformats.org/drawingml/2006/main" xmlns:p="http://schemas.openxmlformats.org/presentationml/2006/main" xmlns:r="http://schemas.openxmlformats.org/officeDocument/2006/relationships">
+  <p:cSld>
+    <p:spTree>
+      <p:nvGrpSpPr>
+        <p:cNvPr id="1" name=""/>
+        <p:cNvGrpSpPr/>
+        <p:nvPr/>
+      </p:nvGrpSpPr>
+      <p:grpSpPr>
+        <a:xfrm>
+          <a:off x="0" y="0"/>
+          <a:ext cx="0" cy="0"/>
+          <a:chOff x="0" y="0"/>
+          <a:chExt cx="0" cy="0"/>
+        </a:xfrm>
+      </p:grpSpPr>
+      <p:sp>
+        <p:nvSpPr>
+          <p:cNvPr id="2" name="Slide Image Placeholder 1"/>
+          <p:cNvSpPr>
+            <a:spLocks noGrp="1"/>
+          </p:cNvSpPr>
+          <p:nvPr>
+            <p:ph type="sldImg" idx="2"/>
+          </p:nvPr>
+        </p:nvSpPr>
+        <p:spPr/>
+      </p:sp>
+      <p:sp>
+        <p:nvSpPr>
+          <p:cNvPr id="3" name="Notes Placeholder 2"/>
+          <p:cNvSpPr>
+            <a:spLocks noGrp="1"/>
+          </p:cNvSpPr>
+          <p:nvPr>
+            <p:ph type="body" idx="3" sz="quarter"/>
+          </p:nvPr>
+        </p:nvSpPr>
+        <p:spPr/>
+        <p:txBody>
+          <a:bodyPr/>
+          <a:lstStyle/>
+          <a:p>
+            <a:r>
+              <a:t>Production, in plain words: the model runs somewhere real users can reach it. Follow the circle clockwise from 1. Save - the blue box, today's first step; 6. Retrain is dark because it closes the circle and starts it again. Stress Ng's rollout ladder: shadow first (the model watches, nobody acts on it), canary next (a sliver of real traffic), full swap last - deployment is a dial, not a switch. Ask the class: why is there no 'done' box anywhere on this diagram?</a:t>
+            </a:r>
+          </a:p>
+        </p:txBody>
+      </p:sp>
+      <p:sp>
+        <p:nvSpPr>
+          <p:cNvPr id="4" name="Slide Number Placeholder 3"/>
+          <p:cNvSpPr>
+            <a:spLocks noGrp="1"/>
+          </p:cNvSpPr>
+          <p:nvPr>
+            <p:ph type="sldNum" idx="5" sz="quarter"/>
+          </p:nvPr>
+        </p:nvSpPr>
+        <p:spPr/>
+      </p:sp>
+    </p:spTree>
+  </p:cSld>
+  <p:clrMapOvr>
+    <a:masterClrMapping/>
+  </p:clrMapOvr>
+</p:notes>
+</file>
+
+<file path=ppt/notesSlides/notesSlide12.xml><?xml version="1.0" encoding="utf-8"?>
+<p:notes xmlns:a="http://schemas.openxmlformats.org/drawingml/2006/main" xmlns:p="http://schemas.openxmlformats.org/presentationml/2006/main" xmlns:r="http://schemas.openxmlformats.org/officeDocument/2006/relationships">
+  <p:cSld>
+    <p:spTree>
+      <p:nvGrpSpPr>
+        <p:cNvPr id="1" name=""/>
+        <p:cNvGrpSpPr/>
+        <p:nvPr/>
+      </p:nvGrpSpPr>
+      <p:grpSpPr>
+        <a:xfrm>
+          <a:off x="0" y="0"/>
+          <a:ext cx="0" cy="0"/>
+          <a:chOff x="0" y="0"/>
+          <a:chExt cx="0" cy="0"/>
+        </a:xfrm>
+      </p:grpSpPr>
+      <p:sp>
+        <p:nvSpPr>
+          <p:cNvPr id="2" name="Slide Image Placeholder 1"/>
+          <p:cNvSpPr>
+            <a:spLocks noGrp="1"/>
+          </p:cNvSpPr>
+          <p:nvPr>
+            <p:ph type="sldImg" idx="2"/>
+          </p:nvPr>
+        </p:nvSpPr>
+        <p:spPr/>
+      </p:sp>
+      <p:sp>
+        <p:nvSpPr>
+          <p:cNvPr id="3" name="Notes Placeholder 2"/>
+          <p:cNvSpPr>
+            <a:spLocks noGrp="1"/>
+          </p:cNvSpPr>
+          <p:nvPr>
+            <p:ph type="body" idx="3" sz="quarter"/>
+          </p:nvPr>
+        </p:nvSpPr>
+        <p:spPr/>
+        <p:txBody>
+          <a:bodyPr/>
+          <a:lstStyle/>
+          <a:p>
+            <a:r>
+              <a:t>The moment it becomes real: a saved file, loaded in a fresh process, answers about people it has never seen. The two passengers are invented, but built to resemble the module's recurring ones - Owen, the third-class man, and Florence, the first-class woman. Read a probability honestly: 3% means 'of 100 very similar passengers, about 3 survive' - confidence, not a verdict on one person. Ask the class: why test on invented passengers instead of rows from the test set?</a:t>
+            </a:r>
+          </a:p>
+        </p:txBody>
+      </p:sp>
+      <p:sp>
+        <p:nvSpPr>
+          <p:cNvPr id="4" name="Slide Number Placeholder 3"/>
+          <p:cNvSpPr>
+            <a:spLocks noGrp="1"/>
+          </p:cNvSpPr>
+          <p:nvPr>
+            <p:ph type="sldNum" idx="5" sz="quarter"/>
+          </p:nvPr>
+        </p:nvSpPr>
+        <p:spPr/>
+      </p:sp>
+    </p:spTree>
+  </p:cSld>
+  <p:clrMapOvr>
+    <a:masterClrMapping/>
+  </p:clrMapOvr>
+</p:notes>
+</file>
+
+<file path=ppt/notesSlides/notesSlide13.xml><?xml version="1.0" encoding="utf-8"?>
+<p:notes xmlns:a="http://schemas.openxmlformats.org/drawingml/2006/main" xmlns:p="http://schemas.openxmlformats.org/presentationml/2006/main" xmlns:r="http://schemas.openxmlformats.org/officeDocument/2006/relationships">
+  <p:cSld>
+    <p:spTree>
+      <p:nvGrpSpPr>
+        <p:cNvPr id="1" name=""/>
+        <p:cNvGrpSpPr/>
+        <p:nvPr/>
+      </p:nvGrpSpPr>
+      <p:grpSpPr>
+        <a:xfrm>
+          <a:off x="0" y="0"/>
+          <a:ext cx="0" cy="0"/>
+          <a:chOff x="0" y="0"/>
+          <a:chExt cx="0" cy="0"/>
+        </a:xfrm>
+      </p:grpSpPr>
+      <p:sp>
+        <p:nvSpPr>
+          <p:cNvPr id="2" name="Slide Image Placeholder 1"/>
+          <p:cNvSpPr>
+            <a:spLocks noGrp="1"/>
+          </p:cNvSpPr>
+          <p:nvPr>
+            <p:ph type="sldImg" idx="2"/>
+          </p:nvPr>
+        </p:nvSpPr>
+        <p:spPr/>
+      </p:sp>
+      <p:sp>
+        <p:nvSpPr>
+          <p:cNvPr id="3" name="Notes Placeholder 2"/>
+          <p:cNvSpPr>
+            <a:spLocks noGrp="1"/>
+          </p:cNvSpPr>
+          <p:nvPr>
+            <p:ph type="body" idx="3" sz="quarter"/>
+          </p:nvPr>
+        </p:nvSpPr>
+        <p:spPr/>
+        <p:txBody>
+          <a:bodyPr/>
+          <a:lstStyle/>
+          <a:p>
+            <a:r>
+              <a:t>Demystify both names before the clicks: Gradio is just a Python library that draws a web form around a normal function - inputs in, answer out. Hugging Face Spaces is just a free public shelf that runs that form at a URL. Four files uploaded in the browser and the model is live - no server administration. Two habits to call out: pin the scikit-learn version so the loaded pipeline matches the saved one, and never paste tokens or keys into code.</a:t>
+            </a:r>
+          </a:p>
+        </p:txBody>
+      </p:sp>
+      <p:sp>
+        <p:nvSpPr>
+          <p:cNvPr id="4" name="Slide Number Placeholder 3"/>
+          <p:cNvSpPr>
+            <a:spLocks noGrp="1"/>
+          </p:cNvSpPr>
+          <p:nvPr>
+            <p:ph type="sldNum" idx="5" sz="quarter"/>
+          </p:nvPr>
+        </p:nvSpPr>
+        <p:spPr/>
+      </p:sp>
+    </p:spTree>
+  </p:cSld>
+  <p:clrMapOvr>
+    <a:masterClrMapping/>
+  </p:clrMapOvr>
+</p:notes>
+</file>
+
+<file path=ppt/notesSlides/notesSlide14.xml><?xml version="1.0" encoding="utf-8"?>
+<p:notes xmlns:a="http://schemas.openxmlformats.org/drawingml/2006/main" xmlns:p="http://schemas.openxmlformats.org/presentationml/2006/main" xmlns:r="http://schemas.openxmlformats.org/officeDocument/2006/relationships">
+  <p:cSld>
+    <p:spTree>
+      <p:nvGrpSpPr>
+        <p:cNvPr id="1" name=""/>
+        <p:cNvGrpSpPr/>
+        <p:nvPr/>
+      </p:nvGrpSpPr>
+      <p:grpSpPr>
+        <a:xfrm>
+          <a:off x="0" y="0"/>
+          <a:ext cx="0" cy="0"/>
+          <a:chOff x="0" y="0"/>
+          <a:chExt cx="0" cy="0"/>
+        </a:xfrm>
+      </p:grpSpPr>
+      <p:sp>
+        <p:nvSpPr>
+          <p:cNvPr id="2" name="Slide Image Placeholder 1"/>
+          <p:cNvSpPr>
+            <a:spLocks noGrp="1"/>
+          </p:cNvSpPr>
+          <p:nvPr>
+            <p:ph type="sldImg" idx="2"/>
+          </p:nvPr>
+        </p:nvSpPr>
+        <p:spPr/>
+      </p:sp>
+      <p:sp>
+        <p:nvSpPr>
+          <p:cNvPr id="3" name="Notes Placeholder 2"/>
+          <p:cNvSpPr>
+            <a:spLocks noGrp="1"/>
+          </p:cNvSpPr>
+          <p:nvPr>
+            <p:ph type="body" idx="3" sz="quarter"/>
+          </p:nvPr>
+        </p:nvSpPr>
+        <p:spPr/>
+        <p:txBody>
+          <a:bodyPr/>
+          <a:lstStyle/>
+          <a:p>
+            <a:r>
+              <a:t>Two cautionary tales, both real. Netflix paid $1M for a 10% better model and never shipped it - accuracy alone does not ship; engineering cost and a business that had moved to streaming killed it. Google Flu Trends kept running an essentially untouched 2009 model and drifted to overestimating flu by more than 50% - claiming about 11% of the US had flu when CDC data said about 6%. Ask the class: which kind of drift was Flu Trends - the inputs changing, or the hidden rule moving?</a:t>
             </a:r>
           </a:p>
         </p:txBody>
@@ -1010,7 +1360,7 @@
           <a:lstStyle/>
           <a:p>
             <a:r>
-              <a:t>Theory made real: 18 grid combos and 15 random draws all ran Session 3's tournament again, refereed by the same 5-fold CV, test set sealed. Random found a better setting than the grid with fewer tries - exactly the slide-6 prediction. Read the winning knobs out loud: capped depth and bigger leaves are brakes, regularization by another name. Ask the class: why is it no surprise the winner has LESS freedom than the default forest?</a:t>
+              <a:t>Theory made real: 18 grid combos and 15 random draws all ran Session 3's tournament again, refereed by the same 5-fold CV, test set sealed. Grid best: max_depth 4, min_samples_leaf 5, 100 trees. Random found a better setting with fewer tries - exactly the slide-6 prediction. Read the winning knobs out loud: capped depth and bigger leaves are brakes - 'regularization' is the textbook word for such brakes. A little bias buys a big drop in variance: Session 3's U-curve, found automatically. Ask the class: why is it no surprise the winner has LESS freedom than the default forest?</a:t>
             </a:r>
           </a:p>
         </p:txBody>
@@ -4289,7 +4639,7 @@
                 </a:solidFill>
                 <a:latin typeface="Arial"/>
               </a:rPr>
-              <a:t>The forest gets tuned, the test set gets its one look, and the model leaves the notebook: a public app anyone can ask about a passenger like Owen or Florence.</a:t>
+              <a:t>Session 3's Random Forest gets tuned, the test set gets its one look, and the model leaves the notebook: a public app anyone can ask about a passenger like Owen or Florence.</a:t>
             </a:r>
           </a:p>
         </p:txBody>
@@ -4864,7 +5214,7 @@
                 </a:solidFill>
                 <a:latin typeface="Arial"/>
               </a:rPr>
-              <a:t>Grid search = CV plus nested for-loops, no magic: 2x3x3 = 18 combos x 5 folds = 90 trainings. Best (max_depth 4, min_samples_leaf 5, 100 trees): CV 0.8259, +0.0322 over the 0.7937 default.</a:t>
+              <a:t>How to read it: each bar = the forest's practice-test (CV) score at one stage; the y-axis starts at 0.75, so gaps are zoomed.</a:t>
             </a:r>
           </a:p>
           <a:p>
@@ -4884,7 +5234,7 @@
                 </a:solidFill>
                 <a:latin typeface="Arial"/>
               </a:rPr>
-              <a:t>Grids explode: 5 knobs x 6 values = 7,776 combos - nearly 39,000 trainings. 15 random draws instead test up to 15 distinct values of every knob: CV 0.8274, beating the grid with fewer tries.</a:t>
+              <a:t>Grid search = CV plus for-loops, no magic: 18 combos x 5 folds = 90 trainings. Best: CV 0.8259 (+0.0322 over the default).</a:t>
             </a:r>
           </a:p>
           <a:p>
@@ -4904,7 +5254,7 @@
                 </a:solidFill>
                 <a:latin typeface="Arial"/>
               </a:rPr>
-              <a:t>Part 1 in action: all 33 candidates ran Session 3's tournament again - same referee (5-fold CV), new contestants - and the test set stayed sealed.</a:t>
+              <a:t>Grids explode: 5 knobs x 6 values = 7,776 combos - nearly 39,000 trainings.</a:t>
             </a:r>
           </a:p>
           <a:p>
@@ -4924,7 +5274,47 @@
                 </a:solidFill>
                 <a:latin typeface="Arial"/>
               </a:rPr>
-              <a:t>Read the winning knobs: capped depth and bigger leaves are complexity BRAKES - regularization by another name: a little bias buys a big drop in variance. Session 3's U-curve, found automatically.</a:t>
+              <a:t>15 random draws test up to 15 values of every knob: CV 0.8274 - beats the grid with fewer tries, as slide 6 predicted.</a:t>
+            </a:r>
+          </a:p>
+          <a:p>
+            <a:pPr algn="l" indent="-228600" marL="228600">
+              <a:spcAft>
+                <a:spcPts val="800"/>
+              </a:spcAft>
+              <a:buClr>
+                <a:srgbClr val="1E5EF3"/>
+              </a:buClr>
+              <a:buChar char="—"/>
+            </a:pPr>
+            <a:r>
+              <a:rPr sz="1450" b="0">
+                <a:solidFill>
+                  <a:srgbClr val="202B38"/>
+                </a:solidFill>
+                <a:latin typeface="Arial"/>
+              </a:rPr>
+              <a:t>All 33 candidates sat the same 5 practice tests; the test set stayed sealed.</a:t>
+            </a:r>
+          </a:p>
+          <a:p>
+            <a:pPr algn="l" indent="-228600" marL="228600">
+              <a:spcAft>
+                <a:spcPts val="800"/>
+              </a:spcAft>
+              <a:buClr>
+                <a:srgbClr val="1E5EF3"/>
+              </a:buClr>
+              <a:buChar char="—"/>
+            </a:pPr>
+            <a:r>
+              <a:rPr sz="1450" b="0">
+                <a:solidFill>
+                  <a:srgbClr val="202B38"/>
+                </a:solidFill>
+                <a:latin typeface="Arial"/>
+              </a:rPr>
+              <a:t>The winning knobs (capped depth, bigger leaves) are complexity brakes: less freedom to memorize, so it generalizes better.</a:t>
             </a:r>
           </a:p>
         </p:txBody>
@@ -4946,7 +5336,7 @@
         <p:spPr>
           <a:xfrm>
             <a:off x="5120640" y="1874519"/>
-            <a:ext cx="6492240" cy="3892428"/>
+            <a:ext cx="6492240" cy="3765593"/>
           </a:xfrm>
           <a:prstGeom prst="rect">
             <a:avLst/>
@@ -5341,7 +5731,7 @@
                 </a:solidFill>
                 <a:latin typeface="Arial"/>
               </a:rPr>
-              <a:t>Final exam: 179 passengers the model has never seen, scored one time: accuracy 0.8268, F1 0.7597.</a:t>
+              <a:t>How to read it: left bar = what the practice tests (CV) promised; right bar = the one real exam. Y-axis starts at 0.75.</a:t>
             </a:r>
           </a:p>
           <a:p>
@@ -5361,7 +5751,7 @@
                 </a:solidFill>
                 <a:latin typeface="Arial"/>
               </a:rPr>
-              <a:t>CV promised 0.8274; the sealed test answered 0.8268 - a search judged honestly generalizes.</a:t>
+              <a:t>Final exam: 179 passengers the model has never seen, scored one time: accuracy 0.8268, F1 0.7597.</a:t>
             </a:r>
           </a:p>
           <a:p>
@@ -5381,7 +5771,7 @@
                 </a:solidFill>
                 <a:latin typeface="Arial"/>
               </a:rPr>
-              <a:t>Peeking at test scores while tuning silently turns the test set into training data.</a:t>
+              <a:t>CV promised 0.8274; the sealed test answered 0.8268 - a search judged honestly generalizes.</a:t>
             </a:r>
           </a:p>
           <a:p>
@@ -5401,7 +5791,7 @@
                 </a:solidFill>
                 <a:latin typeface="Arial"/>
               </a:rPr>
-              <a:t>Honest expectation: tuning buys a percentage point or two, not miracles.</a:t>
+              <a:t>Peeking at test scores while tuning silently turns the test set into training data.</a:t>
             </a:r>
           </a:p>
           <a:p>
@@ -5421,7 +5811,27 @@
                 </a:solidFill>
                 <a:latin typeface="Arial"/>
               </a:rPr>
-              <a:t>This was Part 1's assessment step, executed: selection used CV only, and 0.8268 is the only forecast of real-world performance we own.</a:t>
+              <a:t>Honest expectation: tuning buys a percentage point or two, not miracles.</a:t>
+            </a:r>
+          </a:p>
+          <a:p>
+            <a:pPr algn="l" indent="-228600" marL="228600">
+              <a:spcAft>
+                <a:spcPts val="800"/>
+              </a:spcAft>
+              <a:buClr>
+                <a:srgbClr val="1E5EF3"/>
+              </a:buClr>
+              <a:buChar char="—"/>
+            </a:pPr>
+            <a:r>
+              <a:rPr sz="1450" b="0">
+                <a:solidFill>
+                  <a:srgbClr val="202B38"/>
+                </a:solidFill>
+                <a:latin typeface="Arial"/>
+              </a:rPr>
+              <a:t>0.8268 is the only forecast of real-world performance we own.</a:t>
             </a:r>
           </a:p>
         </p:txBody>
@@ -5838,7 +6248,7 @@
                 </a:solidFill>
                 <a:latin typeface="Arial"/>
               </a:rPr>
-              <a:t>MIT's five steps: compare variants by CV, pick the winner, RETRAIN the winning recipe on all available data, ship, and be judged on data nobody at the table has seen.</a:t>
+              <a:t>How to read it: five steps, left to right; the raised blue box is the surprise step; dashed red arrows = forbidden moves.</a:t>
             </a:r>
           </a:p>
           <a:p>
@@ -5858,7 +6268,7 @@
                 </a:solidFill>
                 <a:latin typeface="Arial"/>
               </a:rPr>
-              <a:t>Step 3 surprises beginners: the fold models were scaffolding; more data = a better final model, so refit everything.</a:t>
+              <a:t>MIT's five steps: compare by CV, pick the winner, RETRAIN on all data, ship, be judged on unseen data.</a:t>
             </a:r>
           </a:p>
           <a:p>
@@ -5878,7 +6288,7 @@
                 </a:solidFill>
                 <a:latin typeface="Arial"/>
               </a:rPr>
-              <a:t>sklearn already does the training-set version: refit=True retrains the best settings on all 712 rows automatically - that is the model we saved.</a:t>
+              <a:t>Step 3 surprises beginners: the fold models were scaffolding; more data = a better final model, so refit everything.</a:t>
             </a:r>
           </a:p>
           <a:p>
@@ -5898,7 +6308,7 @@
                 </a:solidFill>
                 <a:latin typeface="Arial"/>
               </a:rPr>
-              <a:t>Once the single test look is spent, the recipe - not the score - is what you trust: retraining it on all 891 rows before shipping is legitimate; re-scoring it is not, because no honest data remains.</a:t>
+              <a:t>sklearn already does this on the training set: refit=True retrains the best settings on all 712 rows - the model we saved.</a:t>
             </a:r>
           </a:p>
           <a:p>
@@ -5918,7 +6328,27 @@
                 </a:solidFill>
                 <a:latin typeface="Arial"/>
               </a:rPr>
-              <a:t>Two contamination arrows are forever forbidden: test data into training, and validation scores reused as the final report card.</a:t>
+              <a:t>After the one test look, trust the recipe, not the score: retraining on all 891 rows is legitimate; re-scoring is not - no honest data remains.</a:t>
+            </a:r>
+          </a:p>
+          <a:p>
+            <a:pPr algn="l" indent="-228600" marL="228600">
+              <a:spcAft>
+                <a:spcPts val="800"/>
+              </a:spcAft>
+              <a:buClr>
+                <a:srgbClr val="1E5EF3"/>
+              </a:buClr>
+              <a:buChar char="—"/>
+            </a:pPr>
+            <a:r>
+              <a:rPr sz="1450" b="0">
+                <a:solidFill>
+                  <a:srgbClr val="202B38"/>
+                </a:solidFill>
+                <a:latin typeface="Arial"/>
+              </a:rPr>
+              <a:t>Forbidden forever: test data flowing into training, and a validation score reused as the report card.</a:t>
             </a:r>
           </a:p>
         </p:txBody>
@@ -6335,7 +6765,7 @@
                 </a:solidFill>
                 <a:latin typeface="Arial"/>
               </a:rPr>
-              <a:t>Save the WHOLE pipeline: titanic_model_v1.joblib, 2,599 KB - raw data in, prediction out; re-coding the prep by hand invites silently wrong predictions</a:t>
+              <a:t>How to read it: six steps, arrows run clockwise; after 6. Retrain you are back at 1. Save - the loop never ends.</a:t>
             </a:r>
           </a:p>
           <a:p>
@@ -6355,7 +6785,7 @@
                 </a:solidFill>
                 <a:latin typeface="Arial"/>
               </a:rPr>
-              <a:t>Load in a fresh process: no retraining, no notebook required</a:t>
+              <a:t>Save the WHOLE pipeline (titanic_model_v1.joblib, 2,599 KB): raw data in, prediction out - re-coding the prep by hand invites silently wrong predictions.</a:t>
             </a:r>
           </a:p>
           <a:p>
@@ -6375,7 +6805,7 @@
                 </a:solidFill>
                 <a:latin typeface="Arial"/>
               </a:rPr>
-              <a:t>Version the file name (v1) so you always know what is running - and can roll back</a:t>
+              <a:t>Load in a fresh process: no retraining, no notebook required.</a:t>
             </a:r>
           </a:p>
           <a:p>
@@ -6395,7 +6825,7 @@
                 </a:solidFill>
                 <a:latin typeface="Arial"/>
               </a:rPr>
-              <a:t>Ng's rollout ladder for steps 4-5: SHADOW mode (model runs beside the human, predictions logged but unused), then CANARY (~5% of real traffic, watch, ramp), then full swap with a rollback path - deployment is a dial, not a switch</a:t>
+              <a:t>Version the file name (v1) so you always know what is running - and can roll back.</a:t>
             </a:r>
           </a:p>
           <a:p>
@@ -6415,7 +6845,27 @@
                 </a:solidFill>
                 <a:latin typeface="Arial"/>
               </a:rPr>
-              <a:t>Monitoring closes the loop: drift detected means retrain and reship</a:t>
+              <a:t>Ng's rollout for steps 4-5: SHADOW (predictions logged, unused) -&gt; CANARY (~5% of traffic) -&gt; full swap, rollback ready.</a:t>
+            </a:r>
+          </a:p>
+          <a:p>
+            <a:pPr algn="l" indent="-228600" marL="228600">
+              <a:spcAft>
+                <a:spcPts val="800"/>
+              </a:spcAft>
+              <a:buClr>
+                <a:srgbClr val="1E5EF3"/>
+              </a:buClr>
+              <a:buChar char="—"/>
+            </a:pPr>
+            <a:r>
+              <a:rPr sz="1450" b="0">
+                <a:solidFill>
+                  <a:srgbClr val="202B38"/>
+                </a:solidFill>
+                <a:latin typeface="Arial"/>
+              </a:rPr>
+              <a:t>Monitoring closes the loop: drift detected means retrain and reship.</a:t>
             </a:r>
           </a:p>
         </p:txBody>
@@ -6832,6 +7282,26 @@
                 </a:solidFill>
                 <a:latin typeface="Arial"/>
               </a:rPr>
+              <a:t>How to read it: each bar = the predicted survival chance the loaded model gives one invented passenger.</a:t>
+            </a:r>
+          </a:p>
+          <a:p>
+            <a:pPr algn="l" indent="-228600" marL="228600">
+              <a:spcAft>
+                <a:spcPts val="800"/>
+              </a:spcAft>
+              <a:buClr>
+                <a:srgbClr val="1E5EF3"/>
+              </a:buClr>
+              <a:buChar char="—"/>
+            </a:pPr>
+            <a:r>
+              <a:rPr sz="1450" b="0">
+                <a:solidFill>
+                  <a:srgbClr val="202B38"/>
+                </a:solidFill>
+                <a:latin typeface="Arial"/>
+              </a:rPr>
               <a:t>Loaded from disk, no retraining: raw passenger details in, verdict out.</a:t>
             </a:r>
           </a:p>
@@ -7413,7 +7883,7 @@
                 </a:solidFill>
                 <a:latin typeface="Arial"/>
               </a:rPr>
-              <a:t>Write a normal Python function: inputs in, answer out.</a:t>
+              <a:t>Gradio - in plain words: a Python library that turns a function into a web page.</a:t>
             </a:r>
           </a:p>
           <a:p>
@@ -7433,7 +7903,7 @@
                 </a:solidFill>
                 <a:latin typeface="Arial"/>
               </a:rPr>
-              <a:t>Gradio renders it as sliders, dropdowns and a text box.</a:t>
+              <a:t>Write a normal function: inputs in, answer out.</a:t>
             </a:r>
           </a:p>
           <a:p>
@@ -7453,7 +7923,27 @@
                 </a:solidFill>
                 <a:latin typeface="Arial"/>
               </a:rPr>
-              <a:t>Title is derived by rule (boys under 13 Master, men Mr).</a:t>
+              <a:t>Gradio renders it as sliders, dropdowns and a text box.</a:t>
+            </a:r>
+          </a:p>
+          <a:p>
+            <a:pPr algn="l" indent="-228600" marL="228600">
+              <a:spcAft>
+                <a:spcPts val="600"/>
+              </a:spcAft>
+              <a:buClr>
+                <a:srgbClr val="1E5EF3"/>
+              </a:buClr>
+              <a:buChar char="—"/>
+            </a:pPr>
+            <a:r>
+              <a:rPr sz="1300" b="0">
+                <a:solidFill>
+                  <a:srgbClr val="202B38"/>
+                </a:solidFill>
+                <a:latin typeface="Arial"/>
+              </a:rPr>
+              <a:t>The app derives the Title feature by rule (boys under 13 -&gt; Master, men -&gt; Mr).</a:t>
             </a:r>
           </a:p>
           <a:p>
@@ -7600,7 +8090,7 @@
                 </a:solidFill>
                 <a:latin typeface="Arial"/>
               </a:rPr>
-              <a:t>Four files: app.py, the model, requirements.txt, README.md.</a:t>
+              <a:t>Spaces - in plain words: a free public host for ML apps.</a:t>
             </a:r>
           </a:p>
           <a:p>
@@ -7620,7 +8110,7 @@
                 </a:solidFill>
                 <a:latin typeface="Arial"/>
               </a:rPr>
-              <a:t>Pin the scikit-learn version in requirements.txt.</a:t>
+              <a:t>Four files: app.py, the model, requirements.txt, README.md.</a:t>
             </a:r>
           </a:p>
           <a:p>
@@ -7640,7 +8130,7 @@
                 </a:solidFill>
                 <a:latin typeface="Arial"/>
               </a:rPr>
-              <a:t>Upload the files in the browser - that is the whole deploy.</a:t>
+              <a:t>Pin the scikit-learn version in requirements.txt.</a:t>
             </a:r>
           </a:p>
           <a:p>
@@ -7660,7 +8150,27 @@
                 </a:solidFill>
                 <a:latin typeface="Arial"/>
               </a:rPr>
-              <a:t>No tokens or keys in code, ever - uploads stay in the browser.</a:t>
+              <a:t>Upload the files in the browser - that is the whole deploy.</a:t>
+            </a:r>
+          </a:p>
+          <a:p>
+            <a:pPr algn="l" indent="-228600" marL="228600">
+              <a:spcAft>
+                <a:spcPts val="600"/>
+              </a:spcAft>
+              <a:buClr>
+                <a:srgbClr val="1E5EF3"/>
+              </a:buClr>
+              <a:buChar char="—"/>
+            </a:pPr>
+            <a:r>
+              <a:rPr sz="1300" b="0">
+                <a:solidFill>
+                  <a:srgbClr val="202B38"/>
+                </a:solidFill>
+                <a:latin typeface="Arial"/>
+              </a:rPr>
+              <a:t>No tokens or keys in code, ever.</a:t>
             </a:r>
           </a:p>
           <a:p>
@@ -8073,7 +8583,7 @@
                 </a:solidFill>
                 <a:latin typeface="Arial"/>
               </a:rPr>
-              <a:t>Two kinds of drift: DATA drift - the inputs change (different passengers start arriving); CONCEPT drift - the hidden rule f itself moves.</a:t>
+              <a:t>Two kinds of drift make models go stale.</a:t>
             </a:r>
           </a:p>
           <a:p>
@@ -8093,7 +8603,47 @@
                 </a:solidFill>
                 <a:latin typeface="Arial"/>
               </a:rPr>
-              <a:t>Same inputs, new outcomes: Session 1's Y = f(X) + ε, with f no longer standing still. Monitor inputs and outputs separately.</a:t>
+              <a:t>DATA drift: the inputs change - different passengers start arriving.</a:t>
+            </a:r>
+          </a:p>
+          <a:p>
+            <a:pPr algn="l" lvl="1" indent="-228600" marL="514350">
+              <a:spcAft>
+                <a:spcPts val="600"/>
+              </a:spcAft>
+              <a:buClr>
+                <a:srgbClr val="1E5EF3"/>
+              </a:buClr>
+              <a:buChar char="·"/>
+            </a:pPr>
+            <a:r>
+              <a:rPr sz="1350" b="0">
+                <a:solidFill>
+                  <a:srgbClr val="5B6774"/>
+                </a:solidFill>
+                <a:latin typeface="Arial"/>
+              </a:rPr>
+              <a:t>CONCEPT drift: the hidden rule f itself moves - same inputs, new outcomes (Session 1's Y = f(X) + ε).</a:t>
+            </a:r>
+          </a:p>
+          <a:p>
+            <a:pPr algn="l" lvl="1" indent="-228600" marL="514350">
+              <a:spcAft>
+                <a:spcPts val="600"/>
+              </a:spcAft>
+              <a:buClr>
+                <a:srgbClr val="1E5EF3"/>
+              </a:buClr>
+              <a:buChar char="·"/>
+            </a:pPr>
+            <a:r>
+              <a:rPr sz="1350" b="0">
+                <a:solidFill>
+                  <a:srgbClr val="5B6774"/>
+                </a:solidFill>
+                <a:latin typeface="Arial"/>
+              </a:rPr>
+              <a:t>Monitor inputs and outputs separately.</a:t>
             </a:r>
           </a:p>
           <a:p>
@@ -9329,7 +9879,7 @@
                 </a:solidFill>
                 <a:latin typeface="Arial"/>
               </a:rPr>
-              <a:t>Survived = 0 for Owen, 1 for Florence, 1 for Frankie - the odds were never abstract.</a:t>
+              <a:t>Survived = 0 for Owen, 1 for Florence, 1 for Frankie (the 9-year-old "Master") - the odds were never abstract.</a:t>
             </a:r>
           </a:p>
           <a:p>
@@ -9655,7 +10205,7 @@
                 </a:solidFill>
                 <a:latin typeface="Arial"/>
               </a:rPr>
-              <a:t>Tune one knob per problem: four bars, each with its own dials</a:t>
+              <a:t>Tune one knob at a time: four rungs, each with its own knobs</a:t>
             </a:r>
           </a:p>
         </p:txBody>
@@ -9762,7 +10312,7 @@
                 </a:solidFill>
                 <a:latin typeface="Arial"/>
               </a:rPr>
-              <a:t>Where we are: leak-proof pipeline (712/179, 18 features); LogReg champion CV 0.819 / test 0.838, no knobs left; Random Forest 0.797 has the most knobs - today's candidate.</a:t>
+              <a:t>How to read the ladder: climb from the bottom rung; each rung is one problem, fixed by its OWN knobs - never someone else's.</a:t>
             </a:r>
           </a:p>
           <a:p>
@@ -9782,7 +10332,7 @@
                 </a:solidFill>
                 <a:latin typeface="Arial"/>
               </a:rPr>
-              <a:t>Ng's tuning philosophy: clear four bars in order - fit training, generalize to validation, hold up on test, work in the world - each bar with its OWN knobs.</a:t>
+              <a:t>Where we are: a leak-proof pipeline, 712 training / 179 test rows, 18 features.</a:t>
             </a:r>
           </a:p>
           <a:p>
@@ -9802,7 +10352,7 @@
                 </a:solidFill>
                 <a:latin typeface="Arial"/>
               </a:rPr>
-              <a:t>The cures, per bar: bigger model / regularize or add data / a fresher validation set / fix the data or the metric.</a:t>
+              <a:t>LogReg won Session 3 (CV 0.819, test 0.838) but has no knobs left; the Random Forest (CV 0.797) has the most - today's candidate.</a:t>
             </a:r>
           </a:p>
           <a:p>
@@ -9822,7 +10372,27 @@
                 </a:solidFill>
                 <a:latin typeface="Arial"/>
               </a:rPr>
-              <a:t>Diagnose WHICH bar you are failing (Session 3's two numbers) before touching any knob. Today: the validation bar, then the world bar.</a:t>
+              <a:t>Diagnose WHICH rung you are failing before touching any knob: compare the training score with the practice-test (CV) score.</a:t>
+            </a:r>
+          </a:p>
+          <a:p>
+            <a:pPr algn="l" indent="-228600" marL="228600">
+              <a:spcAft>
+                <a:spcPts val="800"/>
+              </a:spcAft>
+              <a:buClr>
+                <a:srgbClr val="1E5EF3"/>
+              </a:buClr>
+              <a:buChar char="—"/>
+            </a:pPr>
+            <a:r>
+              <a:rPr sz="1450" b="0">
+                <a:solidFill>
+                  <a:srgbClr val="202B38"/>
+                </a:solidFill>
+                <a:latin typeface="Arial"/>
+              </a:rPr>
+              <a:t>TODAY tags our rungs: pass the practice tests (tuning), then work in the real world (shipping).</a:t>
             </a:r>
           </a:p>
         </p:txBody>
@@ -9886,7 +10456,7 @@
                 </a:solidFill>
                 <a:latin typeface="Arial"/>
               </a:rPr>
-              <a:t>Ng's orthogonalization ladder: one job per knob. Ng, Deep Learning Specialization C3 "Structuring ML Projects".</a:t>
+              <a:t>Ng's orthogonalization ladder: one job per knob. "Practice tests" = 5-fold cross-validation from Session 3. Ng, Deep Learning Specialization C3 "Structuring ML Projects".</a:t>
             </a:r>
           </a:p>
         </p:txBody>
@@ -10852,7 +11422,7 @@
                 </a:solidFill>
                 <a:latin typeface="Arial"/>
               </a:rPr>
-              <a:t>MIT's sharper cut: hyperparameters sit OUTSIDE Session 1's three slots - they define the game the learner plays.</a:t>
+              <a:t>MIT's sharper cut: they sit OUTSIDE Session 1's three-slot recipe (model, loss, optimizer).</a:t>
             </a:r>
           </a:p>
           <a:p>
@@ -10872,7 +11442,27 @@
                 </a:solidFill>
                 <a:latin typeface="Arial"/>
               </a:rPr>
-              <a:t>Same algorithm, two settings = best thought of as two different algorithms. MIT 6.390, Appendix C.</a:t>
+              <a:t>They define the game the learner plays - before it starts.</a:t>
+            </a:r>
+          </a:p>
+          <a:p>
+            <a:pPr algn="l" indent="-228600" marL="228600">
+              <a:spcAft>
+                <a:spcPts val="600"/>
+              </a:spcAft>
+              <a:buClr>
+                <a:srgbClr val="1E5EF3"/>
+              </a:buClr>
+              <a:buChar char="—"/>
+            </a:pPr>
+            <a:r>
+              <a:rPr sz="1300" b="0">
+                <a:solidFill>
+                  <a:srgbClr val="202B38"/>
+                </a:solidFill>
+                <a:latin typeface="Arial"/>
+              </a:rPr>
+              <a:t>Same algorithm, two settings = two different algorithms. MIT 6.390, Appendix C.</a:t>
             </a:r>
           </a:p>
         </p:txBody>
@@ -11285,7 +11875,7 @@
                 </a:solidFill>
                 <a:latin typeface="Arial"/>
               </a:rPr>
-              <a:t>MIT's reframe: a forest capped at depth 4 and a forest allowed depth 8 are two different algorithms - same name, different game.</a:t>
+              <a:t>How to read it: two settings walk in; one referee - the same 5 practice tests (cross-validation) - picks the winner.</a:t>
             </a:r>
           </a:p>
           <a:p>
@@ -11305,7 +11895,7 @@
                 </a:solidFill>
                 <a:latin typeface="Arial"/>
               </a:rPr>
-              <a:t>So tuning is a problem you already solved: Session 3 compared six families; tuning compares variants of one.</a:t>
+              <a:t>MIT's reframe: a forest capped at depth 4 and a forest allowed depth 8 are two different algorithms - same name, different game.</a:t>
             </a:r>
           </a:p>
           <a:p>
@@ -11325,7 +11915,27 @@
                 </a:solidFill>
                 <a:latin typeface="Arial"/>
               </a:rPr>
-              <a:t>The referee never changes: run each variant, score it on folds it never trained on, keep the best.</a:t>
+              <a:t>So tuning is a problem you already solved: Session 3 compared six model families; tuning compares variants of one.</a:t>
+            </a:r>
+          </a:p>
+          <a:p>
+            <a:pPr algn="l" indent="-228600" marL="228600">
+              <a:spcAft>
+                <a:spcPts val="800"/>
+              </a:spcAft>
+              <a:buClr>
+                <a:srgbClr val="1E5EF3"/>
+              </a:buClr>
+              <a:buChar char="—"/>
+            </a:pPr>
+            <a:r>
+              <a:rPr sz="1450" b="0">
+                <a:solidFill>
+                  <a:srgbClr val="202B38"/>
+                </a:solidFill>
+                <a:latin typeface="Arial"/>
+              </a:rPr>
+              <a:t>The referee never changes: each variant is scored on rows it never trained on; the best score wins.</a:t>
             </a:r>
           </a:p>
           <a:p>
@@ -11762,7 +12372,7 @@
                 </a:solidFill>
                 <a:latin typeface="Arial"/>
               </a:rPr>
-              <a:t>Grid vs random - in plain words: a grid re-tests the same few values; random tries a new value every time.</a:t>
+              <a:t>How to read it: each dot = one try; darker blue = better score; the ticks below count the distinct values tried.</a:t>
             </a:r>
           </a:p>
           <a:p>
@@ -11782,7 +12392,7 @@
                 </a:solidFill>
                 <a:latin typeface="Arial"/>
               </a:rPr>
-              <a:t>Typically one or two knobs dominate the score - and you do not know in advance which.</a:t>
+              <a:t>Grid vs random - in plain words: a grid re-tests the same few values; random tries a new value every time.</a:t>
             </a:r>
           </a:p>
           <a:p>
@@ -11802,7 +12412,7 @@
                 </a:solidFill>
                 <a:latin typeface="Arial"/>
               </a:rPr>
-              <a:t>A 3x3 grid spends nine trials on only three distinct values of each knob - six trials are repeats.</a:t>
+              <a:t>Typically one or two knobs dominate the score - and you do not know in advance which.</a:t>
             </a:r>
           </a:p>
           <a:p>
@@ -11822,7 +12432,7 @@
                 </a:solidFill>
                 <a:latin typeface="Arial"/>
               </a:rPr>
-              <a:t>Nine random draws test nine NEW values of every knob at once - nine chances instead of three where it counts.</a:t>
+              <a:t>The grid's nine tries line up in three columns: only three values of the knob that matters.</a:t>
             </a:r>
           </a:p>
           <a:p>
@@ -11842,7 +12452,7 @@
                 </a:solidFill>
                 <a:latin typeface="Arial"/>
               </a:rPr>
-              <a:t>Same budget, more information: that is why random search usually wins beyond a couple of knobs.</a:t>
+              <a:t>Nine random tries scatter: nine values of that same knob.</a:t>
             </a:r>
           </a:p>
           <a:p>
@@ -11862,7 +12472,27 @@
                 </a:solidFill>
                 <a:latin typeface="Arial"/>
               </a:rPr>
-              <a:t>The referee never changes: every candidate - grid cell or random draw - is scored by the same cross-validation.</a:t>
+              <a:t>Same budget, more information - that is why random search usually wins beyond a couple of knobs.</a:t>
+            </a:r>
+          </a:p>
+          <a:p>
+            <a:pPr algn="l" indent="-228600" marL="228600">
+              <a:spcAft>
+                <a:spcPts val="800"/>
+              </a:spcAft>
+              <a:buClr>
+                <a:srgbClr val="1E5EF3"/>
+              </a:buClr>
+              <a:buChar char="—"/>
+            </a:pPr>
+            <a:r>
+              <a:rPr sz="1450" b="0">
+                <a:solidFill>
+                  <a:srgbClr val="202B38"/>
+                </a:solidFill>
+                <a:latin typeface="Arial"/>
+              </a:rPr>
+              <a:t>The referee never changes: every try is scored by the same cross-validation.</a:t>
             </a:r>
           </a:p>
         </p:txBody>
@@ -12279,7 +12909,7 @@
                 </a:solidFill>
                 <a:latin typeface="Arial"/>
               </a:rPr>
-              <a:t>Pull the misclassified validation examples and look at them by hand - about 100 when you have them.</a:t>
+              <a:t>How to read it: each row = one wrong prediction; each X = the category it falls into; the bottom row totals the percentages.</a:t>
             </a:r>
           </a:p>
           <a:p>
@@ -12299,7 +12929,7 @@
                 </a:solidFill>
                 <a:latin typeface="Arial"/>
               </a:rPr>
-              <a:t>Tally them into categories in a spreadsheet; add new categories as they emerge.</a:t>
+              <a:t>The method: pull ~100 wrong predictions, look at them by hand, tally them in a spreadsheet.</a:t>
             </a:r>
           </a:p>
           <a:p>
@@ -12319,7 +12949,7 @@
                 </a:solidFill>
                 <a:latin typeface="Arial"/>
               </a:rPr>
-              <a:t>The bottom row of percentages IS your priority list: a category worth 5% of errors caps its payoff at almost nothing; one worth 50% is where the month goes.</a:t>
+              <a:t>The bottom row IS the priority list: a 5% category cannot repay a month of work; the 50% one (shaded) is where the month goes.</a:t>
             </a:r>
           </a:p>
           <a:p>
@@ -12339,7 +12969,7 @@
                 </a:solidFill>
                 <a:latin typeface="Arial"/>
               </a:rPr>
-              <a:t>Guard: split a large validation set into an "Eyeball" part you inspect and a "Blackbox" part you never look at - you will overfit whatever you stare at.</a:t>
+              <a:t>Guard: inspect only an "Eyeball" sample; keep a "Blackbox" part you never look at - you overfit whatever you stare at.</a:t>
             </a:r>
           </a:p>
           <a:p>
@@ -12359,7 +12989,7 @@
                 </a:solidFill>
                 <a:latin typeface="Arial"/>
               </a:rPr>
-              <a:t>Exercise: pull our champion's misclassified test-set passengers in the notebook and tally your own categories (family size? fare band? title?) - no fixing allowed before the counting.</a:t>
+              <a:t>Exercise: tally our champion's wrong test predictions (family size? fare band? title?) - count first, fix second.</a:t>
             </a:r>
           </a:p>
         </p:txBody>
@@ -12776,7 +13406,7 @@
                 </a:solidFill>
                 <a:latin typeface="Arial"/>
               </a:rPr>
-              <a:t>The doctrine - in plain words: one scoreboard; teams argue forever with two scoreboards.</a:t>
+              <a:t>The deadlock in the table: A wins precision, B wins recall - two numbers cannot rank two models.</a:t>
             </a:r>
           </a:p>
           <a:p>
@@ -12796,7 +13426,7 @@
                 </a:solidFill>
                 <a:latin typeface="Arial"/>
               </a:rPr>
-              <a:t>Two numbers cannot rank two models: A wins precision, B wins recall - deadlock until one combiner (F1) breaks it.</a:t>
+              <a:t>The blue F1 column combines both into one number - and B wins. Deadlock broken.</a:t>
             </a:r>
           </a:p>
           <a:p>
@@ -12816,7 +13446,7 @@
                 </a:solidFill>
                 <a:latin typeface="Arial"/>
               </a:rPr>
-              <a:t>F1 punishes imbalance: precision 0.9 with recall 0.1 scores near 0.18, not 0.5 - a useless side cannot hide.</a:t>
+              <a:t>The doctrine - in plain words: one scoreboard; teams argue forever with two scoreboards.</a:t>
             </a:r>
           </a:p>
           <a:p>
@@ -12836,7 +13466,27 @@
                 </a:solidFill>
                 <a:latin typeface="Arial"/>
               </a:rPr>
-              <a:t>When one number is genuinely not enough (safety, latency): make those SATISFICING - bars to clear, not scores to chase - and keep exactly ONE metric to maximize.</a:t>
+              <a:t>F1 punishes imbalance: precision 0.9 with recall 0.1 scores near 0.18, not 0.5 - a useless side cannot hide.</a:t>
+            </a:r>
+          </a:p>
+          <a:p>
+            <a:pPr algn="l" indent="-228600" marL="228600">
+              <a:spcAft>
+                <a:spcPts val="800"/>
+              </a:spcAft>
+              <a:buClr>
+                <a:srgbClr val="1E5EF3"/>
+              </a:buClr>
+              <a:buChar char="—"/>
+            </a:pPr>
+            <a:r>
+              <a:rPr sz="1450" b="0">
+                <a:solidFill>
+                  <a:srgbClr val="202B38"/>
+                </a:solidFill>
+                <a:latin typeface="Arial"/>
+              </a:rPr>
+              <a:t>Something else matters too (safety, speed)? SATISFICE it: a bar to clear, not a score to chase. Maximize exactly ONE metric.</a:t>
             </a:r>
           </a:p>
           <a:p>
@@ -13273,7 +13923,7 @@
                 </a:solidFill>
                 <a:latin typeface="Arial"/>
               </a:rPr>
-              <a:t>In plain words: practice tests choose your strategy; the final exam grades it - and you only sit the final once.</a:t>
+              <a:t>In plain words: practice tests choose your strategy; the final exam grades it - you sit the final once.</a:t>
             </a:r>
           </a:p>
           <a:p>
@@ -13293,7 +13943,7 @@
                 </a:solidFill>
                 <a:latin typeface="Arial"/>
               </a:rPr>
-              <a:t>Model SELECTION picks the knob values - done on validation data or by CV, repeatable a thousand times.</a:t>
+              <a:t>SELECTION picks the knob values - done on the practice tests (CV), repeatable a thousand times.</a:t>
             </a:r>
           </a:p>
           <a:p>
@@ -13313,7 +13963,7 @@
                 </a:solidFill>
                 <a:latin typeface="Arial"/>
               </a:rPr>
-              <a:t>Model ASSESSMENT estimates real-world performance - done exactly once, on the untouched test set.</a:t>
+              <a:t>ASSESSMENT estimates real-world performance - done exactly once, on the untouched test set.</a:t>
             </a:r>
           </a:p>
           <a:p>
@@ -13333,7 +13983,7 @@
                 </a:solidFill>
                 <a:latin typeface="Arial"/>
               </a:rPr>
-              <a:t>Select on the test set and it silently becomes a practice test: you tuned toward it, so its score flatters.</a:t>
+              <a:t>How to read the bar (from Session 2): pale = 712 training rows (FIT); hatched = practice tests (CHOOSE); dark = 179 sealed test rows (REPORT).</a:t>
             </a:r>
           </a:p>
           <a:p>
@@ -13353,7 +14003,7 @@
                 </a:solidFill>
                 <a:latin typeface="Arial"/>
               </a:rPr>
-              <a:t>A number you optimized against is a target you hit, not a forecast - that is why REPORT opens once.</a:t>
+              <a:t>Select on the test set and it silently becomes a practice test: its score flatters.</a:t>
             </a:r>
           </a:p>
           <a:p>
@@ -13373,7 +14023,7 @@
                 </a:solidFill>
                 <a:latin typeface="Arial"/>
               </a:rPr>
-              <a:t>The verbs bar, unchanged since Session 2: FIT on train, CHOOSE inside it by CV, REPORT on the sealed test rows.</a:t>
+              <a:t>A number you optimized against is a target you hit, not a forecast - so REPORT opens once.</a:t>
             </a:r>
           </a:p>
         </p:txBody>
